--- a/lecons/USA/Population Geography/10_USA_POP_PW03_Dependency_Ratio_and_Population_Pyramids.pptx
+++ b/lecons/USA/Population Geography/10_USA_POP_PW03_Dependency_Ratio_and_Population_Pyramids.pptx
@@ -58,9 +58,13 @@
     <p:sldId id="306" r:id="rId52"/>
     <p:sldId id="307" r:id="rId53"/>
     <p:sldId id="308" r:id="rId54"/>
+    <p:sldId id="309" r:id="rId55"/>
+    <p:sldId id="310" r:id="rId56"/>
+    <p:sldId id="311" r:id="rId57"/>
+    <p:sldId id="312" r:id="rId58"/>
   </p:sldIdLst>
   <p:notesMasterIdLst>
-    <p:notesMasterId r:id="rId55"/>
+    <p:notesMasterId r:id="rId59"/>
   </p:notesMasterIdLst>
   <p:sldSz cx="12192000" cy="6858000"/>
   <p:notesSz cx="6858000" cy="12192000"/>
@@ -642,7 +646,7 @@
           <a:p>
             <a:r>
               <a:rPr lang="en-US" dirty="0"/>
-              <a:t>Question 1: What is the problem in the situation? Think for a moment, then raise your hand to answer.</a:t>
+              <a:t>Take your time to copy this part; we will continue together.</a:t>
             </a:r>
             <a:endParaRPr lang="en-US" dirty="0"/>
           </a:p>
@@ -730,7 +734,7 @@
           <a:p>
             <a:r>
               <a:rPr lang="en-US" dirty="0"/>
-              <a:t>Good. The class must turn numbers into a pyramid.</a:t>
+              <a:t>Listen carefully to this situation from real life. A development NGO in Garoua compares two districts. In the first, there are 2,000 children, 800 elderly people and 3,000 adults of working age; in the second, the adults are much more numerous than the dependants. The NGO manager wants to know where families carry the heaviest burden. He asks: "How do we calculate and explain the dependency ratio?" Think about it, because I am going to ask you some questions.</a:t>
             </a:r>
             <a:endParaRPr lang="en-US" dirty="0"/>
           </a:p>
@@ -818,7 +822,7 @@
           <a:p>
             <a:r>
               <a:rPr lang="en-US" dirty="0"/>
-              <a:t>Question 2: What must be calculated first? Think for a moment, then raise your hand to answer.</a:t>
+              <a:t>Question 1: What is the problem in the situation? Think for a moment, then raise your hand to answer.</a:t>
             </a:r>
             <a:endParaRPr lang="en-US" dirty="0"/>
           </a:p>
@@ -906,7 +910,7 @@
           <a:p>
             <a:r>
               <a:rPr lang="en-US" dirty="0"/>
-              <a:t>Good. The percentage of each group.</a:t>
+              <a:t>Good. The manager does not know how to calculate and interpret the dependency ratio.</a:t>
             </a:r>
             <a:endParaRPr lang="en-US" dirty="0"/>
           </a:p>
@@ -994,7 +998,7 @@
           <a:p>
             <a:r>
               <a:rPr lang="en-US" dirty="0"/>
-              <a:t>Question 3: What will the dependency ratio show? Think for a moment, then raise your hand to answer.</a:t>
+              <a:t>Question 2: Who are the dependants in the first district? Think for a moment, then raise your hand to answer.</a:t>
             </a:r>
             <a:endParaRPr lang="en-US" dirty="0"/>
           </a:p>
@@ -1082,7 +1086,7 @@
           <a:p>
             <a:r>
               <a:rPr lang="en-US" dirty="0"/>
-              <a:t>Good. How many dependants each worker supports.</a:t>
+              <a:t>Good. The 2,000 children and the 800 elderly people.</a:t>
             </a:r>
             <a:endParaRPr lang="en-US" dirty="0"/>
           </a:p>
@@ -1170,7 +1174,7 @@
           <a:p>
             <a:r>
               <a:rPr lang="en-US" dirty="0"/>
-              <a:t>From this situation, the action we are working towards in this lesson is the following: draw and interpret population pyramids and dependency ratios.</a:t>
+              <a:t>Question 3: Who supports them? Think for a moment, then raise your hand to answer.</a:t>
             </a:r>
             <a:endParaRPr lang="en-US" dirty="0"/>
           </a:p>
@@ -1258,7 +1262,7 @@
           <a:p>
             <a:r>
               <a:rPr lang="en-US" dirty="0"/>
-              <a:t>Why is this lesson important for you? This practical work helps us to draw and use population pyramids for planning.</a:t>
+              <a:t>Good. The 3,000 adults of working age.</a:t>
             </a:r>
             <a:endParaRPr lang="en-US" dirty="0"/>
           </a:p>
@@ -1346,7 +1350,7 @@
           <a:p>
             <a:r>
               <a:rPr lang="en-US" dirty="0"/>
-              <a:t>Activity 1. Look carefully at this diagram: population of a town by age and sex. Observe every detail before I ask the question.</a:t>
+              <a:t>From this situation, the action we are working towards in this lesson is the following: always show the formula, the working and a sentence of interpretation when calculating a ratio.</a:t>
             </a:r>
             <a:endParaRPr lang="en-US" dirty="0"/>
           </a:p>
@@ -1434,7 +1438,7 @@
           <a:p>
             <a:r>
               <a:rPr lang="en-US" dirty="0"/>
-              <a:t>Here is the question for Activity 1: What percentage of the population are boys aged 0–14? (Total = 9,870) Take one minute to think and write your answer in your rough notebook.</a:t>
+              <a:t>Why is this lesson important for you? This practical work helps us to measure the burden on workers, a key tool for planning and a frequent examination exercise.</a:t>
             </a:r>
             <a:endParaRPr lang="en-US" dirty="0"/>
           </a:p>
@@ -1610,7 +1614,7 @@
           <a:p>
             <a:r>
               <a:rPr lang="en-US" dirty="0"/>
-              <a:t>Let us check the answer together. 2,100 ÷ 9,870 × 100 ≈ 21.3 %.</a:t>
+              <a:t>Activity 1. Look carefully at this diagram: the dependency ratio. Observe every detail before I ask the question.</a:t>
             </a:r>
             <a:endParaRPr lang="en-US" dirty="0"/>
           </a:p>
@@ -1698,7 +1702,7 @@
           <a:p>
             <a:r>
               <a:rPr lang="en-US" dirty="0"/>
-              <a:t>Activity 2. Look carefully at this diagram: a finished pyramid. Observe every detail before I ask the question.</a:t>
+              <a:t>Here is the question for Activity 1: Which age groups are the dependants? Take one minute to think and write your answer in your rough notebook.</a:t>
             </a:r>
             <a:endParaRPr lang="en-US" dirty="0"/>
           </a:p>
@@ -1786,7 +1790,7 @@
           <a:p>
             <a:r>
               <a:rPr lang="en-US" dirty="0"/>
-              <a:t>Here is the question for Activity 2: Where do males and females go on a pyramid? Take one minute to think and write your answer in your rough notebook.</a:t>
+              <a:t>Let us check the answer together. People aged 0–14 and people aged 65 and over.</a:t>
             </a:r>
             <a:endParaRPr lang="en-US" dirty="0"/>
           </a:p>
@@ -1874,7 +1878,7 @@
           <a:p>
             <a:r>
               <a:rPr lang="en-US" dirty="0"/>
-              <a:t>Let us check the answer together. Males on the left, females on the right, youngest at the bottom.</a:t>
+              <a:t>Activity 2. Look carefully at this picture: a worked example: UK, 1971. Observe every detail before I ask the question.</a:t>
             </a:r>
             <a:endParaRPr lang="en-US" dirty="0"/>
           </a:p>
@@ -1962,7 +1966,7 @@
           <a:p>
             <a:r>
               <a:rPr lang="en-US" dirty="0"/>
-              <a:t>Activity 3. Look carefully at this diagram: the dependency ratio formula. Observe every detail before I ask the question.</a:t>
+              <a:t>Here is the question for Activity 2: What is the dependency ratio of the UK in 1971? Take one minute to think and write your answer in your rough notebook.</a:t>
             </a:r>
             <a:endParaRPr lang="en-US" dirty="0"/>
           </a:p>
@@ -2050,7 +2054,7 @@
           <a:p>
             <a:r>
               <a:rPr lang="en-US" dirty="0"/>
-              <a:t>Here is the question for Activity 3: Using the town data, calculate the dependency ratio. Take one minute to think and write your answer in your rough notebook.</a:t>
+              <a:t>Let us check the answer together. 65.45 %.</a:t>
             </a:r>
             <a:endParaRPr lang="en-US" dirty="0"/>
           </a:p>
@@ -2138,7 +2142,7 @@
           <a:p>
             <a:r>
               <a:rPr lang="en-US" dirty="0"/>
-              <a:t>Let us check the answer together. Dependants 4,420; workers 5,450; ratio ≈ 81.</a:t>
+              <a:t>Activity 3. Look carefully at this picture: children and adults. Observe every detail before I ask the question.</a:t>
             </a:r>
             <a:endParaRPr lang="en-US" dirty="0"/>
           </a:p>
@@ -2226,7 +2230,7 @@
           <a:p>
             <a:r>
               <a:rPr lang="en-US" dirty="0"/>
-              <a:t>Activity 4. Look carefully at this diagram: the three types of pyramid. Observe every detail before I ask the question.</a:t>
+              <a:t>Here is the question for Activity 3: Calculate the ratio: 2,000 children, 800 elderly and 3,000 adults. Take one minute to think and write your answer in your rough notebook.</a:t>
             </a:r>
             <a:endParaRPr lang="en-US" dirty="0"/>
           </a:p>
@@ -2314,7 +2318,7 @@
           <a:p>
             <a:r>
               <a:rPr lang="en-US" dirty="0"/>
-              <a:t>Here is the question for Activity 4: What type of pyramid does the town have? Take one minute to think and write your answer in your rough notebook.</a:t>
+              <a:t>Let us check the answer together. (2,000 + 800) ÷ 3,000 × 100 ≈ 93.3 %.</a:t>
             </a:r>
             <a:endParaRPr lang="en-US" dirty="0"/>
           </a:p>
@@ -2402,7 +2406,7 @@
           <a:p>
             <a:r>
               <a:rPr lang="en-US" dirty="0"/>
-              <a:t>Let us check the answer together. Expansive: a wide base and narrow top.</a:t>
+              <a:t>Activity 4. Look carefully at this diagram: young and old people in some countries. Observe every detail before I ask the question.</a:t>
             </a:r>
             <a:endParaRPr lang="en-US" dirty="0"/>
           </a:p>
@@ -2490,7 +2494,7 @@
           <a:p>
             <a:r>
               <a:rPr lang="en-US" dirty="0"/>
-              <a:t>Our topic is Population Structure and Composition, and the sub-topic is Age-Sex Pyramids. The key notions we shall use today are: dependency ratio, youth dependency, old-age dependency, pyramid construction. At the end, you should be able to do this: learners are able to construct a population pyramid from data and calculate dependency ratios.</a:t>
+              <a:t>Our topic is Population Structure and Composition, and the sub-topic is Age-Sex Pyramids. The key notions we shall use today are: dependency ratio, young dependants, elderly dependants, working-age population, interpretation. At the end, you should be able to do this: learners are able to calculate and interpret the dependency ratio from population data.</a:t>
             </a:r>
             <a:endParaRPr lang="en-US" dirty="0"/>
           </a:p>
@@ -2578,7 +2582,7 @@
           <a:p>
             <a:r>
               <a:rPr lang="en-US" dirty="0"/>
-              <a:t>Activity 5. Look carefully at this diagram: a constrictive pyramid (Japan). Observe every detail before I ask the question.</a:t>
+              <a:t>Here is the question for Activity 4: Which kind of dependants dominates in Cameroon? Take one minute to think and write your answer in your rough notebook.</a:t>
             </a:r>
             <a:endParaRPr lang="en-US" dirty="0"/>
           </a:p>
@@ -2666,7 +2670,7 @@
           <a:p>
             <a:r>
               <a:rPr lang="en-US" dirty="0"/>
-              <a:t>Here is the question for Activity 5: Would Japan have a high youth or old-age dependency? Take one minute to think and write your answer in your rough notebook.</a:t>
+              <a:t>Let us check the answer together. The young dependants (children).</a:t>
             </a:r>
             <a:endParaRPr lang="en-US" dirty="0"/>
           </a:p>
@@ -2754,7 +2758,7 @@
           <a:p>
             <a:r>
               <a:rPr lang="en-US" dirty="0"/>
-              <a:t>Let us check the answer together. A high old-age dependency.</a:t>
+              <a:t>Activity 5. Look carefully at this diagram: data of a population. Observe every detail before I ask the question.</a:t>
             </a:r>
             <a:endParaRPr lang="en-US" dirty="0"/>
           </a:p>
@@ -2842,7 +2846,7 @@
           <a:p>
             <a:r>
               <a:rPr lang="en-US" dirty="0"/>
-              <a:t>Now we are going to copy the board summary. Write the title and the headings neatly in your notebooks. I will give you enough time for each slide, so do not rush.</a:t>
+              <a:t>Here is the question for Activity 5: What does a ratio of 93 % mean? Take one minute to think and write your answer in your rough notebook.</a:t>
             </a:r>
             <a:endParaRPr lang="en-US" dirty="0"/>
           </a:p>
@@ -2930,7 +2934,7 @@
           <a:p>
             <a:r>
               <a:rPr lang="en-US" dirty="0"/>
-              <a:t>Let us copy the definitions. The key terms of this lesson are defined as follows. On this slide we have Dependency ratio. Write each point on a new line, with the key term first, and explain it in your own words when we revise.</a:t>
+              <a:t>Let us check the answer together. There are 93 dependants for every 100 people of working age.</a:t>
             </a:r>
             <a:endParaRPr lang="en-US" dirty="0"/>
           </a:p>
@@ -3018,7 +3022,7 @@
           <a:p>
             <a:r>
               <a:rPr lang="en-US" dirty="0"/>
-              <a:t>Let us copy Construction of a Population Pyramid. A pyramid is drawn as follows. On this slide we have Calculations. Write each point on a new line, with the key term first, and explain it in your own words when we revise. When you finish, we go to the next slide.</a:t>
+              <a:t>Now we are going to copy the board summary. Write the title and the headings neatly in your notebooks. I will give you enough time for each slide, so do not rush.</a:t>
             </a:r>
             <a:endParaRPr lang="en-US" dirty="0"/>
           </a:p>
@@ -3106,7 +3110,7 @@
           <a:p>
             <a:r>
               <a:rPr lang="en-US" dirty="0"/>
-              <a:t>We continue with Construction of a Population Pyramid. On this slide we have Drawing. Write each point on a new line, with the key term first, and explain it in your own words when we revise.</a:t>
+              <a:t>Let us copy the definitions. The key terms of this lesson are defined as follows. On this slide we have Dependency ratio. Write each point on a new line, with the key term first, and explain it in your own words when we revise. When you finish, we go to the next slide.</a:t>
             </a:r>
             <a:endParaRPr lang="en-US" dirty="0"/>
           </a:p>
@@ -3194,7 +3198,7 @@
           <a:p>
             <a:r>
               <a:rPr lang="en-US" dirty="0"/>
-              <a:t>Now draw this illustration in your notebook: data table. Give it a title and label it clearly.</a:t>
+              <a:t>We continue with the definitions. On this slide we have Working-age population. Write each point on a new line, with the key term first, and explain it in your own words when we revise.</a:t>
             </a:r>
             <a:endParaRPr lang="en-US" dirty="0"/>
           </a:p>
@@ -3282,7 +3286,7 @@
           <a:p>
             <a:r>
               <a:rPr lang="en-US" dirty="0"/>
-              <a:t>Let us copy Calculation and Interpretation. The results are calculated and interpreted as follows. On this slide we have Dependency ratio. Write each point on a new line, with the key term first, and explain it in your own words when we revise. When you finish, we go to the next slide.</a:t>
+              <a:t>Let us copy The Formula. The dependency ratio is calculated with the following formula. Copy the point on Formula on the left, then draw the diagram on the right: the dependency ratio. Give it a title and label it clearly.</a:t>
             </a:r>
             <a:endParaRPr lang="en-US" dirty="0"/>
           </a:p>
@@ -3370,7 +3374,7 @@
           <a:p>
             <a:r>
               <a:rPr lang="en-US" dirty="0"/>
-              <a:t>We continue with Calculation and Interpretation. On this slide we have Reading the pyramid. Write each point on a new line, with the key term first, and explain it in your own words when we revise. When you finish, we go to the next slide.</a:t>
+              <a:t>We continue with The Formula. On this slide we have Dependants and Workers. Write each point on a new line, with the key term first, and explain it in your own words when we revise.</a:t>
             </a:r>
             <a:endParaRPr lang="en-US" dirty="0"/>
           </a:p>
@@ -3458,7 +3462,7 @@
           <a:p>
             <a:r>
               <a:rPr lang="en-US" dirty="0"/>
-              <a:t>Before we start the new lesson, let us correct the homework I gave you at the end of Lesson 7: Population Pyramids. The question was: Sketch the pyramids of Cameroon and Japan and list three differences. Take out your exercise books.</a:t>
+              <a:t>Before we start the new lesson, let us correct the homework I gave you at the end of Lesson 7: Population Pyramids. The question was: Write the formula of the dependency ratio. Take out your exercise books.</a:t>
             </a:r>
             <a:endParaRPr lang="en-US" dirty="0"/>
           </a:p>
@@ -3546,7 +3550,7 @@
           <a:p>
             <a:r>
               <a:rPr lang="en-US" dirty="0"/>
-              <a:t>We continue with Calculation and Interpretation. On this slide we have Distinguishing types. Write each point on a new line, with the key term first, and explain it in your own words when we revise.</a:t>
+              <a:t>Let us copy Worked Examples. The calculation is done as in the following examples. On this slide we have Example 1. Write each point on a new line, with the key term first, and explain it in your own words when we revise.</a:t>
             </a:r>
             <a:endParaRPr lang="en-US" dirty="0"/>
           </a:p>
@@ -3634,7 +3638,7 @@
           <a:p>
             <a:r>
               <a:rPr lang="en-US" dirty="0"/>
-              <a:t>Now draw this illustration in your notebook: dependency ratio. Give it a title and label it clearly.</a:t>
+              <a:t>Copy the point on Example 2 (UK, 1971) on the left, then draw the diagram on the right: uK, 1971. Give it a title and label it clearly.</a:t>
             </a:r>
             <a:endParaRPr lang="en-US" dirty="0"/>
           </a:p>
@@ -3722,7 +3726,7 @@
           <a:p>
             <a:r>
               <a:rPr lang="en-US" dirty="0"/>
-              <a:t>Now let us check what you have understood. Question 1: A town has 3,000 aged 0–14, 400 aged 65+ and 4,600 aged 15–64. Find the dependency ratio. Answer in your exercise book.</a:t>
+              <a:t>We continue with Worked Examples. On this slide we have Interpretation of example 2 and Example 3. Write each point on a new line, with the key term first, and explain it in your own words when we revise.</a:t>
             </a:r>
             <a:endParaRPr lang="en-US" dirty="0"/>
           </a:p>
@@ -3810,7 +3814,7 @@
           <a:p>
             <a:r>
               <a:rPr lang="en-US" dirty="0"/>
-              <a:t>The expected answer is: (3,000 + 400) ÷ 4,600 × 100 ≈ 74. If you got it right, well done.</a:t>
+              <a:t>Let us copy Interpretation of the Results. The results of the dependency ratio are interpreted as follows. Copy the point on High ratio on the left, then draw the diagram on the right: young and old people. Give it a title and label it clearly.</a:t>
             </a:r>
             <a:endParaRPr lang="en-US" dirty="0"/>
           </a:p>
@@ -3898,7 +3902,7 @@
           <a:p>
             <a:r>
               <a:rPr lang="en-US" dirty="0"/>
-              <a:t>Now let us check what you have understood. Question 2: What does a high youth dependency ratio mean for planning? Answer in your exercise book.</a:t>
+              <a:t>We continue with Interpretation of the Results. On this slide we have Cameroon and Low ratio. Write each point on a new line, with the key term first, and explain it in your own words when we revise. When you finish, we go to the next slide.</a:t>
             </a:r>
             <a:endParaRPr lang="en-US" dirty="0"/>
           </a:p>
@@ -3986,7 +3990,7 @@
           <a:p>
             <a:r>
               <a:rPr lang="en-US" dirty="0"/>
-              <a:t>The expected answer is: more schools and child health services are needed. If you got it right, well done.</a:t>
+              <a:t>We continue with Interpretation of the Results. On this slide we have Ageing countries. Write each point on a new line, with the key term first, and explain it in your own words when we revise.</a:t>
             </a:r>
             <a:endParaRPr lang="en-US" dirty="0"/>
           </a:p>
@@ -4074,7 +4078,7 @@
           <a:p>
             <a:r>
               <a:rPr lang="en-US" dirty="0"/>
-              <a:t>For those who need more practice, fill in the blanks in your exercise book. The answers are: number 1, left; number 2, bottom; number 3, 100.</a:t>
+              <a:t>Now let us check what you have understood. Question 1: Calculate the dependency ratio of a population with 4,500 children, 500 elderly and 5,000 adults. Answer in your exercise book.</a:t>
             </a:r>
             <a:endParaRPr lang="en-US" dirty="0"/>
           </a:p>
@@ -4162,7 +4166,7 @@
           <a:p>
             <a:r>
               <a:rPr lang="en-US" dirty="0"/>
-              <a:t>For your homework: Draw the pyramid of the town on graph paper and write a short report. We shall correct it at the beginning of our next lesson.</a:t>
+              <a:t>The expected answer is: (4,500 + 500) ÷ 5,000 × 100 = 100 %. If you got it right, well done.</a:t>
             </a:r>
             <a:endParaRPr lang="en-US" dirty="0"/>
           </a:p>
@@ -4250,7 +4254,7 @@
           <a:p>
             <a:r>
               <a:rPr lang="en-US" dirty="0"/>
-              <a:t>Our next lesson will be on Lesson 8: Historical Evolution of World Population. Thank you for your attention, and see you next time.</a:t>
+              <a:t>Now let us check what you have understood. Question 2: Interpret a dependency ratio of 100 %. Answer in your exercise book.</a:t>
             </a:r>
             <a:endParaRPr lang="en-US" dirty="0"/>
           </a:p>
@@ -4338,7 +4342,7 @@
           <a:p>
             <a:r>
               <a:rPr lang="en-US" dirty="0"/>
-              <a:t>Let us play the bilingual game. I say a word in English, and you give me the French word. Then we do the reverse.</a:t>
+              <a:t>The expected answer is: there is one dependant for every person of working age. If you got it right, well done.</a:t>
             </a:r>
             <a:endParaRPr lang="en-US" dirty="0"/>
           </a:p>
@@ -4426,7 +4430,7 @@
           <a:p>
             <a:r>
               <a:rPr lang="en-US" dirty="0"/>
-              <a:t>Here is a good answer. Cameroon: wide base, narrow top, many children, few old people. Japan: narrow base, wide top, few children, many old people, more old women than men. Compare it with your own answer and correct your work in red.</a:t>
+              <a:t>Here is a good answer. Dependency ratio = (people aged 0–14 + people aged 65 and over) ÷ people aged 15–64 × 100. Compare it with your own answer and correct your work in red.</a:t>
             </a:r>
             <a:endParaRPr lang="en-US" dirty="0"/>
           </a:p>
@@ -4514,7 +4518,7 @@
           <a:p>
             <a:r>
               <a:rPr lang="en-US" dirty="0"/>
-              <a:t>I record this information in the official logbook of the class after the lesson.</a:t>
+              <a:t>For those who need more practice, fill in the blanks in your exercise book. The answers are: number 1, 65; number 2, 100; number 3, 100.</a:t>
             </a:r>
             <a:endParaRPr lang="en-US" dirty="0"/>
           </a:p>
@@ -4602,7 +4606,7 @@
           <a:p>
             <a:r>
               <a:rPr lang="en-US" dirty="0"/>
-              <a:t>I complete the second page of the logbook: the matter taught, the evaluation, the homework and the attendance.</a:t>
+              <a:t>For your homework: State the world population around 1800. We shall correct it at the beginning of our next lesson.</a:t>
             </a:r>
             <a:endParaRPr lang="en-US" dirty="0"/>
           </a:p>
@@ -4690,7 +4694,7 @@
           <a:p>
             <a:r>
               <a:rPr lang="en-US" dirty="0"/>
-              <a:t>This slide is for me, the teacher: it gives the timing of the lesson and what to do if the projector is not available.</a:t>
+              <a:t>Our next lesson will be on Lesson 8: Historical Evolution of World Population. Thank you for your attention, and see you next time.</a:t>
             </a:r>
             <a:endParaRPr lang="en-US" dirty="0"/>
           </a:p>
@@ -4778,7 +4782,7 @@
           <a:p>
             <a:r>
               <a:rPr lang="en-US" dirty="0"/>
-              <a:t>These are the references and picture credits used to prepare this lesson.</a:t>
+              <a:t>Let us play the bilingual game. I say a word in English, and you give me the French word. Then we do the reverse.</a:t>
             </a:r>
             <a:endParaRPr lang="en-US" dirty="0"/>
           </a:p>
@@ -4802,6 +4806,358 @@
             <a:fld id="{F7021451-1387-4CA6-816F-3879F97B5CBC}" type="slidenum">
               <a:rPr lang="en-US"/>
               <a:t>53</a:t>
+            </a:fld>
+            <a:endParaRPr lang="en-US"/>
+          </a:p>
+        </p:txBody>
+      </p:sp>
+    </p:spTree>
+    <p:extLst>
+      <p:ext uri="{BB962C8B-B14F-4D97-AF65-F5344CB8AC3E}">
+        <p14:creationId xmlns:p14="http://schemas.microsoft.com/office/powerpoint/2010/main" val="1024086991"/>
+      </p:ext>
+    </p:extLst>
+  </p:cSld>
+  <p:clrMapOvr>
+    <a:masterClrMapping/>
+  </p:clrMapOvr>
+</p:notes>
+</file>
+
+<file path=ppt/notesSlides/notesSlide54.xml><?xml version="1.0" encoding="utf-8"?>
+<p:notes xmlns:a="http://schemas.openxmlformats.org/drawingml/2006/main" xmlns:r="http://schemas.openxmlformats.org/officeDocument/2006/relationships" xmlns:p="http://schemas.openxmlformats.org/presentationml/2006/main">
+  <p:cSld>
+    <p:spTree>
+      <p:nvGrpSpPr>
+        <p:cNvPr id="1" name=""/>
+        <p:cNvGrpSpPr/>
+        <p:nvPr/>
+      </p:nvGrpSpPr>
+      <p:grpSpPr>
+        <a:xfrm>
+          <a:off x="0" y="0"/>
+          <a:ext cx="0" cy="0"/>
+          <a:chOff x="0" y="0"/>
+          <a:chExt cx="0" cy="0"/>
+        </a:xfrm>
+      </p:grpSpPr>
+      <p:sp>
+        <p:nvSpPr>
+          <p:cNvPr id="2" name="Slide Image Placeholder 1"/>
+          <p:cNvSpPr>
+            <a:spLocks noGrp="1" noRot="1" noChangeAspect="1"/>
+          </p:cNvSpPr>
+          <p:nvPr>
+            <p:ph type="sldImg"/>
+          </p:nvPr>
+        </p:nvSpPr>
+        <p:spPr/>
+      </p:sp>
+      <p:sp>
+        <p:nvSpPr>
+          <p:cNvPr id="3" name="Notes Placeholder 2"/>
+          <p:cNvSpPr>
+            <a:spLocks noGrp="1"/>
+          </p:cNvSpPr>
+          <p:nvPr>
+            <p:ph type="body" idx="1"/>
+          </p:nvPr>
+        </p:nvSpPr>
+        <p:spPr/>
+        <p:txBody>
+          <a:bodyPr/>
+          <a:lstStyle/>
+          <a:p>
+            <a:r>
+              <a:rPr lang="en-US" dirty="0"/>
+              <a:t>I record this information in the official logbook of the class after the lesson.</a:t>
+            </a:r>
+            <a:endParaRPr lang="en-US" dirty="0"/>
+          </a:p>
+        </p:txBody>
+      </p:sp>
+      <p:sp>
+        <p:nvSpPr>
+          <p:cNvPr id="4" name="Slide Number Placeholder 3"/>
+          <p:cNvSpPr>
+            <a:spLocks noGrp="1"/>
+          </p:cNvSpPr>
+          <p:nvPr>
+            <p:ph type="sldNum" sz="quarter" idx="10"/>
+          </p:nvPr>
+        </p:nvSpPr>
+        <p:spPr/>
+        <p:txBody>
+          <a:bodyPr/>
+          <a:lstStyle/>
+          <a:p>
+            <a:fld id="{F7021451-1387-4CA6-816F-3879F97B5CBC}" type="slidenum">
+              <a:rPr lang="en-US"/>
+              <a:t>54</a:t>
+            </a:fld>
+            <a:endParaRPr lang="en-US"/>
+          </a:p>
+        </p:txBody>
+      </p:sp>
+    </p:spTree>
+    <p:extLst>
+      <p:ext uri="{BB962C8B-B14F-4D97-AF65-F5344CB8AC3E}">
+        <p14:creationId xmlns:p14="http://schemas.microsoft.com/office/powerpoint/2010/main" val="1024086991"/>
+      </p:ext>
+    </p:extLst>
+  </p:cSld>
+  <p:clrMapOvr>
+    <a:masterClrMapping/>
+  </p:clrMapOvr>
+</p:notes>
+</file>
+
+<file path=ppt/notesSlides/notesSlide55.xml><?xml version="1.0" encoding="utf-8"?>
+<p:notes xmlns:a="http://schemas.openxmlformats.org/drawingml/2006/main" xmlns:r="http://schemas.openxmlformats.org/officeDocument/2006/relationships" xmlns:p="http://schemas.openxmlformats.org/presentationml/2006/main">
+  <p:cSld>
+    <p:spTree>
+      <p:nvGrpSpPr>
+        <p:cNvPr id="1" name=""/>
+        <p:cNvGrpSpPr/>
+        <p:nvPr/>
+      </p:nvGrpSpPr>
+      <p:grpSpPr>
+        <a:xfrm>
+          <a:off x="0" y="0"/>
+          <a:ext cx="0" cy="0"/>
+          <a:chOff x="0" y="0"/>
+          <a:chExt cx="0" cy="0"/>
+        </a:xfrm>
+      </p:grpSpPr>
+      <p:sp>
+        <p:nvSpPr>
+          <p:cNvPr id="2" name="Slide Image Placeholder 1"/>
+          <p:cNvSpPr>
+            <a:spLocks noGrp="1" noRot="1" noChangeAspect="1"/>
+          </p:cNvSpPr>
+          <p:nvPr>
+            <p:ph type="sldImg"/>
+          </p:nvPr>
+        </p:nvSpPr>
+        <p:spPr/>
+      </p:sp>
+      <p:sp>
+        <p:nvSpPr>
+          <p:cNvPr id="3" name="Notes Placeholder 2"/>
+          <p:cNvSpPr>
+            <a:spLocks noGrp="1"/>
+          </p:cNvSpPr>
+          <p:nvPr>
+            <p:ph type="body" idx="1"/>
+          </p:nvPr>
+        </p:nvSpPr>
+        <p:spPr/>
+        <p:txBody>
+          <a:bodyPr/>
+          <a:lstStyle/>
+          <a:p>
+            <a:r>
+              <a:rPr lang="en-US" dirty="0"/>
+              <a:t>I complete the second page of the logbook: the matter taught, the evaluation, the homework and the attendance.</a:t>
+            </a:r>
+            <a:endParaRPr lang="en-US" dirty="0"/>
+          </a:p>
+        </p:txBody>
+      </p:sp>
+      <p:sp>
+        <p:nvSpPr>
+          <p:cNvPr id="4" name="Slide Number Placeholder 3"/>
+          <p:cNvSpPr>
+            <a:spLocks noGrp="1"/>
+          </p:cNvSpPr>
+          <p:nvPr>
+            <p:ph type="sldNum" sz="quarter" idx="10"/>
+          </p:nvPr>
+        </p:nvSpPr>
+        <p:spPr/>
+        <p:txBody>
+          <a:bodyPr/>
+          <a:lstStyle/>
+          <a:p>
+            <a:fld id="{F7021451-1387-4CA6-816F-3879F97B5CBC}" type="slidenum">
+              <a:rPr lang="en-US"/>
+              <a:t>55</a:t>
+            </a:fld>
+            <a:endParaRPr lang="en-US"/>
+          </a:p>
+        </p:txBody>
+      </p:sp>
+    </p:spTree>
+    <p:extLst>
+      <p:ext uri="{BB962C8B-B14F-4D97-AF65-F5344CB8AC3E}">
+        <p14:creationId xmlns:p14="http://schemas.microsoft.com/office/powerpoint/2010/main" val="1024086991"/>
+      </p:ext>
+    </p:extLst>
+  </p:cSld>
+  <p:clrMapOvr>
+    <a:masterClrMapping/>
+  </p:clrMapOvr>
+</p:notes>
+</file>
+
+<file path=ppt/notesSlides/notesSlide56.xml><?xml version="1.0" encoding="utf-8"?>
+<p:notes xmlns:a="http://schemas.openxmlformats.org/drawingml/2006/main" xmlns:r="http://schemas.openxmlformats.org/officeDocument/2006/relationships" xmlns:p="http://schemas.openxmlformats.org/presentationml/2006/main">
+  <p:cSld>
+    <p:spTree>
+      <p:nvGrpSpPr>
+        <p:cNvPr id="1" name=""/>
+        <p:cNvGrpSpPr/>
+        <p:nvPr/>
+      </p:nvGrpSpPr>
+      <p:grpSpPr>
+        <a:xfrm>
+          <a:off x="0" y="0"/>
+          <a:ext cx="0" cy="0"/>
+          <a:chOff x="0" y="0"/>
+          <a:chExt cx="0" cy="0"/>
+        </a:xfrm>
+      </p:grpSpPr>
+      <p:sp>
+        <p:nvSpPr>
+          <p:cNvPr id="2" name="Slide Image Placeholder 1"/>
+          <p:cNvSpPr>
+            <a:spLocks noGrp="1" noRot="1" noChangeAspect="1"/>
+          </p:cNvSpPr>
+          <p:nvPr>
+            <p:ph type="sldImg"/>
+          </p:nvPr>
+        </p:nvSpPr>
+        <p:spPr/>
+      </p:sp>
+      <p:sp>
+        <p:nvSpPr>
+          <p:cNvPr id="3" name="Notes Placeholder 2"/>
+          <p:cNvSpPr>
+            <a:spLocks noGrp="1"/>
+          </p:cNvSpPr>
+          <p:nvPr>
+            <p:ph type="body" idx="1"/>
+          </p:nvPr>
+        </p:nvSpPr>
+        <p:spPr/>
+        <p:txBody>
+          <a:bodyPr/>
+          <a:lstStyle/>
+          <a:p>
+            <a:r>
+              <a:rPr lang="en-US" dirty="0"/>
+              <a:t>This slide is for me, the teacher: it gives the timing of the lesson and what to do if the projector is not available.</a:t>
+            </a:r>
+            <a:endParaRPr lang="en-US" dirty="0"/>
+          </a:p>
+        </p:txBody>
+      </p:sp>
+      <p:sp>
+        <p:nvSpPr>
+          <p:cNvPr id="4" name="Slide Number Placeholder 3"/>
+          <p:cNvSpPr>
+            <a:spLocks noGrp="1"/>
+          </p:cNvSpPr>
+          <p:nvPr>
+            <p:ph type="sldNum" sz="quarter" idx="10"/>
+          </p:nvPr>
+        </p:nvSpPr>
+        <p:spPr/>
+        <p:txBody>
+          <a:bodyPr/>
+          <a:lstStyle/>
+          <a:p>
+            <a:fld id="{F7021451-1387-4CA6-816F-3879F97B5CBC}" type="slidenum">
+              <a:rPr lang="en-US"/>
+              <a:t>56</a:t>
+            </a:fld>
+            <a:endParaRPr lang="en-US"/>
+          </a:p>
+        </p:txBody>
+      </p:sp>
+    </p:spTree>
+    <p:extLst>
+      <p:ext uri="{BB962C8B-B14F-4D97-AF65-F5344CB8AC3E}">
+        <p14:creationId xmlns:p14="http://schemas.microsoft.com/office/powerpoint/2010/main" val="1024086991"/>
+      </p:ext>
+    </p:extLst>
+  </p:cSld>
+  <p:clrMapOvr>
+    <a:masterClrMapping/>
+  </p:clrMapOvr>
+</p:notes>
+</file>
+
+<file path=ppt/notesSlides/notesSlide57.xml><?xml version="1.0" encoding="utf-8"?>
+<p:notes xmlns:a="http://schemas.openxmlformats.org/drawingml/2006/main" xmlns:r="http://schemas.openxmlformats.org/officeDocument/2006/relationships" xmlns:p="http://schemas.openxmlformats.org/presentationml/2006/main">
+  <p:cSld>
+    <p:spTree>
+      <p:nvGrpSpPr>
+        <p:cNvPr id="1" name=""/>
+        <p:cNvGrpSpPr/>
+        <p:nvPr/>
+      </p:nvGrpSpPr>
+      <p:grpSpPr>
+        <a:xfrm>
+          <a:off x="0" y="0"/>
+          <a:ext cx="0" cy="0"/>
+          <a:chOff x="0" y="0"/>
+          <a:chExt cx="0" cy="0"/>
+        </a:xfrm>
+      </p:grpSpPr>
+      <p:sp>
+        <p:nvSpPr>
+          <p:cNvPr id="2" name="Slide Image Placeholder 1"/>
+          <p:cNvSpPr>
+            <a:spLocks noGrp="1" noRot="1" noChangeAspect="1"/>
+          </p:cNvSpPr>
+          <p:nvPr>
+            <p:ph type="sldImg"/>
+          </p:nvPr>
+        </p:nvSpPr>
+        <p:spPr/>
+      </p:sp>
+      <p:sp>
+        <p:nvSpPr>
+          <p:cNvPr id="3" name="Notes Placeholder 2"/>
+          <p:cNvSpPr>
+            <a:spLocks noGrp="1"/>
+          </p:cNvSpPr>
+          <p:nvPr>
+            <p:ph type="body" idx="1"/>
+          </p:nvPr>
+        </p:nvSpPr>
+        <p:spPr/>
+        <p:txBody>
+          <a:bodyPr/>
+          <a:lstStyle/>
+          <a:p>
+            <a:r>
+              <a:rPr lang="en-US" dirty="0"/>
+              <a:t>These are the references and picture credits used to prepare this lesson.</a:t>
+            </a:r>
+            <a:endParaRPr lang="en-US" dirty="0"/>
+          </a:p>
+        </p:txBody>
+      </p:sp>
+      <p:sp>
+        <p:nvSpPr>
+          <p:cNvPr id="4" name="Slide Number Placeholder 3"/>
+          <p:cNvSpPr>
+            <a:spLocks noGrp="1"/>
+          </p:cNvSpPr>
+          <p:nvPr>
+            <p:ph type="sldNum" sz="quarter" idx="10"/>
+          </p:nvPr>
+        </p:nvSpPr>
+        <p:spPr/>
+        <p:txBody>
+          <a:bodyPr/>
+          <a:lstStyle/>
+          <a:p>
+            <a:fld id="{F7021451-1387-4CA6-816F-3879F97B5CBC}" type="slidenum">
+              <a:rPr lang="en-US"/>
+              <a:t>57</a:t>
             </a:fld>
             <a:endParaRPr lang="en-US"/>
           </a:p>
@@ -4954,7 +5310,7 @@
           <a:p>
             <a:r>
               <a:rPr lang="en-US" dirty="0"/>
-              <a:t>By the end of this lesson, you should be able to do three things. Number 1: convert population numbers to percentages. Number 2: draw a population pyramid. Number 3: calculate and interpret dependency ratios.</a:t>
+              <a:t>Take your time to copy this part; we will continue together.</a:t>
             </a:r>
             <a:endParaRPr lang="en-US" dirty="0"/>
           </a:p>
@@ -5042,7 +5398,7 @@
           <a:p>
             <a:r>
               <a:rPr lang="en-US" dirty="0"/>
-              <a:t>Let us first remember what you already know. A pyramid shows males on the left and females on the right. Dependency ratio = dependants ÷ workers × 100. Keep this in mind, because we shall build on it today.</a:t>
+              <a:t>By the end of this lesson, you should be able to do four things. Number 1: define the dependency ratio. Number 2: calculate the dependency ratio from data. Number 3: interpret the result in words. Number 4: compare dependency ratios of different countries.</a:t>
             </a:r>
             <a:endParaRPr lang="en-US" dirty="0"/>
           </a:p>
@@ -5130,7 +5486,7 @@
           <a:p>
             <a:r>
               <a:rPr lang="en-US" dirty="0"/>
-              <a:t>Listen carefully to this situation from real life. The council of a small town gives the class the number of males and females in five age groups. It wants a pyramid and the dependency ratio to plan a new school and a health centre. Think about it, because I am going to ask you some questions.</a:t>
+              <a:t>Let us first remember what you already know. Young dependants are aged 0–14. Old dependants are aged 65 and over. The working population is aged 15–64. Keep this in mind, because we shall build on it today.</a:t>
             </a:r>
             <a:endParaRPr lang="en-US" dirty="0"/>
           </a:p>
@@ -6510,7 +6866,7 @@
         <p:spPr>
           <a:xfrm>
             <a:off x="0" y="658368"/>
-            <a:ext cx="5120640" cy="5833872"/>
+            <a:ext cx="3840480" cy="5833872"/>
           </a:xfrm>
           <a:prstGeom prst="rect">
             <a:avLst/>
@@ -6525,8 +6881,8 @@
         </p:nvSpPr>
         <p:spPr>
           <a:xfrm>
-            <a:off x="5349240" y="1005840"/>
-            <a:ext cx="6522415" cy="731520"/>
+            <a:off x="4069080" y="1005840"/>
+            <a:ext cx="7802575" cy="731520"/>
           </a:xfrm>
           <a:prstGeom prst="rect">
             <a:avLst/>
@@ -6552,7 +6908,7 @@
                 <a:ea typeface="Times New Roman" pitchFamily="34" charset="-122"/>
                 <a:cs typeface="Times New Roman" pitchFamily="34" charset="-120"/>
               </a:rPr>
-              <a:t>Situation: Question 1</a:t>
+              <a:t>Situation in Real Life</a:t>
             </a:r>
             <a:endParaRPr lang="en-US" sz="3600" dirty="0"/>
           </a:p>
@@ -6566,8 +6922,8 @@
         </p:nvSpPr>
         <p:spPr>
           <a:xfrm>
-            <a:off x="5349240" y="1783080"/>
-            <a:ext cx="6522415" cy="4663440"/>
+            <a:off x="4069080" y="1783080"/>
+            <a:ext cx="7802575" cy="4663440"/>
           </a:xfrm>
           <a:prstGeom prst="rect">
             <a:avLst/>
@@ -6594,7 +6950,27 @@
                 <a:ea typeface="Times New Roman" pitchFamily="34" charset="-122"/>
                 <a:cs typeface="Times New Roman" pitchFamily="34" charset="-120"/>
               </a:rPr>
-              <a:t>What is the problem in the situation?</a:t>
+              <a:t>A development NGO in Garoua compares two districts.</a:t>
+            </a:r>
+            <a:endParaRPr lang="en-US" sz="4000" dirty="0"/>
+          </a:p>
+          <a:p>
+            <a:pPr algn="l" indent="0" marL="0">
+              <a:spcAft>
+                <a:spcPts val="800"/>
+              </a:spcAft>
+              <a:buNone/>
+            </a:pPr>
+            <a:r>
+              <a:rPr lang="en-US" sz="4000" dirty="0">
+                <a:solidFill>
+                  <a:srgbClr val="111111"/>
+                </a:solidFill>
+                <a:latin typeface="Times New Roman" pitchFamily="34" charset="0"/>
+                <a:ea typeface="Times New Roman" pitchFamily="34" charset="-122"/>
+                <a:cs typeface="Times New Roman" pitchFamily="34" charset="-120"/>
+              </a:rPr>
+              <a:t>In the first, there are 2,000 children, 800 elderly people and 3,000 adults of working age; in the second, the adults are much more numerous than the dependants.</a:t>
             </a:r>
             <a:endParaRPr lang="en-US" sz="4000" dirty="0"/>
           </a:p>
@@ -6771,7 +7147,7 @@
                 <a:ea typeface="Times New Roman" pitchFamily="34" charset="-122"/>
                 <a:cs typeface="Times New Roman" pitchFamily="34" charset="-120"/>
               </a:rPr>
-              <a:t>Answer</a:t>
+              <a:t>Situation in Real Life (continued)</a:t>
             </a:r>
             <a:endParaRPr lang="en-US" sz="3600" dirty="0"/>
           </a:p>
@@ -6813,7 +7189,27 @@
                 <a:ea typeface="Times New Roman" pitchFamily="34" charset="-122"/>
                 <a:cs typeface="Times New Roman" pitchFamily="34" charset="-120"/>
               </a:rPr>
-              <a:t>The class must turn numbers into a pyramid.</a:t>
+              <a:t>The NGO manager wants to know where families carry the heaviest burden.</a:t>
+            </a:r>
+            <a:endParaRPr lang="en-US" sz="4000" dirty="0"/>
+          </a:p>
+          <a:p>
+            <a:pPr algn="l" indent="0" marL="0">
+              <a:spcAft>
+                <a:spcPts val="800"/>
+              </a:spcAft>
+              <a:buNone/>
+            </a:pPr>
+            <a:r>
+              <a:rPr lang="en-US" sz="4000" dirty="0">
+                <a:solidFill>
+                  <a:srgbClr val="111111"/>
+                </a:solidFill>
+                <a:latin typeface="Times New Roman" pitchFamily="34" charset="0"/>
+                <a:ea typeface="Times New Roman" pitchFamily="34" charset="-122"/>
+                <a:cs typeface="Times New Roman" pitchFamily="34" charset="-120"/>
+              </a:rPr>
+              <a:t>He asks: "How do we calculate and explain the dependency ratio?"</a:t>
             </a:r>
             <a:endParaRPr lang="en-US" sz="4000" dirty="0"/>
           </a:p>
@@ -6990,7 +7386,7 @@
                 <a:ea typeface="Times New Roman" pitchFamily="34" charset="-122"/>
                 <a:cs typeface="Times New Roman" pitchFamily="34" charset="-120"/>
               </a:rPr>
-              <a:t>Situation: Question 2</a:t>
+              <a:t>Situation: Question 1</a:t>
             </a:r>
             <a:endParaRPr lang="en-US" sz="3600" dirty="0"/>
           </a:p>
@@ -7032,7 +7428,7 @@
                 <a:ea typeface="Times New Roman" pitchFamily="34" charset="-122"/>
                 <a:cs typeface="Times New Roman" pitchFamily="34" charset="-120"/>
               </a:rPr>
-              <a:t>What must be calculated first?</a:t>
+              <a:t>What is the problem in the situation?</a:t>
             </a:r>
             <a:endParaRPr lang="en-US" sz="4000" dirty="0"/>
           </a:p>
@@ -7251,7 +7647,7 @@
                 <a:ea typeface="Times New Roman" pitchFamily="34" charset="-122"/>
                 <a:cs typeface="Times New Roman" pitchFamily="34" charset="-120"/>
               </a:rPr>
-              <a:t>The percentage of each group.</a:t>
+              <a:t>The manager does not know how to calculate and interpret the dependency ratio.</a:t>
             </a:r>
             <a:endParaRPr lang="en-US" sz="4000" dirty="0"/>
           </a:p>
@@ -7428,7 +7824,7 @@
                 <a:ea typeface="Times New Roman" pitchFamily="34" charset="-122"/>
                 <a:cs typeface="Times New Roman" pitchFamily="34" charset="-120"/>
               </a:rPr>
-              <a:t>Situation: Question 3</a:t>
+              <a:t>Situation: Question 2</a:t>
             </a:r>
             <a:endParaRPr lang="en-US" sz="3600" dirty="0"/>
           </a:p>
@@ -7470,7 +7866,7 @@
                 <a:ea typeface="Times New Roman" pitchFamily="34" charset="-122"/>
                 <a:cs typeface="Times New Roman" pitchFamily="34" charset="-120"/>
               </a:rPr>
-              <a:t>What will the dependency ratio show?</a:t>
+              <a:t>Who are the dependants in the first district?</a:t>
             </a:r>
             <a:endParaRPr lang="en-US" sz="4000" dirty="0"/>
           </a:p>
@@ -7647,7 +8043,7 @@
                 <a:ea typeface="Times New Roman" pitchFamily="34" charset="-122"/>
                 <a:cs typeface="Times New Roman" pitchFamily="34" charset="-120"/>
               </a:rPr>
-              <a:t>Possible Answer</a:t>
+              <a:t>Answer</a:t>
             </a:r>
             <a:endParaRPr lang="en-US" sz="3600" dirty="0"/>
           </a:p>
@@ -7689,7 +8085,7 @@
                 <a:ea typeface="Times New Roman" pitchFamily="34" charset="-122"/>
                 <a:cs typeface="Times New Roman" pitchFamily="34" charset="-120"/>
               </a:rPr>
-              <a:t>How many dependants each worker supports.</a:t>
+              <a:t>The 2,000 children and the 800 elderly people.</a:t>
             </a:r>
             <a:endParaRPr lang="en-US" sz="4000" dirty="0"/>
           </a:p>
@@ -7801,7 +8197,7 @@
                 <a:ea typeface="Calibri" pitchFamily="34" charset="-122"/>
                 <a:cs typeface="Calibri" pitchFamily="34" charset="-120"/>
               </a:rPr>
-              <a:t>ACTION TO TAKE</a:t>
+              <a:t>REAL-LIFE SITUATION</a:t>
             </a:r>
             <a:endParaRPr lang="en-US" sz="1400" dirty="0"/>
           </a:p>
@@ -7866,7 +8262,7 @@
                 <a:ea typeface="Times New Roman" pitchFamily="34" charset="-122"/>
                 <a:cs typeface="Times New Roman" pitchFamily="34" charset="-120"/>
               </a:rPr>
-              <a:t>Action to Take</a:t>
+              <a:t>Situation: Question 3</a:t>
             </a:r>
             <a:endParaRPr lang="en-US" sz="3600" dirty="0"/>
           </a:p>
@@ -7908,7 +8304,7 @@
                 <a:ea typeface="Times New Roman" pitchFamily="34" charset="-122"/>
                 <a:cs typeface="Times New Roman" pitchFamily="34" charset="-120"/>
               </a:rPr>
-              <a:t>Draw and interpret population pyramids and dependency ratios.</a:t>
+              <a:t>Who supports them?</a:t>
             </a:r>
             <a:endParaRPr lang="en-US" sz="4000" dirty="0"/>
           </a:p>
@@ -8020,7 +8416,7 @@
                 <a:ea typeface="Calibri" pitchFamily="34" charset="-122"/>
                 <a:cs typeface="Calibri" pitchFamily="34" charset="-120"/>
               </a:rPr>
-              <a:t>JUSTIFICATION</a:t>
+              <a:t>REAL-LIFE SITUATION</a:t>
             </a:r>
             <a:endParaRPr lang="en-US" sz="1400" dirty="0"/>
           </a:p>
@@ -8085,7 +8481,7 @@
                 <a:ea typeface="Times New Roman" pitchFamily="34" charset="-122"/>
                 <a:cs typeface="Times New Roman" pitchFamily="34" charset="-120"/>
               </a:rPr>
-              <a:t>Justification of the Lesson</a:t>
+              <a:t>Possible Answer</a:t>
             </a:r>
             <a:endParaRPr lang="en-US" sz="3600" dirty="0"/>
           </a:p>
@@ -8127,7 +8523,7 @@
                 <a:ea typeface="Times New Roman" pitchFamily="34" charset="-122"/>
                 <a:cs typeface="Times New Roman" pitchFamily="34" charset="-120"/>
               </a:rPr>
-              <a:t>This practical work helps us to draw and use population pyramids for planning.</a:t>
+              <a:t>The 3,000 adults of working age.</a:t>
             </a:r>
             <a:endParaRPr lang="en-US" sz="4000" dirty="0"/>
           </a:p>
@@ -8239,54 +8635,15 @@
                 <a:ea typeface="Calibri" pitchFamily="34" charset="-122"/>
                 <a:cs typeface="Calibri" pitchFamily="34" charset="-120"/>
               </a:rPr>
-              <a:t>1. THE DATA</a:t>
+              <a:t>ACTION TO TAKE</a:t>
             </a:r>
             <a:endParaRPr lang="en-US" sz="1400" dirty="0"/>
-          </a:p>
-        </p:txBody>
-      </p:sp>
-      <p:sp>
-        <p:nvSpPr>
-          <p:cNvPr id="3" name="Text 1"/>
-          <p:cNvSpPr/>
-          <p:nvPr/>
-        </p:nvSpPr>
-        <p:spPr>
-          <a:xfrm>
-            <a:off x="457200" y="1005840"/>
-            <a:ext cx="11277295" cy="731520"/>
-          </a:xfrm>
-          <a:prstGeom prst="rect">
-            <a:avLst/>
-          </a:prstGeom>
-          <a:noFill/>
-          <a:ln/>
-        </p:spPr>
-        <p:txBody>
-          <a:bodyPr wrap="square" lIns="0" tIns="0" rIns="0" bIns="0" rtlCol="0" anchor="ctr"/>
-          <a:lstStyle/>
-          <a:p>
-            <a:pPr algn="ctr" indent="0" marL="0">
-              <a:buNone/>
-            </a:pPr>
-            <a:r>
-              <a:rPr lang="en-US" sz="3600" b="1" dirty="0">
-                <a:solidFill>
-                  <a:srgbClr val="990011"/>
-                </a:solidFill>
-                <a:latin typeface="Times New Roman" pitchFamily="34" charset="0"/>
-                <a:ea typeface="Times New Roman" pitchFamily="34" charset="-122"/>
-                <a:cs typeface="Times New Roman" pitchFamily="34" charset="-120"/>
-              </a:rPr>
-              <a:t>Activity 1</a:t>
-            </a:r>
-            <a:endParaRPr lang="en-US" sz="3600" dirty="0"/>
           </a:p>
         </p:txBody>
       </p:sp>
       <p:pic>
         <p:nvPicPr>
-          <p:cNvPr id="4" name="Image 0" descr="/home/claude/f4/img/v2/pw_pyramid_table_big.png">    </p:cNvPr>
+          <p:cNvPr id="3" name="Image 0" descr="/home/claude/f4/img/minesec_sheet.png">    </p:cNvPr>
           <p:cNvPicPr>
             <a:picLocks noChangeAspect="1"/>
           </p:cNvPicPr>
@@ -8300,8 +8657,8 @@
         </p:blipFill>
         <p:spPr>
           <a:xfrm>
-            <a:off x="629930" y="1783080"/>
-            <a:ext cx="10931835" cy="4270248"/>
+            <a:off x="0" y="658368"/>
+            <a:ext cx="5120640" cy="5833872"/>
           </a:xfrm>
           <a:prstGeom prst="rect">
             <a:avLst/>
@@ -8310,14 +8667,14 @@
       </p:pic>
       <p:sp>
         <p:nvSpPr>
-          <p:cNvPr id="5" name="Text 2"/>
+          <p:cNvPr id="4" name="Text 1"/>
           <p:cNvSpPr/>
           <p:nvPr/>
         </p:nvSpPr>
         <p:spPr>
           <a:xfrm>
-            <a:off x="457200" y="6089904"/>
-            <a:ext cx="11277295" cy="347472"/>
+            <a:off x="5349240" y="1005840"/>
+            <a:ext cx="6522415" cy="731520"/>
           </a:xfrm>
           <a:prstGeom prst="rect">
             <a:avLst/>
@@ -8326,24 +8683,68 @@
           <a:ln/>
         </p:spPr>
         <p:txBody>
-          <a:bodyPr wrap="square" lIns="0" tIns="0" rIns="0" bIns="0" rtlCol="0" anchor="ctr"/>
+          <a:bodyPr wrap="square" lIns="0" tIns="0" rIns="0" bIns="0" rtlCol="0" anchor="ctr">
+            <a:normAutofit/>
+          </a:bodyPr>
           <a:lstStyle/>
           <a:p>
             <a:pPr algn="ctr" indent="0" marL="0">
               <a:buNone/>
             </a:pPr>
             <a:r>
-              <a:rPr lang="en-US" sz="1800" i="1" dirty="0">
-                <a:solidFill>
-                  <a:srgbClr val="555555"/>
+              <a:rPr lang="en-US" sz="3600" b="1" dirty="0">
+                <a:solidFill>
+                  <a:srgbClr val="990011"/>
                 </a:solidFill>
                 <a:latin typeface="Times New Roman" pitchFamily="34" charset="0"/>
                 <a:ea typeface="Times New Roman" pitchFamily="34" charset="-122"/>
                 <a:cs typeface="Times New Roman" pitchFamily="34" charset="-120"/>
               </a:rPr>
-              <a:t>Population of a town by age and sex.</a:t>
-            </a:r>
-            <a:endParaRPr lang="en-US" sz="1800" dirty="0"/>
+              <a:t>Action to Take</a:t>
+            </a:r>
+            <a:endParaRPr lang="en-US" sz="3600" dirty="0"/>
+          </a:p>
+        </p:txBody>
+      </p:sp>
+      <p:sp>
+        <p:nvSpPr>
+          <p:cNvPr id="5" name="Text 2"/>
+          <p:cNvSpPr/>
+          <p:nvPr/>
+        </p:nvSpPr>
+        <p:spPr>
+          <a:xfrm>
+            <a:off x="5349240" y="1783080"/>
+            <a:ext cx="6522415" cy="4663440"/>
+          </a:xfrm>
+          <a:prstGeom prst="rect">
+            <a:avLst/>
+          </a:prstGeom>
+          <a:noFill/>
+          <a:ln/>
+        </p:spPr>
+        <p:txBody>
+          <a:bodyPr wrap="square" lIns="0" tIns="0" rIns="0" bIns="0" rtlCol="0" anchor="t"/>
+          <a:lstStyle/>
+          <a:p>
+            <a:pPr algn="l" indent="0" marL="0">
+              <a:spcAft>
+                <a:spcPts val="800"/>
+              </a:spcAft>
+              <a:buNone/>
+            </a:pPr>
+            <a:r>
+              <a:rPr lang="en-US" sz="4000" dirty="0">
+                <a:solidFill>
+                  <a:srgbClr val="111111"/>
+                </a:solidFill>
+                <a:latin typeface="Times New Roman" pitchFamily="34" charset="0"/>
+                <a:ea typeface="Times New Roman" pitchFamily="34" charset="-122"/>
+                <a:cs typeface="Times New Roman" pitchFamily="34" charset="-120"/>
+              </a:rPr>
+              <a:t>Always show the formula, the working and a sentence of interpretation when calculating a ratio.</a:t>
+            </a:r>
+            <a:endParaRPr lang="en-US" sz="4000" dirty="0"/>
           </a:p>
         </p:txBody>
       </p:sp>
@@ -8453,7 +8854,7 @@
                 <a:ea typeface="Calibri" pitchFamily="34" charset="-122"/>
                 <a:cs typeface="Calibri" pitchFamily="34" charset="-120"/>
               </a:rPr>
-              <a:t>1. THE DATA</a:t>
+              <a:t>JUSTIFICATION</a:t>
             </a:r>
             <a:endParaRPr lang="en-US" sz="1400" dirty="0"/>
           </a:p>
@@ -8518,7 +8919,7 @@
                 <a:ea typeface="Times New Roman" pitchFamily="34" charset="-122"/>
                 <a:cs typeface="Times New Roman" pitchFamily="34" charset="-120"/>
               </a:rPr>
-              <a:t>Activity 1: Question</a:t>
+              <a:t>Justification of the Lesson</a:t>
             </a:r>
             <a:endParaRPr lang="en-US" sz="3600" dirty="0"/>
           </a:p>
@@ -8560,7 +8961,7 @@
                 <a:ea typeface="Times New Roman" pitchFamily="34" charset="-122"/>
                 <a:cs typeface="Times New Roman" pitchFamily="34" charset="-120"/>
               </a:rPr>
-              <a:t>What percentage of the population are boys aged 0–14? (Total = 9,870)</a:t>
+              <a:t>This practical work helps us to measure the burden on workers, a key tool for planning and a frequent examination exercise.</a:t>
             </a:r>
             <a:endParaRPr lang="en-US" sz="4000" dirty="0"/>
           </a:p>
@@ -9267,15 +9668,54 @@
                 <a:ea typeface="Calibri" pitchFamily="34" charset="-122"/>
                 <a:cs typeface="Calibri" pitchFamily="34" charset="-120"/>
               </a:rPr>
-              <a:t>1. THE DATA</a:t>
+              <a:t>1. FORMULA</a:t>
             </a:r>
             <a:endParaRPr lang="en-US" sz="1400" dirty="0"/>
+          </a:p>
+        </p:txBody>
+      </p:sp>
+      <p:sp>
+        <p:nvSpPr>
+          <p:cNvPr id="3" name="Text 1"/>
+          <p:cNvSpPr/>
+          <p:nvPr/>
+        </p:nvSpPr>
+        <p:spPr>
+          <a:xfrm>
+            <a:off x="457200" y="1005840"/>
+            <a:ext cx="11277295" cy="731520"/>
+          </a:xfrm>
+          <a:prstGeom prst="rect">
+            <a:avLst/>
+          </a:prstGeom>
+          <a:noFill/>
+          <a:ln/>
+        </p:spPr>
+        <p:txBody>
+          <a:bodyPr wrap="square" lIns="0" tIns="0" rIns="0" bIns="0" rtlCol="0" anchor="ctr"/>
+          <a:lstStyle/>
+          <a:p>
+            <a:pPr algn="ctr" indent="0" marL="0">
+              <a:buNone/>
+            </a:pPr>
+            <a:r>
+              <a:rPr lang="en-US" sz="3600" b="1" dirty="0">
+                <a:solidFill>
+                  <a:srgbClr val="990011"/>
+                </a:solidFill>
+                <a:latin typeface="Times New Roman" pitchFamily="34" charset="0"/>
+                <a:ea typeface="Times New Roman" pitchFamily="34" charset="-122"/>
+                <a:cs typeface="Times New Roman" pitchFamily="34" charset="-120"/>
+              </a:rPr>
+              <a:t>Activity 1</a:t>
+            </a:r>
+            <a:endParaRPr lang="en-US" sz="3600" dirty="0"/>
           </a:p>
         </p:txBody>
       </p:sp>
       <p:pic>
         <p:nvPicPr>
-          <p:cNvPr id="3" name="Image 0" descr="/home/claude/f4/img/minesec_sheet.png">    </p:cNvPr>
+          <p:cNvPr id="4" name="Image 0" descr="/home/claude/f4/img/v2/dependency_big.png">    </p:cNvPr>
           <p:cNvPicPr>
             <a:picLocks noChangeAspect="1"/>
           </p:cNvPicPr>
@@ -9289,8 +9729,8 @@
         </p:blipFill>
         <p:spPr>
           <a:xfrm>
-            <a:off x="0" y="658368"/>
-            <a:ext cx="5120640" cy="5833872"/>
+            <a:off x="629930" y="1783080"/>
+            <a:ext cx="10931835" cy="4270248"/>
           </a:xfrm>
           <a:prstGeom prst="rect">
             <a:avLst/>
@@ -9299,14 +9739,14 @@
       </p:pic>
       <p:sp>
         <p:nvSpPr>
-          <p:cNvPr id="4" name="Text 1"/>
+          <p:cNvPr id="5" name="Text 2"/>
           <p:cNvSpPr/>
           <p:nvPr/>
         </p:nvSpPr>
         <p:spPr>
           <a:xfrm>
-            <a:off x="5349240" y="1005840"/>
-            <a:ext cx="6522415" cy="731520"/>
+            <a:off x="457200" y="6089904"/>
+            <a:ext cx="11277295" cy="347472"/>
           </a:xfrm>
           <a:prstGeom prst="rect">
             <a:avLst/>
@@ -9315,68 +9755,24 @@
           <a:ln/>
         </p:spPr>
         <p:txBody>
-          <a:bodyPr wrap="square" lIns="0" tIns="0" rIns="0" bIns="0" rtlCol="0" anchor="ctr">
-            <a:normAutofit/>
-          </a:bodyPr>
+          <a:bodyPr wrap="square" lIns="0" tIns="0" rIns="0" bIns="0" rtlCol="0" anchor="ctr"/>
           <a:lstStyle/>
           <a:p>
             <a:pPr algn="ctr" indent="0" marL="0">
               <a:buNone/>
             </a:pPr>
             <a:r>
-              <a:rPr lang="en-US" sz="3600" b="1" dirty="0">
-                <a:solidFill>
-                  <a:srgbClr val="990011"/>
+              <a:rPr lang="en-US" sz="1800" i="1" dirty="0">
+                <a:solidFill>
+                  <a:srgbClr val="555555"/>
                 </a:solidFill>
                 <a:latin typeface="Times New Roman" pitchFamily="34" charset="0"/>
                 <a:ea typeface="Times New Roman" pitchFamily="34" charset="-122"/>
                 <a:cs typeface="Times New Roman" pitchFamily="34" charset="-120"/>
               </a:rPr>
-              <a:t>Activity 1: Answer</a:t>
-            </a:r>
-            <a:endParaRPr lang="en-US" sz="3600" dirty="0"/>
-          </a:p>
-        </p:txBody>
-      </p:sp>
-      <p:sp>
-        <p:nvSpPr>
-          <p:cNvPr id="5" name="Text 2"/>
-          <p:cNvSpPr/>
-          <p:nvPr/>
-        </p:nvSpPr>
-        <p:spPr>
-          <a:xfrm>
-            <a:off x="5349240" y="1783080"/>
-            <a:ext cx="6522415" cy="4663440"/>
-          </a:xfrm>
-          <a:prstGeom prst="rect">
-            <a:avLst/>
-          </a:prstGeom>
-          <a:noFill/>
-          <a:ln/>
-        </p:spPr>
-        <p:txBody>
-          <a:bodyPr wrap="square" lIns="0" tIns="0" rIns="0" bIns="0" rtlCol="0" anchor="t"/>
-          <a:lstStyle/>
-          <a:p>
-            <a:pPr algn="l" indent="0" marL="0">
-              <a:spcAft>
-                <a:spcPts val="800"/>
-              </a:spcAft>
-              <a:buNone/>
-            </a:pPr>
-            <a:r>
-              <a:rPr lang="en-US" sz="4000" dirty="0">
-                <a:solidFill>
-                  <a:srgbClr val="111111"/>
-                </a:solidFill>
-                <a:latin typeface="Times New Roman" pitchFamily="34" charset="0"/>
-                <a:ea typeface="Times New Roman" pitchFamily="34" charset="-122"/>
-                <a:cs typeface="Times New Roman" pitchFamily="34" charset="-120"/>
-              </a:rPr>
-              <a:t>2,100 ÷ 9,870 × 100 ≈ 21.3 %.</a:t>
-            </a:r>
-            <a:endParaRPr lang="en-US" sz="4000" dirty="0"/>
+              <a:t>The dependency ratio.</a:t>
+            </a:r>
+            <a:endParaRPr lang="en-US" sz="1800" dirty="0"/>
           </a:p>
         </p:txBody>
       </p:sp>
@@ -9486,54 +9882,15 @@
                 <a:ea typeface="Calibri" pitchFamily="34" charset="-122"/>
                 <a:cs typeface="Calibri" pitchFamily="34" charset="-120"/>
               </a:rPr>
-              <a:t>2. CONSTRUCTION</a:t>
+              <a:t>1. FORMULA</a:t>
             </a:r>
             <a:endParaRPr lang="en-US" sz="1400" dirty="0"/>
-          </a:p>
-        </p:txBody>
-      </p:sp>
-      <p:sp>
-        <p:nvSpPr>
-          <p:cNvPr id="3" name="Text 1"/>
-          <p:cNvSpPr/>
-          <p:nvPr/>
-        </p:nvSpPr>
-        <p:spPr>
-          <a:xfrm>
-            <a:off x="457200" y="1005840"/>
-            <a:ext cx="11277295" cy="731520"/>
-          </a:xfrm>
-          <a:prstGeom prst="rect">
-            <a:avLst/>
-          </a:prstGeom>
-          <a:noFill/>
-          <a:ln/>
-        </p:spPr>
-        <p:txBody>
-          <a:bodyPr wrap="square" lIns="0" tIns="0" rIns="0" bIns="0" rtlCol="0" anchor="ctr"/>
-          <a:lstStyle/>
-          <a:p>
-            <a:pPr algn="ctr" indent="0" marL="0">
-              <a:buNone/>
-            </a:pPr>
-            <a:r>
-              <a:rPr lang="en-US" sz="3600" b="1" dirty="0">
-                <a:solidFill>
-                  <a:srgbClr val="990011"/>
-                </a:solidFill>
-                <a:latin typeface="Times New Roman" pitchFamily="34" charset="0"/>
-                <a:ea typeface="Times New Roman" pitchFamily="34" charset="-122"/>
-                <a:cs typeface="Times New Roman" pitchFamily="34" charset="-120"/>
-              </a:rPr>
-              <a:t>Activity 2</a:t>
-            </a:r>
-            <a:endParaRPr lang="en-US" sz="3600" dirty="0"/>
           </a:p>
         </p:txBody>
       </p:sp>
       <p:pic>
         <p:nvPicPr>
-          <p:cNvPr id="4" name="Image 0" descr="/home/claude/f4/img/v2/pyramid_cameroon_big.png">    </p:cNvPr>
+          <p:cNvPr id="3" name="Image 0" descr="/home/claude/f4/img/minesec_sheet.png">    </p:cNvPr>
           <p:cNvPicPr>
             <a:picLocks noChangeAspect="1"/>
           </p:cNvPicPr>
@@ -9547,8 +9904,8 @@
         </p:blipFill>
         <p:spPr>
           <a:xfrm>
-            <a:off x="1383850" y="1783080"/>
-            <a:ext cx="9423996" cy="4270248"/>
+            <a:off x="0" y="658368"/>
+            <a:ext cx="5120640" cy="5833872"/>
           </a:xfrm>
           <a:prstGeom prst="rect">
             <a:avLst/>
@@ -9557,14 +9914,14 @@
       </p:pic>
       <p:sp>
         <p:nvSpPr>
-          <p:cNvPr id="5" name="Text 2"/>
+          <p:cNvPr id="4" name="Text 1"/>
           <p:cNvSpPr/>
           <p:nvPr/>
         </p:nvSpPr>
         <p:spPr>
           <a:xfrm>
-            <a:off x="457200" y="6089904"/>
-            <a:ext cx="11277295" cy="347472"/>
+            <a:off x="5349240" y="1005840"/>
+            <a:ext cx="6522415" cy="731520"/>
           </a:xfrm>
           <a:prstGeom prst="rect">
             <a:avLst/>
@@ -9573,24 +9930,68 @@
           <a:ln/>
         </p:spPr>
         <p:txBody>
-          <a:bodyPr wrap="square" lIns="0" tIns="0" rIns="0" bIns="0" rtlCol="0" anchor="ctr"/>
+          <a:bodyPr wrap="square" lIns="0" tIns="0" rIns="0" bIns="0" rtlCol="0" anchor="ctr">
+            <a:normAutofit/>
+          </a:bodyPr>
           <a:lstStyle/>
           <a:p>
             <a:pPr algn="ctr" indent="0" marL="0">
               <a:buNone/>
             </a:pPr>
             <a:r>
-              <a:rPr lang="en-US" sz="1800" i="1" dirty="0">
-                <a:solidFill>
-                  <a:srgbClr val="555555"/>
+              <a:rPr lang="en-US" sz="3600" b="1" dirty="0">
+                <a:solidFill>
+                  <a:srgbClr val="990011"/>
                 </a:solidFill>
                 <a:latin typeface="Times New Roman" pitchFamily="34" charset="0"/>
                 <a:ea typeface="Times New Roman" pitchFamily="34" charset="-122"/>
                 <a:cs typeface="Times New Roman" pitchFamily="34" charset="-120"/>
               </a:rPr>
-              <a:t>A finished pyramid.</a:t>
-            </a:r>
-            <a:endParaRPr lang="en-US" sz="1800" dirty="0"/>
+              <a:t>Activity 1: Question</a:t>
+            </a:r>
+            <a:endParaRPr lang="en-US" sz="3600" dirty="0"/>
+          </a:p>
+        </p:txBody>
+      </p:sp>
+      <p:sp>
+        <p:nvSpPr>
+          <p:cNvPr id="5" name="Text 2"/>
+          <p:cNvSpPr/>
+          <p:nvPr/>
+        </p:nvSpPr>
+        <p:spPr>
+          <a:xfrm>
+            <a:off x="5349240" y="1783080"/>
+            <a:ext cx="6522415" cy="4663440"/>
+          </a:xfrm>
+          <a:prstGeom prst="rect">
+            <a:avLst/>
+          </a:prstGeom>
+          <a:noFill/>
+          <a:ln/>
+        </p:spPr>
+        <p:txBody>
+          <a:bodyPr wrap="square" lIns="0" tIns="0" rIns="0" bIns="0" rtlCol="0" anchor="t"/>
+          <a:lstStyle/>
+          <a:p>
+            <a:pPr algn="l" indent="0" marL="0">
+              <a:spcAft>
+                <a:spcPts val="800"/>
+              </a:spcAft>
+              <a:buNone/>
+            </a:pPr>
+            <a:r>
+              <a:rPr lang="en-US" sz="4000" dirty="0">
+                <a:solidFill>
+                  <a:srgbClr val="111111"/>
+                </a:solidFill>
+                <a:latin typeface="Times New Roman" pitchFamily="34" charset="0"/>
+                <a:ea typeface="Times New Roman" pitchFamily="34" charset="-122"/>
+                <a:cs typeface="Times New Roman" pitchFamily="34" charset="-120"/>
+              </a:rPr>
+              <a:t>Which age groups are the dependants?</a:t>
+            </a:r>
+            <a:endParaRPr lang="en-US" sz="4000" dirty="0"/>
           </a:p>
         </p:txBody>
       </p:sp>
@@ -9700,7 +10101,7 @@
                 <a:ea typeface="Calibri" pitchFamily="34" charset="-122"/>
                 <a:cs typeface="Calibri" pitchFamily="34" charset="-120"/>
               </a:rPr>
-              <a:t>2. CONSTRUCTION</a:t>
+              <a:t>1. FORMULA</a:t>
             </a:r>
             <a:endParaRPr lang="en-US" sz="1400" dirty="0"/>
           </a:p>
@@ -9765,7 +10166,7 @@
                 <a:ea typeface="Times New Roman" pitchFamily="34" charset="-122"/>
                 <a:cs typeface="Times New Roman" pitchFamily="34" charset="-120"/>
               </a:rPr>
-              <a:t>Activity 2: Question</a:t>
+              <a:t>Activity 1: Answer</a:t>
             </a:r>
             <a:endParaRPr lang="en-US" sz="3600" dirty="0"/>
           </a:p>
@@ -9807,7 +10208,7 @@
                 <a:ea typeface="Times New Roman" pitchFamily="34" charset="-122"/>
                 <a:cs typeface="Times New Roman" pitchFamily="34" charset="-120"/>
               </a:rPr>
-              <a:t>Where do males and females go on a pyramid?</a:t>
+              <a:t>People aged 0–14 and people aged 65 and over.</a:t>
             </a:r>
             <a:endParaRPr lang="en-US" sz="4000" dirty="0"/>
           </a:p>
@@ -9919,15 +10320,54 @@
                 <a:ea typeface="Calibri" pitchFamily="34" charset="-122"/>
                 <a:cs typeface="Calibri" pitchFamily="34" charset="-120"/>
               </a:rPr>
-              <a:t>2. CONSTRUCTION</a:t>
+              <a:t>2. CALCULATION</a:t>
             </a:r>
             <a:endParaRPr lang="en-US" sz="1400" dirty="0"/>
+          </a:p>
+        </p:txBody>
+      </p:sp>
+      <p:sp>
+        <p:nvSpPr>
+          <p:cNvPr id="3" name="Text 1"/>
+          <p:cNvSpPr/>
+          <p:nvPr/>
+        </p:nvSpPr>
+        <p:spPr>
+          <a:xfrm>
+            <a:off x="457200" y="1005840"/>
+            <a:ext cx="11277295" cy="731520"/>
+          </a:xfrm>
+          <a:prstGeom prst="rect">
+            <a:avLst/>
+          </a:prstGeom>
+          <a:noFill/>
+          <a:ln/>
+        </p:spPr>
+        <p:txBody>
+          <a:bodyPr wrap="square" lIns="0" tIns="0" rIns="0" bIns="0" rtlCol="0" anchor="ctr"/>
+          <a:lstStyle/>
+          <a:p>
+            <a:pPr algn="ctr" indent="0" marL="0">
+              <a:buNone/>
+            </a:pPr>
+            <a:r>
+              <a:rPr lang="en-US" sz="3600" b="1" dirty="0">
+                <a:solidFill>
+                  <a:srgbClr val="990011"/>
+                </a:solidFill>
+                <a:latin typeface="Times New Roman" pitchFamily="34" charset="0"/>
+                <a:ea typeface="Times New Roman" pitchFamily="34" charset="-122"/>
+                <a:cs typeface="Times New Roman" pitchFamily="34" charset="-120"/>
+              </a:rPr>
+              <a:t>Activity 2</a:t>
+            </a:r>
+            <a:endParaRPr lang="en-US" sz="3600" dirty="0"/>
           </a:p>
         </p:txBody>
       </p:sp>
       <p:pic>
         <p:nvPicPr>
-          <p:cNvPr id="3" name="Image 0" descr="/home/claude/f4/img/minesec_sheet.png">    </p:cNvPr>
+          <p:cNvPr id="4" name="Image 0" descr="/home/claude/f4/img/v2/pop2_dep_uk.png">    </p:cNvPr>
           <p:cNvPicPr>
             <a:picLocks noChangeAspect="1"/>
           </p:cNvPicPr>
@@ -9941,8 +10381,8 @@
         </p:blipFill>
         <p:spPr>
           <a:xfrm>
-            <a:off x="0" y="658368"/>
-            <a:ext cx="5120640" cy="5833872"/>
+            <a:off x="629930" y="1783080"/>
+            <a:ext cx="10931835" cy="4270248"/>
           </a:xfrm>
           <a:prstGeom prst="rect">
             <a:avLst/>
@@ -9951,14 +10391,14 @@
       </p:pic>
       <p:sp>
         <p:nvSpPr>
-          <p:cNvPr id="4" name="Text 1"/>
+          <p:cNvPr id="5" name="Text 2"/>
           <p:cNvSpPr/>
           <p:nvPr/>
         </p:nvSpPr>
         <p:spPr>
           <a:xfrm>
-            <a:off x="5349240" y="1005840"/>
-            <a:ext cx="6522415" cy="731520"/>
+            <a:off x="457200" y="6089904"/>
+            <a:ext cx="11277295" cy="347472"/>
           </a:xfrm>
           <a:prstGeom prst="rect">
             <a:avLst/>
@@ -9967,68 +10407,24 @@
           <a:ln/>
         </p:spPr>
         <p:txBody>
-          <a:bodyPr wrap="square" lIns="0" tIns="0" rIns="0" bIns="0" rtlCol="0" anchor="ctr">
-            <a:normAutofit/>
-          </a:bodyPr>
+          <a:bodyPr wrap="square" lIns="0" tIns="0" rIns="0" bIns="0" rtlCol="0" anchor="ctr"/>
           <a:lstStyle/>
           <a:p>
             <a:pPr algn="ctr" indent="0" marL="0">
               <a:buNone/>
             </a:pPr>
             <a:r>
-              <a:rPr lang="en-US" sz="3600" b="1" dirty="0">
-                <a:solidFill>
-                  <a:srgbClr val="990011"/>
+              <a:rPr lang="en-US" sz="1800" i="1" dirty="0">
+                <a:solidFill>
+                  <a:srgbClr val="555555"/>
                 </a:solidFill>
                 <a:latin typeface="Times New Roman" pitchFamily="34" charset="0"/>
                 <a:ea typeface="Times New Roman" pitchFamily="34" charset="-122"/>
                 <a:cs typeface="Times New Roman" pitchFamily="34" charset="-120"/>
               </a:rPr>
-              <a:t>Activity 2: Answer</a:t>
-            </a:r>
-            <a:endParaRPr lang="en-US" sz="3600" dirty="0"/>
-          </a:p>
-        </p:txBody>
-      </p:sp>
-      <p:sp>
-        <p:nvSpPr>
-          <p:cNvPr id="5" name="Text 2"/>
-          <p:cNvSpPr/>
-          <p:nvPr/>
-        </p:nvSpPr>
-        <p:spPr>
-          <a:xfrm>
-            <a:off x="5349240" y="1783080"/>
-            <a:ext cx="6522415" cy="4663440"/>
-          </a:xfrm>
-          <a:prstGeom prst="rect">
-            <a:avLst/>
-          </a:prstGeom>
-          <a:noFill/>
-          <a:ln/>
-        </p:spPr>
-        <p:txBody>
-          <a:bodyPr wrap="square" lIns="0" tIns="0" rIns="0" bIns="0" rtlCol="0" anchor="t"/>
-          <a:lstStyle/>
-          <a:p>
-            <a:pPr algn="l" indent="0" marL="0">
-              <a:spcAft>
-                <a:spcPts val="800"/>
-              </a:spcAft>
-              <a:buNone/>
-            </a:pPr>
-            <a:r>
-              <a:rPr lang="en-US" sz="4000" dirty="0">
-                <a:solidFill>
-                  <a:srgbClr val="111111"/>
-                </a:solidFill>
-                <a:latin typeface="Times New Roman" pitchFamily="34" charset="0"/>
-                <a:ea typeface="Times New Roman" pitchFamily="34" charset="-122"/>
-                <a:cs typeface="Times New Roman" pitchFamily="34" charset="-120"/>
-              </a:rPr>
-              <a:t>Males on the left, females on the right, youngest at the bottom.</a:t>
-            </a:r>
-            <a:endParaRPr lang="en-US" sz="4000" dirty="0"/>
+              <a:t>A worked example: UK, 1971.</a:t>
+            </a:r>
+            <a:endParaRPr lang="en-US" sz="1800" dirty="0"/>
           </a:p>
         </p:txBody>
       </p:sp>
@@ -10138,54 +10534,15 @@
                 <a:ea typeface="Calibri" pitchFamily="34" charset="-122"/>
                 <a:cs typeface="Calibri" pitchFamily="34" charset="-120"/>
               </a:rPr>
-              <a:t>3. DEPENDENCY RATIO</a:t>
+              <a:t>2. CALCULATION</a:t>
             </a:r>
             <a:endParaRPr lang="en-US" sz="1400" dirty="0"/>
-          </a:p>
-        </p:txBody>
-      </p:sp>
-      <p:sp>
-        <p:nvSpPr>
-          <p:cNvPr id="3" name="Text 1"/>
-          <p:cNvSpPr/>
-          <p:nvPr/>
-        </p:nvSpPr>
-        <p:spPr>
-          <a:xfrm>
-            <a:off x="457200" y="1005840"/>
-            <a:ext cx="11277295" cy="731520"/>
-          </a:xfrm>
-          <a:prstGeom prst="rect">
-            <a:avLst/>
-          </a:prstGeom>
-          <a:noFill/>
-          <a:ln/>
-        </p:spPr>
-        <p:txBody>
-          <a:bodyPr wrap="square" lIns="0" tIns="0" rIns="0" bIns="0" rtlCol="0" anchor="ctr"/>
-          <a:lstStyle/>
-          <a:p>
-            <a:pPr algn="ctr" indent="0" marL="0">
-              <a:buNone/>
-            </a:pPr>
-            <a:r>
-              <a:rPr lang="en-US" sz="3600" b="1" dirty="0">
-                <a:solidFill>
-                  <a:srgbClr val="990011"/>
-                </a:solidFill>
-                <a:latin typeface="Times New Roman" pitchFamily="34" charset="0"/>
-                <a:ea typeface="Times New Roman" pitchFamily="34" charset="-122"/>
-                <a:cs typeface="Times New Roman" pitchFamily="34" charset="-120"/>
-              </a:rPr>
-              <a:t>Activity 3</a:t>
-            </a:r>
-            <a:endParaRPr lang="en-US" sz="3600" dirty="0"/>
           </a:p>
         </p:txBody>
       </p:sp>
       <p:pic>
         <p:nvPicPr>
-          <p:cNvPr id="4" name="Image 0" descr="/home/claude/f4/img/v2/dependency_big.png">    </p:cNvPr>
+          <p:cNvPr id="3" name="Image 0" descr="/home/claude/f4/img/minesec_sheet.png">    </p:cNvPr>
           <p:cNvPicPr>
             <a:picLocks noChangeAspect="1"/>
           </p:cNvPicPr>
@@ -10199,8 +10556,8 @@
         </p:blipFill>
         <p:spPr>
           <a:xfrm>
-            <a:off x="629930" y="1783080"/>
-            <a:ext cx="10931835" cy="4270248"/>
+            <a:off x="0" y="658368"/>
+            <a:ext cx="5120640" cy="5833872"/>
           </a:xfrm>
           <a:prstGeom prst="rect">
             <a:avLst/>
@@ -10209,14 +10566,14 @@
       </p:pic>
       <p:sp>
         <p:nvSpPr>
-          <p:cNvPr id="5" name="Text 2"/>
+          <p:cNvPr id="4" name="Text 1"/>
           <p:cNvSpPr/>
           <p:nvPr/>
         </p:nvSpPr>
         <p:spPr>
           <a:xfrm>
-            <a:off x="457200" y="6089904"/>
-            <a:ext cx="11277295" cy="347472"/>
+            <a:off x="5349240" y="1005840"/>
+            <a:ext cx="6522415" cy="731520"/>
           </a:xfrm>
           <a:prstGeom prst="rect">
             <a:avLst/>
@@ -10225,24 +10582,68 @@
           <a:ln/>
         </p:spPr>
         <p:txBody>
-          <a:bodyPr wrap="square" lIns="0" tIns="0" rIns="0" bIns="0" rtlCol="0" anchor="ctr"/>
+          <a:bodyPr wrap="square" lIns="0" tIns="0" rIns="0" bIns="0" rtlCol="0" anchor="ctr">
+            <a:normAutofit/>
+          </a:bodyPr>
           <a:lstStyle/>
           <a:p>
             <a:pPr algn="ctr" indent="0" marL="0">
               <a:buNone/>
             </a:pPr>
             <a:r>
-              <a:rPr lang="en-US" sz="1800" i="1" dirty="0">
-                <a:solidFill>
-                  <a:srgbClr val="555555"/>
+              <a:rPr lang="en-US" sz="3600" b="1" dirty="0">
+                <a:solidFill>
+                  <a:srgbClr val="990011"/>
                 </a:solidFill>
                 <a:latin typeface="Times New Roman" pitchFamily="34" charset="0"/>
                 <a:ea typeface="Times New Roman" pitchFamily="34" charset="-122"/>
                 <a:cs typeface="Times New Roman" pitchFamily="34" charset="-120"/>
               </a:rPr>
-              <a:t>The dependency ratio formula.</a:t>
-            </a:r>
-            <a:endParaRPr lang="en-US" sz="1800" dirty="0"/>
+              <a:t>Activity 2: Question</a:t>
+            </a:r>
+            <a:endParaRPr lang="en-US" sz="3600" dirty="0"/>
+          </a:p>
+        </p:txBody>
+      </p:sp>
+      <p:sp>
+        <p:nvSpPr>
+          <p:cNvPr id="5" name="Text 2"/>
+          <p:cNvSpPr/>
+          <p:nvPr/>
+        </p:nvSpPr>
+        <p:spPr>
+          <a:xfrm>
+            <a:off x="5349240" y="1783080"/>
+            <a:ext cx="6522415" cy="4663440"/>
+          </a:xfrm>
+          <a:prstGeom prst="rect">
+            <a:avLst/>
+          </a:prstGeom>
+          <a:noFill/>
+          <a:ln/>
+        </p:spPr>
+        <p:txBody>
+          <a:bodyPr wrap="square" lIns="0" tIns="0" rIns="0" bIns="0" rtlCol="0" anchor="t"/>
+          <a:lstStyle/>
+          <a:p>
+            <a:pPr algn="l" indent="0" marL="0">
+              <a:spcAft>
+                <a:spcPts val="800"/>
+              </a:spcAft>
+              <a:buNone/>
+            </a:pPr>
+            <a:r>
+              <a:rPr lang="en-US" sz="4000" dirty="0">
+                <a:solidFill>
+                  <a:srgbClr val="111111"/>
+                </a:solidFill>
+                <a:latin typeface="Times New Roman" pitchFamily="34" charset="0"/>
+                <a:ea typeface="Times New Roman" pitchFamily="34" charset="-122"/>
+                <a:cs typeface="Times New Roman" pitchFamily="34" charset="-120"/>
+              </a:rPr>
+              <a:t>What is the dependency ratio of the UK in 1971?</a:t>
+            </a:r>
+            <a:endParaRPr lang="en-US" sz="4000" dirty="0"/>
           </a:p>
         </p:txBody>
       </p:sp>
@@ -10352,7 +10753,7 @@
                 <a:ea typeface="Calibri" pitchFamily="34" charset="-122"/>
                 <a:cs typeface="Calibri" pitchFamily="34" charset="-120"/>
               </a:rPr>
-              <a:t>3. DEPENDENCY RATIO</a:t>
+              <a:t>2. CALCULATION</a:t>
             </a:r>
             <a:endParaRPr lang="en-US" sz="1400" dirty="0"/>
           </a:p>
@@ -10417,7 +10818,7 @@
                 <a:ea typeface="Times New Roman" pitchFamily="34" charset="-122"/>
                 <a:cs typeface="Times New Roman" pitchFamily="34" charset="-120"/>
               </a:rPr>
-              <a:t>Activity 3: Question</a:t>
+              <a:t>Activity 2: Answer</a:t>
             </a:r>
             <a:endParaRPr lang="en-US" sz="3600" dirty="0"/>
           </a:p>
@@ -10459,7 +10860,7 @@
                 <a:ea typeface="Times New Roman" pitchFamily="34" charset="-122"/>
                 <a:cs typeface="Times New Roman" pitchFamily="34" charset="-120"/>
               </a:rPr>
-              <a:t>Using the town data, calculate the dependency ratio.</a:t>
+              <a:t>65.45 %.</a:t>
             </a:r>
             <a:endParaRPr lang="en-US" sz="4000" dirty="0"/>
           </a:p>
@@ -10571,15 +10972,54 @@
                 <a:ea typeface="Calibri" pitchFamily="34" charset="-122"/>
                 <a:cs typeface="Calibri" pitchFamily="34" charset="-120"/>
               </a:rPr>
-              <a:t>3. DEPENDENCY RATIO</a:t>
+              <a:t>2. CALCULATION</a:t>
             </a:r>
             <a:endParaRPr lang="en-US" sz="1400" dirty="0"/>
+          </a:p>
+        </p:txBody>
+      </p:sp>
+      <p:sp>
+        <p:nvSpPr>
+          <p:cNvPr id="3" name="Text 1"/>
+          <p:cNvSpPr/>
+          <p:nvPr/>
+        </p:nvSpPr>
+        <p:spPr>
+          <a:xfrm>
+            <a:off x="457200" y="1005840"/>
+            <a:ext cx="11277295" cy="731520"/>
+          </a:xfrm>
+          <a:prstGeom prst="rect">
+            <a:avLst/>
+          </a:prstGeom>
+          <a:noFill/>
+          <a:ln/>
+        </p:spPr>
+        <p:txBody>
+          <a:bodyPr wrap="square" lIns="0" tIns="0" rIns="0" bIns="0" rtlCol="0" anchor="ctr"/>
+          <a:lstStyle/>
+          <a:p>
+            <a:pPr algn="ctr" indent="0" marL="0">
+              <a:buNone/>
+            </a:pPr>
+            <a:r>
+              <a:rPr lang="en-US" sz="3600" b="1" dirty="0">
+                <a:solidFill>
+                  <a:srgbClr val="990011"/>
+                </a:solidFill>
+                <a:latin typeface="Times New Roman" pitchFamily="34" charset="0"/>
+                <a:ea typeface="Times New Roman" pitchFamily="34" charset="-122"/>
+                <a:cs typeface="Times New Roman" pitchFamily="34" charset="-120"/>
+              </a:rPr>
+              <a:t>Activity 3</a:t>
+            </a:r>
+            <a:endParaRPr lang="en-US" sz="3600" dirty="0"/>
           </a:p>
         </p:txBody>
       </p:sp>
       <p:pic>
         <p:nvPicPr>
-          <p:cNvPr id="3" name="Image 0" descr="/home/claude/f4/img/minesec_sheet.png">    </p:cNvPr>
+          <p:cNvPr id="4" name="Image 0" descr="/home/claude/f4/img/v2/usa_children.jpg">    </p:cNvPr>
           <p:cNvPicPr>
             <a:picLocks noChangeAspect="1"/>
           </p:cNvPicPr>
@@ -10593,8 +11033,8 @@
         </p:blipFill>
         <p:spPr>
           <a:xfrm>
-            <a:off x="0" y="658368"/>
-            <a:ext cx="5120640" cy="5833872"/>
+            <a:off x="2246610" y="1783080"/>
+            <a:ext cx="7698475" cy="4270248"/>
           </a:xfrm>
           <a:prstGeom prst="rect">
             <a:avLst/>
@@ -10603,14 +11043,14 @@
       </p:pic>
       <p:sp>
         <p:nvSpPr>
-          <p:cNvPr id="4" name="Text 1"/>
+          <p:cNvPr id="5" name="Text 2"/>
           <p:cNvSpPr/>
           <p:nvPr/>
         </p:nvSpPr>
         <p:spPr>
           <a:xfrm>
-            <a:off x="5349240" y="1005840"/>
-            <a:ext cx="6522415" cy="731520"/>
+            <a:off x="457200" y="6089904"/>
+            <a:ext cx="11277295" cy="347472"/>
           </a:xfrm>
           <a:prstGeom prst="rect">
             <a:avLst/>
@@ -10619,68 +11059,24 @@
           <a:ln/>
         </p:spPr>
         <p:txBody>
-          <a:bodyPr wrap="square" lIns="0" tIns="0" rIns="0" bIns="0" rtlCol="0" anchor="ctr">
-            <a:normAutofit/>
-          </a:bodyPr>
+          <a:bodyPr wrap="square" lIns="0" tIns="0" rIns="0" bIns="0" rtlCol="0" anchor="ctr"/>
           <a:lstStyle/>
           <a:p>
             <a:pPr algn="ctr" indent="0" marL="0">
               <a:buNone/>
             </a:pPr>
             <a:r>
-              <a:rPr lang="en-US" sz="3600" b="1" dirty="0">
-                <a:solidFill>
-                  <a:srgbClr val="990011"/>
+              <a:rPr lang="en-US" sz="1800" i="1" dirty="0">
+                <a:solidFill>
+                  <a:srgbClr val="555555"/>
                 </a:solidFill>
                 <a:latin typeface="Times New Roman" pitchFamily="34" charset="0"/>
                 <a:ea typeface="Times New Roman" pitchFamily="34" charset="-122"/>
                 <a:cs typeface="Times New Roman" pitchFamily="34" charset="-120"/>
               </a:rPr>
-              <a:t>Activity 3: Answer</a:t>
-            </a:r>
-            <a:endParaRPr lang="en-US" sz="3600" dirty="0"/>
-          </a:p>
-        </p:txBody>
-      </p:sp>
-      <p:sp>
-        <p:nvSpPr>
-          <p:cNvPr id="5" name="Text 2"/>
-          <p:cNvSpPr/>
-          <p:nvPr/>
-        </p:nvSpPr>
-        <p:spPr>
-          <a:xfrm>
-            <a:off x="5349240" y="1783080"/>
-            <a:ext cx="6522415" cy="4663440"/>
-          </a:xfrm>
-          <a:prstGeom prst="rect">
-            <a:avLst/>
-          </a:prstGeom>
-          <a:noFill/>
-          <a:ln/>
-        </p:spPr>
-        <p:txBody>
-          <a:bodyPr wrap="square" lIns="0" tIns="0" rIns="0" bIns="0" rtlCol="0" anchor="t"/>
-          <a:lstStyle/>
-          <a:p>
-            <a:pPr algn="l" indent="0" marL="0">
-              <a:spcAft>
-                <a:spcPts val="800"/>
-              </a:spcAft>
-              <a:buNone/>
-            </a:pPr>
-            <a:r>
-              <a:rPr lang="en-US" sz="4000" dirty="0">
-                <a:solidFill>
-                  <a:srgbClr val="111111"/>
-                </a:solidFill>
-                <a:latin typeface="Times New Roman" pitchFamily="34" charset="0"/>
-                <a:ea typeface="Times New Roman" pitchFamily="34" charset="-122"/>
-                <a:cs typeface="Times New Roman" pitchFamily="34" charset="-120"/>
-              </a:rPr>
-              <a:t>Dependants 4,420; workers 5,450; ratio ≈ 81.</a:t>
-            </a:r>
-            <a:endParaRPr lang="en-US" sz="4000" dirty="0"/>
+              <a:t>Children and adults.</a:t>
+            </a:r>
+            <a:endParaRPr lang="en-US" sz="1800" dirty="0"/>
           </a:p>
         </p:txBody>
       </p:sp>
@@ -10790,54 +11186,15 @@
                 <a:ea typeface="Calibri" pitchFamily="34" charset="-122"/>
                 <a:cs typeface="Calibri" pitchFamily="34" charset="-120"/>
               </a:rPr>
-              <a:t>4. INTERPRETATION</a:t>
+              <a:t>2. CALCULATION</a:t>
             </a:r>
             <a:endParaRPr lang="en-US" sz="1400" dirty="0"/>
-          </a:p>
-        </p:txBody>
-      </p:sp>
-      <p:sp>
-        <p:nvSpPr>
-          <p:cNvPr id="3" name="Text 1"/>
-          <p:cNvSpPr/>
-          <p:nvPr/>
-        </p:nvSpPr>
-        <p:spPr>
-          <a:xfrm>
-            <a:off x="457200" y="1005840"/>
-            <a:ext cx="11277295" cy="731520"/>
-          </a:xfrm>
-          <a:prstGeom prst="rect">
-            <a:avLst/>
-          </a:prstGeom>
-          <a:noFill/>
-          <a:ln/>
-        </p:spPr>
-        <p:txBody>
-          <a:bodyPr wrap="square" lIns="0" tIns="0" rIns="0" bIns="0" rtlCol="0" anchor="ctr"/>
-          <a:lstStyle/>
-          <a:p>
-            <a:pPr algn="ctr" indent="0" marL="0">
-              <a:buNone/>
-            </a:pPr>
-            <a:r>
-              <a:rPr lang="en-US" sz="3600" b="1" dirty="0">
-                <a:solidFill>
-                  <a:srgbClr val="990011"/>
-                </a:solidFill>
-                <a:latin typeface="Times New Roman" pitchFamily="34" charset="0"/>
-                <a:ea typeface="Times New Roman" pitchFamily="34" charset="-122"/>
-                <a:cs typeface="Times New Roman" pitchFamily="34" charset="-120"/>
-              </a:rPr>
-              <a:t>Activity 4</a:t>
-            </a:r>
-            <a:endParaRPr lang="en-US" sz="3600" dirty="0"/>
           </a:p>
         </p:txBody>
       </p:sp>
       <p:pic>
         <p:nvPicPr>
-          <p:cNvPr id="4" name="Image 0" descr="/home/claude/f4/img/v2/pyramid_types_big.png">    </p:cNvPr>
+          <p:cNvPr id="3" name="Image 0" descr="/home/claude/f4/img/minesec_sheet.png">    </p:cNvPr>
           <p:cNvPicPr>
             <a:picLocks noChangeAspect="1"/>
           </p:cNvPicPr>
@@ -10851,8 +11208,8 @@
         </p:blipFill>
         <p:spPr>
           <a:xfrm>
-            <a:off x="629930" y="1783080"/>
-            <a:ext cx="10931835" cy="4270248"/>
+            <a:off x="0" y="658368"/>
+            <a:ext cx="5120640" cy="5833872"/>
           </a:xfrm>
           <a:prstGeom prst="rect">
             <a:avLst/>
@@ -10861,14 +11218,14 @@
       </p:pic>
       <p:sp>
         <p:nvSpPr>
-          <p:cNvPr id="5" name="Text 2"/>
+          <p:cNvPr id="4" name="Text 1"/>
           <p:cNvSpPr/>
           <p:nvPr/>
         </p:nvSpPr>
         <p:spPr>
           <a:xfrm>
-            <a:off x="457200" y="6089904"/>
-            <a:ext cx="11277295" cy="347472"/>
+            <a:off x="5349240" y="1005840"/>
+            <a:ext cx="6522415" cy="731520"/>
           </a:xfrm>
           <a:prstGeom prst="rect">
             <a:avLst/>
@@ -10877,24 +11234,68 @@
           <a:ln/>
         </p:spPr>
         <p:txBody>
-          <a:bodyPr wrap="square" lIns="0" tIns="0" rIns="0" bIns="0" rtlCol="0" anchor="ctr"/>
+          <a:bodyPr wrap="square" lIns="0" tIns="0" rIns="0" bIns="0" rtlCol="0" anchor="ctr">
+            <a:normAutofit/>
+          </a:bodyPr>
           <a:lstStyle/>
           <a:p>
             <a:pPr algn="ctr" indent="0" marL="0">
               <a:buNone/>
             </a:pPr>
             <a:r>
-              <a:rPr lang="en-US" sz="1800" i="1" dirty="0">
-                <a:solidFill>
-                  <a:srgbClr val="555555"/>
+              <a:rPr lang="en-US" sz="3600" b="1" dirty="0">
+                <a:solidFill>
+                  <a:srgbClr val="990011"/>
                 </a:solidFill>
                 <a:latin typeface="Times New Roman" pitchFamily="34" charset="0"/>
                 <a:ea typeface="Times New Roman" pitchFamily="34" charset="-122"/>
                 <a:cs typeface="Times New Roman" pitchFamily="34" charset="-120"/>
               </a:rPr>
-              <a:t>The three types of pyramid.</a:t>
-            </a:r>
-            <a:endParaRPr lang="en-US" sz="1800" dirty="0"/>
+              <a:t>Activity 3: Question</a:t>
+            </a:r>
+            <a:endParaRPr lang="en-US" sz="3600" dirty="0"/>
+          </a:p>
+        </p:txBody>
+      </p:sp>
+      <p:sp>
+        <p:nvSpPr>
+          <p:cNvPr id="5" name="Text 2"/>
+          <p:cNvSpPr/>
+          <p:nvPr/>
+        </p:nvSpPr>
+        <p:spPr>
+          <a:xfrm>
+            <a:off x="5349240" y="1783080"/>
+            <a:ext cx="6522415" cy="4663440"/>
+          </a:xfrm>
+          <a:prstGeom prst="rect">
+            <a:avLst/>
+          </a:prstGeom>
+          <a:noFill/>
+          <a:ln/>
+        </p:spPr>
+        <p:txBody>
+          <a:bodyPr wrap="square" lIns="0" tIns="0" rIns="0" bIns="0" rtlCol="0" anchor="t"/>
+          <a:lstStyle/>
+          <a:p>
+            <a:pPr algn="l" indent="0" marL="0">
+              <a:spcAft>
+                <a:spcPts val="800"/>
+              </a:spcAft>
+              <a:buNone/>
+            </a:pPr>
+            <a:r>
+              <a:rPr lang="en-US" sz="4000" dirty="0">
+                <a:solidFill>
+                  <a:srgbClr val="111111"/>
+                </a:solidFill>
+                <a:latin typeface="Times New Roman" pitchFamily="34" charset="0"/>
+                <a:ea typeface="Times New Roman" pitchFamily="34" charset="-122"/>
+                <a:cs typeface="Times New Roman" pitchFamily="34" charset="-120"/>
+              </a:rPr>
+              <a:t>Calculate the ratio: 2,000 children, 800 elderly and 3,000 adults.</a:t>
+            </a:r>
+            <a:endParaRPr lang="en-US" sz="4000" dirty="0"/>
           </a:p>
         </p:txBody>
       </p:sp>
@@ -11004,7 +11405,7 @@
                 <a:ea typeface="Calibri" pitchFamily="34" charset="-122"/>
                 <a:cs typeface="Calibri" pitchFamily="34" charset="-120"/>
               </a:rPr>
-              <a:t>4. INTERPRETATION</a:t>
+              <a:t>2. CALCULATION</a:t>
             </a:r>
             <a:endParaRPr lang="en-US" sz="1400" dirty="0"/>
           </a:p>
@@ -11069,7 +11470,7 @@
                 <a:ea typeface="Times New Roman" pitchFamily="34" charset="-122"/>
                 <a:cs typeface="Times New Roman" pitchFamily="34" charset="-120"/>
               </a:rPr>
-              <a:t>Activity 4: Question</a:t>
+              <a:t>Activity 3: Answer</a:t>
             </a:r>
             <a:endParaRPr lang="en-US" sz="3600" dirty="0"/>
           </a:p>
@@ -11111,7 +11512,7 @@
                 <a:ea typeface="Times New Roman" pitchFamily="34" charset="-122"/>
                 <a:cs typeface="Times New Roman" pitchFamily="34" charset="-120"/>
               </a:rPr>
-              <a:t>What type of pyramid does the town have?</a:t>
+              <a:t>(2,000 + 800) ÷ 3,000 × 100 ≈ 93.3 %.</a:t>
             </a:r>
             <a:endParaRPr lang="en-US" sz="4000" dirty="0"/>
           </a:p>
@@ -11223,15 +11624,54 @@
                 <a:ea typeface="Calibri" pitchFamily="34" charset="-122"/>
                 <a:cs typeface="Calibri" pitchFamily="34" charset="-120"/>
               </a:rPr>
-              <a:t>4. INTERPRETATION</a:t>
+              <a:t>3. INTERPRETATION</a:t>
             </a:r>
             <a:endParaRPr lang="en-US" sz="1400" dirty="0"/>
+          </a:p>
+        </p:txBody>
+      </p:sp>
+      <p:sp>
+        <p:nvSpPr>
+          <p:cNvPr id="3" name="Text 1"/>
+          <p:cNvSpPr/>
+          <p:nvPr/>
+        </p:nvSpPr>
+        <p:spPr>
+          <a:xfrm>
+            <a:off x="457200" y="1005840"/>
+            <a:ext cx="11277295" cy="731520"/>
+          </a:xfrm>
+          <a:prstGeom prst="rect">
+            <a:avLst/>
+          </a:prstGeom>
+          <a:noFill/>
+          <a:ln/>
+        </p:spPr>
+        <p:txBody>
+          <a:bodyPr wrap="square" lIns="0" tIns="0" rIns="0" bIns="0" rtlCol="0" anchor="ctr"/>
+          <a:lstStyle/>
+          <a:p>
+            <a:pPr algn="ctr" indent="0" marL="0">
+              <a:buNone/>
+            </a:pPr>
+            <a:r>
+              <a:rPr lang="en-US" sz="3600" b="1" dirty="0">
+                <a:solidFill>
+                  <a:srgbClr val="990011"/>
+                </a:solidFill>
+                <a:latin typeface="Times New Roman" pitchFamily="34" charset="0"/>
+                <a:ea typeface="Times New Roman" pitchFamily="34" charset="-122"/>
+                <a:cs typeface="Times New Roman" pitchFamily="34" charset="-120"/>
+              </a:rPr>
+              <a:t>Activity 4</a:t>
+            </a:r>
+            <a:endParaRPr lang="en-US" sz="3600" dirty="0"/>
           </a:p>
         </p:txBody>
       </p:sp>
       <p:pic>
         <p:nvPicPr>
-          <p:cNvPr id="3" name="Image 0" descr="/home/claude/f4/img/minesec_sheet.png">    </p:cNvPr>
+          <p:cNvPr id="4" name="Image 0" descr="/home/claude/f4/img/v2/youth_ageing_big.png">    </p:cNvPr>
           <p:cNvPicPr>
             <a:picLocks noChangeAspect="1"/>
           </p:cNvPicPr>
@@ -11245,8 +11685,8 @@
         </p:blipFill>
         <p:spPr>
           <a:xfrm>
-            <a:off x="0" y="658368"/>
-            <a:ext cx="5120640" cy="5833872"/>
+            <a:off x="1215564" y="1783080"/>
+            <a:ext cx="9760567" cy="4270248"/>
           </a:xfrm>
           <a:prstGeom prst="rect">
             <a:avLst/>
@@ -11255,14 +11695,14 @@
       </p:pic>
       <p:sp>
         <p:nvSpPr>
-          <p:cNvPr id="4" name="Text 1"/>
+          <p:cNvPr id="5" name="Text 2"/>
           <p:cNvSpPr/>
           <p:nvPr/>
         </p:nvSpPr>
         <p:spPr>
           <a:xfrm>
-            <a:off x="5349240" y="1005840"/>
-            <a:ext cx="6522415" cy="731520"/>
+            <a:off x="457200" y="6089904"/>
+            <a:ext cx="11277295" cy="347472"/>
           </a:xfrm>
           <a:prstGeom prst="rect">
             <a:avLst/>
@@ -11271,68 +11711,24 @@
           <a:ln/>
         </p:spPr>
         <p:txBody>
-          <a:bodyPr wrap="square" lIns="0" tIns="0" rIns="0" bIns="0" rtlCol="0" anchor="ctr">
-            <a:normAutofit/>
-          </a:bodyPr>
+          <a:bodyPr wrap="square" lIns="0" tIns="0" rIns="0" bIns="0" rtlCol="0" anchor="ctr"/>
           <a:lstStyle/>
           <a:p>
             <a:pPr algn="ctr" indent="0" marL="0">
               <a:buNone/>
             </a:pPr>
             <a:r>
-              <a:rPr lang="en-US" sz="3600" b="1" dirty="0">
-                <a:solidFill>
-                  <a:srgbClr val="990011"/>
+              <a:rPr lang="en-US" sz="1800" i="1" dirty="0">
+                <a:solidFill>
+                  <a:srgbClr val="555555"/>
                 </a:solidFill>
                 <a:latin typeface="Times New Roman" pitchFamily="34" charset="0"/>
                 <a:ea typeface="Times New Roman" pitchFamily="34" charset="-122"/>
                 <a:cs typeface="Times New Roman" pitchFamily="34" charset="-120"/>
               </a:rPr>
-              <a:t>Activity 4: Answer</a:t>
-            </a:r>
-            <a:endParaRPr lang="en-US" sz="3600" dirty="0"/>
-          </a:p>
-        </p:txBody>
-      </p:sp>
-      <p:sp>
-        <p:nvSpPr>
-          <p:cNvPr id="5" name="Text 2"/>
-          <p:cNvSpPr/>
-          <p:nvPr/>
-        </p:nvSpPr>
-        <p:spPr>
-          <a:xfrm>
-            <a:off x="5349240" y="1783080"/>
-            <a:ext cx="6522415" cy="4663440"/>
-          </a:xfrm>
-          <a:prstGeom prst="rect">
-            <a:avLst/>
-          </a:prstGeom>
-          <a:noFill/>
-          <a:ln/>
-        </p:spPr>
-        <p:txBody>
-          <a:bodyPr wrap="square" lIns="0" tIns="0" rIns="0" bIns="0" rtlCol="0" anchor="t"/>
-          <a:lstStyle/>
-          <a:p>
-            <a:pPr algn="l" indent="0" marL="0">
-              <a:spcAft>
-                <a:spcPts val="800"/>
-              </a:spcAft>
-              <a:buNone/>
-            </a:pPr>
-            <a:r>
-              <a:rPr lang="en-US" sz="4000" dirty="0">
-                <a:solidFill>
-                  <a:srgbClr val="111111"/>
-                </a:solidFill>
-                <a:latin typeface="Times New Roman" pitchFamily="34" charset="0"/>
-                <a:ea typeface="Times New Roman" pitchFamily="34" charset="-122"/>
-                <a:cs typeface="Times New Roman" pitchFamily="34" charset="-120"/>
-              </a:rPr>
-              <a:t>Expansive: a wide base and narrow top.</a:t>
-            </a:r>
-            <a:endParaRPr lang="en-US" sz="4000" dirty="0"/>
+              <a:t>Young and old people in some countries.</a:t>
+            </a:r>
+            <a:endParaRPr lang="en-US" sz="1800" dirty="0"/>
           </a:p>
         </p:txBody>
       </p:sp>
@@ -12013,7 +12409,7 @@
                           <a:ea typeface="Calibri" pitchFamily="34" charset="-122"/>
                           <a:cs typeface="Calibri" pitchFamily="34" charset="-120"/>
                         </a:rPr>
-                        <a:t>Dependency ratio, youth dependency, old-age dependency, pyramid construction.</a:t>
+                        <a:t>Dependency ratio, young dependants, elderly dependants, working-age population, interpretation.</a:t>
                       </a:r>
                       <a:endParaRPr lang="en-US" sz="1700" dirty="0">
                         <a:latin typeface="Calibri" charset="0"/>
@@ -12151,7 +12547,7 @@
                           <a:ea typeface="Calibri" pitchFamily="34" charset="-122"/>
                           <a:cs typeface="Calibri" pitchFamily="34" charset="-120"/>
                         </a:rPr>
-                        <a:t>Define and calculate dependency ratio; construct and interpret population pyramids.</a:t>
+                        <a:t>Definition and calculation of the dependency ratio; worked examples; interpretation of the results.</a:t>
                       </a:r>
                       <a:endParaRPr lang="en-US" sz="1700" dirty="0">
                         <a:latin typeface="Calibri" charset="0"/>
@@ -12289,7 +12685,7 @@
                           <a:ea typeface="Calibri" pitchFamily="34" charset="-122"/>
                           <a:cs typeface="Calibri" pitchFamily="34" charset="-120"/>
                         </a:rPr>
-                        <a:t>Learners are able to construct a population pyramid from data and calculate dependency ratios.</a:t>
+                        <a:t>Learners are able to calculate and interpret the dependency ratio from population data.</a:t>
                       </a:r>
                       <a:endParaRPr lang="en-US" sz="1700" dirty="0">
                         <a:latin typeface="Calibri" charset="0"/>
@@ -12451,54 +12847,15 @@
                 <a:ea typeface="Calibri" pitchFamily="34" charset="-122"/>
                 <a:cs typeface="Calibri" pitchFamily="34" charset="-120"/>
               </a:rPr>
-              <a:t>4. INTERPRETATION</a:t>
+              <a:t>3. INTERPRETATION</a:t>
             </a:r>
             <a:endParaRPr lang="en-US" sz="1400" dirty="0"/>
-          </a:p>
-        </p:txBody>
-      </p:sp>
-      <p:sp>
-        <p:nvSpPr>
-          <p:cNvPr id="3" name="Text 1"/>
-          <p:cNvSpPr/>
-          <p:nvPr/>
-        </p:nvSpPr>
-        <p:spPr>
-          <a:xfrm>
-            <a:off x="457200" y="1005840"/>
-            <a:ext cx="11277295" cy="731520"/>
-          </a:xfrm>
-          <a:prstGeom prst="rect">
-            <a:avLst/>
-          </a:prstGeom>
-          <a:noFill/>
-          <a:ln/>
-        </p:spPr>
-        <p:txBody>
-          <a:bodyPr wrap="square" lIns="0" tIns="0" rIns="0" bIns="0" rtlCol="0" anchor="ctr"/>
-          <a:lstStyle/>
-          <a:p>
-            <a:pPr algn="ctr" indent="0" marL="0">
-              <a:buNone/>
-            </a:pPr>
-            <a:r>
-              <a:rPr lang="en-US" sz="3600" b="1" dirty="0">
-                <a:solidFill>
-                  <a:srgbClr val="990011"/>
-                </a:solidFill>
-                <a:latin typeface="Times New Roman" pitchFamily="34" charset="0"/>
-                <a:ea typeface="Times New Roman" pitchFamily="34" charset="-122"/>
-                <a:cs typeface="Times New Roman" pitchFamily="34" charset="-120"/>
-              </a:rPr>
-              <a:t>Activity 5</a:t>
-            </a:r>
-            <a:endParaRPr lang="en-US" sz="3600" dirty="0"/>
           </a:p>
         </p:txBody>
       </p:sp>
       <p:pic>
         <p:nvPicPr>
-          <p:cNvPr id="4" name="Image 0" descr="/home/claude/f4/img/v2/pyramid_japan_big.png">    </p:cNvPr>
+          <p:cNvPr id="3" name="Image 0" descr="/home/claude/f4/img/minesec_sheet.png">    </p:cNvPr>
           <p:cNvPicPr>
             <a:picLocks noChangeAspect="1"/>
           </p:cNvPicPr>
@@ -12512,8 +12869,8 @@
         </p:blipFill>
         <p:spPr>
           <a:xfrm>
-            <a:off x="1383850" y="1783080"/>
-            <a:ext cx="9423996" cy="4270248"/>
+            <a:off x="0" y="658368"/>
+            <a:ext cx="5120640" cy="5833872"/>
           </a:xfrm>
           <a:prstGeom prst="rect">
             <a:avLst/>
@@ -12522,14 +12879,14 @@
       </p:pic>
       <p:sp>
         <p:nvSpPr>
-          <p:cNvPr id="5" name="Text 2"/>
+          <p:cNvPr id="4" name="Text 1"/>
           <p:cNvSpPr/>
           <p:nvPr/>
         </p:nvSpPr>
         <p:spPr>
           <a:xfrm>
-            <a:off x="457200" y="6089904"/>
-            <a:ext cx="11277295" cy="347472"/>
+            <a:off x="5349240" y="1005840"/>
+            <a:ext cx="6522415" cy="731520"/>
           </a:xfrm>
           <a:prstGeom prst="rect">
             <a:avLst/>
@@ -12538,24 +12895,68 @@
           <a:ln/>
         </p:spPr>
         <p:txBody>
-          <a:bodyPr wrap="square" lIns="0" tIns="0" rIns="0" bIns="0" rtlCol="0" anchor="ctr"/>
+          <a:bodyPr wrap="square" lIns="0" tIns="0" rIns="0" bIns="0" rtlCol="0" anchor="ctr">
+            <a:normAutofit/>
+          </a:bodyPr>
           <a:lstStyle/>
           <a:p>
             <a:pPr algn="ctr" indent="0" marL="0">
               <a:buNone/>
             </a:pPr>
             <a:r>
-              <a:rPr lang="en-US" sz="1800" i="1" dirty="0">
-                <a:solidFill>
-                  <a:srgbClr val="555555"/>
+              <a:rPr lang="en-US" sz="3600" b="1" dirty="0">
+                <a:solidFill>
+                  <a:srgbClr val="990011"/>
                 </a:solidFill>
                 <a:latin typeface="Times New Roman" pitchFamily="34" charset="0"/>
                 <a:ea typeface="Times New Roman" pitchFamily="34" charset="-122"/>
                 <a:cs typeface="Times New Roman" pitchFamily="34" charset="-120"/>
               </a:rPr>
-              <a:t>A constrictive pyramid (Japan).</a:t>
-            </a:r>
-            <a:endParaRPr lang="en-US" sz="1800" dirty="0"/>
+              <a:t>Activity 4: Question</a:t>
+            </a:r>
+            <a:endParaRPr lang="en-US" sz="3600" dirty="0"/>
+          </a:p>
+        </p:txBody>
+      </p:sp>
+      <p:sp>
+        <p:nvSpPr>
+          <p:cNvPr id="5" name="Text 2"/>
+          <p:cNvSpPr/>
+          <p:nvPr/>
+        </p:nvSpPr>
+        <p:spPr>
+          <a:xfrm>
+            <a:off x="5349240" y="1783080"/>
+            <a:ext cx="6522415" cy="4663440"/>
+          </a:xfrm>
+          <a:prstGeom prst="rect">
+            <a:avLst/>
+          </a:prstGeom>
+          <a:noFill/>
+          <a:ln/>
+        </p:spPr>
+        <p:txBody>
+          <a:bodyPr wrap="square" lIns="0" tIns="0" rIns="0" bIns="0" rtlCol="0" anchor="t"/>
+          <a:lstStyle/>
+          <a:p>
+            <a:pPr algn="l" indent="0" marL="0">
+              <a:spcAft>
+                <a:spcPts val="800"/>
+              </a:spcAft>
+              <a:buNone/>
+            </a:pPr>
+            <a:r>
+              <a:rPr lang="en-US" sz="4000" dirty="0">
+                <a:solidFill>
+                  <a:srgbClr val="111111"/>
+                </a:solidFill>
+                <a:latin typeface="Times New Roman" pitchFamily="34" charset="0"/>
+                <a:ea typeface="Times New Roman" pitchFamily="34" charset="-122"/>
+                <a:cs typeface="Times New Roman" pitchFamily="34" charset="-120"/>
+              </a:rPr>
+              <a:t>Which kind of dependants dominates in Cameroon?</a:t>
+            </a:r>
+            <a:endParaRPr lang="en-US" sz="4000" dirty="0"/>
           </a:p>
         </p:txBody>
       </p:sp>
@@ -12665,7 +13066,7 @@
                 <a:ea typeface="Calibri" pitchFamily="34" charset="-122"/>
                 <a:cs typeface="Calibri" pitchFamily="34" charset="-120"/>
               </a:rPr>
-              <a:t>4. INTERPRETATION</a:t>
+              <a:t>3. INTERPRETATION</a:t>
             </a:r>
             <a:endParaRPr lang="en-US" sz="1400" dirty="0"/>
           </a:p>
@@ -12730,7 +13131,7 @@
                 <a:ea typeface="Times New Roman" pitchFamily="34" charset="-122"/>
                 <a:cs typeface="Times New Roman" pitchFamily="34" charset="-120"/>
               </a:rPr>
-              <a:t>Activity 5: Question</a:t>
+              <a:t>Activity 4: Answer</a:t>
             </a:r>
             <a:endParaRPr lang="en-US" sz="3600" dirty="0"/>
           </a:p>
@@ -12772,7 +13173,7 @@
                 <a:ea typeface="Times New Roman" pitchFamily="34" charset="-122"/>
                 <a:cs typeface="Times New Roman" pitchFamily="34" charset="-120"/>
               </a:rPr>
-              <a:t>Would Japan have a high youth or old-age dependency?</a:t>
+              <a:t>The young dependants (children).</a:t>
             </a:r>
             <a:endParaRPr lang="en-US" sz="4000" dirty="0"/>
           </a:p>
@@ -12884,15 +13285,54 @@
                 <a:ea typeface="Calibri" pitchFamily="34" charset="-122"/>
                 <a:cs typeface="Calibri" pitchFamily="34" charset="-120"/>
               </a:rPr>
-              <a:t>4. INTERPRETATION</a:t>
+              <a:t>3. INTERPRETATION</a:t>
             </a:r>
             <a:endParaRPr lang="en-US" sz="1400" dirty="0"/>
+          </a:p>
+        </p:txBody>
+      </p:sp>
+      <p:sp>
+        <p:nvSpPr>
+          <p:cNvPr id="3" name="Text 1"/>
+          <p:cNvSpPr/>
+          <p:nvPr/>
+        </p:nvSpPr>
+        <p:spPr>
+          <a:xfrm>
+            <a:off x="457200" y="1005840"/>
+            <a:ext cx="11277295" cy="731520"/>
+          </a:xfrm>
+          <a:prstGeom prst="rect">
+            <a:avLst/>
+          </a:prstGeom>
+          <a:noFill/>
+          <a:ln/>
+        </p:spPr>
+        <p:txBody>
+          <a:bodyPr wrap="square" lIns="0" tIns="0" rIns="0" bIns="0" rtlCol="0" anchor="ctr"/>
+          <a:lstStyle/>
+          <a:p>
+            <a:pPr algn="ctr" indent="0" marL="0">
+              <a:buNone/>
+            </a:pPr>
+            <a:r>
+              <a:rPr lang="en-US" sz="3600" b="1" dirty="0">
+                <a:solidFill>
+                  <a:srgbClr val="990011"/>
+                </a:solidFill>
+                <a:latin typeface="Times New Roman" pitchFamily="34" charset="0"/>
+                <a:ea typeface="Times New Roman" pitchFamily="34" charset="-122"/>
+                <a:cs typeface="Times New Roman" pitchFamily="34" charset="-120"/>
+              </a:rPr>
+              <a:t>Activity 5</a:t>
+            </a:r>
+            <a:endParaRPr lang="en-US" sz="3600" dirty="0"/>
           </a:p>
         </p:txBody>
       </p:sp>
       <p:pic>
         <p:nvPicPr>
-          <p:cNvPr id="3" name="Image 0" descr="/home/claude/f4/img/minesec_sheet.png">    </p:cNvPr>
+          <p:cNvPr id="4" name="Image 0" descr="/home/claude/f4/img/v2/pw_pyramid_table_big.png">    </p:cNvPr>
           <p:cNvPicPr>
             <a:picLocks noChangeAspect="1"/>
           </p:cNvPicPr>
@@ -12906,8 +13346,8 @@
         </p:blipFill>
         <p:spPr>
           <a:xfrm>
-            <a:off x="0" y="658368"/>
-            <a:ext cx="5120640" cy="5833872"/>
+            <a:off x="629930" y="1783080"/>
+            <a:ext cx="10931835" cy="4270248"/>
           </a:xfrm>
           <a:prstGeom prst="rect">
             <a:avLst/>
@@ -12916,14 +13356,14 @@
       </p:pic>
       <p:sp>
         <p:nvSpPr>
-          <p:cNvPr id="4" name="Text 1"/>
+          <p:cNvPr id="5" name="Text 2"/>
           <p:cNvSpPr/>
           <p:nvPr/>
         </p:nvSpPr>
         <p:spPr>
           <a:xfrm>
-            <a:off x="5349240" y="1005840"/>
-            <a:ext cx="6522415" cy="731520"/>
+            <a:off x="457200" y="6089904"/>
+            <a:ext cx="11277295" cy="347472"/>
           </a:xfrm>
           <a:prstGeom prst="rect">
             <a:avLst/>
@@ -12932,68 +13372,24 @@
           <a:ln/>
         </p:spPr>
         <p:txBody>
-          <a:bodyPr wrap="square" lIns="0" tIns="0" rIns="0" bIns="0" rtlCol="0" anchor="ctr">
-            <a:normAutofit/>
-          </a:bodyPr>
+          <a:bodyPr wrap="square" lIns="0" tIns="0" rIns="0" bIns="0" rtlCol="0" anchor="ctr"/>
           <a:lstStyle/>
           <a:p>
             <a:pPr algn="ctr" indent="0" marL="0">
               <a:buNone/>
             </a:pPr>
             <a:r>
-              <a:rPr lang="en-US" sz="3600" b="1" dirty="0">
-                <a:solidFill>
-                  <a:srgbClr val="990011"/>
+              <a:rPr lang="en-US" sz="1800" i="1" dirty="0">
+                <a:solidFill>
+                  <a:srgbClr val="555555"/>
                 </a:solidFill>
                 <a:latin typeface="Times New Roman" pitchFamily="34" charset="0"/>
                 <a:ea typeface="Times New Roman" pitchFamily="34" charset="-122"/>
                 <a:cs typeface="Times New Roman" pitchFamily="34" charset="-120"/>
               </a:rPr>
-              <a:t>Activity 5: Answer</a:t>
-            </a:r>
-            <a:endParaRPr lang="en-US" sz="3600" dirty="0"/>
-          </a:p>
-        </p:txBody>
-      </p:sp>
-      <p:sp>
-        <p:nvSpPr>
-          <p:cNvPr id="5" name="Text 2"/>
-          <p:cNvSpPr/>
-          <p:nvPr/>
-        </p:nvSpPr>
-        <p:spPr>
-          <a:xfrm>
-            <a:off x="5349240" y="1783080"/>
-            <a:ext cx="6522415" cy="4663440"/>
-          </a:xfrm>
-          <a:prstGeom prst="rect">
-            <a:avLst/>
-          </a:prstGeom>
-          <a:noFill/>
-          <a:ln/>
-        </p:spPr>
-        <p:txBody>
-          <a:bodyPr wrap="square" lIns="0" tIns="0" rIns="0" bIns="0" rtlCol="0" anchor="t"/>
-          <a:lstStyle/>
-          <a:p>
-            <a:pPr algn="l" indent="0" marL="0">
-              <a:spcAft>
-                <a:spcPts val="800"/>
-              </a:spcAft>
-              <a:buNone/>
-            </a:pPr>
-            <a:r>
-              <a:rPr lang="en-US" sz="4000" dirty="0">
-                <a:solidFill>
-                  <a:srgbClr val="111111"/>
-                </a:solidFill>
-                <a:latin typeface="Times New Roman" pitchFamily="34" charset="0"/>
-                <a:ea typeface="Times New Roman" pitchFamily="34" charset="-122"/>
-                <a:cs typeface="Times New Roman" pitchFamily="34" charset="-120"/>
-              </a:rPr>
-              <a:t>A high old-age dependency.</a:t>
-            </a:r>
-            <a:endParaRPr lang="en-US" sz="4000" dirty="0"/>
+              <a:t>Data of a population.</a:t>
+            </a:r>
+            <a:endParaRPr lang="en-US" sz="1800" dirty="0"/>
           </a:p>
         </p:txBody>
       </p:sp>
@@ -13103,7 +13499,7 @@
                 <a:ea typeface="Calibri" pitchFamily="34" charset="-122"/>
                 <a:cs typeface="Calibri" pitchFamily="34" charset="-120"/>
               </a:rPr>
-              <a:t>BOARD SUMMARY</a:t>
+              <a:t>3. INTERPRETATION</a:t>
             </a:r>
             <a:endParaRPr lang="en-US" sz="1400" dirty="0"/>
           </a:p>
@@ -13168,7 +13564,7 @@
                 <a:ea typeface="Times New Roman" pitchFamily="34" charset="-122"/>
                 <a:cs typeface="Times New Roman" pitchFamily="34" charset="-120"/>
               </a:rPr>
-              <a:t>Board Summary</a:t>
+              <a:t>Activity 5: Question</a:t>
             </a:r>
             <a:endParaRPr lang="en-US" sz="3600" dirty="0"/>
           </a:p>
@@ -13202,7 +13598,7 @@
               <a:buNone/>
             </a:pPr>
             <a:r>
-              <a:rPr lang="en-US" sz="4000" b="1" dirty="0">
+              <a:rPr lang="en-US" sz="4000" dirty="0">
                 <a:solidFill>
                   <a:srgbClr val="111111"/>
                 </a:solidFill>
@@ -13210,47 +13606,7 @@
                 <a:ea typeface="Times New Roman" pitchFamily="34" charset="-122"/>
                 <a:cs typeface="Times New Roman" pitchFamily="34" charset="-120"/>
               </a:rPr>
-              <a:t>Topic: Population Structure and Composition</a:t>
-            </a:r>
-            <a:endParaRPr lang="en-US" sz="4000" dirty="0"/>
-          </a:p>
-          <a:p>
-            <a:pPr algn="l" indent="0" marL="0">
-              <a:spcAft>
-                <a:spcPts val="800"/>
-              </a:spcAft>
-              <a:buNone/>
-            </a:pPr>
-            <a:r>
-              <a:rPr lang="en-US" sz="4000" b="1" dirty="0">
-                <a:solidFill>
-                  <a:srgbClr val="111111"/>
-                </a:solidFill>
-                <a:latin typeface="Times New Roman" pitchFamily="34" charset="0"/>
-                <a:ea typeface="Times New Roman" pitchFamily="34" charset="-122"/>
-                <a:cs typeface="Times New Roman" pitchFamily="34" charset="-120"/>
-              </a:rPr>
-              <a:t>Sub-topic: Age-Sex Pyramids</a:t>
-            </a:r>
-            <a:endParaRPr lang="en-US" sz="4000" dirty="0"/>
-          </a:p>
-          <a:p>
-            <a:pPr algn="l" indent="0" marL="0">
-              <a:spcAft>
-                <a:spcPts val="800"/>
-              </a:spcAft>
-              <a:buNone/>
-            </a:pPr>
-            <a:r>
-              <a:rPr lang="en-US" sz="4000" b="1" dirty="0">
-                <a:solidFill>
-                  <a:srgbClr val="990011"/>
-                </a:solidFill>
-                <a:latin typeface="Times New Roman" pitchFamily="34" charset="0"/>
-                <a:ea typeface="Times New Roman" pitchFamily="34" charset="-122"/>
-                <a:cs typeface="Times New Roman" pitchFamily="34" charset="-120"/>
-              </a:rPr>
-              <a:t>Practical Work 3: Dependency Ratio and Population Pyramids</a:t>
+              <a:t>What does a ratio of 93 % mean?</a:t>
             </a:r>
             <a:endParaRPr lang="en-US" sz="4000" dirty="0"/>
           </a:p>
@@ -13362,7 +13718,7 @@
                 <a:ea typeface="Calibri" pitchFamily="34" charset="-122"/>
                 <a:cs typeface="Calibri" pitchFamily="34" charset="-120"/>
               </a:rPr>
-              <a:t>BOARD SUMMARY</a:t>
+              <a:t>3. INTERPRETATION</a:t>
             </a:r>
             <a:endParaRPr lang="en-US" sz="1400" dirty="0"/>
           </a:p>
@@ -13427,7 +13783,7 @@
                 <a:ea typeface="Times New Roman" pitchFamily="34" charset="-122"/>
                 <a:cs typeface="Times New Roman" pitchFamily="34" charset="-120"/>
               </a:rPr>
-              <a:t>DEFINITIONS</a:t>
+              <a:t>Activity 5: Answer</a:t>
             </a:r>
             <a:endParaRPr lang="en-US" sz="3600" dirty="0"/>
           </a:p>
@@ -13461,7 +13817,7 @@
               <a:buNone/>
             </a:pPr>
             <a:r>
-              <a:rPr lang="en-US" sz="4000" i="1" dirty="0">
+              <a:rPr lang="en-US" sz="4000" dirty="0">
                 <a:solidFill>
                   <a:srgbClr val="111111"/>
                 </a:solidFill>
@@ -13469,44 +13825,7 @@
                 <a:ea typeface="Times New Roman" pitchFamily="34" charset="-122"/>
                 <a:cs typeface="Times New Roman" pitchFamily="34" charset="-120"/>
               </a:rPr>
-              <a:t>The key terms of this lesson are defined as follows:</a:t>
-            </a:r>
-            <a:endParaRPr lang="en-US" sz="4000" dirty="0"/>
-          </a:p>
-          <a:p>
-            <a:pPr algn="l" indent="0" marL="0">
-              <a:spcAft>
-                <a:spcPts val="800"/>
-              </a:spcAft>
-              <a:buNone/>
-            </a:pPr>
-            <a:r>
-              <a:rPr lang="en-US" sz="4000" b="1" dirty="0">
-                <a:solidFill>
-                  <a:srgbClr val="111111"/>
-                </a:solidFill>
-                <a:latin typeface="Times New Roman" pitchFamily="34" charset="0"/>
-                <a:ea typeface="Times New Roman" pitchFamily="34" charset="-122"/>
-                <a:cs typeface="Times New Roman" pitchFamily="34" charset="-120"/>
-              </a:rPr>
-              <a:t>Dependency ratio: </a:t>
-            </a:r>
-            <a:pPr algn="l" indent="0" marL="0">
-              <a:spcAft>
-                <a:spcPts val="800"/>
-              </a:spcAft>
-              <a:buNone/>
-            </a:pPr>
-            <a:r>
-              <a:rPr lang="en-US" sz="4000" dirty="0">
-                <a:solidFill>
-                  <a:srgbClr val="111111"/>
-                </a:solidFill>
-                <a:latin typeface="Times New Roman" pitchFamily="34" charset="0"/>
-                <a:ea typeface="Times New Roman" pitchFamily="34" charset="-122"/>
-                <a:cs typeface="Times New Roman" pitchFamily="34" charset="-120"/>
-              </a:rPr>
-              <a:t>It is the number of dependants (under 15 and over 64) for every 100 people of working age (15–64).</a:t>
+              <a:t>There are 93 dependants for every 100 people of working age.</a:t>
             </a:r>
             <a:endParaRPr lang="en-US" sz="4000" dirty="0"/>
           </a:p>
@@ -13683,7 +14002,7 @@
                 <a:ea typeface="Times New Roman" pitchFamily="34" charset="-122"/>
                 <a:cs typeface="Times New Roman" pitchFamily="34" charset="-120"/>
               </a:rPr>
-              <a:t>1. Construction of a Population Pyramid</a:t>
+              <a:t>Board Summary</a:t>
             </a:r>
             <a:endParaRPr lang="en-US" sz="3600" dirty="0"/>
           </a:p>
@@ -13717,7 +14036,7 @@
               <a:buNone/>
             </a:pPr>
             <a:r>
-              <a:rPr lang="en-US" sz="4000" i="1" dirty="0">
+              <a:rPr lang="en-US" sz="4000" b="1" dirty="0">
                 <a:solidFill>
                   <a:srgbClr val="111111"/>
                 </a:solidFill>
@@ -13725,7 +14044,7 @@
                 <a:ea typeface="Times New Roman" pitchFamily="34" charset="-122"/>
                 <a:cs typeface="Times New Roman" pitchFamily="34" charset="-120"/>
               </a:rPr>
-              <a:t>A pyramid is drawn as follows:</a:t>
+              <a:t>Topic: Population Structure and Composition</a:t>
             </a:r>
             <a:endParaRPr lang="en-US" sz="4000" dirty="0"/>
           </a:p>
@@ -13745,8 +14064,11 @@
                 <a:ea typeface="Times New Roman" pitchFamily="34" charset="-122"/>
                 <a:cs typeface="Times New Roman" pitchFamily="34" charset="-120"/>
               </a:rPr>
-              <a:t>Calculations: </a:t>
-            </a:r>
+              <a:t>Sub-topic: Age-Sex Pyramids</a:t>
+            </a:r>
+            <a:endParaRPr lang="en-US" sz="4000" dirty="0"/>
+          </a:p>
+          <a:p>
             <a:pPr algn="l" indent="0" marL="0">
               <a:spcAft>
                 <a:spcPts val="800"/>
@@ -13754,15 +14076,15 @@
               <a:buNone/>
             </a:pPr>
             <a:r>
-              <a:rPr lang="en-US" sz="4000" dirty="0">
-                <a:solidFill>
-                  <a:srgbClr val="111111"/>
+              <a:rPr lang="en-US" sz="4000" b="1" dirty="0">
+                <a:solidFill>
+                  <a:srgbClr val="990011"/>
                 </a:solidFill>
                 <a:latin typeface="Times New Roman" pitchFamily="34" charset="0"/>
                 <a:ea typeface="Times New Roman" pitchFamily="34" charset="-122"/>
                 <a:cs typeface="Times New Roman" pitchFamily="34" charset="-120"/>
               </a:rPr>
-              <a:t>Calculate each age group as a percentage of the total population. For example, 1,480 boys aged 0–4 out of 9,870 = 15 %.</a:t>
+              <a:t>Practical Work 3: Dependency Ratio and Population Pyramids</a:t>
             </a:r>
             <a:endParaRPr lang="en-US" sz="4000" dirty="0"/>
           </a:p>
@@ -13939,7 +14261,7 @@
                 <a:ea typeface="Times New Roman" pitchFamily="34" charset="-122"/>
                 <a:cs typeface="Times New Roman" pitchFamily="34" charset="-120"/>
               </a:rPr>
-              <a:t>1. Construction of a Population Pyramid (continued)</a:t>
+              <a:t>DEFINITIONS</a:t>
             </a:r>
             <a:endParaRPr lang="en-US" sz="3600" dirty="0"/>
           </a:p>
@@ -13973,7 +14295,7 @@
               <a:buNone/>
             </a:pPr>
             <a:r>
-              <a:rPr lang="en-US" sz="4000" b="1" dirty="0">
+              <a:rPr lang="en-US" sz="4000" i="1" dirty="0">
                 <a:solidFill>
                   <a:srgbClr val="111111"/>
                 </a:solidFill>
@@ -13981,8 +14303,11 @@
                 <a:ea typeface="Times New Roman" pitchFamily="34" charset="-122"/>
                 <a:cs typeface="Times New Roman" pitchFamily="34" charset="-120"/>
               </a:rPr>
-              <a:t>Drawing: </a:t>
-            </a:r>
+              <a:t>The key terms of this lesson are defined as follows:</a:t>
+            </a:r>
+            <a:endParaRPr lang="en-US" sz="4000" dirty="0"/>
+          </a:p>
+          <a:p>
             <a:pPr algn="l" indent="0" marL="0">
               <a:spcAft>
                 <a:spcPts val="800"/>
@@ -13990,7 +14315,7 @@
               <a:buNone/>
             </a:pPr>
             <a:r>
-              <a:rPr lang="en-US" sz="4000" dirty="0">
+              <a:rPr lang="en-US" sz="4000" b="1" dirty="0">
                 <a:solidFill>
                   <a:srgbClr val="111111"/>
                 </a:solidFill>
@@ -13998,7 +14323,24 @@
                 <a:ea typeface="Times New Roman" pitchFamily="34" charset="-122"/>
                 <a:cs typeface="Times New Roman" pitchFamily="34" charset="-120"/>
               </a:rPr>
-              <a:t>Draw a vertical axis with the age groups and a horizontal axis with percentages on both sides. Draw males on the left and females on the right, with a title and key.</a:t>
+              <a:t>Dependency ratio: </a:t>
+            </a:r>
+            <a:pPr algn="l" indent="0" marL="0">
+              <a:spcAft>
+                <a:spcPts val="800"/>
+              </a:spcAft>
+              <a:buNone/>
+            </a:pPr>
+            <a:r>
+              <a:rPr lang="en-US" sz="4000" dirty="0">
+                <a:solidFill>
+                  <a:srgbClr val="111111"/>
+                </a:solidFill>
+                <a:latin typeface="Times New Roman" pitchFamily="34" charset="0"/>
+                <a:ea typeface="Times New Roman" pitchFamily="34" charset="-122"/>
+                <a:cs typeface="Times New Roman" pitchFamily="34" charset="-120"/>
+              </a:rPr>
+              <a:t>It is the number of dependants (aged 0–14 and 65 and over) for every 100 people of working age (15–64).</a:t>
             </a:r>
             <a:endParaRPr lang="en-US" sz="4000" dirty="0"/>
           </a:p>
@@ -14116,48 +14458,9 @@
           </a:p>
         </p:txBody>
       </p:sp>
-      <p:sp>
-        <p:nvSpPr>
-          <p:cNvPr id="3" name="Text 1"/>
-          <p:cNvSpPr/>
-          <p:nvPr/>
-        </p:nvSpPr>
-        <p:spPr>
-          <a:xfrm>
-            <a:off x="457200" y="1005840"/>
-            <a:ext cx="11277295" cy="731520"/>
-          </a:xfrm>
-          <a:prstGeom prst="rect">
-            <a:avLst/>
-          </a:prstGeom>
-          <a:noFill/>
-          <a:ln/>
-        </p:spPr>
-        <p:txBody>
-          <a:bodyPr wrap="square" lIns="0" tIns="0" rIns="0" bIns="0" rtlCol="0" anchor="ctr"/>
-          <a:lstStyle/>
-          <a:p>
-            <a:pPr algn="ctr" indent="0" marL="0">
-              <a:buNone/>
-            </a:pPr>
-            <a:r>
-              <a:rPr lang="en-US" sz="3600" b="1" dirty="0">
-                <a:solidFill>
-                  <a:srgbClr val="990011"/>
-                </a:solidFill>
-                <a:latin typeface="Times New Roman" pitchFamily="34" charset="0"/>
-                <a:ea typeface="Times New Roman" pitchFamily="34" charset="-122"/>
-                <a:cs typeface="Times New Roman" pitchFamily="34" charset="-120"/>
-              </a:rPr>
-              <a:t>1. Construction of a Population Pyramid</a:t>
-            </a:r>
-            <a:endParaRPr lang="en-US" sz="3600" dirty="0"/>
-          </a:p>
-        </p:txBody>
-      </p:sp>
       <p:pic>
         <p:nvPicPr>
-          <p:cNvPr id="4" name="Image 0" descr="/home/claude/f4/img/v2/pw_pyramid_table_big.png">    </p:cNvPr>
+          <p:cNvPr id="3" name="Image 0" descr="/home/claude/f4/img/minesec_sheet.png">    </p:cNvPr>
           <p:cNvPicPr>
             <a:picLocks noChangeAspect="1"/>
           </p:cNvPicPr>
@@ -14171,8 +14474,8 @@
         </p:blipFill>
         <p:spPr>
           <a:xfrm>
-            <a:off x="629930" y="1783080"/>
-            <a:ext cx="10931835" cy="4270248"/>
+            <a:off x="0" y="658368"/>
+            <a:ext cx="5120640" cy="5833872"/>
           </a:xfrm>
           <a:prstGeom prst="rect">
             <a:avLst/>
@@ -14181,14 +14484,14 @@
       </p:pic>
       <p:sp>
         <p:nvSpPr>
-          <p:cNvPr id="5" name="Text 2"/>
+          <p:cNvPr id="4" name="Text 1"/>
           <p:cNvSpPr/>
           <p:nvPr/>
         </p:nvSpPr>
         <p:spPr>
           <a:xfrm>
-            <a:off x="457200" y="6089904"/>
-            <a:ext cx="11277295" cy="347472"/>
+            <a:off x="5349240" y="1005840"/>
+            <a:ext cx="6522415" cy="731520"/>
           </a:xfrm>
           <a:prstGeom prst="rect">
             <a:avLst/>
@@ -14197,24 +14500,85 @@
           <a:ln/>
         </p:spPr>
         <p:txBody>
-          <a:bodyPr wrap="square" lIns="0" tIns="0" rIns="0" bIns="0" rtlCol="0" anchor="ctr"/>
+          <a:bodyPr wrap="square" lIns="0" tIns="0" rIns="0" bIns="0" rtlCol="0" anchor="ctr">
+            <a:normAutofit/>
+          </a:bodyPr>
           <a:lstStyle/>
           <a:p>
             <a:pPr algn="ctr" indent="0" marL="0">
               <a:buNone/>
             </a:pPr>
             <a:r>
-              <a:rPr lang="en-US" sz="1800" i="1" dirty="0">
-                <a:solidFill>
-                  <a:srgbClr val="555555"/>
+              <a:rPr lang="en-US" sz="3600" b="1" dirty="0">
+                <a:solidFill>
+                  <a:srgbClr val="990011"/>
                 </a:solidFill>
                 <a:latin typeface="Times New Roman" pitchFamily="34" charset="0"/>
                 <a:ea typeface="Times New Roman" pitchFamily="34" charset="-122"/>
                 <a:cs typeface="Times New Roman" pitchFamily="34" charset="-120"/>
               </a:rPr>
-              <a:t>Illustration: data table</a:t>
-            </a:r>
-            <a:endParaRPr lang="en-US" sz="1800" dirty="0"/>
+              <a:t>DEFINITIONS (continued)</a:t>
+            </a:r>
+            <a:endParaRPr lang="en-US" sz="3600" dirty="0"/>
+          </a:p>
+        </p:txBody>
+      </p:sp>
+      <p:sp>
+        <p:nvSpPr>
+          <p:cNvPr id="5" name="Text 2"/>
+          <p:cNvSpPr/>
+          <p:nvPr/>
+        </p:nvSpPr>
+        <p:spPr>
+          <a:xfrm>
+            <a:off x="5349240" y="1783080"/>
+            <a:ext cx="6522415" cy="4663440"/>
+          </a:xfrm>
+          <a:prstGeom prst="rect">
+            <a:avLst/>
+          </a:prstGeom>
+          <a:noFill/>
+          <a:ln/>
+        </p:spPr>
+        <p:txBody>
+          <a:bodyPr wrap="square" lIns="0" tIns="0" rIns="0" bIns="0" rtlCol="0" anchor="t"/>
+          <a:lstStyle/>
+          <a:p>
+            <a:pPr algn="l" indent="0" marL="0">
+              <a:spcAft>
+                <a:spcPts val="800"/>
+              </a:spcAft>
+              <a:buNone/>
+            </a:pPr>
+            <a:r>
+              <a:rPr lang="en-US" sz="4000" b="1" dirty="0">
+                <a:solidFill>
+                  <a:srgbClr val="111111"/>
+                </a:solidFill>
+                <a:latin typeface="Times New Roman" pitchFamily="34" charset="0"/>
+                <a:ea typeface="Times New Roman" pitchFamily="34" charset="-122"/>
+                <a:cs typeface="Times New Roman" pitchFamily="34" charset="-120"/>
+              </a:rPr>
+              <a:t>Working-age population: </a:t>
+            </a:r>
+            <a:pPr algn="l" indent="0" marL="0">
+              <a:spcAft>
+                <a:spcPts val="800"/>
+              </a:spcAft>
+              <a:buNone/>
+            </a:pPr>
+            <a:r>
+              <a:rPr lang="en-US" sz="4000" dirty="0">
+                <a:solidFill>
+                  <a:srgbClr val="111111"/>
+                </a:solidFill>
+                <a:latin typeface="Times New Roman" pitchFamily="34" charset="0"/>
+                <a:ea typeface="Times New Roman" pitchFamily="34" charset="-122"/>
+                <a:cs typeface="Times New Roman" pitchFamily="34" charset="-120"/>
+              </a:rPr>
+              <a:t>It is the people aged 15–64, who are expected to produce and support the others.</a:t>
+            </a:r>
+            <a:endParaRPr lang="en-US" sz="4000" dirty="0"/>
           </a:p>
         </p:txBody>
       </p:sp>
@@ -14330,9 +14694,129 @@
           </a:p>
         </p:txBody>
       </p:sp>
+      <p:sp>
+        <p:nvSpPr>
+          <p:cNvPr id="3" name="Text 1"/>
+          <p:cNvSpPr/>
+          <p:nvPr/>
+        </p:nvSpPr>
+        <p:spPr>
+          <a:xfrm>
+            <a:off x="365760" y="1005840"/>
+            <a:ext cx="11460175" cy="731520"/>
+          </a:xfrm>
+          <a:prstGeom prst="rect">
+            <a:avLst/>
+          </a:prstGeom>
+          <a:noFill/>
+          <a:ln/>
+        </p:spPr>
+        <p:txBody>
+          <a:bodyPr wrap="square" lIns="0" tIns="0" rIns="0" bIns="0" rtlCol="0" anchor="ctr">
+            <a:normAutofit/>
+          </a:bodyPr>
+          <a:lstStyle/>
+          <a:p>
+            <a:pPr algn="ctr" indent="0" marL="0">
+              <a:buNone/>
+            </a:pPr>
+            <a:r>
+              <a:rPr lang="en-US" sz="3600" b="1" dirty="0">
+                <a:solidFill>
+                  <a:srgbClr val="990011"/>
+                </a:solidFill>
+                <a:latin typeface="Times New Roman" pitchFamily="34" charset="0"/>
+                <a:ea typeface="Times New Roman" pitchFamily="34" charset="-122"/>
+                <a:cs typeface="Times New Roman" pitchFamily="34" charset="-120"/>
+              </a:rPr>
+              <a:t>1. The Formula</a:t>
+            </a:r>
+            <a:endParaRPr lang="en-US" sz="3600" dirty="0"/>
+          </a:p>
+        </p:txBody>
+      </p:sp>
+      <p:sp>
+        <p:nvSpPr>
+          <p:cNvPr id="4" name="Text 2"/>
+          <p:cNvSpPr/>
+          <p:nvPr/>
+        </p:nvSpPr>
+        <p:spPr>
+          <a:xfrm>
+            <a:off x="365760" y="1783080"/>
+            <a:ext cx="4846320" cy="4617720"/>
+          </a:xfrm>
+          <a:prstGeom prst="rect">
+            <a:avLst/>
+          </a:prstGeom>
+          <a:noFill/>
+          <a:ln/>
+        </p:spPr>
+        <p:txBody>
+          <a:bodyPr wrap="square" lIns="0" tIns="0" rIns="0" bIns="0" rtlCol="0" anchor="t"/>
+          <a:lstStyle/>
+          <a:p>
+            <a:pPr algn="l" indent="0" marL="0">
+              <a:spcAft>
+                <a:spcPts val="800"/>
+              </a:spcAft>
+              <a:buNone/>
+            </a:pPr>
+            <a:r>
+              <a:rPr lang="en-US" sz="3600" i="1" dirty="0">
+                <a:solidFill>
+                  <a:srgbClr val="111111"/>
+                </a:solidFill>
+                <a:latin typeface="Times New Roman" pitchFamily="34" charset="0"/>
+                <a:ea typeface="Times New Roman" pitchFamily="34" charset="-122"/>
+                <a:cs typeface="Times New Roman" pitchFamily="34" charset="-120"/>
+              </a:rPr>
+              <a:t>The dependency ratio is calculated with the following formula:</a:t>
+            </a:r>
+            <a:endParaRPr lang="en-US" sz="3600" dirty="0"/>
+          </a:p>
+          <a:p>
+            <a:pPr algn="l" indent="0" marL="0">
+              <a:spcAft>
+                <a:spcPts val="800"/>
+              </a:spcAft>
+              <a:buNone/>
+            </a:pPr>
+            <a:r>
+              <a:rPr lang="en-US" sz="3600" b="1" dirty="0">
+                <a:solidFill>
+                  <a:srgbClr val="111111"/>
+                </a:solidFill>
+                <a:latin typeface="Times New Roman" pitchFamily="34" charset="0"/>
+                <a:ea typeface="Times New Roman" pitchFamily="34" charset="-122"/>
+                <a:cs typeface="Times New Roman" pitchFamily="34" charset="-120"/>
+              </a:rPr>
+              <a:t>Formula: </a:t>
+            </a:r>
+            <a:pPr algn="l" indent="0" marL="0">
+              <a:spcAft>
+                <a:spcPts val="800"/>
+              </a:spcAft>
+              <a:buNone/>
+            </a:pPr>
+            <a:r>
+              <a:rPr lang="en-US" sz="3600" dirty="0">
+                <a:solidFill>
+                  <a:srgbClr val="111111"/>
+                </a:solidFill>
+                <a:latin typeface="Times New Roman" pitchFamily="34" charset="0"/>
+                <a:ea typeface="Times New Roman" pitchFamily="34" charset="-122"/>
+                <a:cs typeface="Times New Roman" pitchFamily="34" charset="-120"/>
+              </a:rPr>
+              <a:t>Dependency ratio = (people aged 0–14 + people aged 65 and over) ÷ people aged 15–64 × 100.</a:t>
+            </a:r>
+            <a:endParaRPr lang="en-US" sz="3600" dirty="0"/>
+          </a:p>
+        </p:txBody>
+      </p:sp>
       <p:pic>
         <p:nvPicPr>
-          <p:cNvPr id="3" name="Image 0" descr="/home/claude/f4/img/minesec_sheet.png">    </p:cNvPr>
+          <p:cNvPr id="5" name="Image 0" descr="/home/claude/f4/img/v2/dependency_big.png">    </p:cNvPr>
           <p:cNvPicPr>
             <a:picLocks noChangeAspect="1"/>
           </p:cNvPicPr>
@@ -14346,8 +14830,8 @@
         </p:blipFill>
         <p:spPr>
           <a:xfrm>
-            <a:off x="0" y="658368"/>
-            <a:ext cx="2468880" cy="5833872"/>
+            <a:off x="5349240" y="2617506"/>
+            <a:ext cx="6659575" cy="2601397"/>
           </a:xfrm>
           <a:prstGeom prst="rect">
             <a:avLst/>
@@ -14356,14 +14840,14 @@
       </p:pic>
       <p:sp>
         <p:nvSpPr>
-          <p:cNvPr id="4" name="Text 1"/>
+          <p:cNvPr id="6" name="Text 3"/>
           <p:cNvSpPr/>
           <p:nvPr/>
         </p:nvSpPr>
         <p:spPr>
           <a:xfrm>
-            <a:off x="2697480" y="1005840"/>
-            <a:ext cx="9174175" cy="731520"/>
+            <a:off x="5349240" y="6089904"/>
+            <a:ext cx="6659575" cy="347472"/>
           </a:xfrm>
           <a:prstGeom prst="rect">
             <a:avLst/>
@@ -14372,105 +14856,24 @@
           <a:ln/>
         </p:spPr>
         <p:txBody>
-          <a:bodyPr wrap="square" lIns="0" tIns="0" rIns="0" bIns="0" rtlCol="0" anchor="ctr">
-            <a:normAutofit/>
-          </a:bodyPr>
+          <a:bodyPr wrap="square" lIns="0" tIns="0" rIns="0" bIns="0" rtlCol="0" anchor="ctr"/>
           <a:lstStyle/>
           <a:p>
             <a:pPr algn="ctr" indent="0" marL="0">
               <a:buNone/>
             </a:pPr>
             <a:r>
-              <a:rPr lang="en-US" sz="3600" b="1" dirty="0">
-                <a:solidFill>
-                  <a:srgbClr val="990011"/>
+              <a:rPr lang="en-US" sz="1600" i="1" dirty="0">
+                <a:solidFill>
+                  <a:srgbClr val="555555"/>
                 </a:solidFill>
                 <a:latin typeface="Times New Roman" pitchFamily="34" charset="0"/>
                 <a:ea typeface="Times New Roman" pitchFamily="34" charset="-122"/>
                 <a:cs typeface="Times New Roman" pitchFamily="34" charset="-120"/>
               </a:rPr>
-              <a:t>2. Calculation and Interpretation</a:t>
-            </a:r>
-            <a:endParaRPr lang="en-US" sz="3600" dirty="0"/>
-          </a:p>
-        </p:txBody>
-      </p:sp>
-      <p:sp>
-        <p:nvSpPr>
-          <p:cNvPr id="5" name="Text 2"/>
-          <p:cNvSpPr/>
-          <p:nvPr/>
-        </p:nvSpPr>
-        <p:spPr>
-          <a:xfrm>
-            <a:off x="2697480" y="1783080"/>
-            <a:ext cx="9174175" cy="4663440"/>
-          </a:xfrm>
-          <a:prstGeom prst="rect">
-            <a:avLst/>
-          </a:prstGeom>
-          <a:noFill/>
-          <a:ln/>
-        </p:spPr>
-        <p:txBody>
-          <a:bodyPr wrap="square" lIns="0" tIns="0" rIns="0" bIns="0" rtlCol="0" anchor="t"/>
-          <a:lstStyle/>
-          <a:p>
-            <a:pPr algn="l" indent="0" marL="0">
-              <a:spcAft>
-                <a:spcPts val="800"/>
-              </a:spcAft>
-              <a:buNone/>
-            </a:pPr>
-            <a:r>
-              <a:rPr lang="en-US" sz="4000" i="1" dirty="0">
-                <a:solidFill>
-                  <a:srgbClr val="111111"/>
-                </a:solidFill>
-                <a:latin typeface="Times New Roman" pitchFamily="34" charset="0"/>
-                <a:ea typeface="Times New Roman" pitchFamily="34" charset="-122"/>
-                <a:cs typeface="Times New Roman" pitchFamily="34" charset="-120"/>
-              </a:rPr>
-              <a:t>The results are calculated and interpreted as follows:</a:t>
-            </a:r>
-            <a:endParaRPr lang="en-US" sz="4000" dirty="0"/>
-          </a:p>
-          <a:p>
-            <a:pPr algn="l" indent="0" marL="0">
-              <a:spcAft>
-                <a:spcPts val="800"/>
-              </a:spcAft>
-              <a:buNone/>
-            </a:pPr>
-            <a:r>
-              <a:rPr lang="en-US" sz="4000" b="1" dirty="0">
-                <a:solidFill>
-                  <a:srgbClr val="111111"/>
-                </a:solidFill>
-                <a:latin typeface="Times New Roman" pitchFamily="34" charset="0"/>
-                <a:ea typeface="Times New Roman" pitchFamily="34" charset="-122"/>
-                <a:cs typeface="Times New Roman" pitchFamily="34" charset="-120"/>
-              </a:rPr>
-              <a:t>Dependency ratio: </a:t>
-            </a:r>
-            <a:pPr algn="l" indent="0" marL="0">
-              <a:spcAft>
-                <a:spcPts val="800"/>
-              </a:spcAft>
-              <a:buNone/>
-            </a:pPr>
-            <a:r>
-              <a:rPr lang="en-US" sz="4000" dirty="0">
-                <a:solidFill>
-                  <a:srgbClr val="111111"/>
-                </a:solidFill>
-                <a:latin typeface="Times New Roman" pitchFamily="34" charset="0"/>
-                <a:ea typeface="Times New Roman" pitchFamily="34" charset="-122"/>
-                <a:cs typeface="Times New Roman" pitchFamily="34" charset="-120"/>
-              </a:rPr>
-              <a:t>Add the population under 15 and over 64, divide by the population aged 15–64 and multiply by 100. A high ratio means a heavy burden on workers.</a:t>
-            </a:r>
-            <a:endParaRPr lang="en-US" sz="4000" dirty="0"/>
+              <a:t>Illustration: the dependency ratio</a:t>
+            </a:r>
+            <a:endParaRPr lang="en-US" sz="1600" dirty="0"/>
           </a:p>
         </p:txBody>
       </p:sp>
@@ -14645,7 +15048,7 @@
                 <a:ea typeface="Times New Roman" pitchFamily="34" charset="-122"/>
                 <a:cs typeface="Times New Roman" pitchFamily="34" charset="-120"/>
               </a:rPr>
-              <a:t>2. Calculation and Interpretation (continued)</a:t>
+              <a:t>1. The Formula</a:t>
             </a:r>
             <a:endParaRPr lang="en-US" sz="3600" dirty="0"/>
           </a:p>
@@ -14687,7 +15090,7 @@
                 <a:ea typeface="Times New Roman" pitchFamily="34" charset="-122"/>
                 <a:cs typeface="Times New Roman" pitchFamily="34" charset="-120"/>
               </a:rPr>
-              <a:t>Reading the pyramid: </a:t>
+              <a:t>Dependants: </a:t>
             </a:r>
             <a:pPr algn="l" indent="0" marL="0">
               <a:spcAft>
@@ -14704,7 +15107,44 @@
                 <a:ea typeface="Times New Roman" pitchFamily="34" charset="-122"/>
                 <a:cs typeface="Times New Roman" pitchFamily="34" charset="-120"/>
               </a:rPr>
-              <a:t>Note the width of the base, the shape of the sides and the top, and any notches. They show birth rate, death rate, life expectancy and events such as migration.</a:t>
+              <a:t>They are the young (0–14 years) and the elderly (65 years and over).</a:t>
+            </a:r>
+            <a:endParaRPr lang="en-US" sz="4000" dirty="0"/>
+          </a:p>
+          <a:p>
+            <a:pPr algn="l" indent="0" marL="0">
+              <a:spcAft>
+                <a:spcPts val="800"/>
+              </a:spcAft>
+              <a:buNone/>
+            </a:pPr>
+            <a:r>
+              <a:rPr lang="en-US" sz="4000" b="1" dirty="0">
+                <a:solidFill>
+                  <a:srgbClr val="111111"/>
+                </a:solidFill>
+                <a:latin typeface="Times New Roman" pitchFamily="34" charset="0"/>
+                <a:ea typeface="Times New Roman" pitchFamily="34" charset="-122"/>
+                <a:cs typeface="Times New Roman" pitchFamily="34" charset="-120"/>
+              </a:rPr>
+              <a:t>Workers: </a:t>
+            </a:r>
+            <a:pPr algn="l" indent="0" marL="0">
+              <a:spcAft>
+                <a:spcPts val="800"/>
+              </a:spcAft>
+              <a:buNone/>
+            </a:pPr>
+            <a:r>
+              <a:rPr lang="en-US" sz="4000" dirty="0">
+                <a:solidFill>
+                  <a:srgbClr val="111111"/>
+                </a:solidFill>
+                <a:latin typeface="Times New Roman" pitchFamily="34" charset="0"/>
+                <a:ea typeface="Times New Roman" pitchFamily="34" charset="-122"/>
+                <a:cs typeface="Times New Roman" pitchFamily="34" charset="-120"/>
+              </a:rPr>
+              <a:t>They are the people aged 15–64 years.</a:t>
             </a:r>
             <a:endParaRPr lang="en-US" sz="4000" dirty="0"/>
           </a:p>
@@ -14943,7 +15383,7 @@
                 <a:ea typeface="Times New Roman" pitchFamily="34" charset="-122"/>
                 <a:cs typeface="Times New Roman" pitchFamily="34" charset="-120"/>
               </a:rPr>
-              <a:t>Sketch the pyramids of Cameroon and Japan and list three differences.</a:t>
+              <a:t>Write the formula of the dependency ratio.</a:t>
             </a:r>
             <a:endParaRPr lang="en-US" sz="4000" dirty="0"/>
           </a:p>
@@ -15078,7 +15518,7 @@
         <p:spPr>
           <a:xfrm>
             <a:off x="0" y="658368"/>
-            <a:ext cx="3840480" cy="5833872"/>
+            <a:ext cx="5120640" cy="5833872"/>
           </a:xfrm>
           <a:prstGeom prst="rect">
             <a:avLst/>
@@ -15093,8 +15533,8 @@
         </p:nvSpPr>
         <p:spPr>
           <a:xfrm>
-            <a:off x="4069080" y="1005840"/>
-            <a:ext cx="7802575" cy="731520"/>
+            <a:off x="5349240" y="1005840"/>
+            <a:ext cx="6522415" cy="731520"/>
           </a:xfrm>
           <a:prstGeom prst="rect">
             <a:avLst/>
@@ -15120,7 +15560,7 @@
                 <a:ea typeface="Times New Roman" pitchFamily="34" charset="-122"/>
                 <a:cs typeface="Times New Roman" pitchFamily="34" charset="-120"/>
               </a:rPr>
-              <a:t>2. Calculation and Interpretation (continued)</a:t>
+              <a:t>2. Worked Examples</a:t>
             </a:r>
             <a:endParaRPr lang="en-US" sz="3600" dirty="0"/>
           </a:p>
@@ -15134,8 +15574,8 @@
         </p:nvSpPr>
         <p:spPr>
           <a:xfrm>
-            <a:off x="4069080" y="1783080"/>
-            <a:ext cx="7802575" cy="4663440"/>
+            <a:off x="5349240" y="1783080"/>
+            <a:ext cx="6522415" cy="4663440"/>
           </a:xfrm>
           <a:prstGeom prst="rect">
             <a:avLst/>
@@ -15154,7 +15594,7 @@
               <a:buNone/>
             </a:pPr>
             <a:r>
-              <a:rPr lang="en-US" sz="4000" b="1" dirty="0">
+              <a:rPr lang="en-US" sz="4000" i="1" dirty="0">
                 <a:solidFill>
                   <a:srgbClr val="111111"/>
                 </a:solidFill>
@@ -15162,8 +15602,11 @@
                 <a:ea typeface="Times New Roman" pitchFamily="34" charset="-122"/>
                 <a:cs typeface="Times New Roman" pitchFamily="34" charset="-120"/>
               </a:rPr>
-              <a:t>Distinguishing types: </a:t>
-            </a:r>
+              <a:t>The calculation is done as in the following examples:</a:t>
+            </a:r>
+            <a:endParaRPr lang="en-US" sz="4000" dirty="0"/>
+          </a:p>
+          <a:p>
             <a:pPr algn="l" indent="0" marL="0">
               <a:spcAft>
                 <a:spcPts val="800"/>
@@ -15171,7 +15614,7 @@
               <a:buNone/>
             </a:pPr>
             <a:r>
-              <a:rPr lang="en-US" sz="4000" dirty="0">
+              <a:rPr lang="en-US" sz="4000" b="1" dirty="0">
                 <a:solidFill>
                   <a:srgbClr val="111111"/>
                 </a:solidFill>
@@ -15179,7 +15622,24 @@
                 <a:ea typeface="Times New Roman" pitchFamily="34" charset="-122"/>
                 <a:cs typeface="Times New Roman" pitchFamily="34" charset="-120"/>
               </a:rPr>
-              <a:t>A wide base shows an expansive pyramid (LEDC), straight sides a stationary one, and a narrow base a constrictive one (MEDC). Each type tells us the stage of development of the country.</a:t>
+              <a:t>Example 1: </a:t>
+            </a:r>
+            <a:pPr algn="l" indent="0" marL="0">
+              <a:spcAft>
+                <a:spcPts val="800"/>
+              </a:spcAft>
+              <a:buNone/>
+            </a:pPr>
+            <a:r>
+              <a:rPr lang="en-US" sz="4000" dirty="0">
+                <a:solidFill>
+                  <a:srgbClr val="111111"/>
+                </a:solidFill>
+                <a:latin typeface="Times New Roman" pitchFamily="34" charset="0"/>
+                <a:ea typeface="Times New Roman" pitchFamily="34" charset="-122"/>
+                <a:cs typeface="Times New Roman" pitchFamily="34" charset="-120"/>
+              </a:rPr>
+              <a:t>2,000 children, 800 elderly and 3,000 adults: (2,000 + 800) ÷ 3,000 × 100 ≈ 93.3 %.</a:t>
             </a:r>
             <a:endParaRPr lang="en-US" sz="4000" dirty="0"/>
           </a:p>
@@ -15305,8 +15765,8 @@
         </p:nvSpPr>
         <p:spPr>
           <a:xfrm>
-            <a:off x="457200" y="1005840"/>
-            <a:ext cx="11277295" cy="731520"/>
+            <a:off x="365760" y="1005840"/>
+            <a:ext cx="11460175" cy="731520"/>
           </a:xfrm>
           <a:prstGeom prst="rect">
             <a:avLst/>
@@ -15315,7 +15775,9 @@
           <a:ln/>
         </p:spPr>
         <p:txBody>
-          <a:bodyPr wrap="square" lIns="0" tIns="0" rIns="0" bIns="0" rtlCol="0" anchor="ctr"/>
+          <a:bodyPr wrap="square" lIns="0" tIns="0" rIns="0" bIns="0" rtlCol="0" anchor="ctr">
+            <a:normAutofit/>
+          </a:bodyPr>
           <a:lstStyle/>
           <a:p>
             <a:pPr algn="ctr" indent="0" marL="0">
@@ -15330,7 +15792,66 @@
                 <a:ea typeface="Times New Roman" pitchFamily="34" charset="-122"/>
                 <a:cs typeface="Times New Roman" pitchFamily="34" charset="-120"/>
               </a:rPr>
-              <a:t>2. Calculation and Interpretation</a:t>
+              <a:t>2. Worked Examples</a:t>
+            </a:r>
+            <a:endParaRPr lang="en-US" sz="3600" dirty="0"/>
+          </a:p>
+        </p:txBody>
+      </p:sp>
+      <p:sp>
+        <p:nvSpPr>
+          <p:cNvPr id="4" name="Text 2"/>
+          <p:cNvSpPr/>
+          <p:nvPr/>
+        </p:nvSpPr>
+        <p:spPr>
+          <a:xfrm>
+            <a:off x="365760" y="1783080"/>
+            <a:ext cx="4846320" cy="4617720"/>
+          </a:xfrm>
+          <a:prstGeom prst="rect">
+            <a:avLst/>
+          </a:prstGeom>
+          <a:noFill/>
+          <a:ln/>
+        </p:spPr>
+        <p:txBody>
+          <a:bodyPr wrap="square" lIns="0" tIns="0" rIns="0" bIns="0" rtlCol="0" anchor="t"/>
+          <a:lstStyle/>
+          <a:p>
+            <a:pPr algn="l" indent="0" marL="0">
+              <a:spcAft>
+                <a:spcPts val="800"/>
+              </a:spcAft>
+              <a:buNone/>
+            </a:pPr>
+            <a:r>
+              <a:rPr lang="en-US" sz="3600" b="1" dirty="0">
+                <a:solidFill>
+                  <a:srgbClr val="111111"/>
+                </a:solidFill>
+                <a:latin typeface="Times New Roman" pitchFamily="34" charset="0"/>
+                <a:ea typeface="Times New Roman" pitchFamily="34" charset="-122"/>
+                <a:cs typeface="Times New Roman" pitchFamily="34" charset="-120"/>
+              </a:rPr>
+              <a:t>Example 2 (UK, 1971): </a:t>
+            </a:r>
+            <a:pPr algn="l" indent="0" marL="0">
+              <a:spcAft>
+                <a:spcPts val="800"/>
+              </a:spcAft>
+              <a:buNone/>
+            </a:pPr>
+            <a:r>
+              <a:rPr lang="en-US" sz="3600" dirty="0">
+                <a:solidFill>
+                  <a:srgbClr val="111111"/>
+                </a:solidFill>
+                <a:latin typeface="Times New Roman" pitchFamily="34" charset="0"/>
+                <a:ea typeface="Times New Roman" pitchFamily="34" charset="-122"/>
+                <a:cs typeface="Times New Roman" pitchFamily="34" charset="-120"/>
+              </a:rPr>
+              <a:t>13,387 children, 7,307 elderly and 31,616 adults (in thousands): (13,387 + 7,307) ÷ 31,616 × 100 = 65.45 %.</a:t>
             </a:r>
             <a:endParaRPr lang="en-US" sz="3600" dirty="0"/>
           </a:p>
@@ -15338,7 +15859,7 @@
       </p:sp>
       <p:pic>
         <p:nvPicPr>
-          <p:cNvPr id="4" name="Image 0" descr="/home/claude/f4/img/v2/dependency_big.png">    </p:cNvPr>
+          <p:cNvPr id="5" name="Image 0" descr="/home/claude/f4/img/v2/pop2_dep_uk.png">    </p:cNvPr>
           <p:cNvPicPr>
             <a:picLocks noChangeAspect="1"/>
           </p:cNvPicPr>
@@ -15352,8 +15873,8 @@
         </p:blipFill>
         <p:spPr>
           <a:xfrm>
-            <a:off x="629930" y="1783080"/>
-            <a:ext cx="10931835" cy="4270248"/>
+            <a:off x="5349240" y="2617506"/>
+            <a:ext cx="6659575" cy="2601397"/>
           </a:xfrm>
           <a:prstGeom prst="rect">
             <a:avLst/>
@@ -15362,14 +15883,14 @@
       </p:pic>
       <p:sp>
         <p:nvSpPr>
-          <p:cNvPr id="5" name="Text 2"/>
+          <p:cNvPr id="6" name="Text 3"/>
           <p:cNvSpPr/>
           <p:nvPr/>
         </p:nvSpPr>
         <p:spPr>
           <a:xfrm>
-            <a:off x="457200" y="6089904"/>
-            <a:ext cx="11277295" cy="347472"/>
+            <a:off x="5349240" y="6089904"/>
+            <a:ext cx="6659575" cy="347472"/>
           </a:xfrm>
           <a:prstGeom prst="rect">
             <a:avLst/>
@@ -15385,7 +15906,7 @@
               <a:buNone/>
             </a:pPr>
             <a:r>
-              <a:rPr lang="en-US" sz="1800" i="1" dirty="0">
+              <a:rPr lang="en-US" sz="1600" i="1" dirty="0">
                 <a:solidFill>
                   <a:srgbClr val="555555"/>
                 </a:solidFill>
@@ -15393,9 +15914,9 @@
                 <a:ea typeface="Times New Roman" pitchFamily="34" charset="-122"/>
                 <a:cs typeface="Times New Roman" pitchFamily="34" charset="-120"/>
               </a:rPr>
-              <a:t>Illustration: dependency ratio</a:t>
-            </a:r>
-            <a:endParaRPr lang="en-US" sz="1800" dirty="0"/>
+              <a:t>Illustration: UK, 1971</a:t>
+            </a:r>
+            <a:endParaRPr lang="en-US" sz="1600" dirty="0"/>
           </a:p>
         </p:txBody>
       </p:sp>
@@ -15505,7 +16026,7 @@
                 <a:ea typeface="Calibri" pitchFamily="34" charset="-122"/>
                 <a:cs typeface="Calibri" pitchFamily="34" charset="-120"/>
               </a:rPr>
-              <a:t>FORMATIVE EVALUATION</a:t>
+              <a:t>BOARD SUMMARY</a:t>
             </a:r>
             <a:endParaRPr lang="en-US" sz="1400" dirty="0"/>
           </a:p>
@@ -15528,7 +16049,7 @@
         <p:spPr>
           <a:xfrm>
             <a:off x="0" y="658368"/>
-            <a:ext cx="5120640" cy="5833872"/>
+            <a:ext cx="3840480" cy="5833872"/>
           </a:xfrm>
           <a:prstGeom prst="rect">
             <a:avLst/>
@@ -15543,8 +16064,8 @@
         </p:nvSpPr>
         <p:spPr>
           <a:xfrm>
-            <a:off x="5349240" y="1005840"/>
-            <a:ext cx="6522415" cy="731520"/>
+            <a:off x="4069080" y="1005840"/>
+            <a:ext cx="7802575" cy="731520"/>
           </a:xfrm>
           <a:prstGeom prst="rect">
             <a:avLst/>
@@ -15570,7 +16091,7 @@
                 <a:ea typeface="Times New Roman" pitchFamily="34" charset="-122"/>
                 <a:cs typeface="Times New Roman" pitchFamily="34" charset="-120"/>
               </a:rPr>
-              <a:t>Evaluation 1</a:t>
+              <a:t>2. Worked Examples</a:t>
             </a:r>
             <a:endParaRPr lang="en-US" sz="3600" dirty="0"/>
           </a:p>
@@ -15584,8 +16105,8 @@
         </p:nvSpPr>
         <p:spPr>
           <a:xfrm>
-            <a:off x="5349240" y="1783080"/>
-            <a:ext cx="6522415" cy="4663440"/>
+            <a:off x="4069080" y="1783080"/>
+            <a:ext cx="7802575" cy="4663440"/>
           </a:xfrm>
           <a:prstGeom prst="rect">
             <a:avLst/>
@@ -15604,7 +16125,7 @@
               <a:buNone/>
             </a:pPr>
             <a:r>
-              <a:rPr lang="en-US" sz="4000" dirty="0">
+              <a:rPr lang="en-US" sz="4000" b="1" dirty="0">
                 <a:solidFill>
                   <a:srgbClr val="111111"/>
                 </a:solidFill>
@@ -15612,7 +16133,61 @@
                 <a:ea typeface="Times New Roman" pitchFamily="34" charset="-122"/>
                 <a:cs typeface="Times New Roman" pitchFamily="34" charset="-120"/>
               </a:rPr>
-              <a:t>A town has 3,000 aged 0–14, 400 aged 65+ and 4,600 aged 15–64. Find the dependency ratio.</a:t>
+              <a:t>Interpretation of example 2: </a:t>
+            </a:r>
+            <a:pPr algn="l" indent="0" marL="0">
+              <a:spcAft>
+                <a:spcPts val="800"/>
+              </a:spcAft>
+              <a:buNone/>
+            </a:pPr>
+            <a:r>
+              <a:rPr lang="en-US" sz="4000" dirty="0">
+                <a:solidFill>
+                  <a:srgbClr val="111111"/>
+                </a:solidFill>
+                <a:latin typeface="Times New Roman" pitchFamily="34" charset="0"/>
+                <a:ea typeface="Times New Roman" pitchFamily="34" charset="-122"/>
+                <a:cs typeface="Times New Roman" pitchFamily="34" charset="-120"/>
+              </a:rPr>
+              <a:t>For every 100 people of working age, there were about 65 dependants.</a:t>
+            </a:r>
+            <a:endParaRPr lang="en-US" sz="4000" dirty="0"/>
+          </a:p>
+          <a:p>
+            <a:pPr algn="l" indent="0" marL="0">
+              <a:spcAft>
+                <a:spcPts val="800"/>
+              </a:spcAft>
+              <a:buNone/>
+            </a:pPr>
+            <a:r>
+              <a:rPr lang="en-US" sz="4000" b="1" dirty="0">
+                <a:solidFill>
+                  <a:srgbClr val="111111"/>
+                </a:solidFill>
+                <a:latin typeface="Times New Roman" pitchFamily="34" charset="0"/>
+                <a:ea typeface="Times New Roman" pitchFamily="34" charset="-122"/>
+                <a:cs typeface="Times New Roman" pitchFamily="34" charset="-120"/>
+              </a:rPr>
+              <a:t>Example 3: </a:t>
+            </a:r>
+            <a:pPr algn="l" indent="0" marL="0">
+              <a:spcAft>
+                <a:spcPts val="800"/>
+              </a:spcAft>
+              <a:buNone/>
+            </a:pPr>
+            <a:r>
+              <a:rPr lang="en-US" sz="4000" dirty="0">
+                <a:solidFill>
+                  <a:srgbClr val="111111"/>
+                </a:solidFill>
+                <a:latin typeface="Times New Roman" pitchFamily="34" charset="0"/>
+                <a:ea typeface="Times New Roman" pitchFamily="34" charset="-122"/>
+                <a:cs typeface="Times New Roman" pitchFamily="34" charset="-120"/>
+              </a:rPr>
+              <a:t>6,000 children, 2,000 elderly and 10,000 adults: (6,000 + 2,000) ÷ 10,000 × 100 = 80 %.</a:t>
             </a:r>
             <a:endParaRPr lang="en-US" sz="4000" dirty="0"/>
           </a:p>
@@ -15724,15 +16299,135 @@
                 <a:ea typeface="Calibri" pitchFamily="34" charset="-122"/>
                 <a:cs typeface="Calibri" pitchFamily="34" charset="-120"/>
               </a:rPr>
-              <a:t>FORMATIVE EVALUATION</a:t>
+              <a:t>BOARD SUMMARY</a:t>
             </a:r>
             <a:endParaRPr lang="en-US" sz="1400" dirty="0"/>
+          </a:p>
+        </p:txBody>
+      </p:sp>
+      <p:sp>
+        <p:nvSpPr>
+          <p:cNvPr id="3" name="Text 1"/>
+          <p:cNvSpPr/>
+          <p:nvPr/>
+        </p:nvSpPr>
+        <p:spPr>
+          <a:xfrm>
+            <a:off x="365760" y="1005840"/>
+            <a:ext cx="11460175" cy="731520"/>
+          </a:xfrm>
+          <a:prstGeom prst="rect">
+            <a:avLst/>
+          </a:prstGeom>
+          <a:noFill/>
+          <a:ln/>
+        </p:spPr>
+        <p:txBody>
+          <a:bodyPr wrap="square" lIns="0" tIns="0" rIns="0" bIns="0" rtlCol="0" anchor="ctr">
+            <a:normAutofit/>
+          </a:bodyPr>
+          <a:lstStyle/>
+          <a:p>
+            <a:pPr algn="ctr" indent="0" marL="0">
+              <a:buNone/>
+            </a:pPr>
+            <a:r>
+              <a:rPr lang="en-US" sz="3600" b="1" dirty="0">
+                <a:solidFill>
+                  <a:srgbClr val="990011"/>
+                </a:solidFill>
+                <a:latin typeface="Times New Roman" pitchFamily="34" charset="0"/>
+                <a:ea typeface="Times New Roman" pitchFamily="34" charset="-122"/>
+                <a:cs typeface="Times New Roman" pitchFamily="34" charset="-120"/>
+              </a:rPr>
+              <a:t>3. Interpretation of the Results</a:t>
+            </a:r>
+            <a:endParaRPr lang="en-US" sz="3600" dirty="0"/>
+          </a:p>
+        </p:txBody>
+      </p:sp>
+      <p:sp>
+        <p:nvSpPr>
+          <p:cNvPr id="4" name="Text 2"/>
+          <p:cNvSpPr/>
+          <p:nvPr/>
+        </p:nvSpPr>
+        <p:spPr>
+          <a:xfrm>
+            <a:off x="365760" y="1783080"/>
+            <a:ext cx="4846320" cy="4617720"/>
+          </a:xfrm>
+          <a:prstGeom prst="rect">
+            <a:avLst/>
+          </a:prstGeom>
+          <a:noFill/>
+          <a:ln/>
+        </p:spPr>
+        <p:txBody>
+          <a:bodyPr wrap="square" lIns="0" tIns="0" rIns="0" bIns="0" rtlCol="0" anchor="t"/>
+          <a:lstStyle/>
+          <a:p>
+            <a:pPr algn="l" indent="0" marL="0">
+              <a:spcAft>
+                <a:spcPts val="800"/>
+              </a:spcAft>
+              <a:buNone/>
+            </a:pPr>
+            <a:r>
+              <a:rPr lang="en-US" sz="3200" i="1" dirty="0">
+                <a:solidFill>
+                  <a:srgbClr val="111111"/>
+                </a:solidFill>
+                <a:latin typeface="Times New Roman" pitchFamily="34" charset="0"/>
+                <a:ea typeface="Times New Roman" pitchFamily="34" charset="-122"/>
+                <a:cs typeface="Times New Roman" pitchFamily="34" charset="-120"/>
+              </a:rPr>
+              <a:t>The results of the dependency ratio are interpreted as follows:</a:t>
+            </a:r>
+            <a:endParaRPr lang="en-US" sz="3200" dirty="0"/>
+          </a:p>
+          <a:p>
+            <a:pPr algn="l" indent="0" marL="0">
+              <a:spcAft>
+                <a:spcPts val="800"/>
+              </a:spcAft>
+              <a:buNone/>
+            </a:pPr>
+            <a:r>
+              <a:rPr lang="en-US" sz="3200" b="1" dirty="0">
+                <a:solidFill>
+                  <a:srgbClr val="111111"/>
+                </a:solidFill>
+                <a:latin typeface="Times New Roman" pitchFamily="34" charset="0"/>
+                <a:ea typeface="Times New Roman" pitchFamily="34" charset="-122"/>
+                <a:cs typeface="Times New Roman" pitchFamily="34" charset="-120"/>
+              </a:rPr>
+              <a:t>High ratio: </a:t>
+            </a:r>
+            <a:pPr algn="l" indent="0" marL="0">
+              <a:spcAft>
+                <a:spcPts val="800"/>
+              </a:spcAft>
+              <a:buNone/>
+            </a:pPr>
+            <a:r>
+              <a:rPr lang="en-US" sz="3200" dirty="0">
+                <a:solidFill>
+                  <a:srgbClr val="111111"/>
+                </a:solidFill>
+                <a:latin typeface="Times New Roman" pitchFamily="34" charset="0"/>
+                <a:ea typeface="Times New Roman" pitchFamily="34" charset="-122"/>
+                <a:cs typeface="Times New Roman" pitchFamily="34" charset="-120"/>
+              </a:rPr>
+              <a:t>A ratio close to or above 80–100 % means a heavy burden on workers, common in developing countries.</a:t>
+            </a:r>
+            <a:endParaRPr lang="en-US" sz="3200" dirty="0"/>
           </a:p>
         </p:txBody>
       </p:sp>
       <p:pic>
         <p:nvPicPr>
-          <p:cNvPr id="3" name="Image 0" descr="/home/claude/f4/img/minesec_sheet.png">    </p:cNvPr>
+          <p:cNvPr id="5" name="Image 0" descr="/home/claude/f4/img/v2/youth_ageing_big.png">    </p:cNvPr>
           <p:cNvPicPr>
             <a:picLocks noChangeAspect="1"/>
           </p:cNvPicPr>
@@ -15746,8 +16441,8 @@
         </p:blipFill>
         <p:spPr>
           <a:xfrm>
-            <a:off x="0" y="658368"/>
-            <a:ext cx="5120640" cy="5833872"/>
+            <a:off x="5349240" y="2461422"/>
+            <a:ext cx="6659575" cy="2913564"/>
           </a:xfrm>
           <a:prstGeom prst="rect">
             <a:avLst/>
@@ -15756,14 +16451,14 @@
       </p:pic>
       <p:sp>
         <p:nvSpPr>
-          <p:cNvPr id="4" name="Text 1"/>
+          <p:cNvPr id="6" name="Text 3"/>
           <p:cNvSpPr/>
           <p:nvPr/>
         </p:nvSpPr>
         <p:spPr>
           <a:xfrm>
-            <a:off x="5349240" y="1005840"/>
-            <a:ext cx="6522415" cy="731520"/>
+            <a:off x="5349240" y="6089904"/>
+            <a:ext cx="6659575" cy="347472"/>
           </a:xfrm>
           <a:prstGeom prst="rect">
             <a:avLst/>
@@ -15772,68 +16467,24 @@
           <a:ln/>
         </p:spPr>
         <p:txBody>
-          <a:bodyPr wrap="square" lIns="0" tIns="0" rIns="0" bIns="0" rtlCol="0" anchor="ctr">
-            <a:normAutofit/>
-          </a:bodyPr>
+          <a:bodyPr wrap="square" lIns="0" tIns="0" rIns="0" bIns="0" rtlCol="0" anchor="ctr"/>
           <a:lstStyle/>
           <a:p>
             <a:pPr algn="ctr" indent="0" marL="0">
               <a:buNone/>
             </a:pPr>
             <a:r>
-              <a:rPr lang="en-US" sz="3600" b="1" dirty="0">
-                <a:solidFill>
-                  <a:srgbClr val="990011"/>
+              <a:rPr lang="en-US" sz="1600" i="1" dirty="0">
+                <a:solidFill>
+                  <a:srgbClr val="555555"/>
                 </a:solidFill>
                 <a:latin typeface="Times New Roman" pitchFamily="34" charset="0"/>
                 <a:ea typeface="Times New Roman" pitchFamily="34" charset="-122"/>
                 <a:cs typeface="Times New Roman" pitchFamily="34" charset="-120"/>
               </a:rPr>
-              <a:t>Expected Answer</a:t>
-            </a:r>
-            <a:endParaRPr lang="en-US" sz="3600" dirty="0"/>
-          </a:p>
-        </p:txBody>
-      </p:sp>
-      <p:sp>
-        <p:nvSpPr>
-          <p:cNvPr id="5" name="Text 2"/>
-          <p:cNvSpPr/>
-          <p:nvPr/>
-        </p:nvSpPr>
-        <p:spPr>
-          <a:xfrm>
-            <a:off x="5349240" y="1783080"/>
-            <a:ext cx="6522415" cy="4663440"/>
-          </a:xfrm>
-          <a:prstGeom prst="rect">
-            <a:avLst/>
-          </a:prstGeom>
-          <a:noFill/>
-          <a:ln/>
-        </p:spPr>
-        <p:txBody>
-          <a:bodyPr wrap="square" lIns="0" tIns="0" rIns="0" bIns="0" rtlCol="0" anchor="t"/>
-          <a:lstStyle/>
-          <a:p>
-            <a:pPr algn="l" indent="0" marL="0">
-              <a:spcAft>
-                <a:spcPts val="800"/>
-              </a:spcAft>
-              <a:buNone/>
-            </a:pPr>
-            <a:r>
-              <a:rPr lang="en-US" sz="4000" dirty="0">
-                <a:solidFill>
-                  <a:srgbClr val="111111"/>
-                </a:solidFill>
-                <a:latin typeface="Times New Roman" pitchFamily="34" charset="0"/>
-                <a:ea typeface="Times New Roman" pitchFamily="34" charset="-122"/>
-                <a:cs typeface="Times New Roman" pitchFamily="34" charset="-120"/>
-              </a:rPr>
-              <a:t>(3,000 + 400) ÷ 4,600 × 100 ≈ 74.</a:t>
-            </a:r>
-            <a:endParaRPr lang="en-US" sz="4000" dirty="0"/>
+              <a:t>Illustration: young and old people</a:t>
+            </a:r>
+            <a:endParaRPr lang="en-US" sz="1600" dirty="0"/>
           </a:p>
         </p:txBody>
       </p:sp>
@@ -15943,7 +16594,7 @@
                 <a:ea typeface="Calibri" pitchFamily="34" charset="-122"/>
                 <a:cs typeface="Calibri" pitchFamily="34" charset="-120"/>
               </a:rPr>
-              <a:t>FORMATIVE EVALUATION</a:t>
+              <a:t>BOARD SUMMARY</a:t>
             </a:r>
             <a:endParaRPr lang="en-US" sz="1400" dirty="0"/>
           </a:p>
@@ -15966,7 +16617,7 @@
         <p:spPr>
           <a:xfrm>
             <a:off x="0" y="658368"/>
-            <a:ext cx="5120640" cy="5833872"/>
+            <a:ext cx="3840480" cy="5833872"/>
           </a:xfrm>
           <a:prstGeom prst="rect">
             <a:avLst/>
@@ -15981,8 +16632,8 @@
         </p:nvSpPr>
         <p:spPr>
           <a:xfrm>
-            <a:off x="5349240" y="1005840"/>
-            <a:ext cx="6522415" cy="731520"/>
+            <a:off x="4069080" y="1005840"/>
+            <a:ext cx="7802575" cy="731520"/>
           </a:xfrm>
           <a:prstGeom prst="rect">
             <a:avLst/>
@@ -16008,7 +16659,7 @@
                 <a:ea typeface="Times New Roman" pitchFamily="34" charset="-122"/>
                 <a:cs typeface="Times New Roman" pitchFamily="34" charset="-120"/>
               </a:rPr>
-              <a:t>Evaluation 2</a:t>
+              <a:t>3. Interpretation of the Results</a:t>
             </a:r>
             <a:endParaRPr lang="en-US" sz="3600" dirty="0"/>
           </a:p>
@@ -16022,8 +16673,8 @@
         </p:nvSpPr>
         <p:spPr>
           <a:xfrm>
-            <a:off x="5349240" y="1783080"/>
-            <a:ext cx="6522415" cy="4663440"/>
+            <a:off x="4069080" y="1783080"/>
+            <a:ext cx="7802575" cy="4663440"/>
           </a:xfrm>
           <a:prstGeom prst="rect">
             <a:avLst/>
@@ -16042,7 +16693,7 @@
               <a:buNone/>
             </a:pPr>
             <a:r>
-              <a:rPr lang="en-US" sz="4000" dirty="0">
+              <a:rPr lang="en-US" sz="4000" b="1" dirty="0">
                 <a:solidFill>
                   <a:srgbClr val="111111"/>
                 </a:solidFill>
@@ -16050,7 +16701,61 @@
                 <a:ea typeface="Times New Roman" pitchFamily="34" charset="-122"/>
                 <a:cs typeface="Times New Roman" pitchFamily="34" charset="-120"/>
               </a:rPr>
-              <a:t>What does a high youth dependency ratio mean for planning?</a:t>
+              <a:t>Cameroon: </a:t>
+            </a:r>
+            <a:pPr algn="l" indent="0" marL="0">
+              <a:spcAft>
+                <a:spcPts val="800"/>
+              </a:spcAft>
+              <a:buNone/>
+            </a:pPr>
+            <a:r>
+              <a:rPr lang="en-US" sz="4000" dirty="0">
+                <a:solidFill>
+                  <a:srgbClr val="111111"/>
+                </a:solidFill>
+                <a:latin typeface="Times New Roman" pitchFamily="34" charset="0"/>
+                <a:ea typeface="Times New Roman" pitchFamily="34" charset="-122"/>
+                <a:cs typeface="Times New Roman" pitchFamily="34" charset="-120"/>
+              </a:rPr>
+              <a:t>The ratio is about 80 %, mostly young dependants (about 42 % under 15 and 3 % over 65).</a:t>
+            </a:r>
+            <a:endParaRPr lang="en-US" sz="4000" dirty="0"/>
+          </a:p>
+          <a:p>
+            <a:pPr algn="l" indent="0" marL="0">
+              <a:spcAft>
+                <a:spcPts val="800"/>
+              </a:spcAft>
+              <a:buNone/>
+            </a:pPr>
+            <a:r>
+              <a:rPr lang="en-US" sz="4000" b="1" dirty="0">
+                <a:solidFill>
+                  <a:srgbClr val="111111"/>
+                </a:solidFill>
+                <a:latin typeface="Times New Roman" pitchFamily="34" charset="0"/>
+                <a:ea typeface="Times New Roman" pitchFamily="34" charset="-122"/>
+                <a:cs typeface="Times New Roman" pitchFamily="34" charset="-120"/>
+              </a:rPr>
+              <a:t>Low ratio: </a:t>
+            </a:r>
+            <a:pPr algn="l" indent="0" marL="0">
+              <a:spcAft>
+                <a:spcPts val="800"/>
+              </a:spcAft>
+              <a:buNone/>
+            </a:pPr>
+            <a:r>
+              <a:rPr lang="en-US" sz="4000" dirty="0">
+                <a:solidFill>
+                  <a:srgbClr val="111111"/>
+                </a:solidFill>
+                <a:latin typeface="Times New Roman" pitchFamily="34" charset="0"/>
+                <a:ea typeface="Times New Roman" pitchFamily="34" charset="-122"/>
+                <a:cs typeface="Times New Roman" pitchFamily="34" charset="-120"/>
+              </a:rPr>
+              <a:t>A ratio around 50 % means a large working population, which helps economic growth (demographic dividend).</a:t>
             </a:r>
             <a:endParaRPr lang="en-US" sz="4000" dirty="0"/>
           </a:p>
@@ -16162,7 +16867,7 @@
                 <a:ea typeface="Calibri" pitchFamily="34" charset="-122"/>
                 <a:cs typeface="Calibri" pitchFamily="34" charset="-120"/>
               </a:rPr>
-              <a:t>FORMATIVE EVALUATION</a:t>
+              <a:t>BOARD SUMMARY</a:t>
             </a:r>
             <a:endParaRPr lang="en-US" sz="1400" dirty="0"/>
           </a:p>
@@ -16227,7 +16932,7 @@
                 <a:ea typeface="Times New Roman" pitchFamily="34" charset="-122"/>
                 <a:cs typeface="Times New Roman" pitchFamily="34" charset="-120"/>
               </a:rPr>
-              <a:t>Expected Answer</a:t>
+              <a:t>3. Interpretation of the Results (continued)</a:t>
             </a:r>
             <a:endParaRPr lang="en-US" sz="3600" dirty="0"/>
           </a:p>
@@ -16261,7 +16966,7 @@
               <a:buNone/>
             </a:pPr>
             <a:r>
-              <a:rPr lang="en-US" sz="4000" dirty="0">
+              <a:rPr lang="en-US" sz="4000" b="1" dirty="0">
                 <a:solidFill>
                   <a:srgbClr val="111111"/>
                 </a:solidFill>
@@ -16269,7 +16974,24 @@
                 <a:ea typeface="Times New Roman" pitchFamily="34" charset="-122"/>
                 <a:cs typeface="Times New Roman" pitchFamily="34" charset="-120"/>
               </a:rPr>
-              <a:t>More schools and child health services are needed.</a:t>
+              <a:t>Ageing countries: </a:t>
+            </a:r>
+            <a:pPr algn="l" indent="0" marL="0">
+              <a:spcAft>
+                <a:spcPts val="800"/>
+              </a:spcAft>
+              <a:buNone/>
+            </a:pPr>
+            <a:r>
+              <a:rPr lang="en-US" sz="4000" dirty="0">
+                <a:solidFill>
+                  <a:srgbClr val="111111"/>
+                </a:solidFill>
+                <a:latin typeface="Times New Roman" pitchFamily="34" charset="0"/>
+                <a:ea typeface="Times New Roman" pitchFamily="34" charset="-122"/>
+                <a:cs typeface="Times New Roman" pitchFamily="34" charset="-120"/>
+              </a:rPr>
+              <a:t>In Japan and Europe, the ratio rises again because of the elderly.</a:t>
             </a:r>
             <a:endParaRPr lang="en-US" sz="4000" dirty="0"/>
           </a:p>
@@ -16381,7 +17103,7 @@
                 <a:ea typeface="Calibri" pitchFamily="34" charset="-122"/>
                 <a:cs typeface="Calibri" pitchFamily="34" charset="-120"/>
               </a:rPr>
-              <a:t>REMEDIATION</a:t>
+              <a:t>FORMATIVE EVALUATION</a:t>
             </a:r>
             <a:endParaRPr lang="en-US" sz="1400" dirty="0"/>
           </a:p>
@@ -16404,7 +17126,7 @@
         <p:spPr>
           <a:xfrm>
             <a:off x="0" y="658368"/>
-            <a:ext cx="2468880" cy="5833872"/>
+            <a:ext cx="5120640" cy="5833872"/>
           </a:xfrm>
           <a:prstGeom prst="rect">
             <a:avLst/>
@@ -16419,8 +17141,8 @@
         </p:nvSpPr>
         <p:spPr>
           <a:xfrm>
-            <a:off x="2697480" y="1005840"/>
-            <a:ext cx="9174175" cy="731520"/>
+            <a:off x="5349240" y="1005840"/>
+            <a:ext cx="6522415" cy="731520"/>
           </a:xfrm>
           <a:prstGeom prst="rect">
             <a:avLst/>
@@ -16446,7 +17168,7 @@
                 <a:ea typeface="Times New Roman" pitchFamily="34" charset="-122"/>
                 <a:cs typeface="Times New Roman" pitchFamily="34" charset="-120"/>
               </a:rPr>
-              <a:t>Remediation</a:t>
+              <a:t>Evaluation 1</a:t>
             </a:r>
             <a:endParaRPr lang="en-US" sz="3600" dirty="0"/>
           </a:p>
@@ -16460,8 +17182,8 @@
         </p:nvSpPr>
         <p:spPr>
           <a:xfrm>
-            <a:off x="2697480" y="1783080"/>
-            <a:ext cx="9174175" cy="4663440"/>
+            <a:off x="5349240" y="1783080"/>
+            <a:ext cx="6522415" cy="4663440"/>
           </a:xfrm>
           <a:prstGeom prst="rect">
             <a:avLst/>
@@ -16480,7 +17202,7 @@
               <a:buNone/>
             </a:pPr>
             <a:r>
-              <a:rPr lang="en-US" sz="4000" b="1" dirty="0">
+              <a:rPr lang="en-US" sz="4000" dirty="0">
                 <a:solidFill>
                   <a:srgbClr val="111111"/>
                 </a:solidFill>
@@ -16488,73 +17210,7 @@
                 <a:ea typeface="Times New Roman" pitchFamily="34" charset="-122"/>
                 <a:cs typeface="Times New Roman" pitchFamily="34" charset="-120"/>
               </a:rPr>
-              <a:t>Fill in the blanks:</a:t>
-            </a:r>
-            <a:endParaRPr lang="en-US" sz="4000" dirty="0"/>
-          </a:p>
-          <a:p>
-            <a:pPr algn="l" marL="342900" indent="-342900">
-              <a:spcAft>
-                <a:spcPts val="800"/>
-              </a:spcAft>
-              <a:buSzPct val="100000"/>
-              <a:buFont typeface="+mj-lt"/>
-              <a:buAutoNum type="arabicPeriod" startAt="1"/>
-            </a:pPr>
-            <a:r>
-              <a:rPr lang="en-US" sz="4000" dirty="0">
-                <a:solidFill>
-                  <a:srgbClr val="111111"/>
-                </a:solidFill>
-                <a:latin typeface="Times New Roman" pitchFamily="34" charset="0"/>
-                <a:ea typeface="Times New Roman" pitchFamily="34" charset="-122"/>
-                <a:cs typeface="Times New Roman" pitchFamily="34" charset="-120"/>
-              </a:rPr>
-              <a:t>Males are drawn on the ______ side.</a:t>
-            </a:r>
-            <a:endParaRPr lang="en-US" sz="4000" dirty="0"/>
-          </a:p>
-          <a:p>
-            <a:pPr algn="l" marL="342900" indent="-342900">
-              <a:spcAft>
-                <a:spcPts val="800"/>
-              </a:spcAft>
-              <a:buSzPct val="100000"/>
-              <a:buFont typeface="+mj-lt"/>
-              <a:buAutoNum type="arabicPeriod" startAt="1"/>
-            </a:pPr>
-            <a:r>
-              <a:rPr lang="en-US" sz="4000" dirty="0">
-                <a:solidFill>
-                  <a:srgbClr val="111111"/>
-                </a:solidFill>
-                <a:latin typeface="Times New Roman" pitchFamily="34" charset="0"/>
-                <a:ea typeface="Times New Roman" pitchFamily="34" charset="-122"/>
-                <a:cs typeface="Times New Roman" pitchFamily="34" charset="-120"/>
-              </a:rPr>
-              <a:t>The youngest group is at the ______.</a:t>
-            </a:r>
-            <a:endParaRPr lang="en-US" sz="4000" dirty="0"/>
-          </a:p>
-          <a:p>
-            <a:pPr algn="l" marL="342900" indent="-342900">
-              <a:spcAft>
-                <a:spcPts val="800"/>
-              </a:spcAft>
-              <a:buSzPct val="100000"/>
-              <a:buFont typeface="+mj-lt"/>
-              <a:buAutoNum type="arabicPeriod" startAt="1"/>
-            </a:pPr>
-            <a:r>
-              <a:rPr lang="en-US" sz="4000" dirty="0">
-                <a:solidFill>
-                  <a:srgbClr val="111111"/>
-                </a:solidFill>
-                <a:latin typeface="Times New Roman" pitchFamily="34" charset="0"/>
-                <a:ea typeface="Times New Roman" pitchFamily="34" charset="-122"/>
-                <a:cs typeface="Times New Roman" pitchFamily="34" charset="-120"/>
-              </a:rPr>
-              <a:t>Dependants ÷ workers × ______ gives the ratio.</a:t>
+              <a:t>Calculate the dependency ratio of a population with 4,500 children, 500 elderly and 5,000 adults.</a:t>
             </a:r>
             <a:endParaRPr lang="en-US" sz="4000" dirty="0"/>
           </a:p>
@@ -16666,7 +17322,7 @@
                 <a:ea typeface="Calibri" pitchFamily="34" charset="-122"/>
                 <a:cs typeface="Calibri" pitchFamily="34" charset="-120"/>
               </a:rPr>
-              <a:t>HOMEWORK</a:t>
+              <a:t>FORMATIVE EVALUATION</a:t>
             </a:r>
             <a:endParaRPr lang="en-US" sz="1400" dirty="0"/>
           </a:p>
@@ -16731,7 +17387,7 @@
                 <a:ea typeface="Times New Roman" pitchFamily="34" charset="-122"/>
                 <a:cs typeface="Times New Roman" pitchFamily="34" charset="-120"/>
               </a:rPr>
-              <a:t>Homework</a:t>
+              <a:t>Expected Answer</a:t>
             </a:r>
             <a:endParaRPr lang="en-US" sz="3600" dirty="0"/>
           </a:p>
@@ -16773,7 +17429,7 @@
                 <a:ea typeface="Times New Roman" pitchFamily="34" charset="-122"/>
                 <a:cs typeface="Times New Roman" pitchFamily="34" charset="-120"/>
               </a:rPr>
-              <a:t>Draw the pyramid of the town on graph paper and write a short report.</a:t>
+              <a:t>(4,500 + 500) ÷ 5,000 × 100 = 100 %.</a:t>
             </a:r>
             <a:endParaRPr lang="en-US" sz="4000" dirty="0"/>
           </a:p>
@@ -16885,7 +17541,7 @@
                 <a:ea typeface="Calibri" pitchFamily="34" charset="-122"/>
                 <a:cs typeface="Calibri" pitchFamily="34" charset="-120"/>
               </a:rPr>
-              <a:t>NEXT LESSON</a:t>
+              <a:t>FORMATIVE EVALUATION</a:t>
             </a:r>
             <a:endParaRPr lang="en-US" sz="1400" dirty="0"/>
           </a:p>
@@ -16950,7 +17606,7 @@
                 <a:ea typeface="Times New Roman" pitchFamily="34" charset="-122"/>
                 <a:cs typeface="Times New Roman" pitchFamily="34" charset="-120"/>
               </a:rPr>
-              <a:t>Next Lesson</a:t>
+              <a:t>Evaluation 2</a:t>
             </a:r>
             <a:endParaRPr lang="en-US" sz="3600" dirty="0"/>
           </a:p>
@@ -16974,17 +17630,17 @@
           <a:ln/>
         </p:spPr>
         <p:txBody>
-          <a:bodyPr wrap="square" lIns="0" tIns="0" rIns="0" bIns="0" rtlCol="0" anchor="ctr"/>
-          <a:lstStyle/>
-          <a:p>
-            <a:pPr algn="ctr" indent="0" marL="0">
+          <a:bodyPr wrap="square" lIns="0" tIns="0" rIns="0" bIns="0" rtlCol="0" anchor="t"/>
+          <a:lstStyle/>
+          <a:p>
+            <a:pPr algn="l" indent="0" marL="0">
               <a:spcAft>
                 <a:spcPts val="800"/>
               </a:spcAft>
               <a:buNone/>
             </a:pPr>
             <a:r>
-              <a:rPr lang="en-US" sz="4000" b="1" dirty="0">
+              <a:rPr lang="en-US" sz="4000" dirty="0">
                 <a:solidFill>
                   <a:srgbClr val="111111"/>
                 </a:solidFill>
@@ -16992,27 +17648,7 @@
                 <a:ea typeface="Times New Roman" pitchFamily="34" charset="-122"/>
                 <a:cs typeface="Times New Roman" pitchFamily="34" charset="-120"/>
               </a:rPr>
-              <a:t>Our next lesson will be on:</a:t>
-            </a:r>
-            <a:endParaRPr lang="en-US" sz="4000" dirty="0"/>
-          </a:p>
-          <a:p>
-            <a:pPr algn="ctr" indent="0" marL="0">
-              <a:spcAft>
-                <a:spcPts val="800"/>
-              </a:spcAft>
-              <a:buNone/>
-            </a:pPr>
-            <a:r>
-              <a:rPr lang="en-US" sz="4000" b="1" dirty="0">
-                <a:solidFill>
-                  <a:srgbClr val="990011"/>
-                </a:solidFill>
-                <a:latin typeface="Times New Roman" pitchFamily="34" charset="0"/>
-                <a:ea typeface="Times New Roman" pitchFamily="34" charset="-122"/>
-                <a:cs typeface="Times New Roman" pitchFamily="34" charset="-120"/>
-              </a:rPr>
-              <a:t>Lesson 8: Historical Evolution of World Population</a:t>
+              <a:t>Interpret a dependency ratio of 100 %.</a:t>
             </a:r>
             <a:endParaRPr lang="en-US" sz="4000" dirty="0"/>
           </a:p>
@@ -17124,6 +17760,1187 @@
                 <a:ea typeface="Calibri" pitchFamily="34" charset="-122"/>
                 <a:cs typeface="Calibri" pitchFamily="34" charset="-120"/>
               </a:rPr>
+              <a:t>FORMATIVE EVALUATION</a:t>
+            </a:r>
+            <a:endParaRPr lang="en-US" sz="1400" dirty="0"/>
+          </a:p>
+        </p:txBody>
+      </p:sp>
+      <p:pic>
+        <p:nvPicPr>
+          <p:cNvPr id="3" name="Image 0" descr="/home/claude/f4/img/minesec_sheet.png">    </p:cNvPr>
+          <p:cNvPicPr>
+            <a:picLocks noChangeAspect="1"/>
+          </p:cNvPicPr>
+          <p:nvPr/>
+        </p:nvPicPr>
+        <p:blipFill>
+          <a:blip r:embed="rId1"/>
+          <a:stretch>
+            <a:fillRect/>
+          </a:stretch>
+        </p:blipFill>
+        <p:spPr>
+          <a:xfrm>
+            <a:off x="0" y="658368"/>
+            <a:ext cx="5120640" cy="5833872"/>
+          </a:xfrm>
+          <a:prstGeom prst="rect">
+            <a:avLst/>
+          </a:prstGeom>
+        </p:spPr>
+      </p:pic>
+      <p:sp>
+        <p:nvSpPr>
+          <p:cNvPr id="4" name="Text 1"/>
+          <p:cNvSpPr/>
+          <p:nvPr/>
+        </p:nvSpPr>
+        <p:spPr>
+          <a:xfrm>
+            <a:off x="5349240" y="1005840"/>
+            <a:ext cx="6522415" cy="731520"/>
+          </a:xfrm>
+          <a:prstGeom prst="rect">
+            <a:avLst/>
+          </a:prstGeom>
+          <a:noFill/>
+          <a:ln/>
+        </p:spPr>
+        <p:txBody>
+          <a:bodyPr wrap="square" lIns="0" tIns="0" rIns="0" bIns="0" rtlCol="0" anchor="ctr">
+            <a:normAutofit/>
+          </a:bodyPr>
+          <a:lstStyle/>
+          <a:p>
+            <a:pPr algn="ctr" indent="0" marL="0">
+              <a:buNone/>
+            </a:pPr>
+            <a:r>
+              <a:rPr lang="en-US" sz="3600" b="1" dirty="0">
+                <a:solidFill>
+                  <a:srgbClr val="990011"/>
+                </a:solidFill>
+                <a:latin typeface="Times New Roman" pitchFamily="34" charset="0"/>
+                <a:ea typeface="Times New Roman" pitchFamily="34" charset="-122"/>
+                <a:cs typeface="Times New Roman" pitchFamily="34" charset="-120"/>
+              </a:rPr>
+              <a:t>Expected Answer</a:t>
+            </a:r>
+            <a:endParaRPr lang="en-US" sz="3600" dirty="0"/>
+          </a:p>
+        </p:txBody>
+      </p:sp>
+      <p:sp>
+        <p:nvSpPr>
+          <p:cNvPr id="5" name="Text 2"/>
+          <p:cNvSpPr/>
+          <p:nvPr/>
+        </p:nvSpPr>
+        <p:spPr>
+          <a:xfrm>
+            <a:off x="5349240" y="1783080"/>
+            <a:ext cx="6522415" cy="4663440"/>
+          </a:xfrm>
+          <a:prstGeom prst="rect">
+            <a:avLst/>
+          </a:prstGeom>
+          <a:noFill/>
+          <a:ln/>
+        </p:spPr>
+        <p:txBody>
+          <a:bodyPr wrap="square" lIns="0" tIns="0" rIns="0" bIns="0" rtlCol="0" anchor="t"/>
+          <a:lstStyle/>
+          <a:p>
+            <a:pPr algn="l" indent="0" marL="0">
+              <a:spcAft>
+                <a:spcPts val="800"/>
+              </a:spcAft>
+              <a:buNone/>
+            </a:pPr>
+            <a:r>
+              <a:rPr lang="en-US" sz="4000" dirty="0">
+                <a:solidFill>
+                  <a:srgbClr val="111111"/>
+                </a:solidFill>
+                <a:latin typeface="Times New Roman" pitchFamily="34" charset="0"/>
+                <a:ea typeface="Times New Roman" pitchFamily="34" charset="-122"/>
+                <a:cs typeface="Times New Roman" pitchFamily="34" charset="-120"/>
+              </a:rPr>
+              <a:t>There is one dependant for every person of working age.</a:t>
+            </a:r>
+            <a:endParaRPr lang="en-US" sz="4000" dirty="0"/>
+          </a:p>
+        </p:txBody>
+      </p:sp>
+      <p:sp>
+        <p:nvSpPr>
+          <p:cNvPr id="25" name="Slide Number Placeholder 0"/>
+          <p:cNvSpPr>
+            <a:spLocks noGrp="1"/>
+          </p:cNvSpPr>
+          <p:nvPr>
+            <p:ph type="sldNum" sz="quarter" idx="4294967295"/>
+          </p:nvPr>
+        </p:nvSpPr>
+        <p:spPr>
+          <a:xfrm>
+            <a:off x="27432" y="91440"/>
+            <a:ext cx="585216" cy="475488"/>
+          </a:xfrm>
+          <a:prstGeom prst="rect">
+            <a:avLst/>
+          </a:prstGeom>
+          <a:extLst>
+            <a:ext uri="{C572A759-6A51-4108-AA02-DFA0A04FC94B}">
+              <ma14:wrappingTextBoxFlag xmlns:ma14="http://schemas.microsoft.com/office/mac/drawingml/2011/main" val="0"/>
+            </a:ext>
+          </a:extLst>
+        </p:spPr>
+        <p:txBody>
+          <a:bodyPr/>
+          <a:lstStyle>
+            <a:lvl1pPr>
+              <a:defRPr sz="2000">
+                <a:solidFill>
+                  <a:srgbClr val="FFFFFF"/>
+                </a:solidFill>
+                <a:latin typeface="Calibri"/>
+                <a:ea typeface="Calibri"/>
+                <a:cs typeface="Calibri"/>
+              </a:defRPr>
+            </a:lvl1pPr>
+          </a:lstStyle>
+          <a:p>
+            <a:pPr algn="ctr"/>
+            <a:fld id="{F7021451-1387-4CA6-816F-3879F97B5CBC}" type="slidenum">
+              <a:rPr b="1" lang="en-US"/>
+              <a:t>49</a:t>
+            </a:fld>
+            <a:endParaRPr lang="en-US"/>
+          </a:p>
+        </p:txBody>
+      </p:sp>
+    </p:spTree>
+  </p:cSld>
+  <p:clrMapOvr>
+    <a:masterClrMapping/>
+  </p:clrMapOvr>
+</p:sld>
+</file>
+
+<file path=ppt/slides/slide5.xml><?xml version="1.0" encoding="utf-8"?>
+<p:sld xmlns:a="http://schemas.openxmlformats.org/drawingml/2006/main" xmlns:r="http://schemas.openxmlformats.org/officeDocument/2006/relationships" xmlns:p="http://schemas.openxmlformats.org/presentationml/2006/main">
+  <p:cSld name="Slide 5">
+    <p:spTree>
+      <p:nvGrpSpPr>
+        <p:cNvPr id="1" name=""/>
+        <p:cNvGrpSpPr/>
+        <p:nvPr/>
+      </p:nvGrpSpPr>
+      <p:grpSpPr>
+        <a:xfrm>
+          <a:off x="0" y="0"/>
+          <a:ext cx="0" cy="0"/>
+          <a:chOff x="0" y="0"/>
+          <a:chExt cx="0" cy="0"/>
+        </a:xfrm>
+      </p:grpSpPr>
+      <p:sp>
+        <p:nvSpPr>
+          <p:cNvPr id="2" name="Text 0"/>
+          <p:cNvSpPr/>
+          <p:nvPr/>
+        </p:nvSpPr>
+        <p:spPr>
+          <a:xfrm>
+            <a:off x="457200" y="713232"/>
+            <a:ext cx="11368735" cy="274320"/>
+          </a:xfrm>
+          <a:prstGeom prst="rect">
+            <a:avLst/>
+          </a:prstGeom>
+          <a:noFill/>
+          <a:ln/>
+        </p:spPr>
+        <p:txBody>
+          <a:bodyPr wrap="square" lIns="0" tIns="0" rIns="0" bIns="0" rtlCol="0" anchor="ctr"/>
+          <a:lstStyle/>
+          <a:p>
+            <a:pPr algn="r" indent="0" marL="0">
+              <a:buNone/>
+            </a:pPr>
+            <a:r>
+              <a:rPr lang="en-US" sz="1400" b="1" dirty="0">
+                <a:solidFill>
+                  <a:srgbClr val="1C3F6E"/>
+                </a:solidFill>
+                <a:latin typeface="Calibri" pitchFamily="34" charset="0"/>
+                <a:ea typeface="Calibri" pitchFamily="34" charset="-122"/>
+                <a:cs typeface="Calibri" pitchFamily="34" charset="-120"/>
+              </a:rPr>
+              <a:t>HOMEWORK CORRECTION</a:t>
+            </a:r>
+            <a:endParaRPr lang="en-US" sz="1400" dirty="0"/>
+          </a:p>
+        </p:txBody>
+      </p:sp>
+      <p:pic>
+        <p:nvPicPr>
+          <p:cNvPr id="3" name="Image 0" descr="/home/claude/f4/img/minesec_sheet.png">    </p:cNvPr>
+          <p:cNvPicPr>
+            <a:picLocks noChangeAspect="1"/>
+          </p:cNvPicPr>
+          <p:nvPr/>
+        </p:nvPicPr>
+        <p:blipFill>
+          <a:blip r:embed="rId1"/>
+          <a:stretch>
+            <a:fillRect/>
+          </a:stretch>
+        </p:blipFill>
+        <p:spPr>
+          <a:xfrm>
+            <a:off x="0" y="658368"/>
+            <a:ext cx="5120640" cy="5833872"/>
+          </a:xfrm>
+          <a:prstGeom prst="rect">
+            <a:avLst/>
+          </a:prstGeom>
+        </p:spPr>
+      </p:pic>
+      <p:sp>
+        <p:nvSpPr>
+          <p:cNvPr id="4" name="Text 1"/>
+          <p:cNvSpPr/>
+          <p:nvPr/>
+        </p:nvSpPr>
+        <p:spPr>
+          <a:xfrm>
+            <a:off x="5349240" y="1005840"/>
+            <a:ext cx="6522415" cy="731520"/>
+          </a:xfrm>
+          <a:prstGeom prst="rect">
+            <a:avLst/>
+          </a:prstGeom>
+          <a:noFill/>
+          <a:ln/>
+        </p:spPr>
+        <p:txBody>
+          <a:bodyPr wrap="square" lIns="0" tIns="0" rIns="0" bIns="0" rtlCol="0" anchor="ctr">
+            <a:normAutofit/>
+          </a:bodyPr>
+          <a:lstStyle/>
+          <a:p>
+            <a:pPr algn="ctr" indent="0" marL="0">
+              <a:buNone/>
+            </a:pPr>
+            <a:r>
+              <a:rPr lang="en-US" sz="3600" b="1" dirty="0">
+                <a:solidFill>
+                  <a:srgbClr val="990011"/>
+                </a:solidFill>
+                <a:latin typeface="Times New Roman" pitchFamily="34" charset="0"/>
+                <a:ea typeface="Times New Roman" pitchFamily="34" charset="-122"/>
+                <a:cs typeface="Times New Roman" pitchFamily="34" charset="-120"/>
+              </a:rPr>
+              <a:t>Correction: Possible Answer</a:t>
+            </a:r>
+            <a:endParaRPr lang="en-US" sz="3600" dirty="0"/>
+          </a:p>
+        </p:txBody>
+      </p:sp>
+      <p:sp>
+        <p:nvSpPr>
+          <p:cNvPr id="5" name="Text 2"/>
+          <p:cNvSpPr/>
+          <p:nvPr/>
+        </p:nvSpPr>
+        <p:spPr>
+          <a:xfrm>
+            <a:off x="5349240" y="1783080"/>
+            <a:ext cx="6522415" cy="4663440"/>
+          </a:xfrm>
+          <a:prstGeom prst="rect">
+            <a:avLst/>
+          </a:prstGeom>
+          <a:noFill/>
+          <a:ln/>
+        </p:spPr>
+        <p:txBody>
+          <a:bodyPr wrap="square" lIns="0" tIns="0" rIns="0" bIns="0" rtlCol="0" anchor="t"/>
+          <a:lstStyle/>
+          <a:p>
+            <a:pPr algn="l" indent="0" marL="0">
+              <a:spcAft>
+                <a:spcPts val="800"/>
+              </a:spcAft>
+              <a:buNone/>
+            </a:pPr>
+            <a:r>
+              <a:rPr lang="en-US" sz="4000" dirty="0">
+                <a:solidFill>
+                  <a:srgbClr val="111111"/>
+                </a:solidFill>
+                <a:latin typeface="Times New Roman" pitchFamily="34" charset="0"/>
+                <a:ea typeface="Times New Roman" pitchFamily="34" charset="-122"/>
+                <a:cs typeface="Times New Roman" pitchFamily="34" charset="-120"/>
+              </a:rPr>
+              <a:t>Dependency ratio = (people aged 0–14 + people aged 65 and over) ÷ people aged 15–64 × 100.</a:t>
+            </a:r>
+            <a:endParaRPr lang="en-US" sz="4000" dirty="0"/>
+          </a:p>
+        </p:txBody>
+      </p:sp>
+      <p:sp>
+        <p:nvSpPr>
+          <p:cNvPr id="25" name="Slide Number Placeholder 0"/>
+          <p:cNvSpPr>
+            <a:spLocks noGrp="1"/>
+          </p:cNvSpPr>
+          <p:nvPr>
+            <p:ph type="sldNum" sz="quarter" idx="4294967295"/>
+          </p:nvPr>
+        </p:nvSpPr>
+        <p:spPr>
+          <a:xfrm>
+            <a:off x="27432" y="91440"/>
+            <a:ext cx="585216" cy="475488"/>
+          </a:xfrm>
+          <a:prstGeom prst="rect">
+            <a:avLst/>
+          </a:prstGeom>
+          <a:extLst>
+            <a:ext uri="{C572A759-6A51-4108-AA02-DFA0A04FC94B}">
+              <ma14:wrappingTextBoxFlag xmlns:ma14="http://schemas.microsoft.com/office/mac/drawingml/2011/main" val="0"/>
+            </a:ext>
+          </a:extLst>
+        </p:spPr>
+        <p:txBody>
+          <a:bodyPr/>
+          <a:lstStyle>
+            <a:lvl1pPr>
+              <a:defRPr sz="2000">
+                <a:solidFill>
+                  <a:srgbClr val="FFFFFF"/>
+                </a:solidFill>
+                <a:latin typeface="Calibri"/>
+                <a:ea typeface="Calibri"/>
+                <a:cs typeface="Calibri"/>
+              </a:defRPr>
+            </a:lvl1pPr>
+          </a:lstStyle>
+          <a:p>
+            <a:pPr algn="ctr"/>
+            <a:fld id="{F7021451-1387-4CA6-816F-3879F97B5CBC}" type="slidenum">
+              <a:rPr b="1" lang="en-US"/>
+              <a:t>5</a:t>
+            </a:fld>
+            <a:endParaRPr lang="en-US"/>
+          </a:p>
+        </p:txBody>
+      </p:sp>
+    </p:spTree>
+  </p:cSld>
+  <p:clrMapOvr>
+    <a:masterClrMapping/>
+  </p:clrMapOvr>
+</p:sld>
+</file>
+
+<file path=ppt/slides/slide50.xml><?xml version="1.0" encoding="utf-8"?>
+<p:sld xmlns:a="http://schemas.openxmlformats.org/drawingml/2006/main" xmlns:r="http://schemas.openxmlformats.org/officeDocument/2006/relationships" xmlns:p="http://schemas.openxmlformats.org/presentationml/2006/main">
+  <p:cSld name="Slide 50">
+    <p:spTree>
+      <p:nvGrpSpPr>
+        <p:cNvPr id="1" name=""/>
+        <p:cNvGrpSpPr/>
+        <p:nvPr/>
+      </p:nvGrpSpPr>
+      <p:grpSpPr>
+        <a:xfrm>
+          <a:off x="0" y="0"/>
+          <a:ext cx="0" cy="0"/>
+          <a:chOff x="0" y="0"/>
+          <a:chExt cx="0" cy="0"/>
+        </a:xfrm>
+      </p:grpSpPr>
+      <p:sp>
+        <p:nvSpPr>
+          <p:cNvPr id="2" name="Text 0"/>
+          <p:cNvSpPr/>
+          <p:nvPr/>
+        </p:nvSpPr>
+        <p:spPr>
+          <a:xfrm>
+            <a:off x="457200" y="713232"/>
+            <a:ext cx="11368735" cy="274320"/>
+          </a:xfrm>
+          <a:prstGeom prst="rect">
+            <a:avLst/>
+          </a:prstGeom>
+          <a:noFill/>
+          <a:ln/>
+        </p:spPr>
+        <p:txBody>
+          <a:bodyPr wrap="square" lIns="0" tIns="0" rIns="0" bIns="0" rtlCol="0" anchor="ctr"/>
+          <a:lstStyle/>
+          <a:p>
+            <a:pPr algn="r" indent="0" marL="0">
+              <a:buNone/>
+            </a:pPr>
+            <a:r>
+              <a:rPr lang="en-US" sz="1400" b="1" dirty="0">
+                <a:solidFill>
+                  <a:srgbClr val="1C3F6E"/>
+                </a:solidFill>
+                <a:latin typeface="Calibri" pitchFamily="34" charset="0"/>
+                <a:ea typeface="Calibri" pitchFamily="34" charset="-122"/>
+                <a:cs typeface="Calibri" pitchFamily="34" charset="-120"/>
+              </a:rPr>
+              <a:t>REMEDIATION</a:t>
+            </a:r>
+            <a:endParaRPr lang="en-US" sz="1400" dirty="0"/>
+          </a:p>
+        </p:txBody>
+      </p:sp>
+      <p:pic>
+        <p:nvPicPr>
+          <p:cNvPr id="3" name="Image 0" descr="/home/claude/f4/img/minesec_sheet.png">    </p:cNvPr>
+          <p:cNvPicPr>
+            <a:picLocks noChangeAspect="1"/>
+          </p:cNvPicPr>
+          <p:nvPr/>
+        </p:nvPicPr>
+        <p:blipFill>
+          <a:blip r:embed="rId1"/>
+          <a:stretch>
+            <a:fillRect/>
+          </a:stretch>
+        </p:blipFill>
+        <p:spPr>
+          <a:xfrm>
+            <a:off x="0" y="658368"/>
+            <a:ext cx="2468880" cy="5833872"/>
+          </a:xfrm>
+          <a:prstGeom prst="rect">
+            <a:avLst/>
+          </a:prstGeom>
+        </p:spPr>
+      </p:pic>
+      <p:sp>
+        <p:nvSpPr>
+          <p:cNvPr id="4" name="Text 1"/>
+          <p:cNvSpPr/>
+          <p:nvPr/>
+        </p:nvSpPr>
+        <p:spPr>
+          <a:xfrm>
+            <a:off x="2697480" y="1005840"/>
+            <a:ext cx="9174175" cy="731520"/>
+          </a:xfrm>
+          <a:prstGeom prst="rect">
+            <a:avLst/>
+          </a:prstGeom>
+          <a:noFill/>
+          <a:ln/>
+        </p:spPr>
+        <p:txBody>
+          <a:bodyPr wrap="square" lIns="0" tIns="0" rIns="0" bIns="0" rtlCol="0" anchor="ctr">
+            <a:normAutofit/>
+          </a:bodyPr>
+          <a:lstStyle/>
+          <a:p>
+            <a:pPr algn="ctr" indent="0" marL="0">
+              <a:buNone/>
+            </a:pPr>
+            <a:r>
+              <a:rPr lang="en-US" sz="3600" b="1" dirty="0">
+                <a:solidFill>
+                  <a:srgbClr val="990011"/>
+                </a:solidFill>
+                <a:latin typeface="Times New Roman" pitchFamily="34" charset="0"/>
+                <a:ea typeface="Times New Roman" pitchFamily="34" charset="-122"/>
+                <a:cs typeface="Times New Roman" pitchFamily="34" charset="-120"/>
+              </a:rPr>
+              <a:t>Remediation</a:t>
+            </a:r>
+            <a:endParaRPr lang="en-US" sz="3600" dirty="0"/>
+          </a:p>
+        </p:txBody>
+      </p:sp>
+      <p:sp>
+        <p:nvSpPr>
+          <p:cNvPr id="5" name="Text 2"/>
+          <p:cNvSpPr/>
+          <p:nvPr/>
+        </p:nvSpPr>
+        <p:spPr>
+          <a:xfrm>
+            <a:off x="2697480" y="1783080"/>
+            <a:ext cx="9174175" cy="4663440"/>
+          </a:xfrm>
+          <a:prstGeom prst="rect">
+            <a:avLst/>
+          </a:prstGeom>
+          <a:noFill/>
+          <a:ln/>
+        </p:spPr>
+        <p:txBody>
+          <a:bodyPr wrap="square" lIns="0" tIns="0" rIns="0" bIns="0" rtlCol="0" anchor="t"/>
+          <a:lstStyle/>
+          <a:p>
+            <a:pPr algn="l" indent="0" marL="0">
+              <a:spcAft>
+                <a:spcPts val="800"/>
+              </a:spcAft>
+              <a:buNone/>
+            </a:pPr>
+            <a:r>
+              <a:rPr lang="en-US" sz="4000" b="1" dirty="0">
+                <a:solidFill>
+                  <a:srgbClr val="111111"/>
+                </a:solidFill>
+                <a:latin typeface="Times New Roman" pitchFamily="34" charset="0"/>
+                <a:ea typeface="Times New Roman" pitchFamily="34" charset="-122"/>
+                <a:cs typeface="Times New Roman" pitchFamily="34" charset="-120"/>
+              </a:rPr>
+              <a:t>Fill in the blanks:</a:t>
+            </a:r>
+            <a:endParaRPr lang="en-US" sz="4000" dirty="0"/>
+          </a:p>
+          <a:p>
+            <a:pPr algn="l" marL="342900" indent="-342900">
+              <a:spcAft>
+                <a:spcPts val="800"/>
+              </a:spcAft>
+              <a:buSzPct val="100000"/>
+              <a:buFont typeface="+mj-lt"/>
+              <a:buAutoNum type="arabicPeriod" startAt="1"/>
+            </a:pPr>
+            <a:r>
+              <a:rPr lang="en-US" sz="4000" dirty="0">
+                <a:solidFill>
+                  <a:srgbClr val="111111"/>
+                </a:solidFill>
+                <a:latin typeface="Times New Roman" pitchFamily="34" charset="0"/>
+                <a:ea typeface="Times New Roman" pitchFamily="34" charset="-122"/>
+                <a:cs typeface="Times New Roman" pitchFamily="34" charset="-120"/>
+              </a:rPr>
+              <a:t>Dependants are aged 0–14 and ______ and over.</a:t>
+            </a:r>
+            <a:endParaRPr lang="en-US" sz="4000" dirty="0"/>
+          </a:p>
+          <a:p>
+            <a:pPr algn="l" marL="342900" indent="-342900">
+              <a:spcAft>
+                <a:spcPts val="800"/>
+              </a:spcAft>
+              <a:buSzPct val="100000"/>
+              <a:buFont typeface="+mj-lt"/>
+              <a:buAutoNum type="arabicPeriod" startAt="1"/>
+            </a:pPr>
+            <a:r>
+              <a:rPr lang="en-US" sz="4000" dirty="0">
+                <a:solidFill>
+                  <a:srgbClr val="111111"/>
+                </a:solidFill>
+                <a:latin typeface="Times New Roman" pitchFamily="34" charset="0"/>
+                <a:ea typeface="Times New Roman" pitchFamily="34" charset="-122"/>
+                <a:cs typeface="Times New Roman" pitchFamily="34" charset="-120"/>
+              </a:rPr>
+              <a:t>The ratio is multiplied by ______.</a:t>
+            </a:r>
+            <a:endParaRPr lang="en-US" sz="4000" dirty="0"/>
+          </a:p>
+          <a:p>
+            <a:pPr algn="l" marL="342900" indent="-342900">
+              <a:spcAft>
+                <a:spcPts val="800"/>
+              </a:spcAft>
+              <a:buSzPct val="100000"/>
+              <a:buFont typeface="+mj-lt"/>
+              <a:buAutoNum type="arabicPeriod" startAt="1"/>
+            </a:pPr>
+            <a:r>
+              <a:rPr lang="en-US" sz="4000" dirty="0">
+                <a:solidFill>
+                  <a:srgbClr val="111111"/>
+                </a:solidFill>
+                <a:latin typeface="Times New Roman" pitchFamily="34" charset="0"/>
+                <a:ea typeface="Times New Roman" pitchFamily="34" charset="-122"/>
+                <a:cs typeface="Times New Roman" pitchFamily="34" charset="-120"/>
+              </a:rPr>
+              <a:t>A ratio of 65 % means 65 dependants for every ______ workers.</a:t>
+            </a:r>
+            <a:endParaRPr lang="en-US" sz="4000" dirty="0"/>
+          </a:p>
+        </p:txBody>
+      </p:sp>
+      <p:sp>
+        <p:nvSpPr>
+          <p:cNvPr id="25" name="Slide Number Placeholder 0"/>
+          <p:cNvSpPr>
+            <a:spLocks noGrp="1"/>
+          </p:cNvSpPr>
+          <p:nvPr>
+            <p:ph type="sldNum" sz="quarter" idx="4294967295"/>
+          </p:nvPr>
+        </p:nvSpPr>
+        <p:spPr>
+          <a:xfrm>
+            <a:off x="27432" y="91440"/>
+            <a:ext cx="585216" cy="475488"/>
+          </a:xfrm>
+          <a:prstGeom prst="rect">
+            <a:avLst/>
+          </a:prstGeom>
+          <a:extLst>
+            <a:ext uri="{C572A759-6A51-4108-AA02-DFA0A04FC94B}">
+              <ma14:wrappingTextBoxFlag xmlns:ma14="http://schemas.microsoft.com/office/mac/drawingml/2011/main" val="0"/>
+            </a:ext>
+          </a:extLst>
+        </p:spPr>
+        <p:txBody>
+          <a:bodyPr/>
+          <a:lstStyle>
+            <a:lvl1pPr>
+              <a:defRPr sz="2000">
+                <a:solidFill>
+                  <a:srgbClr val="FFFFFF"/>
+                </a:solidFill>
+                <a:latin typeface="Calibri"/>
+                <a:ea typeface="Calibri"/>
+                <a:cs typeface="Calibri"/>
+              </a:defRPr>
+            </a:lvl1pPr>
+          </a:lstStyle>
+          <a:p>
+            <a:pPr algn="ctr"/>
+            <a:fld id="{F7021451-1387-4CA6-816F-3879F97B5CBC}" type="slidenum">
+              <a:rPr b="1" lang="en-US"/>
+              <a:t>50</a:t>
+            </a:fld>
+            <a:endParaRPr lang="en-US"/>
+          </a:p>
+        </p:txBody>
+      </p:sp>
+    </p:spTree>
+  </p:cSld>
+  <p:clrMapOvr>
+    <a:masterClrMapping/>
+  </p:clrMapOvr>
+</p:sld>
+</file>
+
+<file path=ppt/slides/slide51.xml><?xml version="1.0" encoding="utf-8"?>
+<p:sld xmlns:a="http://schemas.openxmlformats.org/drawingml/2006/main" xmlns:r="http://schemas.openxmlformats.org/officeDocument/2006/relationships" xmlns:p="http://schemas.openxmlformats.org/presentationml/2006/main">
+  <p:cSld name="Slide 51">
+    <p:spTree>
+      <p:nvGrpSpPr>
+        <p:cNvPr id="1" name=""/>
+        <p:cNvGrpSpPr/>
+        <p:nvPr/>
+      </p:nvGrpSpPr>
+      <p:grpSpPr>
+        <a:xfrm>
+          <a:off x="0" y="0"/>
+          <a:ext cx="0" cy="0"/>
+          <a:chOff x="0" y="0"/>
+          <a:chExt cx="0" cy="0"/>
+        </a:xfrm>
+      </p:grpSpPr>
+      <p:sp>
+        <p:nvSpPr>
+          <p:cNvPr id="2" name="Text 0"/>
+          <p:cNvSpPr/>
+          <p:nvPr/>
+        </p:nvSpPr>
+        <p:spPr>
+          <a:xfrm>
+            <a:off x="457200" y="713232"/>
+            <a:ext cx="11368735" cy="274320"/>
+          </a:xfrm>
+          <a:prstGeom prst="rect">
+            <a:avLst/>
+          </a:prstGeom>
+          <a:noFill/>
+          <a:ln/>
+        </p:spPr>
+        <p:txBody>
+          <a:bodyPr wrap="square" lIns="0" tIns="0" rIns="0" bIns="0" rtlCol="0" anchor="ctr"/>
+          <a:lstStyle/>
+          <a:p>
+            <a:pPr algn="r" indent="0" marL="0">
+              <a:buNone/>
+            </a:pPr>
+            <a:r>
+              <a:rPr lang="en-US" sz="1400" b="1" dirty="0">
+                <a:solidFill>
+                  <a:srgbClr val="1C3F6E"/>
+                </a:solidFill>
+                <a:latin typeface="Calibri" pitchFamily="34" charset="0"/>
+                <a:ea typeface="Calibri" pitchFamily="34" charset="-122"/>
+                <a:cs typeface="Calibri" pitchFamily="34" charset="-120"/>
+              </a:rPr>
+              <a:t>HOMEWORK</a:t>
+            </a:r>
+            <a:endParaRPr lang="en-US" sz="1400" dirty="0"/>
+          </a:p>
+        </p:txBody>
+      </p:sp>
+      <p:pic>
+        <p:nvPicPr>
+          <p:cNvPr id="3" name="Image 0" descr="/home/claude/f4/img/minesec_sheet.png">    </p:cNvPr>
+          <p:cNvPicPr>
+            <a:picLocks noChangeAspect="1"/>
+          </p:cNvPicPr>
+          <p:nvPr/>
+        </p:nvPicPr>
+        <p:blipFill>
+          <a:blip r:embed="rId1"/>
+          <a:stretch>
+            <a:fillRect/>
+          </a:stretch>
+        </p:blipFill>
+        <p:spPr>
+          <a:xfrm>
+            <a:off x="0" y="658368"/>
+            <a:ext cx="5120640" cy="5833872"/>
+          </a:xfrm>
+          <a:prstGeom prst="rect">
+            <a:avLst/>
+          </a:prstGeom>
+        </p:spPr>
+      </p:pic>
+      <p:sp>
+        <p:nvSpPr>
+          <p:cNvPr id="4" name="Text 1"/>
+          <p:cNvSpPr/>
+          <p:nvPr/>
+        </p:nvSpPr>
+        <p:spPr>
+          <a:xfrm>
+            <a:off x="5349240" y="1005840"/>
+            <a:ext cx="6522415" cy="731520"/>
+          </a:xfrm>
+          <a:prstGeom prst="rect">
+            <a:avLst/>
+          </a:prstGeom>
+          <a:noFill/>
+          <a:ln/>
+        </p:spPr>
+        <p:txBody>
+          <a:bodyPr wrap="square" lIns="0" tIns="0" rIns="0" bIns="0" rtlCol="0" anchor="ctr">
+            <a:normAutofit/>
+          </a:bodyPr>
+          <a:lstStyle/>
+          <a:p>
+            <a:pPr algn="ctr" indent="0" marL="0">
+              <a:buNone/>
+            </a:pPr>
+            <a:r>
+              <a:rPr lang="en-US" sz="3600" b="1" dirty="0">
+                <a:solidFill>
+                  <a:srgbClr val="990011"/>
+                </a:solidFill>
+                <a:latin typeface="Times New Roman" pitchFamily="34" charset="0"/>
+                <a:ea typeface="Times New Roman" pitchFamily="34" charset="-122"/>
+                <a:cs typeface="Times New Roman" pitchFamily="34" charset="-120"/>
+              </a:rPr>
+              <a:t>Homework</a:t>
+            </a:r>
+            <a:endParaRPr lang="en-US" sz="3600" dirty="0"/>
+          </a:p>
+        </p:txBody>
+      </p:sp>
+      <p:sp>
+        <p:nvSpPr>
+          <p:cNvPr id="5" name="Text 2"/>
+          <p:cNvSpPr/>
+          <p:nvPr/>
+        </p:nvSpPr>
+        <p:spPr>
+          <a:xfrm>
+            <a:off x="5349240" y="1783080"/>
+            <a:ext cx="6522415" cy="4663440"/>
+          </a:xfrm>
+          <a:prstGeom prst="rect">
+            <a:avLst/>
+          </a:prstGeom>
+          <a:noFill/>
+          <a:ln/>
+        </p:spPr>
+        <p:txBody>
+          <a:bodyPr wrap="square" lIns="0" tIns="0" rIns="0" bIns="0" rtlCol="0" anchor="t"/>
+          <a:lstStyle/>
+          <a:p>
+            <a:pPr algn="l" indent="0" marL="0">
+              <a:spcAft>
+                <a:spcPts val="800"/>
+              </a:spcAft>
+              <a:buNone/>
+            </a:pPr>
+            <a:r>
+              <a:rPr lang="en-US" sz="4000" dirty="0">
+                <a:solidFill>
+                  <a:srgbClr val="111111"/>
+                </a:solidFill>
+                <a:latin typeface="Times New Roman" pitchFamily="34" charset="0"/>
+                <a:ea typeface="Times New Roman" pitchFamily="34" charset="-122"/>
+                <a:cs typeface="Times New Roman" pitchFamily="34" charset="-120"/>
+              </a:rPr>
+              <a:t>State the world population around 1800.</a:t>
+            </a:r>
+            <a:endParaRPr lang="en-US" sz="4000" dirty="0"/>
+          </a:p>
+        </p:txBody>
+      </p:sp>
+      <p:sp>
+        <p:nvSpPr>
+          <p:cNvPr id="25" name="Slide Number Placeholder 0"/>
+          <p:cNvSpPr>
+            <a:spLocks noGrp="1"/>
+          </p:cNvSpPr>
+          <p:nvPr>
+            <p:ph type="sldNum" sz="quarter" idx="4294967295"/>
+          </p:nvPr>
+        </p:nvSpPr>
+        <p:spPr>
+          <a:xfrm>
+            <a:off x="27432" y="91440"/>
+            <a:ext cx="585216" cy="475488"/>
+          </a:xfrm>
+          <a:prstGeom prst="rect">
+            <a:avLst/>
+          </a:prstGeom>
+          <a:extLst>
+            <a:ext uri="{C572A759-6A51-4108-AA02-DFA0A04FC94B}">
+              <ma14:wrappingTextBoxFlag xmlns:ma14="http://schemas.microsoft.com/office/mac/drawingml/2011/main" val="0"/>
+            </a:ext>
+          </a:extLst>
+        </p:spPr>
+        <p:txBody>
+          <a:bodyPr/>
+          <a:lstStyle>
+            <a:lvl1pPr>
+              <a:defRPr sz="2000">
+                <a:solidFill>
+                  <a:srgbClr val="FFFFFF"/>
+                </a:solidFill>
+                <a:latin typeface="Calibri"/>
+                <a:ea typeface="Calibri"/>
+                <a:cs typeface="Calibri"/>
+              </a:defRPr>
+            </a:lvl1pPr>
+          </a:lstStyle>
+          <a:p>
+            <a:pPr algn="ctr"/>
+            <a:fld id="{F7021451-1387-4CA6-816F-3879F97B5CBC}" type="slidenum">
+              <a:rPr b="1" lang="en-US"/>
+              <a:t>51</a:t>
+            </a:fld>
+            <a:endParaRPr lang="en-US"/>
+          </a:p>
+        </p:txBody>
+      </p:sp>
+    </p:spTree>
+  </p:cSld>
+  <p:clrMapOvr>
+    <a:masterClrMapping/>
+  </p:clrMapOvr>
+</p:sld>
+</file>
+
+<file path=ppt/slides/slide52.xml><?xml version="1.0" encoding="utf-8"?>
+<p:sld xmlns:a="http://schemas.openxmlformats.org/drawingml/2006/main" xmlns:r="http://schemas.openxmlformats.org/officeDocument/2006/relationships" xmlns:p="http://schemas.openxmlformats.org/presentationml/2006/main">
+  <p:cSld name="Slide 52">
+    <p:spTree>
+      <p:nvGrpSpPr>
+        <p:cNvPr id="1" name=""/>
+        <p:cNvGrpSpPr/>
+        <p:nvPr/>
+      </p:nvGrpSpPr>
+      <p:grpSpPr>
+        <a:xfrm>
+          <a:off x="0" y="0"/>
+          <a:ext cx="0" cy="0"/>
+          <a:chOff x="0" y="0"/>
+          <a:chExt cx="0" cy="0"/>
+        </a:xfrm>
+      </p:grpSpPr>
+      <p:sp>
+        <p:nvSpPr>
+          <p:cNvPr id="2" name="Text 0"/>
+          <p:cNvSpPr/>
+          <p:nvPr/>
+        </p:nvSpPr>
+        <p:spPr>
+          <a:xfrm>
+            <a:off x="457200" y="713232"/>
+            <a:ext cx="11368735" cy="274320"/>
+          </a:xfrm>
+          <a:prstGeom prst="rect">
+            <a:avLst/>
+          </a:prstGeom>
+          <a:noFill/>
+          <a:ln/>
+        </p:spPr>
+        <p:txBody>
+          <a:bodyPr wrap="square" lIns="0" tIns="0" rIns="0" bIns="0" rtlCol="0" anchor="ctr"/>
+          <a:lstStyle/>
+          <a:p>
+            <a:pPr algn="r" indent="0" marL="0">
+              <a:buNone/>
+            </a:pPr>
+            <a:r>
+              <a:rPr lang="en-US" sz="1400" b="1" dirty="0">
+                <a:solidFill>
+                  <a:srgbClr val="1C3F6E"/>
+                </a:solidFill>
+                <a:latin typeface="Calibri" pitchFamily="34" charset="0"/>
+                <a:ea typeface="Calibri" pitchFamily="34" charset="-122"/>
+                <a:cs typeface="Calibri" pitchFamily="34" charset="-120"/>
+              </a:rPr>
+              <a:t>NEXT LESSON</a:t>
+            </a:r>
+            <a:endParaRPr lang="en-US" sz="1400" dirty="0"/>
+          </a:p>
+        </p:txBody>
+      </p:sp>
+      <p:pic>
+        <p:nvPicPr>
+          <p:cNvPr id="3" name="Image 0" descr="/home/claude/f4/img/minesec_sheet.png">    </p:cNvPr>
+          <p:cNvPicPr>
+            <a:picLocks noChangeAspect="1"/>
+          </p:cNvPicPr>
+          <p:nvPr/>
+        </p:nvPicPr>
+        <p:blipFill>
+          <a:blip r:embed="rId1"/>
+          <a:stretch>
+            <a:fillRect/>
+          </a:stretch>
+        </p:blipFill>
+        <p:spPr>
+          <a:xfrm>
+            <a:off x="0" y="658368"/>
+            <a:ext cx="5120640" cy="5833872"/>
+          </a:xfrm>
+          <a:prstGeom prst="rect">
+            <a:avLst/>
+          </a:prstGeom>
+        </p:spPr>
+      </p:pic>
+      <p:sp>
+        <p:nvSpPr>
+          <p:cNvPr id="4" name="Text 1"/>
+          <p:cNvSpPr/>
+          <p:nvPr/>
+        </p:nvSpPr>
+        <p:spPr>
+          <a:xfrm>
+            <a:off x="5349240" y="1005840"/>
+            <a:ext cx="6522415" cy="731520"/>
+          </a:xfrm>
+          <a:prstGeom prst="rect">
+            <a:avLst/>
+          </a:prstGeom>
+          <a:noFill/>
+          <a:ln/>
+        </p:spPr>
+        <p:txBody>
+          <a:bodyPr wrap="square" lIns="0" tIns="0" rIns="0" bIns="0" rtlCol="0" anchor="ctr">
+            <a:normAutofit/>
+          </a:bodyPr>
+          <a:lstStyle/>
+          <a:p>
+            <a:pPr algn="ctr" indent="0" marL="0">
+              <a:buNone/>
+            </a:pPr>
+            <a:r>
+              <a:rPr lang="en-US" sz="3600" b="1" dirty="0">
+                <a:solidFill>
+                  <a:srgbClr val="990011"/>
+                </a:solidFill>
+                <a:latin typeface="Times New Roman" pitchFamily="34" charset="0"/>
+                <a:ea typeface="Times New Roman" pitchFamily="34" charset="-122"/>
+                <a:cs typeface="Times New Roman" pitchFamily="34" charset="-120"/>
+              </a:rPr>
+              <a:t>Next Lesson</a:t>
+            </a:r>
+            <a:endParaRPr lang="en-US" sz="3600" dirty="0"/>
+          </a:p>
+        </p:txBody>
+      </p:sp>
+      <p:sp>
+        <p:nvSpPr>
+          <p:cNvPr id="5" name="Text 2"/>
+          <p:cNvSpPr/>
+          <p:nvPr/>
+        </p:nvSpPr>
+        <p:spPr>
+          <a:xfrm>
+            <a:off x="5349240" y="1783080"/>
+            <a:ext cx="6522415" cy="4663440"/>
+          </a:xfrm>
+          <a:prstGeom prst="rect">
+            <a:avLst/>
+          </a:prstGeom>
+          <a:noFill/>
+          <a:ln/>
+        </p:spPr>
+        <p:txBody>
+          <a:bodyPr wrap="square" lIns="0" tIns="0" rIns="0" bIns="0" rtlCol="0" anchor="ctr"/>
+          <a:lstStyle/>
+          <a:p>
+            <a:pPr algn="ctr" indent="0" marL="0">
+              <a:spcAft>
+                <a:spcPts val="800"/>
+              </a:spcAft>
+              <a:buNone/>
+            </a:pPr>
+            <a:r>
+              <a:rPr lang="en-US" sz="4000" b="1" dirty="0">
+                <a:solidFill>
+                  <a:srgbClr val="111111"/>
+                </a:solidFill>
+                <a:latin typeface="Times New Roman" pitchFamily="34" charset="0"/>
+                <a:ea typeface="Times New Roman" pitchFamily="34" charset="-122"/>
+                <a:cs typeface="Times New Roman" pitchFamily="34" charset="-120"/>
+              </a:rPr>
+              <a:t>Our next lesson will be on:</a:t>
+            </a:r>
+            <a:endParaRPr lang="en-US" sz="4000" dirty="0"/>
+          </a:p>
+          <a:p>
+            <a:pPr algn="ctr" indent="0" marL="0">
+              <a:spcAft>
+                <a:spcPts val="800"/>
+              </a:spcAft>
+              <a:buNone/>
+            </a:pPr>
+            <a:r>
+              <a:rPr lang="en-US" sz="4000" b="1" dirty="0">
+                <a:solidFill>
+                  <a:srgbClr val="990011"/>
+                </a:solidFill>
+                <a:latin typeface="Times New Roman" pitchFamily="34" charset="0"/>
+                <a:ea typeface="Times New Roman" pitchFamily="34" charset="-122"/>
+                <a:cs typeface="Times New Roman" pitchFamily="34" charset="-120"/>
+              </a:rPr>
+              <a:t>Lesson 8: Historical Evolution of World Population</a:t>
+            </a:r>
+            <a:endParaRPr lang="en-US" sz="4000" dirty="0"/>
+          </a:p>
+        </p:txBody>
+      </p:sp>
+      <p:sp>
+        <p:nvSpPr>
+          <p:cNvPr id="25" name="Slide Number Placeholder 0"/>
+          <p:cNvSpPr>
+            <a:spLocks noGrp="1"/>
+          </p:cNvSpPr>
+          <p:nvPr>
+            <p:ph type="sldNum" sz="quarter" idx="4294967295"/>
+          </p:nvPr>
+        </p:nvSpPr>
+        <p:spPr>
+          <a:xfrm>
+            <a:off x="27432" y="91440"/>
+            <a:ext cx="585216" cy="475488"/>
+          </a:xfrm>
+          <a:prstGeom prst="rect">
+            <a:avLst/>
+          </a:prstGeom>
+          <a:extLst>
+            <a:ext uri="{C572A759-6A51-4108-AA02-DFA0A04FC94B}">
+              <ma14:wrappingTextBoxFlag xmlns:ma14="http://schemas.microsoft.com/office/mac/drawingml/2011/main" val="0"/>
+            </a:ext>
+          </a:extLst>
+        </p:spPr>
+        <p:txBody>
+          <a:bodyPr/>
+          <a:lstStyle>
+            <a:lvl1pPr>
+              <a:defRPr sz="2000">
+                <a:solidFill>
+                  <a:srgbClr val="FFFFFF"/>
+                </a:solidFill>
+                <a:latin typeface="Calibri"/>
+                <a:ea typeface="Calibri"/>
+                <a:cs typeface="Calibri"/>
+              </a:defRPr>
+            </a:lvl1pPr>
+          </a:lstStyle>
+          <a:p>
+            <a:pPr algn="ctr"/>
+            <a:fld id="{F7021451-1387-4CA6-816F-3879F97B5CBC}" type="slidenum">
+              <a:rPr b="1" lang="en-US"/>
+              <a:t>52</a:t>
+            </a:fld>
+            <a:endParaRPr lang="en-US"/>
+          </a:p>
+        </p:txBody>
+      </p:sp>
+    </p:spTree>
+  </p:cSld>
+  <p:clrMapOvr>
+    <a:masterClrMapping/>
+  </p:clrMapOvr>
+</p:sld>
+</file>
+
+<file path=ppt/slides/slide53.xml><?xml version="1.0" encoding="utf-8"?>
+<p:sld xmlns:a="http://schemas.openxmlformats.org/drawingml/2006/main" xmlns:r="http://schemas.openxmlformats.org/officeDocument/2006/relationships" xmlns:p="http://schemas.openxmlformats.org/presentationml/2006/main">
+  <p:cSld name="Slide 53">
+    <p:spTree>
+      <p:nvGrpSpPr>
+        <p:cNvPr id="1" name=""/>
+        <p:cNvGrpSpPr/>
+        <p:nvPr/>
+      </p:nvGrpSpPr>
+      <p:grpSpPr>
+        <a:xfrm>
+          <a:off x="0" y="0"/>
+          <a:ext cx="0" cy="0"/>
+          <a:chOff x="0" y="0"/>
+          <a:chExt cx="0" cy="0"/>
+        </a:xfrm>
+      </p:grpSpPr>
+      <p:sp>
+        <p:nvSpPr>
+          <p:cNvPr id="2" name="Text 0"/>
+          <p:cNvSpPr/>
+          <p:nvPr/>
+        </p:nvSpPr>
+        <p:spPr>
+          <a:xfrm>
+            <a:off x="457200" y="713232"/>
+            <a:ext cx="11368735" cy="274320"/>
+          </a:xfrm>
+          <a:prstGeom prst="rect">
+            <a:avLst/>
+          </a:prstGeom>
+          <a:noFill/>
+          <a:ln/>
+        </p:spPr>
+        <p:txBody>
+          <a:bodyPr wrap="square" lIns="0" tIns="0" rIns="0" bIns="0" rtlCol="0" anchor="ctr"/>
+          <a:lstStyle/>
+          <a:p>
+            <a:pPr algn="r" indent="0" marL="0">
+              <a:buNone/>
+            </a:pPr>
+            <a:r>
+              <a:rPr lang="en-US" sz="1400" b="1" dirty="0">
+                <a:solidFill>
+                  <a:srgbClr val="1C3F6E"/>
+                </a:solidFill>
+                <a:latin typeface="Calibri" pitchFamily="34" charset="0"/>
+                <a:ea typeface="Calibri" pitchFamily="34" charset="-122"/>
+                <a:cs typeface="Calibri" pitchFamily="34" charset="-120"/>
+              </a:rPr>
               <a:t>BILINGUAL GAME</a:t>
             </a:r>
             <a:endParaRPr lang="en-US" sz="1400" dirty="0"/>
@@ -17171,7 +18988,7 @@
       </p:sp>
       <p:graphicFrame>
         <p:nvGraphicFramePr>
-          <p:cNvPr id="50" name="Table 0"/>
+          <p:cNvPr id="54" name="Table 0"/>
           <p:cNvGraphicFramePr>
             <a:graphicFrameLocks noGrp="1"/>
           </p:cNvGraphicFramePr>
@@ -17351,7 +19168,7 @@
                           <a:ea typeface="Calibri" pitchFamily="34" charset="-122"/>
                           <a:cs typeface="Calibri" pitchFamily="34" charset="-120"/>
                         </a:rPr>
-                        <a:t>Graph paper</a:t>
+                        <a:t>Dependency ratio</a:t>
                       </a:r>
                       <a:endParaRPr lang="en-US" sz="2200" dirty="0">
                         <a:latin typeface="Calibri" charset="0"/>
@@ -17419,7 +19236,7 @@
                           <a:ea typeface="Calibri" pitchFamily="34" charset="-122"/>
                           <a:cs typeface="Calibri" pitchFamily="34" charset="-120"/>
                         </a:rPr>
-                        <a:t>Le papier millimétré</a:t>
+                        <a:t>Le taux de dépendance</a:t>
                       </a:r>
                       <a:endParaRPr lang="en-US" sz="2200" dirty="0">
                         <a:latin typeface="Calibri" charset="0"/>
@@ -17489,7 +19306,7 @@
                           <a:ea typeface="Calibri" pitchFamily="34" charset="-122"/>
                           <a:cs typeface="Calibri" pitchFamily="34" charset="-120"/>
                         </a:rPr>
-                        <a:t>Axis</a:t>
+                        <a:t>Working-age population</a:t>
                       </a:r>
                       <a:endParaRPr lang="en-US" sz="2200" dirty="0">
                         <a:latin typeface="Calibri" charset="0"/>
@@ -17557,7 +19374,7 @@
                           <a:ea typeface="Calibri" pitchFamily="34" charset="-122"/>
                           <a:cs typeface="Calibri" pitchFamily="34" charset="-120"/>
                         </a:rPr>
-                        <a:t>L'axe</a:t>
+                        <a:t>La population en âge de travailler</a:t>
                       </a:r>
                       <a:endParaRPr lang="en-US" sz="2200" dirty="0">
                         <a:latin typeface="Calibri" charset="0"/>
@@ -17627,7 +19444,7 @@
                           <a:ea typeface="Calibri" pitchFamily="34" charset="-122"/>
                           <a:cs typeface="Calibri" pitchFamily="34" charset="-120"/>
                         </a:rPr>
-                        <a:t>Percentage</a:t>
+                        <a:t>Formula</a:t>
                       </a:r>
                       <a:endParaRPr lang="en-US" sz="2200" dirty="0">
                         <a:latin typeface="Calibri" charset="0"/>
@@ -17695,7 +19512,7 @@
                           <a:ea typeface="Calibri" pitchFamily="34" charset="-122"/>
                           <a:cs typeface="Calibri" pitchFamily="34" charset="-120"/>
                         </a:rPr>
-                        <a:t>Le pourcentage</a:t>
+                        <a:t>La formule</a:t>
                       </a:r>
                       <a:endParaRPr lang="en-US" sz="2200" dirty="0">
                         <a:latin typeface="Calibri" charset="0"/>
@@ -17765,7 +19582,7 @@
                           <a:ea typeface="Calibri" pitchFamily="34" charset="-122"/>
                           <a:cs typeface="Calibri" pitchFamily="34" charset="-120"/>
                         </a:rPr>
-                        <a:t>Age group</a:t>
+                        <a:t>Calculation</a:t>
                       </a:r>
                       <a:endParaRPr lang="en-US" sz="2200" dirty="0">
                         <a:latin typeface="Calibri" charset="0"/>
@@ -17833,7 +19650,7 @@
                           <a:ea typeface="Calibri" pitchFamily="34" charset="-122"/>
                           <a:cs typeface="Calibri" pitchFamily="34" charset="-120"/>
                         </a:rPr>
-                        <a:t>Le groupe d'âge</a:t>
+                        <a:t>Le calcul</a:t>
                       </a:r>
                       <a:endParaRPr lang="en-US" sz="2200" dirty="0">
                         <a:latin typeface="Calibri" charset="0"/>
@@ -17903,7 +19720,7 @@
                           <a:ea typeface="Calibri" pitchFamily="34" charset="-122"/>
                           <a:cs typeface="Calibri" pitchFamily="34" charset="-120"/>
                         </a:rPr>
-                        <a:t>Total</a:t>
+                        <a:t>Interpretation</a:t>
                       </a:r>
                       <a:endParaRPr lang="en-US" sz="2200" dirty="0">
                         <a:latin typeface="Calibri" charset="0"/>
@@ -17971,7 +19788,7 @@
                           <a:ea typeface="Calibri" pitchFamily="34" charset="-122"/>
                           <a:cs typeface="Calibri" pitchFamily="34" charset="-120"/>
                         </a:rPr>
-                        <a:t>Le total</a:t>
+                        <a:t>L'interprétation</a:t>
                       </a:r>
                       <a:endParaRPr lang="en-US" sz="2200" dirty="0">
                         <a:latin typeface="Calibri" charset="0"/>
@@ -18041,7 +19858,7 @@
                           <a:ea typeface="Calibri" pitchFamily="34" charset="-122"/>
                           <a:cs typeface="Calibri" pitchFamily="34" charset="-120"/>
                         </a:rPr>
-                        <a:t>Report</a:t>
+                        <a:t>Burden</a:t>
                       </a:r>
                       <a:endParaRPr lang="en-US" sz="2200" dirty="0">
                         <a:latin typeface="Calibri" charset="0"/>
@@ -18109,7 +19926,7 @@
                           <a:ea typeface="Calibri" pitchFamily="34" charset="-122"/>
                           <a:cs typeface="Calibri" pitchFamily="34" charset="-120"/>
                         </a:rPr>
-                        <a:t>Le rapport</a:t>
+                        <a:t>La charge</a:t>
                       </a:r>
                       <a:endParaRPr lang="en-US" sz="2200" dirty="0">
                         <a:latin typeface="Calibri" charset="0"/>
@@ -18207,7 +20024,7 @@
             <a:pPr algn="ctr"/>
             <a:fld id="{F7021451-1387-4CA6-816F-3879F97B5CBC}" type="slidenum">
               <a:rPr b="1" lang="en-US"/>
-              <a:t>49</a:t>
+              <a:t>53</a:t>
             </a:fld>
             <a:endParaRPr lang="en-US"/>
           </a:p>
@@ -18221,9 +20038,9 @@
 </p:sld>
 </file>
 
-<file path=ppt/slides/slide5.xml><?xml version="1.0" encoding="utf-8"?>
+<file path=ppt/slides/slide54.xml><?xml version="1.0" encoding="utf-8"?>
 <p:sld xmlns:a="http://schemas.openxmlformats.org/drawingml/2006/main" xmlns:r="http://schemas.openxmlformats.org/officeDocument/2006/relationships" xmlns:p="http://schemas.openxmlformats.org/presentationml/2006/main">
-  <p:cSld name="Slide 5">
+  <p:cSld name="Slide 54">
     <p:spTree>
       <p:nvGrpSpPr>
         <p:cNvPr id="1" name=""/>
@@ -18271,225 +20088,6 @@
                 <a:ea typeface="Calibri" pitchFamily="34" charset="-122"/>
                 <a:cs typeface="Calibri" pitchFamily="34" charset="-120"/>
               </a:rPr>
-              <a:t>HOMEWORK CORRECTION</a:t>
-            </a:r>
-            <a:endParaRPr lang="en-US" sz="1400" dirty="0"/>
-          </a:p>
-        </p:txBody>
-      </p:sp>
-      <p:pic>
-        <p:nvPicPr>
-          <p:cNvPr id="3" name="Image 0" descr="/home/claude/f4/img/minesec_sheet.png">    </p:cNvPr>
-          <p:cNvPicPr>
-            <a:picLocks noChangeAspect="1"/>
-          </p:cNvPicPr>
-          <p:nvPr/>
-        </p:nvPicPr>
-        <p:blipFill>
-          <a:blip r:embed="rId1"/>
-          <a:stretch>
-            <a:fillRect/>
-          </a:stretch>
-        </p:blipFill>
-        <p:spPr>
-          <a:xfrm>
-            <a:off x="0" y="658368"/>
-            <a:ext cx="5120640" cy="5833872"/>
-          </a:xfrm>
-          <a:prstGeom prst="rect">
-            <a:avLst/>
-          </a:prstGeom>
-        </p:spPr>
-      </p:pic>
-      <p:sp>
-        <p:nvSpPr>
-          <p:cNvPr id="4" name="Text 1"/>
-          <p:cNvSpPr/>
-          <p:nvPr/>
-        </p:nvSpPr>
-        <p:spPr>
-          <a:xfrm>
-            <a:off x="5349240" y="1005840"/>
-            <a:ext cx="6522415" cy="731520"/>
-          </a:xfrm>
-          <a:prstGeom prst="rect">
-            <a:avLst/>
-          </a:prstGeom>
-          <a:noFill/>
-          <a:ln/>
-        </p:spPr>
-        <p:txBody>
-          <a:bodyPr wrap="square" lIns="0" tIns="0" rIns="0" bIns="0" rtlCol="0" anchor="ctr">
-            <a:normAutofit/>
-          </a:bodyPr>
-          <a:lstStyle/>
-          <a:p>
-            <a:pPr algn="ctr" indent="0" marL="0">
-              <a:buNone/>
-            </a:pPr>
-            <a:r>
-              <a:rPr lang="en-US" sz="3600" b="1" dirty="0">
-                <a:solidFill>
-                  <a:srgbClr val="990011"/>
-                </a:solidFill>
-                <a:latin typeface="Times New Roman" pitchFamily="34" charset="0"/>
-                <a:ea typeface="Times New Roman" pitchFamily="34" charset="-122"/>
-                <a:cs typeface="Times New Roman" pitchFamily="34" charset="-120"/>
-              </a:rPr>
-              <a:t>Correction: Possible Answer</a:t>
-            </a:r>
-            <a:endParaRPr lang="en-US" sz="3600" dirty="0"/>
-          </a:p>
-        </p:txBody>
-      </p:sp>
-      <p:sp>
-        <p:nvSpPr>
-          <p:cNvPr id="5" name="Text 2"/>
-          <p:cNvSpPr/>
-          <p:nvPr/>
-        </p:nvSpPr>
-        <p:spPr>
-          <a:xfrm>
-            <a:off x="5349240" y="1783080"/>
-            <a:ext cx="6522415" cy="4663440"/>
-          </a:xfrm>
-          <a:prstGeom prst="rect">
-            <a:avLst/>
-          </a:prstGeom>
-          <a:noFill/>
-          <a:ln/>
-        </p:spPr>
-        <p:txBody>
-          <a:bodyPr wrap="square" lIns="0" tIns="0" rIns="0" bIns="0" rtlCol="0" anchor="t"/>
-          <a:lstStyle/>
-          <a:p>
-            <a:pPr algn="l" indent="0" marL="0">
-              <a:spcAft>
-                <a:spcPts val="800"/>
-              </a:spcAft>
-              <a:buNone/>
-            </a:pPr>
-            <a:r>
-              <a:rPr lang="en-US" sz="4000" dirty="0">
-                <a:solidFill>
-                  <a:srgbClr val="111111"/>
-                </a:solidFill>
-                <a:latin typeface="Times New Roman" pitchFamily="34" charset="0"/>
-                <a:ea typeface="Times New Roman" pitchFamily="34" charset="-122"/>
-                <a:cs typeface="Times New Roman" pitchFamily="34" charset="-120"/>
-              </a:rPr>
-              <a:t>Cameroon: wide base, narrow top, many children, few old people. Japan: narrow base, wide top, few children, many old people, more old women than men.</a:t>
-            </a:r>
-            <a:endParaRPr lang="en-US" sz="4000" dirty="0"/>
-          </a:p>
-        </p:txBody>
-      </p:sp>
-      <p:sp>
-        <p:nvSpPr>
-          <p:cNvPr id="25" name="Slide Number Placeholder 0"/>
-          <p:cNvSpPr>
-            <a:spLocks noGrp="1"/>
-          </p:cNvSpPr>
-          <p:nvPr>
-            <p:ph type="sldNum" sz="quarter" idx="4294967295"/>
-          </p:nvPr>
-        </p:nvSpPr>
-        <p:spPr>
-          <a:xfrm>
-            <a:off x="27432" y="91440"/>
-            <a:ext cx="585216" cy="475488"/>
-          </a:xfrm>
-          <a:prstGeom prst="rect">
-            <a:avLst/>
-          </a:prstGeom>
-          <a:extLst>
-            <a:ext uri="{C572A759-6A51-4108-AA02-DFA0A04FC94B}">
-              <ma14:wrappingTextBoxFlag xmlns:ma14="http://schemas.microsoft.com/office/mac/drawingml/2011/main" val="0"/>
-            </a:ext>
-          </a:extLst>
-        </p:spPr>
-        <p:txBody>
-          <a:bodyPr/>
-          <a:lstStyle>
-            <a:lvl1pPr>
-              <a:defRPr sz="2000">
-                <a:solidFill>
-                  <a:srgbClr val="FFFFFF"/>
-                </a:solidFill>
-                <a:latin typeface="Calibri"/>
-                <a:ea typeface="Calibri"/>
-                <a:cs typeface="Calibri"/>
-              </a:defRPr>
-            </a:lvl1pPr>
-          </a:lstStyle>
-          <a:p>
-            <a:pPr algn="ctr"/>
-            <a:fld id="{F7021451-1387-4CA6-816F-3879F97B5CBC}" type="slidenum">
-              <a:rPr b="1" lang="en-US"/>
-              <a:t>5</a:t>
-            </a:fld>
-            <a:endParaRPr lang="en-US"/>
-          </a:p>
-        </p:txBody>
-      </p:sp>
-    </p:spTree>
-  </p:cSld>
-  <p:clrMapOvr>
-    <a:masterClrMapping/>
-  </p:clrMapOvr>
-</p:sld>
-</file>
-
-<file path=ppt/slides/slide50.xml><?xml version="1.0" encoding="utf-8"?>
-<p:sld xmlns:a="http://schemas.openxmlformats.org/drawingml/2006/main" xmlns:r="http://schemas.openxmlformats.org/officeDocument/2006/relationships" xmlns:p="http://schemas.openxmlformats.org/presentationml/2006/main">
-  <p:cSld name="Slide 50">
-    <p:spTree>
-      <p:nvGrpSpPr>
-        <p:cNvPr id="1" name=""/>
-        <p:cNvGrpSpPr/>
-        <p:nvPr/>
-      </p:nvGrpSpPr>
-      <p:grpSpPr>
-        <a:xfrm>
-          <a:off x="0" y="0"/>
-          <a:ext cx="0" cy="0"/>
-          <a:chOff x="0" y="0"/>
-          <a:chExt cx="0" cy="0"/>
-        </a:xfrm>
-      </p:grpSpPr>
-      <p:sp>
-        <p:nvSpPr>
-          <p:cNvPr id="2" name="Text 0"/>
-          <p:cNvSpPr/>
-          <p:nvPr/>
-        </p:nvSpPr>
-        <p:spPr>
-          <a:xfrm>
-            <a:off x="457200" y="713232"/>
-            <a:ext cx="11368735" cy="274320"/>
-          </a:xfrm>
-          <a:prstGeom prst="rect">
-            <a:avLst/>
-          </a:prstGeom>
-          <a:noFill/>
-          <a:ln/>
-        </p:spPr>
-        <p:txBody>
-          <a:bodyPr wrap="square" lIns="0" tIns="0" rIns="0" bIns="0" rtlCol="0" anchor="ctr"/>
-          <a:lstStyle/>
-          <a:p>
-            <a:pPr algn="r" indent="0" marL="0">
-              <a:buNone/>
-            </a:pPr>
-            <a:r>
-              <a:rPr lang="en-US" sz="1400" b="1" dirty="0">
-                <a:solidFill>
-                  <a:srgbClr val="1C3F6E"/>
-                </a:solidFill>
-                <a:latin typeface="Calibri" pitchFamily="34" charset="0"/>
-                <a:ea typeface="Calibri" pitchFamily="34" charset="-122"/>
-                <a:cs typeface="Calibri" pitchFamily="34" charset="-120"/>
-              </a:rPr>
               <a:t>LOGBOOK</a:t>
             </a:r>
             <a:endParaRPr lang="en-US" sz="1400" dirty="0"/>
@@ -18537,7 +20135,7 @@
       </p:sp>
       <p:graphicFrame>
         <p:nvGraphicFramePr>
-          <p:cNvPr id="51" name="Table 0"/>
+          <p:cNvPr id="55" name="Table 0"/>
           <p:cNvGraphicFramePr>
             <a:graphicFrameLocks noGrp="1"/>
           </p:cNvGraphicFramePr>
@@ -18923,7 +20521,7 @@
                           <a:ea typeface="Calibri" pitchFamily="34" charset="-122"/>
                           <a:cs typeface="Calibri" pitchFamily="34" charset="-120"/>
                         </a:rPr>
-                        <a:t>Convert population numbers to percentages. Draw a population pyramid. Calculate and interpret dependency ratios.</a:t>
+                        <a:t>Define the dependency ratio. Calculate the dependency ratio from data. Interpret the result in words. Compare dependency ratios of different countries.</a:t>
                       </a:r>
                       <a:endParaRPr lang="en-US" sz="1600" dirty="0">
                         <a:latin typeface="Calibri" charset="0"/>
@@ -19061,7 +20659,7 @@
                           <a:ea typeface="Calibri" pitchFamily="34" charset="-122"/>
                           <a:cs typeface="Calibri" pitchFamily="34" charset="-120"/>
                         </a:rPr>
-                        <a:t>Learners are able to construct a population pyramid from data and calculate dependency ratios.</a:t>
+                        <a:t>Learners are able to calculate and interpret the dependency ratio from population data.</a:t>
                       </a:r>
                       <a:endParaRPr lang="en-US" sz="1600" dirty="0">
                         <a:latin typeface="Calibri" charset="0"/>
@@ -19159,7 +20757,7 @@
             <a:pPr algn="ctr"/>
             <a:fld id="{F7021451-1387-4CA6-816F-3879F97B5CBC}" type="slidenum">
               <a:rPr b="1" lang="en-US"/>
-              <a:t>50</a:t>
+              <a:t>54</a:t>
             </a:fld>
             <a:endParaRPr lang="en-US"/>
           </a:p>
@@ -19173,9 +20771,9 @@
 </p:sld>
 </file>
 
-<file path=ppt/slides/slide51.xml><?xml version="1.0" encoding="utf-8"?>
+<file path=ppt/slides/slide55.xml><?xml version="1.0" encoding="utf-8"?>
 <p:sld xmlns:a="http://schemas.openxmlformats.org/drawingml/2006/main" xmlns:r="http://schemas.openxmlformats.org/officeDocument/2006/relationships" xmlns:p="http://schemas.openxmlformats.org/presentationml/2006/main">
-  <p:cSld name="Slide 51">
+  <p:cSld name="Slide 55">
     <p:spTree>
       <p:nvGrpSpPr>
         <p:cNvPr id="1" name=""/>
@@ -19270,7 +20868,7 @@
       </p:sp>
       <p:graphicFrame>
         <p:nvGraphicFramePr>
-          <p:cNvPr id="52" name="Table 0"/>
+          <p:cNvPr id="56" name="Table 0"/>
           <p:cNvGraphicFramePr>
             <a:graphicFrameLocks noGrp="1"/>
           </p:cNvGraphicFramePr>
@@ -19380,7 +20978,7 @@
                           <a:ea typeface="Calibri" pitchFamily="34" charset="-122"/>
                           <a:cs typeface="Calibri" pitchFamily="34" charset="-120"/>
                         </a:rPr>
-                        <a:t>DEFINITIONS; Construction of a Population Pyramid; Calculation and Interpretation.</a:t>
+                        <a:t>DEFINITIONS; The Formula; Worked Examples; Interpretation of the Results.</a:t>
                       </a:r>
                       <a:endParaRPr lang="en-US" sz="1600" dirty="0">
                         <a:latin typeface="Calibri" charset="0"/>
@@ -19656,7 +21254,7 @@
                           <a:ea typeface="Calibri" pitchFamily="34" charset="-122"/>
                           <a:cs typeface="Calibri" pitchFamily="34" charset="-120"/>
                         </a:rPr>
-                        <a:t>Draw the pyramid of the town on graph paper and write a short report.</a:t>
+                        <a:t>State the world population around 1800.</a:t>
                       </a:r>
                       <a:endParaRPr lang="en-US" sz="1600" dirty="0">
                         <a:latin typeface="Calibri" charset="0"/>
@@ -20030,7 +21628,7 @@
             <a:pPr algn="ctr"/>
             <a:fld id="{F7021451-1387-4CA6-816F-3879F97B5CBC}" type="slidenum">
               <a:rPr b="1" lang="en-US"/>
-              <a:t>51</a:t>
+              <a:t>55</a:t>
             </a:fld>
             <a:endParaRPr lang="en-US"/>
           </a:p>
@@ -20044,9 +21642,9 @@
 </p:sld>
 </file>
 
-<file path=ppt/slides/slide52.xml><?xml version="1.0" encoding="utf-8"?>
+<file path=ppt/slides/slide56.xml><?xml version="1.0" encoding="utf-8"?>
 <p:sld xmlns:a="http://schemas.openxmlformats.org/drawingml/2006/main" xmlns:r="http://schemas.openxmlformats.org/officeDocument/2006/relationships" xmlns:p="http://schemas.openxmlformats.org/presentationml/2006/main">
-  <p:cSld name="Slide 52">
+  <p:cSld name="Slide 56">
     <p:spTree>
       <p:nvGrpSpPr>
         <p:cNvPr id="1" name=""/>
@@ -20223,7 +21821,7 @@
                 <a:ea typeface="Calibri" pitchFamily="34" charset="-122"/>
                 <a:cs typeface="Calibri" pitchFamily="34" charset="-120"/>
               </a:rPr>
-              <a:t>Without the projector (Activity 1): copy the table.</a:t>
+              <a:t>Without the projector (Activity 1): write the formula on the board.</a:t>
             </a:r>
             <a:endParaRPr lang="en-US" sz="2000" dirty="0"/>
           </a:p>
@@ -20244,7 +21842,7 @@
                 <a:ea typeface="Calibri" pitchFamily="34" charset="-122"/>
                 <a:cs typeface="Calibri" pitchFamily="34" charset="-120"/>
               </a:rPr>
-              <a:t>Without the projector (Activity 2): draw the axis on graph paper.</a:t>
+              <a:t>Without the projector (Activity 2): do the calculation step by step.</a:t>
             </a:r>
             <a:endParaRPr lang="en-US" sz="2000" dirty="0"/>
           </a:p>
@@ -20265,7 +21863,7 @@
                 <a:ea typeface="Calibri" pitchFamily="34" charset="-122"/>
                 <a:cs typeface="Calibri" pitchFamily="34" charset="-120"/>
               </a:rPr>
-              <a:t>Without the projector (Activity 3): add the groups step by step.</a:t>
+              <a:t>Without the projector (Activity 3): let learners calculate in pairs.</a:t>
             </a:r>
             <a:endParaRPr lang="en-US" sz="2000" dirty="0"/>
           </a:p>
@@ -20286,7 +21884,7 @@
                 <a:ea typeface="Calibri" pitchFamily="34" charset="-122"/>
                 <a:cs typeface="Calibri" pitchFamily="34" charset="-120"/>
               </a:rPr>
-              <a:t>Without the projector (Activity 4): compare with the three shapes.</a:t>
+              <a:t>Without the projector (Activity 4): compare Cameroon and Japan.</a:t>
             </a:r>
             <a:endParaRPr lang="en-US" sz="2000" dirty="0"/>
           </a:p>
@@ -20307,7 +21905,7 @@
                 <a:ea typeface="Calibri" pitchFamily="34" charset="-122"/>
                 <a:cs typeface="Calibri" pitchFamily="34" charset="-120"/>
               </a:rPr>
-              <a:t>Without the projector (Activity 5): compare dependency types.</a:t>
+              <a:t>Without the projector (Activity 5): write the sentence of interpretation.</a:t>
             </a:r>
             <a:endParaRPr lang="en-US" sz="2000" dirty="0"/>
           </a:p>
@@ -20355,7 +21953,7 @@
             <a:pPr algn="ctr"/>
             <a:fld id="{F7021451-1387-4CA6-816F-3879F97B5CBC}" type="slidenum">
               <a:rPr b="1" lang="en-US"/>
-              <a:t>52</a:t>
+              <a:t>56</a:t>
             </a:fld>
             <a:endParaRPr lang="en-US"/>
           </a:p>
@@ -20369,9 +21967,9 @@
 </p:sld>
 </file>
 
-<file path=ppt/slides/slide53.xml><?xml version="1.0" encoding="utf-8"?>
+<file path=ppt/slides/slide57.xml><?xml version="1.0" encoding="utf-8"?>
 <p:sld xmlns:a="http://schemas.openxmlformats.org/drawingml/2006/main" xmlns:r="http://schemas.openxmlformats.org/officeDocument/2006/relationships" xmlns:p="http://schemas.openxmlformats.org/presentationml/2006/main">
-  <p:cSld name="Slide 53">
+  <p:cSld name="Slide 57">
     <p:spTree>
       <p:nvGrpSpPr>
         <p:cNvPr id="1" name=""/>
@@ -20527,7 +22125,7 @@
                 <a:ea typeface="Calibri" pitchFamily="34" charset="-122"/>
                 <a:cs typeface="Calibri" pitchFamily="34" charset="-120"/>
               </a:rPr>
-              <a:t>National Geography Syllabus, MINESEC/IGE/IP-SS, 2019 — Module 4 (Population Geography).</a:t>
+              <a:t>Geography Syllabus for Sixth Forms (Lower and Upper Sixth), MINESEC, 2019 — Module 4 (Population Geography).</a:t>
             </a:r>
             <a:endParaRPr lang="en-US" sz="1800" dirty="0"/>
           </a:p>
@@ -20548,6 +22146,69 @@
                 <a:ea typeface="Calibri" pitchFamily="34" charset="-122"/>
                 <a:cs typeface="Calibri" pitchFamily="34" charset="-120"/>
               </a:rPr>
+              <a:t>Teacher's course notes: Mr KAMDEM E., Population Geography (USA), GBHS Garoua, 2026.</a:t>
+            </a:r>
+            <a:endParaRPr lang="en-US" sz="1800" dirty="0"/>
+          </a:p>
+          <a:p>
+            <a:pPr algn="l" marL="342900" indent="-342900">
+              <a:spcAft>
+                <a:spcPts val="800"/>
+              </a:spcAft>
+              <a:buSzPct val="100000"/>
+              <a:buChar char="•"/>
+            </a:pPr>
+            <a:r>
+              <a:rPr lang="en-US" sz="1800" dirty="0">
+                <a:solidFill>
+                  <a:srgbClr val="111111"/>
+                </a:solidFill>
+                <a:latin typeface="Calibri" pitchFamily="34" charset="0"/>
+                <a:ea typeface="Calibri" pitchFamily="34" charset="-122"/>
+                <a:cs typeface="Calibri" pitchFamily="34" charset="-120"/>
+              </a:rPr>
+              <a:t>United Nations, World Population Prospects 2024.</a:t>
+            </a:r>
+            <a:endParaRPr lang="en-US" sz="1800" dirty="0"/>
+          </a:p>
+          <a:p>
+            <a:pPr algn="l" marL="342900" indent="-342900">
+              <a:spcAft>
+                <a:spcPts val="800"/>
+              </a:spcAft>
+              <a:buSzPct val="100000"/>
+              <a:buChar char="•"/>
+            </a:pPr>
+            <a:r>
+              <a:rPr lang="en-US" sz="1800" dirty="0">
+                <a:solidFill>
+                  <a:srgbClr val="111111"/>
+                </a:solidFill>
+                <a:latin typeface="Calibri" pitchFamily="34" charset="0"/>
+                <a:ea typeface="Calibri" pitchFamily="34" charset="-122"/>
+                <a:cs typeface="Calibri" pitchFamily="34" charset="-120"/>
+              </a:rPr>
+              <a:t>Photo, Activity 3: “African school children” by World Resources, CC BY-NC-SA 2.0, via Flickr (https://www.flickr.com/photos/26107309@N05/2658469563)</a:t>
+            </a:r>
+            <a:endParaRPr lang="en-US" sz="1800" dirty="0"/>
+          </a:p>
+          <a:p>
+            <a:pPr algn="l" marL="342900" indent="-342900">
+              <a:spcAft>
+                <a:spcPts val="800"/>
+              </a:spcAft>
+              <a:buSzPct val="100000"/>
+              <a:buChar char="•"/>
+            </a:pPr>
+            <a:r>
+              <a:rPr lang="en-US" sz="1800" dirty="0">
+                <a:solidFill>
+                  <a:srgbClr val="111111"/>
+                </a:solidFill>
+                <a:latin typeface="Calibri" pitchFamily="34" charset="0"/>
+                <a:ea typeface="Calibri" pitchFamily="34" charset="-122"/>
+                <a:cs typeface="Calibri" pitchFamily="34" charset="-120"/>
+              </a:rPr>
               <a:t>Diagrams and animations: drawn for this lesson (Geography Department).</a:t>
             </a:r>
             <a:endParaRPr lang="en-US" sz="1800" dirty="0"/>
@@ -20596,7 +22257,7 @@
             <a:pPr algn="ctr"/>
             <a:fld id="{F7021451-1387-4CA6-816F-3879F97B5CBC}" type="slidenum">
               <a:rPr b="1" lang="en-US"/>
-              <a:t>53</a:t>
+              <a:t>57</a:t>
             </a:fld>
             <a:endParaRPr lang="en-US"/>
           </a:p>
@@ -21014,7 +22675,7 @@
         <p:spPr>
           <a:xfrm>
             <a:off x="0" y="658368"/>
-            <a:ext cx="1463040" cy="5833872"/>
+            <a:ext cx="3840480" cy="5833872"/>
           </a:xfrm>
           <a:prstGeom prst="rect">
             <a:avLst/>
@@ -21029,8 +22690,8 @@
         </p:nvSpPr>
         <p:spPr>
           <a:xfrm>
-            <a:off x="1691640" y="1005840"/>
-            <a:ext cx="10180015" cy="731520"/>
+            <a:off x="4069080" y="1005840"/>
+            <a:ext cx="7802575" cy="731520"/>
           </a:xfrm>
           <a:prstGeom prst="rect">
             <a:avLst/>
@@ -21070,8 +22731,8 @@
         </p:nvSpPr>
         <p:spPr>
           <a:xfrm>
-            <a:off x="1691640" y="1783080"/>
-            <a:ext cx="10180015" cy="4663440"/>
+            <a:off x="4069080" y="1783080"/>
+            <a:ext cx="7802575" cy="4663440"/>
           </a:xfrm>
           <a:prstGeom prst="rect">
             <a:avLst/>
@@ -21120,7 +22781,7 @@
                 <a:ea typeface="Times New Roman" pitchFamily="34" charset="-122"/>
                 <a:cs typeface="Times New Roman" pitchFamily="34" charset="-120"/>
               </a:rPr>
-              <a:t>Convert population numbers to percentages.</a:t>
+              <a:t>Define the dependency ratio.</a:t>
             </a:r>
             <a:endParaRPr lang="en-US" sz="4000" dirty="0"/>
           </a:p>
@@ -21142,7 +22803,7 @@
                 <a:ea typeface="Times New Roman" pitchFamily="34" charset="-122"/>
                 <a:cs typeface="Times New Roman" pitchFamily="34" charset="-120"/>
               </a:rPr>
-              <a:t>Draw a population pyramid.</a:t>
+              <a:t>Calculate the dependency ratio from data.</a:t>
             </a:r>
             <a:endParaRPr lang="en-US" sz="4000" dirty="0"/>
           </a:p>
@@ -21164,7 +22825,7 @@
                 <a:ea typeface="Times New Roman" pitchFamily="34" charset="-122"/>
                 <a:cs typeface="Times New Roman" pitchFamily="34" charset="-120"/>
               </a:rPr>
-              <a:t>Calculate and interpret dependency ratios.</a:t>
+              <a:t>Interpret the result in words.</a:t>
             </a:r>
             <a:endParaRPr lang="en-US" sz="4000" dirty="0"/>
           </a:p>
@@ -21276,7 +22937,7 @@
                 <a:ea typeface="Calibri" pitchFamily="34" charset="-122"/>
                 <a:cs typeface="Calibri" pitchFamily="34" charset="-120"/>
               </a:rPr>
-              <a:t>PREVIOUS KNOWLEDGE</a:t>
+              <a:t>OBJECTIVES</a:t>
             </a:r>
             <a:endParaRPr lang="en-US" sz="1400" dirty="0"/>
           </a:p>
@@ -21341,7 +23002,7 @@
                 <a:ea typeface="Times New Roman" pitchFamily="34" charset="-122"/>
                 <a:cs typeface="Times New Roman" pitchFamily="34" charset="-120"/>
               </a:rPr>
-              <a:t>Previous Knowledge</a:t>
+              <a:t>Objectives (continued)</a:t>
             </a:r>
             <a:endParaRPr lang="en-US" sz="3600" dirty="0"/>
           </a:p>
@@ -21373,7 +23034,8 @@
                 <a:spcPts val="800"/>
               </a:spcAft>
               <a:buSzPct val="100000"/>
-              <a:buChar char="•"/>
+              <a:buFont typeface="+mj-lt"/>
+              <a:buAutoNum type="arabicPeriod" startAt="1"/>
             </a:pPr>
             <a:r>
               <a:rPr lang="en-US" sz="4000" dirty="0">
@@ -21384,28 +23046,7 @@
                 <a:ea typeface="Times New Roman" pitchFamily="34" charset="-122"/>
                 <a:cs typeface="Times New Roman" pitchFamily="34" charset="-120"/>
               </a:rPr>
-              <a:t>A pyramid shows males on the left and females on the right.</a:t>
-            </a:r>
-            <a:endParaRPr lang="en-US" sz="4000" dirty="0"/>
-          </a:p>
-          <a:p>
-            <a:pPr algn="l" marL="342900" indent="-342900">
-              <a:spcAft>
-                <a:spcPts val="800"/>
-              </a:spcAft>
-              <a:buSzPct val="100000"/>
-              <a:buChar char="•"/>
-            </a:pPr>
-            <a:r>
-              <a:rPr lang="en-US" sz="4000" dirty="0">
-                <a:solidFill>
-                  <a:srgbClr val="111111"/>
-                </a:solidFill>
-                <a:latin typeface="Times New Roman" pitchFamily="34" charset="0"/>
-                <a:ea typeface="Times New Roman" pitchFamily="34" charset="-122"/>
-                <a:cs typeface="Times New Roman" pitchFamily="34" charset="-120"/>
-              </a:rPr>
-              <a:t>Dependency ratio = dependants ÷ workers × 100.</a:t>
+              <a:t>Compare dependency ratios of different countries.</a:t>
             </a:r>
             <a:endParaRPr lang="en-US" sz="4000" dirty="0"/>
           </a:p>
@@ -21517,7 +23158,7 @@
                 <a:ea typeface="Calibri" pitchFamily="34" charset="-122"/>
                 <a:cs typeface="Calibri" pitchFamily="34" charset="-120"/>
               </a:rPr>
-              <a:t>REAL-LIFE SITUATION</a:t>
+              <a:t>PREVIOUS KNOWLEDGE</a:t>
             </a:r>
             <a:endParaRPr lang="en-US" sz="1400" dirty="0"/>
           </a:p>
@@ -21582,7 +23223,7 @@
                 <a:ea typeface="Times New Roman" pitchFamily="34" charset="-122"/>
                 <a:cs typeface="Times New Roman" pitchFamily="34" charset="-120"/>
               </a:rPr>
-              <a:t>Situation in Real Life</a:t>
+              <a:t>Previous Knowledge</a:t>
             </a:r>
             <a:endParaRPr lang="en-US" sz="3600" dirty="0"/>
           </a:p>
@@ -21609,11 +23250,12 @@
           <a:bodyPr wrap="square" lIns="0" tIns="0" rIns="0" bIns="0" rtlCol="0" anchor="t"/>
           <a:lstStyle/>
           <a:p>
-            <a:pPr algn="l" indent="0" marL="0">
+            <a:pPr algn="l" marL="342900" indent="-342900">
               <a:spcAft>
                 <a:spcPts val="800"/>
               </a:spcAft>
-              <a:buNone/>
+              <a:buSzPct val="100000"/>
+              <a:buChar char="•"/>
             </a:pPr>
             <a:r>
               <a:rPr lang="en-US" sz="4000" dirty="0">
@@ -21624,7 +23266,49 @@
                 <a:ea typeface="Times New Roman" pitchFamily="34" charset="-122"/>
                 <a:cs typeface="Times New Roman" pitchFamily="34" charset="-120"/>
               </a:rPr>
-              <a:t>The council of a small town gives the class the number of males and females in five age groups. It wants a pyramid and the dependency ratio to plan a new school and a health centre.</a:t>
+              <a:t>Young dependants are aged 0–14.</a:t>
+            </a:r>
+            <a:endParaRPr lang="en-US" sz="4000" dirty="0"/>
+          </a:p>
+          <a:p>
+            <a:pPr algn="l" marL="342900" indent="-342900">
+              <a:spcAft>
+                <a:spcPts val="800"/>
+              </a:spcAft>
+              <a:buSzPct val="100000"/>
+              <a:buChar char="•"/>
+            </a:pPr>
+            <a:r>
+              <a:rPr lang="en-US" sz="4000" dirty="0">
+                <a:solidFill>
+                  <a:srgbClr val="111111"/>
+                </a:solidFill>
+                <a:latin typeface="Times New Roman" pitchFamily="34" charset="0"/>
+                <a:ea typeface="Times New Roman" pitchFamily="34" charset="-122"/>
+                <a:cs typeface="Times New Roman" pitchFamily="34" charset="-120"/>
+              </a:rPr>
+              <a:t>Old dependants are aged 65 and over.</a:t>
+            </a:r>
+            <a:endParaRPr lang="en-US" sz="4000" dirty="0"/>
+          </a:p>
+          <a:p>
+            <a:pPr algn="l" marL="342900" indent="-342900">
+              <a:spcAft>
+                <a:spcPts val="800"/>
+              </a:spcAft>
+              <a:buSzPct val="100000"/>
+              <a:buChar char="•"/>
+            </a:pPr>
+            <a:r>
+              <a:rPr lang="en-US" sz="4000" dirty="0">
+                <a:solidFill>
+                  <a:srgbClr val="111111"/>
+                </a:solidFill>
+                <a:latin typeface="Times New Roman" pitchFamily="34" charset="0"/>
+                <a:ea typeface="Times New Roman" pitchFamily="34" charset="-122"/>
+                <a:cs typeface="Times New Roman" pitchFamily="34" charset="-120"/>
+              </a:rPr>
+              <a:t>The working population is aged 15–64.</a:t>
             </a:r>
             <a:endParaRPr lang="en-US" sz="4000" dirty="0"/>
           </a:p>

--- a/lecons/USA/Population Geography/10_USA_POP_PW03_Dependency_Ratio_and_Population_Pyramids.pptx
+++ b/lecons/USA/Population Geography/10_USA_POP_PW03_Dependency_Ratio_and_Population_Pyramids.pptx
@@ -62,9 +62,17 @@
     <p:sldId id="310" r:id="rId56"/>
     <p:sldId id="311" r:id="rId57"/>
     <p:sldId id="312" r:id="rId58"/>
+    <p:sldId id="313" r:id="rId59"/>
+    <p:sldId id="314" r:id="rId60"/>
+    <p:sldId id="315" r:id="rId61"/>
+    <p:sldId id="316" r:id="rId62"/>
+    <p:sldId id="317" r:id="rId63"/>
+    <p:sldId id="318" r:id="rId64"/>
+    <p:sldId id="319" r:id="rId65"/>
+    <p:sldId id="320" r:id="rId66"/>
   </p:sldIdLst>
   <p:notesMasterIdLst>
-    <p:notesMasterId r:id="rId59"/>
+    <p:notesMasterId r:id="rId67"/>
   </p:notesMasterIdLst>
   <p:sldSz cx="12192000" cy="6858000"/>
   <p:notesSz cx="6858000" cy="12192000"/>
@@ -3198,7 +3206,7 @@
           <a:p>
             <a:r>
               <a:rPr lang="en-US" dirty="0"/>
-              <a:t>We continue with the definitions. On this slide we have Working-age population. Write each point on a new line, with the key term first, and explain it in your own words when we revise.</a:t>
+              <a:t>We continue with the definitions. On this slide we have Working-age population and Population pyramid. Write each point on a new line, with the key term first, and explain it in your own words when we revise.</a:t>
             </a:r>
             <a:endParaRPr lang="en-US" dirty="0"/>
           </a:p>
@@ -3286,7 +3294,7 @@
           <a:p>
             <a:r>
               <a:rPr lang="en-US" dirty="0"/>
-              <a:t>Let us copy The Formula. The dependency ratio is calculated with the following formula. Copy the point on Formula on the left, then draw the diagram on the right: the dependency ratio. Give it a title and label it clearly.</a:t>
+              <a:t>Let us copy The Dependency Ratio. The dependency ratio is calculated with the following formula. Copy the point on Formula on the left, then draw the diagram on the right: the dependency ratio. Give it a title and label it clearly.</a:t>
             </a:r>
             <a:endParaRPr lang="en-US" dirty="0"/>
           </a:p>
@@ -3374,7 +3382,7 @@
           <a:p>
             <a:r>
               <a:rPr lang="en-US" dirty="0"/>
-              <a:t>We continue with The Formula. On this slide we have Dependants and Workers. Write each point on a new line, with the key term first, and explain it in your own words when we revise.</a:t>
+              <a:t>We continue with The Dependency Ratio. Copy the point on Dependants and workers: write the key term first, then its explanation.</a:t>
             </a:r>
             <a:endParaRPr lang="en-US" dirty="0"/>
           </a:p>
@@ -3550,7 +3558,7 @@
           <a:p>
             <a:r>
               <a:rPr lang="en-US" dirty="0"/>
-              <a:t>Let us copy Worked Examples. The calculation is done as in the following examples. On this slide we have Example 1. Write each point on a new line, with the key term first, and explain it in your own words when we revise.</a:t>
+              <a:t>Let us copy Worked Examples. The calculation is done as in the following examples. Copy the point on Example 1: write the key term first, then its explanation.</a:t>
             </a:r>
             <a:endParaRPr lang="en-US" dirty="0"/>
           </a:p>
@@ -3638,7 +3646,7 @@
           <a:p>
             <a:r>
               <a:rPr lang="en-US" dirty="0"/>
-              <a:t>Copy the point on Example 2 (UK, 1971) on the left, then draw the diagram on the right: uK, 1971. Give it a title and label it clearly.</a:t>
+              <a:t>Copy the point on Example 2 (United Kingdom, 1971) on the left, then draw the diagram on the right: the United Kingdom in 1971. Give it a title and label it clearly.</a:t>
             </a:r>
             <a:endParaRPr lang="en-US" dirty="0"/>
           </a:p>
@@ -3726,7 +3734,7 @@
           <a:p>
             <a:r>
               <a:rPr lang="en-US" dirty="0"/>
-              <a:t>We continue with Worked Examples. On this slide we have Interpretation of example 2 and Example 3. Write each point on a new line, with the key term first, and explain it in your own words when we revise.</a:t>
+              <a:t>We continue with Worked Examples. Copy the point on Example 3: write the key term first, then its explanation.</a:t>
             </a:r>
             <a:endParaRPr lang="en-US" dirty="0"/>
           </a:p>
@@ -3814,7 +3822,7 @@
           <a:p>
             <a:r>
               <a:rPr lang="en-US" dirty="0"/>
-              <a:t>Let us copy Interpretation of the Results. The results of the dependency ratio are interpreted as follows. Copy the point on High ratio on the left, then draw the diagram on the right: young and old people. Give it a title and label it clearly.</a:t>
+              <a:t>Let us copy Interpretation of the Results. The dependency ratio is interpreted as follows. Copy the point on A high ratio on the left, then draw the diagram on the right: youthful and ageing populations. Give it a title and label it clearly.</a:t>
             </a:r>
             <a:endParaRPr lang="en-US" dirty="0"/>
           </a:p>
@@ -3902,7 +3910,7 @@
           <a:p>
             <a:r>
               <a:rPr lang="en-US" dirty="0"/>
-              <a:t>We continue with Interpretation of the Results. On this slide we have Cameroon and Low ratio. Write each point on a new line, with the key term first, and explain it in your own words when we revise. When you finish, we go to the next slide.</a:t>
+              <a:t>We continue with Interpretation of the Results. Copy the point on Cameroon: write the key term first, then its explanation.</a:t>
             </a:r>
             <a:endParaRPr lang="en-US" dirty="0"/>
           </a:p>
@@ -3990,7 +3998,7 @@
           <a:p>
             <a:r>
               <a:rPr lang="en-US" dirty="0"/>
-              <a:t>We continue with Interpretation of the Results. On this slide we have Ageing countries. Write each point on a new line, with the key term first, and explain it in your own words when we revise.</a:t>
+              <a:t>We continue with Interpretation of the Results. Copy the point on A low ratio: write the key term first, then its explanation.</a:t>
             </a:r>
             <a:endParaRPr lang="en-US" dirty="0"/>
           </a:p>
@@ -4078,7 +4086,7 @@
           <a:p>
             <a:r>
               <a:rPr lang="en-US" dirty="0"/>
-              <a:t>Now let us check what you have understood. Question 1: Calculate the dependency ratio of a population with 4,500 children, 500 elderly and 5,000 adults. Answer in your exercise book.</a:t>
+              <a:t>We continue with Interpretation of the Results. Copy the point on Ageing countries: write the key term first, then its explanation.</a:t>
             </a:r>
             <a:endParaRPr lang="en-US" dirty="0"/>
           </a:p>
@@ -4166,7 +4174,7 @@
           <a:p>
             <a:r>
               <a:rPr lang="en-US" dirty="0"/>
-              <a:t>The expected answer is: (4,500 + 500) ÷ 5,000 × 100 = 100 %. If you got it right, well done.</a:t>
+              <a:t>Let us copy Construction of a Population Pyramid. A population pyramid is constructed in the following steps. Copy the point on Step 1, the axes on the left, then draw the diagram on the right: the parts of a pyramid. Give it a title and label it clearly.</a:t>
             </a:r>
             <a:endParaRPr lang="en-US" dirty="0"/>
           </a:p>
@@ -4254,7 +4262,7 @@
           <a:p>
             <a:r>
               <a:rPr lang="en-US" dirty="0"/>
-              <a:t>Now let us check what you have understood. Question 2: Interpret a dependency ratio of 100 %. Answer in your exercise book.</a:t>
+              <a:t>We continue with Construction of a Population Pyramid. Copy the point on Step 2, the percentages: write the key term first, then its explanation.</a:t>
             </a:r>
             <a:endParaRPr lang="en-US" dirty="0"/>
           </a:p>
@@ -4342,7 +4350,7 @@
           <a:p>
             <a:r>
               <a:rPr lang="en-US" dirty="0"/>
-              <a:t>The expected answer is: there is one dependant for every person of working age. If you got it right, well done.</a:t>
+              <a:t>We continue with Construction of a Population Pyramid. Copy the point on Step 3, the bars: write the key term first, then its explanation.</a:t>
             </a:r>
             <a:endParaRPr lang="en-US" dirty="0"/>
           </a:p>
@@ -4518,7 +4526,7 @@
           <a:p>
             <a:r>
               <a:rPr lang="en-US" dirty="0"/>
-              <a:t>For those who need more practice, fill in the blanks in your exercise book. The answers are: number 1, 65; number 2, 100; number 3, 100.</a:t>
+              <a:t>We continue with Construction of a Population Pyramid. Copy the point on Step 4, the finishing: write the key term first, then its explanation.</a:t>
             </a:r>
             <a:endParaRPr lang="en-US" dirty="0"/>
           </a:p>
@@ -4606,7 +4614,7 @@
           <a:p>
             <a:r>
               <a:rPr lang="en-US" dirty="0"/>
-              <a:t>For your homework: State the world population around 1800. We shall correct it at the beginning of our next lesson.</a:t>
+              <a:t>Let us copy Interpretation of a Population Pyramid. A population pyramid is interpreted in the following steps. Copy the point on Describe the shape on the left, then draw the diagram on the right: the four types of pyramids. Give it a title and label it clearly.</a:t>
             </a:r>
             <a:endParaRPr lang="en-US" dirty="0"/>
           </a:p>
@@ -4694,7 +4702,7 @@
           <a:p>
             <a:r>
               <a:rPr lang="en-US" dirty="0"/>
-              <a:t>Our next lesson will be on Lesson 8: Historical Evolution of World Population. Thank you for your attention, and see you next time.</a:t>
+              <a:t>We continue with Interpretation of a Population Pyramid. Copy the point on Pick out the distinguishing features: write the key term first, then its explanation.</a:t>
             </a:r>
             <a:endParaRPr lang="en-US" dirty="0"/>
           </a:p>
@@ -4782,7 +4790,7 @@
           <a:p>
             <a:r>
               <a:rPr lang="en-US" dirty="0"/>
-              <a:t>Let us play the bilingual game. I say a word in English, and you give me the French word. Then we do the reverse.</a:t>
+              <a:t>We continue with Interpretation of a Population Pyramid. Copy the point on Explain the features: write the key term first, then its explanation.</a:t>
             </a:r>
             <a:endParaRPr lang="en-US" dirty="0"/>
           </a:p>
@@ -4870,7 +4878,7 @@
           <a:p>
             <a:r>
               <a:rPr lang="en-US" dirty="0"/>
-              <a:t>I record this information in the official logbook of the class after the lesson.</a:t>
+              <a:t>Now let us check what you have understood. Question 1: Calculate the dependency ratio of a population with 4,500 children, 500 elderly and 5,000 adults. Answer in your exercise book.</a:t>
             </a:r>
             <a:endParaRPr lang="en-US" dirty="0"/>
           </a:p>
@@ -4958,7 +4966,7 @@
           <a:p>
             <a:r>
               <a:rPr lang="en-US" dirty="0"/>
-              <a:t>I complete the second page of the logbook: the matter taught, the evaluation, the homework and the attendance.</a:t>
+              <a:t>The expected answer is: (4,500 + 500) ÷ 5,000 × 100 = 100 %. If you got it right, well done.</a:t>
             </a:r>
             <a:endParaRPr lang="en-US" dirty="0"/>
           </a:p>
@@ -5046,7 +5054,7 @@
           <a:p>
             <a:r>
               <a:rPr lang="en-US" dirty="0"/>
-              <a:t>This slide is for me, the teacher: it gives the timing of the lesson and what to do if the projector is not available.</a:t>
+              <a:t>Now let us check what you have understood. Question 2: Interpret a dependency ratio of 100 %. Answer in your exercise book.</a:t>
             </a:r>
             <a:endParaRPr lang="en-US" dirty="0"/>
           </a:p>
@@ -5134,7 +5142,7 @@
           <a:p>
             <a:r>
               <a:rPr lang="en-US" dirty="0"/>
-              <a:t>These are the references and picture credits used to prepare this lesson.</a:t>
+              <a:t>The expected answer is: there is one dependant for every person of working age. If you got it right, well done.</a:t>
             </a:r>
             <a:endParaRPr lang="en-US" dirty="0"/>
           </a:p>
@@ -5158,6 +5166,182 @@
             <a:fld id="{F7021451-1387-4CA6-816F-3879F97B5CBC}" type="slidenum">
               <a:rPr lang="en-US"/>
               <a:t>57</a:t>
+            </a:fld>
+            <a:endParaRPr lang="en-US"/>
+          </a:p>
+        </p:txBody>
+      </p:sp>
+    </p:spTree>
+    <p:extLst>
+      <p:ext uri="{BB962C8B-B14F-4D97-AF65-F5344CB8AC3E}">
+        <p14:creationId xmlns:p14="http://schemas.microsoft.com/office/powerpoint/2010/main" val="1024086991"/>
+      </p:ext>
+    </p:extLst>
+  </p:cSld>
+  <p:clrMapOvr>
+    <a:masterClrMapping/>
+  </p:clrMapOvr>
+</p:notes>
+</file>
+
+<file path=ppt/notesSlides/notesSlide58.xml><?xml version="1.0" encoding="utf-8"?>
+<p:notes xmlns:a="http://schemas.openxmlformats.org/drawingml/2006/main" xmlns:r="http://schemas.openxmlformats.org/officeDocument/2006/relationships" xmlns:p="http://schemas.openxmlformats.org/presentationml/2006/main">
+  <p:cSld>
+    <p:spTree>
+      <p:nvGrpSpPr>
+        <p:cNvPr id="1" name=""/>
+        <p:cNvGrpSpPr/>
+        <p:nvPr/>
+      </p:nvGrpSpPr>
+      <p:grpSpPr>
+        <a:xfrm>
+          <a:off x="0" y="0"/>
+          <a:ext cx="0" cy="0"/>
+          <a:chOff x="0" y="0"/>
+          <a:chExt cx="0" cy="0"/>
+        </a:xfrm>
+      </p:grpSpPr>
+      <p:sp>
+        <p:nvSpPr>
+          <p:cNvPr id="2" name="Slide Image Placeholder 1"/>
+          <p:cNvSpPr>
+            <a:spLocks noGrp="1" noRot="1" noChangeAspect="1"/>
+          </p:cNvSpPr>
+          <p:nvPr>
+            <p:ph type="sldImg"/>
+          </p:nvPr>
+        </p:nvSpPr>
+        <p:spPr/>
+      </p:sp>
+      <p:sp>
+        <p:nvSpPr>
+          <p:cNvPr id="3" name="Notes Placeholder 2"/>
+          <p:cNvSpPr>
+            <a:spLocks noGrp="1"/>
+          </p:cNvSpPr>
+          <p:nvPr>
+            <p:ph type="body" idx="1"/>
+          </p:nvPr>
+        </p:nvSpPr>
+        <p:spPr/>
+        <p:txBody>
+          <a:bodyPr/>
+          <a:lstStyle/>
+          <a:p>
+            <a:r>
+              <a:rPr lang="en-US" dirty="0"/>
+              <a:t>For those who need more practice, fill in the blanks in your exercise book. The answers are: number 1, 65; number 2, 100; number 3, 100.</a:t>
+            </a:r>
+            <a:endParaRPr lang="en-US" dirty="0"/>
+          </a:p>
+        </p:txBody>
+      </p:sp>
+      <p:sp>
+        <p:nvSpPr>
+          <p:cNvPr id="4" name="Slide Number Placeholder 3"/>
+          <p:cNvSpPr>
+            <a:spLocks noGrp="1"/>
+          </p:cNvSpPr>
+          <p:nvPr>
+            <p:ph type="sldNum" sz="quarter" idx="10"/>
+          </p:nvPr>
+        </p:nvSpPr>
+        <p:spPr/>
+        <p:txBody>
+          <a:bodyPr/>
+          <a:lstStyle/>
+          <a:p>
+            <a:fld id="{F7021451-1387-4CA6-816F-3879F97B5CBC}" type="slidenum">
+              <a:rPr lang="en-US"/>
+              <a:t>58</a:t>
+            </a:fld>
+            <a:endParaRPr lang="en-US"/>
+          </a:p>
+        </p:txBody>
+      </p:sp>
+    </p:spTree>
+    <p:extLst>
+      <p:ext uri="{BB962C8B-B14F-4D97-AF65-F5344CB8AC3E}">
+        <p14:creationId xmlns:p14="http://schemas.microsoft.com/office/powerpoint/2010/main" val="1024086991"/>
+      </p:ext>
+    </p:extLst>
+  </p:cSld>
+  <p:clrMapOvr>
+    <a:masterClrMapping/>
+  </p:clrMapOvr>
+</p:notes>
+</file>
+
+<file path=ppt/notesSlides/notesSlide59.xml><?xml version="1.0" encoding="utf-8"?>
+<p:notes xmlns:a="http://schemas.openxmlformats.org/drawingml/2006/main" xmlns:r="http://schemas.openxmlformats.org/officeDocument/2006/relationships" xmlns:p="http://schemas.openxmlformats.org/presentationml/2006/main">
+  <p:cSld>
+    <p:spTree>
+      <p:nvGrpSpPr>
+        <p:cNvPr id="1" name=""/>
+        <p:cNvGrpSpPr/>
+        <p:nvPr/>
+      </p:nvGrpSpPr>
+      <p:grpSpPr>
+        <a:xfrm>
+          <a:off x="0" y="0"/>
+          <a:ext cx="0" cy="0"/>
+          <a:chOff x="0" y="0"/>
+          <a:chExt cx="0" cy="0"/>
+        </a:xfrm>
+      </p:grpSpPr>
+      <p:sp>
+        <p:nvSpPr>
+          <p:cNvPr id="2" name="Slide Image Placeholder 1"/>
+          <p:cNvSpPr>
+            <a:spLocks noGrp="1" noRot="1" noChangeAspect="1"/>
+          </p:cNvSpPr>
+          <p:nvPr>
+            <p:ph type="sldImg"/>
+          </p:nvPr>
+        </p:nvSpPr>
+        <p:spPr/>
+      </p:sp>
+      <p:sp>
+        <p:nvSpPr>
+          <p:cNvPr id="3" name="Notes Placeholder 2"/>
+          <p:cNvSpPr>
+            <a:spLocks noGrp="1"/>
+          </p:cNvSpPr>
+          <p:nvPr>
+            <p:ph type="body" idx="1"/>
+          </p:nvPr>
+        </p:nvSpPr>
+        <p:spPr/>
+        <p:txBody>
+          <a:bodyPr/>
+          <a:lstStyle/>
+          <a:p>
+            <a:r>
+              <a:rPr lang="en-US" dirty="0"/>
+              <a:t>For your homework: State the world population around 1800. We shall correct it at the beginning of our next lesson.</a:t>
+            </a:r>
+            <a:endParaRPr lang="en-US" dirty="0"/>
+          </a:p>
+        </p:txBody>
+      </p:sp>
+      <p:sp>
+        <p:nvSpPr>
+          <p:cNvPr id="4" name="Slide Number Placeholder 3"/>
+          <p:cNvSpPr>
+            <a:spLocks noGrp="1"/>
+          </p:cNvSpPr>
+          <p:nvPr>
+            <p:ph type="sldNum" sz="quarter" idx="10"/>
+          </p:nvPr>
+        </p:nvSpPr>
+        <p:spPr/>
+        <p:txBody>
+          <a:bodyPr/>
+          <a:lstStyle/>
+          <a:p>
+            <a:fld id="{F7021451-1387-4CA6-816F-3879F97B5CBC}" type="slidenum">
+              <a:rPr lang="en-US"/>
+              <a:t>59</a:t>
             </a:fld>
             <a:endParaRPr lang="en-US"/>
           </a:p>
@@ -5246,6 +5430,534 @@
             <a:fld id="{F7021451-1387-4CA6-816F-3879F97B5CBC}" type="slidenum">
               <a:rPr lang="en-US"/>
               <a:t>6</a:t>
+            </a:fld>
+            <a:endParaRPr lang="en-US"/>
+          </a:p>
+        </p:txBody>
+      </p:sp>
+    </p:spTree>
+    <p:extLst>
+      <p:ext uri="{BB962C8B-B14F-4D97-AF65-F5344CB8AC3E}">
+        <p14:creationId xmlns:p14="http://schemas.microsoft.com/office/powerpoint/2010/main" val="1024086991"/>
+      </p:ext>
+    </p:extLst>
+  </p:cSld>
+  <p:clrMapOvr>
+    <a:masterClrMapping/>
+  </p:clrMapOvr>
+</p:notes>
+</file>
+
+<file path=ppt/notesSlides/notesSlide60.xml><?xml version="1.0" encoding="utf-8"?>
+<p:notes xmlns:a="http://schemas.openxmlformats.org/drawingml/2006/main" xmlns:r="http://schemas.openxmlformats.org/officeDocument/2006/relationships" xmlns:p="http://schemas.openxmlformats.org/presentationml/2006/main">
+  <p:cSld>
+    <p:spTree>
+      <p:nvGrpSpPr>
+        <p:cNvPr id="1" name=""/>
+        <p:cNvGrpSpPr/>
+        <p:nvPr/>
+      </p:nvGrpSpPr>
+      <p:grpSpPr>
+        <a:xfrm>
+          <a:off x="0" y="0"/>
+          <a:ext cx="0" cy="0"/>
+          <a:chOff x="0" y="0"/>
+          <a:chExt cx="0" cy="0"/>
+        </a:xfrm>
+      </p:grpSpPr>
+      <p:sp>
+        <p:nvSpPr>
+          <p:cNvPr id="2" name="Slide Image Placeholder 1"/>
+          <p:cNvSpPr>
+            <a:spLocks noGrp="1" noRot="1" noChangeAspect="1"/>
+          </p:cNvSpPr>
+          <p:nvPr>
+            <p:ph type="sldImg"/>
+          </p:nvPr>
+        </p:nvSpPr>
+        <p:spPr/>
+      </p:sp>
+      <p:sp>
+        <p:nvSpPr>
+          <p:cNvPr id="3" name="Notes Placeholder 2"/>
+          <p:cNvSpPr>
+            <a:spLocks noGrp="1"/>
+          </p:cNvSpPr>
+          <p:nvPr>
+            <p:ph type="body" idx="1"/>
+          </p:nvPr>
+        </p:nvSpPr>
+        <p:spPr/>
+        <p:txBody>
+          <a:bodyPr/>
+          <a:lstStyle/>
+          <a:p>
+            <a:r>
+              <a:rPr lang="en-US" dirty="0"/>
+              <a:t>Our next lesson will be on Lesson 8: Historical Evolution of World Population. Thank you for your attention, and see you next time.</a:t>
+            </a:r>
+            <a:endParaRPr lang="en-US" dirty="0"/>
+          </a:p>
+        </p:txBody>
+      </p:sp>
+      <p:sp>
+        <p:nvSpPr>
+          <p:cNvPr id="4" name="Slide Number Placeholder 3"/>
+          <p:cNvSpPr>
+            <a:spLocks noGrp="1"/>
+          </p:cNvSpPr>
+          <p:nvPr>
+            <p:ph type="sldNum" sz="quarter" idx="10"/>
+          </p:nvPr>
+        </p:nvSpPr>
+        <p:spPr/>
+        <p:txBody>
+          <a:bodyPr/>
+          <a:lstStyle/>
+          <a:p>
+            <a:fld id="{F7021451-1387-4CA6-816F-3879F97B5CBC}" type="slidenum">
+              <a:rPr lang="en-US"/>
+              <a:t>60</a:t>
+            </a:fld>
+            <a:endParaRPr lang="en-US"/>
+          </a:p>
+        </p:txBody>
+      </p:sp>
+    </p:spTree>
+    <p:extLst>
+      <p:ext uri="{BB962C8B-B14F-4D97-AF65-F5344CB8AC3E}">
+        <p14:creationId xmlns:p14="http://schemas.microsoft.com/office/powerpoint/2010/main" val="1024086991"/>
+      </p:ext>
+    </p:extLst>
+  </p:cSld>
+  <p:clrMapOvr>
+    <a:masterClrMapping/>
+  </p:clrMapOvr>
+</p:notes>
+</file>
+
+<file path=ppt/notesSlides/notesSlide61.xml><?xml version="1.0" encoding="utf-8"?>
+<p:notes xmlns:a="http://schemas.openxmlformats.org/drawingml/2006/main" xmlns:r="http://schemas.openxmlformats.org/officeDocument/2006/relationships" xmlns:p="http://schemas.openxmlformats.org/presentationml/2006/main">
+  <p:cSld>
+    <p:spTree>
+      <p:nvGrpSpPr>
+        <p:cNvPr id="1" name=""/>
+        <p:cNvGrpSpPr/>
+        <p:nvPr/>
+      </p:nvGrpSpPr>
+      <p:grpSpPr>
+        <a:xfrm>
+          <a:off x="0" y="0"/>
+          <a:ext cx="0" cy="0"/>
+          <a:chOff x="0" y="0"/>
+          <a:chExt cx="0" cy="0"/>
+        </a:xfrm>
+      </p:grpSpPr>
+      <p:sp>
+        <p:nvSpPr>
+          <p:cNvPr id="2" name="Slide Image Placeholder 1"/>
+          <p:cNvSpPr>
+            <a:spLocks noGrp="1" noRot="1" noChangeAspect="1"/>
+          </p:cNvSpPr>
+          <p:nvPr>
+            <p:ph type="sldImg"/>
+          </p:nvPr>
+        </p:nvSpPr>
+        <p:spPr/>
+      </p:sp>
+      <p:sp>
+        <p:nvSpPr>
+          <p:cNvPr id="3" name="Notes Placeholder 2"/>
+          <p:cNvSpPr>
+            <a:spLocks noGrp="1"/>
+          </p:cNvSpPr>
+          <p:nvPr>
+            <p:ph type="body" idx="1"/>
+          </p:nvPr>
+        </p:nvSpPr>
+        <p:spPr/>
+        <p:txBody>
+          <a:bodyPr/>
+          <a:lstStyle/>
+          <a:p>
+            <a:r>
+              <a:rPr lang="en-US" dirty="0"/>
+              <a:t>Let us play the bilingual game. I say a word in English, and you give me the French word. Then we do the reverse.</a:t>
+            </a:r>
+            <a:endParaRPr lang="en-US" dirty="0"/>
+          </a:p>
+        </p:txBody>
+      </p:sp>
+      <p:sp>
+        <p:nvSpPr>
+          <p:cNvPr id="4" name="Slide Number Placeholder 3"/>
+          <p:cNvSpPr>
+            <a:spLocks noGrp="1"/>
+          </p:cNvSpPr>
+          <p:nvPr>
+            <p:ph type="sldNum" sz="quarter" idx="10"/>
+          </p:nvPr>
+        </p:nvSpPr>
+        <p:spPr/>
+        <p:txBody>
+          <a:bodyPr/>
+          <a:lstStyle/>
+          <a:p>
+            <a:fld id="{F7021451-1387-4CA6-816F-3879F97B5CBC}" type="slidenum">
+              <a:rPr lang="en-US"/>
+              <a:t>61</a:t>
+            </a:fld>
+            <a:endParaRPr lang="en-US"/>
+          </a:p>
+        </p:txBody>
+      </p:sp>
+    </p:spTree>
+    <p:extLst>
+      <p:ext uri="{BB962C8B-B14F-4D97-AF65-F5344CB8AC3E}">
+        <p14:creationId xmlns:p14="http://schemas.microsoft.com/office/powerpoint/2010/main" val="1024086991"/>
+      </p:ext>
+    </p:extLst>
+  </p:cSld>
+  <p:clrMapOvr>
+    <a:masterClrMapping/>
+  </p:clrMapOvr>
+</p:notes>
+</file>
+
+<file path=ppt/notesSlides/notesSlide62.xml><?xml version="1.0" encoding="utf-8"?>
+<p:notes xmlns:a="http://schemas.openxmlformats.org/drawingml/2006/main" xmlns:r="http://schemas.openxmlformats.org/officeDocument/2006/relationships" xmlns:p="http://schemas.openxmlformats.org/presentationml/2006/main">
+  <p:cSld>
+    <p:spTree>
+      <p:nvGrpSpPr>
+        <p:cNvPr id="1" name=""/>
+        <p:cNvGrpSpPr/>
+        <p:nvPr/>
+      </p:nvGrpSpPr>
+      <p:grpSpPr>
+        <a:xfrm>
+          <a:off x="0" y="0"/>
+          <a:ext cx="0" cy="0"/>
+          <a:chOff x="0" y="0"/>
+          <a:chExt cx="0" cy="0"/>
+        </a:xfrm>
+      </p:grpSpPr>
+      <p:sp>
+        <p:nvSpPr>
+          <p:cNvPr id="2" name="Slide Image Placeholder 1"/>
+          <p:cNvSpPr>
+            <a:spLocks noGrp="1" noRot="1" noChangeAspect="1"/>
+          </p:cNvSpPr>
+          <p:nvPr>
+            <p:ph type="sldImg"/>
+          </p:nvPr>
+        </p:nvSpPr>
+        <p:spPr/>
+      </p:sp>
+      <p:sp>
+        <p:nvSpPr>
+          <p:cNvPr id="3" name="Notes Placeholder 2"/>
+          <p:cNvSpPr>
+            <a:spLocks noGrp="1"/>
+          </p:cNvSpPr>
+          <p:nvPr>
+            <p:ph type="body" idx="1"/>
+          </p:nvPr>
+        </p:nvSpPr>
+        <p:spPr/>
+        <p:txBody>
+          <a:bodyPr/>
+          <a:lstStyle/>
+          <a:p>
+            <a:r>
+              <a:rPr lang="en-US" dirty="0"/>
+              <a:t>I record this information in the official logbook of the class after the lesson.</a:t>
+            </a:r>
+            <a:endParaRPr lang="en-US" dirty="0"/>
+          </a:p>
+        </p:txBody>
+      </p:sp>
+      <p:sp>
+        <p:nvSpPr>
+          <p:cNvPr id="4" name="Slide Number Placeholder 3"/>
+          <p:cNvSpPr>
+            <a:spLocks noGrp="1"/>
+          </p:cNvSpPr>
+          <p:nvPr>
+            <p:ph type="sldNum" sz="quarter" idx="10"/>
+          </p:nvPr>
+        </p:nvSpPr>
+        <p:spPr/>
+        <p:txBody>
+          <a:bodyPr/>
+          <a:lstStyle/>
+          <a:p>
+            <a:fld id="{F7021451-1387-4CA6-816F-3879F97B5CBC}" type="slidenum">
+              <a:rPr lang="en-US"/>
+              <a:t>62</a:t>
+            </a:fld>
+            <a:endParaRPr lang="en-US"/>
+          </a:p>
+        </p:txBody>
+      </p:sp>
+    </p:spTree>
+    <p:extLst>
+      <p:ext uri="{BB962C8B-B14F-4D97-AF65-F5344CB8AC3E}">
+        <p14:creationId xmlns:p14="http://schemas.microsoft.com/office/powerpoint/2010/main" val="1024086991"/>
+      </p:ext>
+    </p:extLst>
+  </p:cSld>
+  <p:clrMapOvr>
+    <a:masterClrMapping/>
+  </p:clrMapOvr>
+</p:notes>
+</file>
+
+<file path=ppt/notesSlides/notesSlide63.xml><?xml version="1.0" encoding="utf-8"?>
+<p:notes xmlns:a="http://schemas.openxmlformats.org/drawingml/2006/main" xmlns:r="http://schemas.openxmlformats.org/officeDocument/2006/relationships" xmlns:p="http://schemas.openxmlformats.org/presentationml/2006/main">
+  <p:cSld>
+    <p:spTree>
+      <p:nvGrpSpPr>
+        <p:cNvPr id="1" name=""/>
+        <p:cNvGrpSpPr/>
+        <p:nvPr/>
+      </p:nvGrpSpPr>
+      <p:grpSpPr>
+        <a:xfrm>
+          <a:off x="0" y="0"/>
+          <a:ext cx="0" cy="0"/>
+          <a:chOff x="0" y="0"/>
+          <a:chExt cx="0" cy="0"/>
+        </a:xfrm>
+      </p:grpSpPr>
+      <p:sp>
+        <p:nvSpPr>
+          <p:cNvPr id="2" name="Slide Image Placeholder 1"/>
+          <p:cNvSpPr>
+            <a:spLocks noGrp="1" noRot="1" noChangeAspect="1"/>
+          </p:cNvSpPr>
+          <p:nvPr>
+            <p:ph type="sldImg"/>
+          </p:nvPr>
+        </p:nvSpPr>
+        <p:spPr/>
+      </p:sp>
+      <p:sp>
+        <p:nvSpPr>
+          <p:cNvPr id="3" name="Notes Placeholder 2"/>
+          <p:cNvSpPr>
+            <a:spLocks noGrp="1"/>
+          </p:cNvSpPr>
+          <p:nvPr>
+            <p:ph type="body" idx="1"/>
+          </p:nvPr>
+        </p:nvSpPr>
+        <p:spPr/>
+        <p:txBody>
+          <a:bodyPr/>
+          <a:lstStyle/>
+          <a:p>
+            <a:r>
+              <a:rPr lang="en-US" dirty="0"/>
+              <a:t>I complete the second page of the logbook: the matter taught, the evaluation, the homework and the attendance.</a:t>
+            </a:r>
+            <a:endParaRPr lang="en-US" dirty="0"/>
+          </a:p>
+        </p:txBody>
+      </p:sp>
+      <p:sp>
+        <p:nvSpPr>
+          <p:cNvPr id="4" name="Slide Number Placeholder 3"/>
+          <p:cNvSpPr>
+            <a:spLocks noGrp="1"/>
+          </p:cNvSpPr>
+          <p:nvPr>
+            <p:ph type="sldNum" sz="quarter" idx="10"/>
+          </p:nvPr>
+        </p:nvSpPr>
+        <p:spPr/>
+        <p:txBody>
+          <a:bodyPr/>
+          <a:lstStyle/>
+          <a:p>
+            <a:fld id="{F7021451-1387-4CA6-816F-3879F97B5CBC}" type="slidenum">
+              <a:rPr lang="en-US"/>
+              <a:t>63</a:t>
+            </a:fld>
+            <a:endParaRPr lang="en-US"/>
+          </a:p>
+        </p:txBody>
+      </p:sp>
+    </p:spTree>
+    <p:extLst>
+      <p:ext uri="{BB962C8B-B14F-4D97-AF65-F5344CB8AC3E}">
+        <p14:creationId xmlns:p14="http://schemas.microsoft.com/office/powerpoint/2010/main" val="1024086991"/>
+      </p:ext>
+    </p:extLst>
+  </p:cSld>
+  <p:clrMapOvr>
+    <a:masterClrMapping/>
+  </p:clrMapOvr>
+</p:notes>
+</file>
+
+<file path=ppt/notesSlides/notesSlide64.xml><?xml version="1.0" encoding="utf-8"?>
+<p:notes xmlns:a="http://schemas.openxmlformats.org/drawingml/2006/main" xmlns:r="http://schemas.openxmlformats.org/officeDocument/2006/relationships" xmlns:p="http://schemas.openxmlformats.org/presentationml/2006/main">
+  <p:cSld>
+    <p:spTree>
+      <p:nvGrpSpPr>
+        <p:cNvPr id="1" name=""/>
+        <p:cNvGrpSpPr/>
+        <p:nvPr/>
+      </p:nvGrpSpPr>
+      <p:grpSpPr>
+        <a:xfrm>
+          <a:off x="0" y="0"/>
+          <a:ext cx="0" cy="0"/>
+          <a:chOff x="0" y="0"/>
+          <a:chExt cx="0" cy="0"/>
+        </a:xfrm>
+      </p:grpSpPr>
+      <p:sp>
+        <p:nvSpPr>
+          <p:cNvPr id="2" name="Slide Image Placeholder 1"/>
+          <p:cNvSpPr>
+            <a:spLocks noGrp="1" noRot="1" noChangeAspect="1"/>
+          </p:cNvSpPr>
+          <p:nvPr>
+            <p:ph type="sldImg"/>
+          </p:nvPr>
+        </p:nvSpPr>
+        <p:spPr/>
+      </p:sp>
+      <p:sp>
+        <p:nvSpPr>
+          <p:cNvPr id="3" name="Notes Placeholder 2"/>
+          <p:cNvSpPr>
+            <a:spLocks noGrp="1"/>
+          </p:cNvSpPr>
+          <p:nvPr>
+            <p:ph type="body" idx="1"/>
+          </p:nvPr>
+        </p:nvSpPr>
+        <p:spPr/>
+        <p:txBody>
+          <a:bodyPr/>
+          <a:lstStyle/>
+          <a:p>
+            <a:r>
+              <a:rPr lang="en-US" dirty="0"/>
+              <a:t>This slide is for me, the teacher: it gives the timing of the lesson and what to do if the projector is not available.</a:t>
+            </a:r>
+            <a:endParaRPr lang="en-US" dirty="0"/>
+          </a:p>
+        </p:txBody>
+      </p:sp>
+      <p:sp>
+        <p:nvSpPr>
+          <p:cNvPr id="4" name="Slide Number Placeholder 3"/>
+          <p:cNvSpPr>
+            <a:spLocks noGrp="1"/>
+          </p:cNvSpPr>
+          <p:nvPr>
+            <p:ph type="sldNum" sz="quarter" idx="10"/>
+          </p:nvPr>
+        </p:nvSpPr>
+        <p:spPr/>
+        <p:txBody>
+          <a:bodyPr/>
+          <a:lstStyle/>
+          <a:p>
+            <a:fld id="{F7021451-1387-4CA6-816F-3879F97B5CBC}" type="slidenum">
+              <a:rPr lang="en-US"/>
+              <a:t>64</a:t>
+            </a:fld>
+            <a:endParaRPr lang="en-US"/>
+          </a:p>
+        </p:txBody>
+      </p:sp>
+    </p:spTree>
+    <p:extLst>
+      <p:ext uri="{BB962C8B-B14F-4D97-AF65-F5344CB8AC3E}">
+        <p14:creationId xmlns:p14="http://schemas.microsoft.com/office/powerpoint/2010/main" val="1024086991"/>
+      </p:ext>
+    </p:extLst>
+  </p:cSld>
+  <p:clrMapOvr>
+    <a:masterClrMapping/>
+  </p:clrMapOvr>
+</p:notes>
+</file>
+
+<file path=ppt/notesSlides/notesSlide65.xml><?xml version="1.0" encoding="utf-8"?>
+<p:notes xmlns:a="http://schemas.openxmlformats.org/drawingml/2006/main" xmlns:r="http://schemas.openxmlformats.org/officeDocument/2006/relationships" xmlns:p="http://schemas.openxmlformats.org/presentationml/2006/main">
+  <p:cSld>
+    <p:spTree>
+      <p:nvGrpSpPr>
+        <p:cNvPr id="1" name=""/>
+        <p:cNvGrpSpPr/>
+        <p:nvPr/>
+      </p:nvGrpSpPr>
+      <p:grpSpPr>
+        <a:xfrm>
+          <a:off x="0" y="0"/>
+          <a:ext cx="0" cy="0"/>
+          <a:chOff x="0" y="0"/>
+          <a:chExt cx="0" cy="0"/>
+        </a:xfrm>
+      </p:grpSpPr>
+      <p:sp>
+        <p:nvSpPr>
+          <p:cNvPr id="2" name="Slide Image Placeholder 1"/>
+          <p:cNvSpPr>
+            <a:spLocks noGrp="1" noRot="1" noChangeAspect="1"/>
+          </p:cNvSpPr>
+          <p:nvPr>
+            <p:ph type="sldImg"/>
+          </p:nvPr>
+        </p:nvSpPr>
+        <p:spPr/>
+      </p:sp>
+      <p:sp>
+        <p:nvSpPr>
+          <p:cNvPr id="3" name="Notes Placeholder 2"/>
+          <p:cNvSpPr>
+            <a:spLocks noGrp="1"/>
+          </p:cNvSpPr>
+          <p:nvPr>
+            <p:ph type="body" idx="1"/>
+          </p:nvPr>
+        </p:nvSpPr>
+        <p:spPr/>
+        <p:txBody>
+          <a:bodyPr/>
+          <a:lstStyle/>
+          <a:p>
+            <a:r>
+              <a:rPr lang="en-US" dirty="0"/>
+              <a:t>These are the references and picture credits used to prepare this lesson.</a:t>
+            </a:r>
+            <a:endParaRPr lang="en-US" dirty="0"/>
+          </a:p>
+        </p:txBody>
+      </p:sp>
+      <p:sp>
+        <p:nvSpPr>
+          <p:cNvPr id="4" name="Slide Number Placeholder 3"/>
+          <p:cNvSpPr>
+            <a:spLocks noGrp="1"/>
+          </p:cNvSpPr>
+          <p:nvPr>
+            <p:ph type="sldNum" sz="quarter" idx="10"/>
+          </p:nvPr>
+        </p:nvSpPr>
+        <p:spPr/>
+        <p:txBody>
+          <a:bodyPr/>
+          <a:lstStyle/>
+          <a:p>
+            <a:fld id="{F7021451-1387-4CA6-816F-3879F97B5CBC}" type="slidenum">
+              <a:rPr lang="en-US"/>
+              <a:t>65</a:t>
             </a:fld>
             <a:endParaRPr lang="en-US"/>
           </a:p>
@@ -14340,7 +15052,7 @@
                 <a:ea typeface="Times New Roman" pitchFamily="34" charset="-122"/>
                 <a:cs typeface="Times New Roman" pitchFamily="34" charset="-120"/>
               </a:rPr>
-              <a:t>It is the number of dependants (aged 0–14 and 65 and over) for every 100 people of working age (15–64).</a:t>
+              <a:t>It is the number of dependants (aged 0 to 14 and 65 and over) for every 100 people of working age (15 to 64).</a:t>
             </a:r>
             <a:endParaRPr lang="en-US" sz="4000" dirty="0"/>
           </a:p>
@@ -14475,7 +15187,7 @@
         <p:spPr>
           <a:xfrm>
             <a:off x="0" y="658368"/>
-            <a:ext cx="5120640" cy="5833872"/>
+            <a:ext cx="3840480" cy="5833872"/>
           </a:xfrm>
           <a:prstGeom prst="rect">
             <a:avLst/>
@@ -14490,8 +15202,8 @@
         </p:nvSpPr>
         <p:spPr>
           <a:xfrm>
-            <a:off x="5349240" y="1005840"/>
-            <a:ext cx="6522415" cy="731520"/>
+            <a:off x="4069080" y="1005840"/>
+            <a:ext cx="7802575" cy="731520"/>
           </a:xfrm>
           <a:prstGeom prst="rect">
             <a:avLst/>
@@ -14531,8 +15243,8 @@
         </p:nvSpPr>
         <p:spPr>
           <a:xfrm>
-            <a:off x="5349240" y="1783080"/>
-            <a:ext cx="6522415" cy="4663440"/>
+            <a:off x="4069080" y="1783080"/>
+            <a:ext cx="7802575" cy="4663440"/>
           </a:xfrm>
           <a:prstGeom prst="rect">
             <a:avLst/>
@@ -14576,7 +15288,44 @@
                 <a:ea typeface="Times New Roman" pitchFamily="34" charset="-122"/>
                 <a:cs typeface="Times New Roman" pitchFamily="34" charset="-120"/>
               </a:rPr>
-              <a:t>It is the people aged 15–64, who are expected to produce and support the others.</a:t>
+              <a:t>It is the people aged 15 to 64, who are expected to produce and support the others.</a:t>
+            </a:r>
+            <a:endParaRPr lang="en-US" sz="4000" dirty="0"/>
+          </a:p>
+          <a:p>
+            <a:pPr algn="l" indent="0" marL="0">
+              <a:spcAft>
+                <a:spcPts val="800"/>
+              </a:spcAft>
+              <a:buNone/>
+            </a:pPr>
+            <a:r>
+              <a:rPr lang="en-US" sz="4000" b="1" dirty="0">
+                <a:solidFill>
+                  <a:srgbClr val="111111"/>
+                </a:solidFill>
+                <a:latin typeface="Times New Roman" pitchFamily="34" charset="0"/>
+                <a:ea typeface="Times New Roman" pitchFamily="34" charset="-122"/>
+                <a:cs typeface="Times New Roman" pitchFamily="34" charset="-120"/>
+              </a:rPr>
+              <a:t>Population pyramid: </a:t>
+            </a:r>
+            <a:pPr algn="l" indent="0" marL="0">
+              <a:spcAft>
+                <a:spcPts val="800"/>
+              </a:spcAft>
+              <a:buNone/>
+            </a:pPr>
+            <a:r>
+              <a:rPr lang="en-US" sz="4000" dirty="0">
+                <a:solidFill>
+                  <a:srgbClr val="111111"/>
+                </a:solidFill>
+                <a:latin typeface="Times New Roman" pitchFamily="34" charset="0"/>
+                <a:ea typeface="Times New Roman" pitchFamily="34" charset="-122"/>
+                <a:cs typeface="Times New Roman" pitchFamily="34" charset="-120"/>
+              </a:rPr>
+              <a:t>It is a double bar graph showing the age and sex composition of a population.</a:t>
             </a:r>
             <a:endParaRPr lang="en-US" sz="4000" dirty="0"/>
           </a:p>
@@ -14729,7 +15478,7 @@
                 <a:ea typeface="Times New Roman" pitchFamily="34" charset="-122"/>
                 <a:cs typeface="Times New Roman" pitchFamily="34" charset="-120"/>
               </a:rPr>
-              <a:t>1. The Formula</a:t>
+              <a:t>1. The Dependency Ratio</a:t>
             </a:r>
             <a:endParaRPr lang="en-US" sz="3600" dirty="0"/>
           </a:p>
@@ -14744,7 +15493,7 @@
         <p:spPr>
           <a:xfrm>
             <a:off x="365760" y="1783080"/>
-            <a:ext cx="4846320" cy="4617720"/>
+            <a:ext cx="6035040" cy="4617720"/>
           </a:xfrm>
           <a:prstGeom prst="rect">
             <a:avLst/>
@@ -14763,7 +15512,7 @@
               <a:buNone/>
             </a:pPr>
             <a:r>
-              <a:rPr lang="en-US" sz="3600" i="1" dirty="0">
+              <a:rPr lang="en-US" sz="3200" i="1" dirty="0">
                 <a:solidFill>
                   <a:srgbClr val="111111"/>
                 </a:solidFill>
@@ -14773,7 +15522,7 @@
               </a:rPr>
               <a:t>The dependency ratio is calculated with the following formula:</a:t>
             </a:r>
-            <a:endParaRPr lang="en-US" sz="3600" dirty="0"/>
+            <a:endParaRPr lang="en-US" sz="3200" dirty="0"/>
           </a:p>
           <a:p>
             <a:pPr algn="l" indent="0" marL="0">
@@ -14783,7 +15532,7 @@
               <a:buNone/>
             </a:pPr>
             <a:r>
-              <a:rPr lang="en-US" sz="3600" b="1" dirty="0">
+              <a:rPr lang="en-US" sz="3200" b="1" dirty="0">
                 <a:solidFill>
                   <a:srgbClr val="111111"/>
                 </a:solidFill>
@@ -14800,7 +15549,7 @@
               <a:buNone/>
             </a:pPr>
             <a:r>
-              <a:rPr lang="en-US" sz="3600" dirty="0">
+              <a:rPr lang="en-US" sz="3200" dirty="0">
                 <a:solidFill>
                   <a:srgbClr val="111111"/>
                 </a:solidFill>
@@ -14808,9 +15557,9 @@
                 <a:ea typeface="Times New Roman" pitchFamily="34" charset="-122"/>
                 <a:cs typeface="Times New Roman" pitchFamily="34" charset="-120"/>
               </a:rPr>
-              <a:t>Dependency ratio = (people aged 0–14 + people aged 65 and over) ÷ people aged 15–64 × 100.</a:t>
-            </a:r>
-            <a:endParaRPr lang="en-US" sz="3600" dirty="0"/>
+              <a:t>Dependency ratio = (people aged 0 to 14 + people aged 65 and over) ÷ people aged 15 to 64 × 100. The result is the number of dependants for every 100 people of working age.</a:t>
+            </a:r>
+            <a:endParaRPr lang="en-US" sz="3200" dirty="0"/>
           </a:p>
         </p:txBody>
       </p:sp>
@@ -14830,8 +15579,8 @@
         </p:blipFill>
         <p:spPr>
           <a:xfrm>
-            <a:off x="5349240" y="2617506"/>
-            <a:ext cx="6659575" cy="2601397"/>
+            <a:off x="6537960" y="2849678"/>
+            <a:ext cx="5470855" cy="2137053"/>
           </a:xfrm>
           <a:prstGeom prst="rect">
             <a:avLst/>
@@ -14846,8 +15595,8 @@
         </p:nvSpPr>
         <p:spPr>
           <a:xfrm>
-            <a:off x="5349240" y="6089904"/>
-            <a:ext cx="6659575" cy="347472"/>
+            <a:off x="6537960" y="6089904"/>
+            <a:ext cx="5470855" cy="347472"/>
           </a:xfrm>
           <a:prstGeom prst="rect">
             <a:avLst/>
@@ -15048,7 +15797,7 @@
                 <a:ea typeface="Times New Roman" pitchFamily="34" charset="-122"/>
                 <a:cs typeface="Times New Roman" pitchFamily="34" charset="-120"/>
               </a:rPr>
-              <a:t>1. The Formula</a:t>
+              <a:t>1. The Dependency Ratio</a:t>
             </a:r>
             <a:endParaRPr lang="en-US" sz="3600" dirty="0"/>
           </a:p>
@@ -15090,7 +15839,7 @@
                 <a:ea typeface="Times New Roman" pitchFamily="34" charset="-122"/>
                 <a:cs typeface="Times New Roman" pitchFamily="34" charset="-120"/>
               </a:rPr>
-              <a:t>Dependants: </a:t>
+              <a:t>Dependants and workers: </a:t>
             </a:r>
             <a:pPr algn="l" indent="0" marL="0">
               <a:spcAft>
@@ -15107,44 +15856,7 @@
                 <a:ea typeface="Times New Roman" pitchFamily="34" charset="-122"/>
                 <a:cs typeface="Times New Roman" pitchFamily="34" charset="-120"/>
               </a:rPr>
-              <a:t>They are the young (0–14 years) and the elderly (65 years and over).</a:t>
-            </a:r>
-            <a:endParaRPr lang="en-US" sz="4000" dirty="0"/>
-          </a:p>
-          <a:p>
-            <a:pPr algn="l" indent="0" marL="0">
-              <a:spcAft>
-                <a:spcPts val="800"/>
-              </a:spcAft>
-              <a:buNone/>
-            </a:pPr>
-            <a:r>
-              <a:rPr lang="en-US" sz="4000" b="1" dirty="0">
-                <a:solidFill>
-                  <a:srgbClr val="111111"/>
-                </a:solidFill>
-                <a:latin typeface="Times New Roman" pitchFamily="34" charset="0"/>
-                <a:ea typeface="Times New Roman" pitchFamily="34" charset="-122"/>
-                <a:cs typeface="Times New Roman" pitchFamily="34" charset="-120"/>
-              </a:rPr>
-              <a:t>Workers: </a:t>
-            </a:r>
-            <a:pPr algn="l" indent="0" marL="0">
-              <a:spcAft>
-                <a:spcPts val="800"/>
-              </a:spcAft>
-              <a:buNone/>
-            </a:pPr>
-            <a:r>
-              <a:rPr lang="en-US" sz="4000" dirty="0">
-                <a:solidFill>
-                  <a:srgbClr val="111111"/>
-                </a:solidFill>
-                <a:latin typeface="Times New Roman" pitchFamily="34" charset="0"/>
-                <a:ea typeface="Times New Roman" pitchFamily="34" charset="-122"/>
-                <a:cs typeface="Times New Roman" pitchFamily="34" charset="-120"/>
-              </a:rPr>
-              <a:t>They are the people aged 15–64 years.</a:t>
+              <a:t>The dependants are the young (0 to 14 years) and the elderly (65 years and over). The workers are the people aged 15 to 64 years.</a:t>
             </a:r>
             <a:endParaRPr lang="en-US" sz="4000" dirty="0"/>
           </a:p>
@@ -15639,7 +16351,7 @@
                 <a:ea typeface="Times New Roman" pitchFamily="34" charset="-122"/>
                 <a:cs typeface="Times New Roman" pitchFamily="34" charset="-120"/>
               </a:rPr>
-              <a:t>2,000 children, 800 elderly and 3,000 adults: (2,000 + 800) ÷ 3,000 × 100 ≈ 93.3 %.</a:t>
+              <a:t>A village has 2,000 children, 800 elderly people and 3,000 adults. Its dependency ratio is (2,000 + 800) ÷ 3,000 × 100 ≈ 93.3.</a:t>
             </a:r>
             <a:endParaRPr lang="en-US" sz="4000" dirty="0"/>
           </a:p>
@@ -15807,7 +16519,7 @@
         <p:spPr>
           <a:xfrm>
             <a:off x="365760" y="1783080"/>
-            <a:ext cx="4846320" cy="4617720"/>
+            <a:ext cx="6035040" cy="4617720"/>
           </a:xfrm>
           <a:prstGeom prst="rect">
             <a:avLst/>
@@ -15826,7 +16538,7 @@
               <a:buNone/>
             </a:pPr>
             <a:r>
-              <a:rPr lang="en-US" sz="3600" b="1" dirty="0">
+              <a:rPr lang="en-US" sz="3200" b="1" dirty="0">
                 <a:solidFill>
                   <a:srgbClr val="111111"/>
                 </a:solidFill>
@@ -15834,7 +16546,7 @@
                 <a:ea typeface="Times New Roman" pitchFamily="34" charset="-122"/>
                 <a:cs typeface="Times New Roman" pitchFamily="34" charset="-120"/>
               </a:rPr>
-              <a:t>Example 2 (UK, 1971): </a:t>
+              <a:t>Example 2 (United Kingdom, 1971): </a:t>
             </a:r>
             <a:pPr algn="l" indent="0" marL="0">
               <a:spcAft>
@@ -15843,7 +16555,7 @@
               <a:buNone/>
             </a:pPr>
             <a:r>
-              <a:rPr lang="en-US" sz="3600" dirty="0">
+              <a:rPr lang="en-US" sz="3200" dirty="0">
                 <a:solidFill>
                   <a:srgbClr val="111111"/>
                 </a:solidFill>
@@ -15851,9 +16563,9 @@
                 <a:ea typeface="Times New Roman" pitchFamily="34" charset="-122"/>
                 <a:cs typeface="Times New Roman" pitchFamily="34" charset="-120"/>
               </a:rPr>
-              <a:t>13,387 children, 7,307 elderly and 31,616 adults (in thousands): (13,387 + 7,307) ÷ 31,616 × 100 = 65.45 %.</a:t>
-            </a:r>
-            <a:endParaRPr lang="en-US" sz="3600" dirty="0"/>
+              <a:t>There were 13,387 children, 7,307 elderly and 31,616 adults, in thousands, so the ratio is (13,387 + 7,307) ÷ 31,616 × 100 = 65.45. This means that for every 100 people of working age, there were about 65 dependants.</a:t>
+            </a:r>
+            <a:endParaRPr lang="en-US" sz="3200" dirty="0"/>
           </a:p>
         </p:txBody>
       </p:sp>
@@ -15873,8 +16585,8 @@
         </p:blipFill>
         <p:spPr>
           <a:xfrm>
-            <a:off x="5349240" y="2617506"/>
-            <a:ext cx="6659575" cy="2601397"/>
+            <a:off x="6537960" y="2849678"/>
+            <a:ext cx="5470855" cy="2137053"/>
           </a:xfrm>
           <a:prstGeom prst="rect">
             <a:avLst/>
@@ -15889,8 +16601,8 @@
         </p:nvSpPr>
         <p:spPr>
           <a:xfrm>
-            <a:off x="5349240" y="6089904"/>
-            <a:ext cx="6659575" cy="347472"/>
+            <a:off x="6537960" y="6089904"/>
+            <a:ext cx="5470855" cy="347472"/>
           </a:xfrm>
           <a:prstGeom prst="rect">
             <a:avLst/>
@@ -15914,7 +16626,7 @@
                 <a:ea typeface="Times New Roman" pitchFamily="34" charset="-122"/>
                 <a:cs typeface="Times New Roman" pitchFamily="34" charset="-120"/>
               </a:rPr>
-              <a:t>Illustration: UK, 1971</a:t>
+              <a:t>Illustration: the United Kingdom in 1971</a:t>
             </a:r>
             <a:endParaRPr lang="en-US" sz="1600" dirty="0"/>
           </a:p>
@@ -16049,7 +16761,7 @@
         <p:spPr>
           <a:xfrm>
             <a:off x="0" y="658368"/>
-            <a:ext cx="3840480" cy="5833872"/>
+            <a:ext cx="5120640" cy="5833872"/>
           </a:xfrm>
           <a:prstGeom prst="rect">
             <a:avLst/>
@@ -16064,8 +16776,8 @@
         </p:nvSpPr>
         <p:spPr>
           <a:xfrm>
-            <a:off x="4069080" y="1005840"/>
-            <a:ext cx="7802575" cy="731520"/>
+            <a:off x="5349240" y="1005840"/>
+            <a:ext cx="6522415" cy="731520"/>
           </a:xfrm>
           <a:prstGeom prst="rect">
             <a:avLst/>
@@ -16105,8 +16817,8 @@
         </p:nvSpPr>
         <p:spPr>
           <a:xfrm>
-            <a:off x="4069080" y="1783080"/>
-            <a:ext cx="7802575" cy="4663440"/>
+            <a:off x="5349240" y="1783080"/>
+            <a:ext cx="6522415" cy="4663440"/>
           </a:xfrm>
           <a:prstGeom prst="rect">
             <a:avLst/>
@@ -16133,7 +16845,7 @@
                 <a:ea typeface="Times New Roman" pitchFamily="34" charset="-122"/>
                 <a:cs typeface="Times New Roman" pitchFamily="34" charset="-120"/>
               </a:rPr>
-              <a:t>Interpretation of example 2: </a:t>
+              <a:t>Example 3: </a:t>
             </a:r>
             <a:pPr algn="l" indent="0" marL="0">
               <a:spcAft>
@@ -16150,44 +16862,7 @@
                 <a:ea typeface="Times New Roman" pitchFamily="34" charset="-122"/>
                 <a:cs typeface="Times New Roman" pitchFamily="34" charset="-120"/>
               </a:rPr>
-              <a:t>For every 100 people of working age, there were about 65 dependants.</a:t>
-            </a:r>
-            <a:endParaRPr lang="en-US" sz="4000" dirty="0"/>
-          </a:p>
-          <a:p>
-            <a:pPr algn="l" indent="0" marL="0">
-              <a:spcAft>
-                <a:spcPts val="800"/>
-              </a:spcAft>
-              <a:buNone/>
-            </a:pPr>
-            <a:r>
-              <a:rPr lang="en-US" sz="4000" b="1" dirty="0">
-                <a:solidFill>
-                  <a:srgbClr val="111111"/>
-                </a:solidFill>
-                <a:latin typeface="Times New Roman" pitchFamily="34" charset="0"/>
-                <a:ea typeface="Times New Roman" pitchFamily="34" charset="-122"/>
-                <a:cs typeface="Times New Roman" pitchFamily="34" charset="-120"/>
-              </a:rPr>
-              <a:t>Example 3: </a:t>
-            </a:r>
-            <a:pPr algn="l" indent="0" marL="0">
-              <a:spcAft>
-                <a:spcPts val="800"/>
-              </a:spcAft>
-              <a:buNone/>
-            </a:pPr>
-            <a:r>
-              <a:rPr lang="en-US" sz="4000" dirty="0">
-                <a:solidFill>
-                  <a:srgbClr val="111111"/>
-                </a:solidFill>
-                <a:latin typeface="Times New Roman" pitchFamily="34" charset="0"/>
-                <a:ea typeface="Times New Roman" pitchFamily="34" charset="-122"/>
-                <a:cs typeface="Times New Roman" pitchFamily="34" charset="-120"/>
-              </a:rPr>
-              <a:t>6,000 children, 2,000 elderly and 10,000 adults: (6,000 + 2,000) ÷ 10,000 × 100 = 80 %.</a:t>
+              <a:t>A town has 6,000 children, 2,000 elderly people and 10,000 adults. Its dependency ratio is (6,000 + 2,000) ÷ 10,000 × 100 = 80.</a:t>
             </a:r>
             <a:endParaRPr lang="en-US" sz="4000" dirty="0"/>
           </a:p>
@@ -16355,7 +17030,7 @@
         <p:spPr>
           <a:xfrm>
             <a:off x="365760" y="1783080"/>
-            <a:ext cx="4846320" cy="4617720"/>
+            <a:ext cx="6035040" cy="4617720"/>
           </a:xfrm>
           <a:prstGeom prst="rect">
             <a:avLst/>
@@ -16374,7 +17049,7 @@
               <a:buNone/>
             </a:pPr>
             <a:r>
-              <a:rPr lang="en-US" sz="3200" i="1" dirty="0">
+              <a:rPr lang="en-US" sz="3600" i="1" dirty="0">
                 <a:solidFill>
                   <a:srgbClr val="111111"/>
                 </a:solidFill>
@@ -16382,9 +17057,9 @@
                 <a:ea typeface="Times New Roman" pitchFamily="34" charset="-122"/>
                 <a:cs typeface="Times New Roman" pitchFamily="34" charset="-120"/>
               </a:rPr>
-              <a:t>The results of the dependency ratio are interpreted as follows:</a:t>
-            </a:r>
-            <a:endParaRPr lang="en-US" sz="3200" dirty="0"/>
+              <a:t>The dependency ratio is interpreted as follows:</a:t>
+            </a:r>
+            <a:endParaRPr lang="en-US" sz="3600" dirty="0"/>
           </a:p>
           <a:p>
             <a:pPr algn="l" indent="0" marL="0">
@@ -16394,7 +17069,7 @@
               <a:buNone/>
             </a:pPr>
             <a:r>
-              <a:rPr lang="en-US" sz="3200" b="1" dirty="0">
+              <a:rPr lang="en-US" sz="3600" b="1" dirty="0">
                 <a:solidFill>
                   <a:srgbClr val="111111"/>
                 </a:solidFill>
@@ -16402,7 +17077,7 @@
                 <a:ea typeface="Times New Roman" pitchFamily="34" charset="-122"/>
                 <a:cs typeface="Times New Roman" pitchFamily="34" charset="-120"/>
               </a:rPr>
-              <a:t>High ratio: </a:t>
+              <a:t>A high ratio: </a:t>
             </a:r>
             <a:pPr algn="l" indent="0" marL="0">
               <a:spcAft>
@@ -16411,7 +17086,7 @@
               <a:buNone/>
             </a:pPr>
             <a:r>
-              <a:rPr lang="en-US" sz="3200" dirty="0">
+              <a:rPr lang="en-US" sz="3600" dirty="0">
                 <a:solidFill>
                   <a:srgbClr val="111111"/>
                 </a:solidFill>
@@ -16419,9 +17094,9 @@
                 <a:ea typeface="Times New Roman" pitchFamily="34" charset="-122"/>
                 <a:cs typeface="Times New Roman" pitchFamily="34" charset="-120"/>
               </a:rPr>
-              <a:t>A ratio close to or above 80–100 % means a heavy burden on workers, common in developing countries.</a:t>
-            </a:r>
-            <a:endParaRPr lang="en-US" sz="3200" dirty="0"/>
+              <a:t>A ratio close to or above 80 to 100 means a heavy burden on workers. It is common in developing countries with many children.</a:t>
+            </a:r>
+            <a:endParaRPr lang="en-US" sz="3600" dirty="0"/>
           </a:p>
         </p:txBody>
       </p:sp>
@@ -16441,8 +17116,8 @@
         </p:blipFill>
         <p:spPr>
           <a:xfrm>
-            <a:off x="5349240" y="2461422"/>
-            <a:ext cx="6659575" cy="2913564"/>
+            <a:off x="6537960" y="2721454"/>
+            <a:ext cx="5470855" cy="2393499"/>
           </a:xfrm>
           <a:prstGeom prst="rect">
             <a:avLst/>
@@ -16457,8 +17132,8 @@
         </p:nvSpPr>
         <p:spPr>
           <a:xfrm>
-            <a:off x="5349240" y="6089904"/>
-            <a:ext cx="6659575" cy="347472"/>
+            <a:off x="6537960" y="6089904"/>
+            <a:ext cx="5470855" cy="347472"/>
           </a:xfrm>
           <a:prstGeom prst="rect">
             <a:avLst/>
@@ -16482,7 +17157,7 @@
                 <a:ea typeface="Times New Roman" pitchFamily="34" charset="-122"/>
                 <a:cs typeface="Times New Roman" pitchFamily="34" charset="-120"/>
               </a:rPr>
-              <a:t>Illustration: young and old people</a:t>
+              <a:t>Illustration: youthful and ageing populations</a:t>
             </a:r>
             <a:endParaRPr lang="en-US" sz="1600" dirty="0"/>
           </a:p>
@@ -16718,44 +17393,7 @@
                 <a:ea typeface="Times New Roman" pitchFamily="34" charset="-122"/>
                 <a:cs typeface="Times New Roman" pitchFamily="34" charset="-120"/>
               </a:rPr>
-              <a:t>The ratio is about 80 %, mostly young dependants (about 42 % under 15 and 3 % over 65).</a:t>
-            </a:r>
-            <a:endParaRPr lang="en-US" sz="4000" dirty="0"/>
-          </a:p>
-          <a:p>
-            <a:pPr algn="l" indent="0" marL="0">
-              <a:spcAft>
-                <a:spcPts val="800"/>
-              </a:spcAft>
-              <a:buNone/>
-            </a:pPr>
-            <a:r>
-              <a:rPr lang="en-US" sz="4000" b="1" dirty="0">
-                <a:solidFill>
-                  <a:srgbClr val="111111"/>
-                </a:solidFill>
-                <a:latin typeface="Times New Roman" pitchFamily="34" charset="0"/>
-                <a:ea typeface="Times New Roman" pitchFamily="34" charset="-122"/>
-                <a:cs typeface="Times New Roman" pitchFamily="34" charset="-120"/>
-              </a:rPr>
-              <a:t>Low ratio: </a:t>
-            </a:r>
-            <a:pPr algn="l" indent="0" marL="0">
-              <a:spcAft>
-                <a:spcPts val="800"/>
-              </a:spcAft>
-              <a:buNone/>
-            </a:pPr>
-            <a:r>
-              <a:rPr lang="en-US" sz="4000" dirty="0">
-                <a:solidFill>
-                  <a:srgbClr val="111111"/>
-                </a:solidFill>
-                <a:latin typeface="Times New Roman" pitchFamily="34" charset="0"/>
-                <a:ea typeface="Times New Roman" pitchFamily="34" charset="-122"/>
-                <a:cs typeface="Times New Roman" pitchFamily="34" charset="-120"/>
-              </a:rPr>
-              <a:t>A ratio around 50 % means a large working population, which helps economic growth (demographic dividend).</a:t>
+              <a:t>The ratio of Cameroon is about 80, and most dependants are young, since about 42 % of the people are under 15 and 3 % over 65. The state must spend a lot on schools and child health.</a:t>
             </a:r>
             <a:endParaRPr lang="en-US" sz="4000" dirty="0"/>
           </a:p>
@@ -16932,7 +17570,7 @@
                 <a:ea typeface="Times New Roman" pitchFamily="34" charset="-122"/>
                 <a:cs typeface="Times New Roman" pitchFamily="34" charset="-120"/>
               </a:rPr>
-              <a:t>3. Interpretation of the Results (continued)</a:t>
+              <a:t>3. Interpretation of the Results</a:t>
             </a:r>
             <a:endParaRPr lang="en-US" sz="3600" dirty="0"/>
           </a:p>
@@ -16974,7 +17612,7 @@
                 <a:ea typeface="Times New Roman" pitchFamily="34" charset="-122"/>
                 <a:cs typeface="Times New Roman" pitchFamily="34" charset="-120"/>
               </a:rPr>
-              <a:t>Ageing countries: </a:t>
+              <a:t>A low ratio: </a:t>
             </a:r>
             <a:pPr algn="l" indent="0" marL="0">
               <a:spcAft>
@@ -16991,7 +17629,7 @@
                 <a:ea typeface="Times New Roman" pitchFamily="34" charset="-122"/>
                 <a:cs typeface="Times New Roman" pitchFamily="34" charset="-120"/>
               </a:rPr>
-              <a:t>In Japan and Europe, the ratio rises again because of the elderly.</a:t>
+              <a:t>A ratio around 50 means a large working population compared with dependants. This helps economic growth and is called the demographic dividend.</a:t>
             </a:r>
             <a:endParaRPr lang="en-US" sz="4000" dirty="0"/>
           </a:p>
@@ -17103,7 +17741,7 @@
                 <a:ea typeface="Calibri" pitchFamily="34" charset="-122"/>
                 <a:cs typeface="Calibri" pitchFamily="34" charset="-120"/>
               </a:rPr>
-              <a:t>FORMATIVE EVALUATION</a:t>
+              <a:t>BOARD SUMMARY</a:t>
             </a:r>
             <a:endParaRPr lang="en-US" sz="1400" dirty="0"/>
           </a:p>
@@ -17168,7 +17806,7 @@
                 <a:ea typeface="Times New Roman" pitchFamily="34" charset="-122"/>
                 <a:cs typeface="Times New Roman" pitchFamily="34" charset="-120"/>
               </a:rPr>
-              <a:t>Evaluation 1</a:t>
+              <a:t>3. Interpretation of the Results</a:t>
             </a:r>
             <a:endParaRPr lang="en-US" sz="3600" dirty="0"/>
           </a:p>
@@ -17202,7 +17840,7 @@
               <a:buNone/>
             </a:pPr>
             <a:r>
-              <a:rPr lang="en-US" sz="4000" dirty="0">
+              <a:rPr lang="en-US" sz="4000" b="1" dirty="0">
                 <a:solidFill>
                   <a:srgbClr val="111111"/>
                 </a:solidFill>
@@ -17210,7 +17848,24 @@
                 <a:ea typeface="Times New Roman" pitchFamily="34" charset="-122"/>
                 <a:cs typeface="Times New Roman" pitchFamily="34" charset="-120"/>
               </a:rPr>
-              <a:t>Calculate the dependency ratio of a population with 4,500 children, 500 elderly and 5,000 adults.</a:t>
+              <a:t>Ageing countries: </a:t>
+            </a:r>
+            <a:pPr algn="l" indent="0" marL="0">
+              <a:spcAft>
+                <a:spcPts val="800"/>
+              </a:spcAft>
+              <a:buNone/>
+            </a:pPr>
+            <a:r>
+              <a:rPr lang="en-US" sz="4000" dirty="0">
+                <a:solidFill>
+                  <a:srgbClr val="111111"/>
+                </a:solidFill>
+                <a:latin typeface="Times New Roman" pitchFamily="34" charset="0"/>
+                <a:ea typeface="Times New Roman" pitchFamily="34" charset="-122"/>
+                <a:cs typeface="Times New Roman" pitchFamily="34" charset="-120"/>
+              </a:rPr>
+              <a:t>In Japan and Europe, the ratio rises again, but this time because of the elderly. These countries must spend more on pensions and health care.</a:t>
             </a:r>
             <a:endParaRPr lang="en-US" sz="4000" dirty="0"/>
           </a:p>
@@ -17322,15 +17977,135 @@
                 <a:ea typeface="Calibri" pitchFamily="34" charset="-122"/>
                 <a:cs typeface="Calibri" pitchFamily="34" charset="-120"/>
               </a:rPr>
-              <a:t>FORMATIVE EVALUATION</a:t>
+              <a:t>BOARD SUMMARY</a:t>
             </a:r>
             <a:endParaRPr lang="en-US" sz="1400" dirty="0"/>
+          </a:p>
+        </p:txBody>
+      </p:sp>
+      <p:sp>
+        <p:nvSpPr>
+          <p:cNvPr id="3" name="Text 1"/>
+          <p:cNvSpPr/>
+          <p:nvPr/>
+        </p:nvSpPr>
+        <p:spPr>
+          <a:xfrm>
+            <a:off x="365760" y="1005840"/>
+            <a:ext cx="11460175" cy="731520"/>
+          </a:xfrm>
+          <a:prstGeom prst="rect">
+            <a:avLst/>
+          </a:prstGeom>
+          <a:noFill/>
+          <a:ln/>
+        </p:spPr>
+        <p:txBody>
+          <a:bodyPr wrap="square" lIns="0" tIns="0" rIns="0" bIns="0" rtlCol="0" anchor="ctr">
+            <a:normAutofit/>
+          </a:bodyPr>
+          <a:lstStyle/>
+          <a:p>
+            <a:pPr algn="ctr" indent="0" marL="0">
+              <a:buNone/>
+            </a:pPr>
+            <a:r>
+              <a:rPr lang="en-US" sz="3600" b="1" dirty="0">
+                <a:solidFill>
+                  <a:srgbClr val="990011"/>
+                </a:solidFill>
+                <a:latin typeface="Times New Roman" pitchFamily="34" charset="0"/>
+                <a:ea typeface="Times New Roman" pitchFamily="34" charset="-122"/>
+                <a:cs typeface="Times New Roman" pitchFamily="34" charset="-120"/>
+              </a:rPr>
+              <a:t>4. Construction of a Population Pyramid</a:t>
+            </a:r>
+            <a:endParaRPr lang="en-US" sz="3600" dirty="0"/>
+          </a:p>
+        </p:txBody>
+      </p:sp>
+      <p:sp>
+        <p:nvSpPr>
+          <p:cNvPr id="4" name="Text 2"/>
+          <p:cNvSpPr/>
+          <p:nvPr/>
+        </p:nvSpPr>
+        <p:spPr>
+          <a:xfrm>
+            <a:off x="365760" y="1783080"/>
+            <a:ext cx="6035040" cy="4617720"/>
+          </a:xfrm>
+          <a:prstGeom prst="rect">
+            <a:avLst/>
+          </a:prstGeom>
+          <a:noFill/>
+          <a:ln/>
+        </p:spPr>
+        <p:txBody>
+          <a:bodyPr wrap="square" lIns="0" tIns="0" rIns="0" bIns="0" rtlCol="0" anchor="t"/>
+          <a:lstStyle/>
+          <a:p>
+            <a:pPr algn="l" indent="0" marL="0">
+              <a:spcAft>
+                <a:spcPts val="800"/>
+              </a:spcAft>
+              <a:buNone/>
+            </a:pPr>
+            <a:r>
+              <a:rPr lang="en-US" sz="3000" i="1" dirty="0">
+                <a:solidFill>
+                  <a:srgbClr val="111111"/>
+                </a:solidFill>
+                <a:latin typeface="Times New Roman" pitchFamily="34" charset="0"/>
+                <a:ea typeface="Times New Roman" pitchFamily="34" charset="-122"/>
+                <a:cs typeface="Times New Roman" pitchFamily="34" charset="-120"/>
+              </a:rPr>
+              <a:t>A population pyramid is constructed in the following steps:</a:t>
+            </a:r>
+            <a:endParaRPr lang="en-US" sz="3000" dirty="0"/>
+          </a:p>
+          <a:p>
+            <a:pPr algn="l" indent="0" marL="0">
+              <a:spcAft>
+                <a:spcPts val="800"/>
+              </a:spcAft>
+              <a:buNone/>
+            </a:pPr>
+            <a:r>
+              <a:rPr lang="en-US" sz="3000" b="1" dirty="0">
+                <a:solidFill>
+                  <a:srgbClr val="111111"/>
+                </a:solidFill>
+                <a:latin typeface="Times New Roman" pitchFamily="34" charset="0"/>
+                <a:ea typeface="Times New Roman" pitchFamily="34" charset="-122"/>
+                <a:cs typeface="Times New Roman" pitchFamily="34" charset="-120"/>
+              </a:rPr>
+              <a:t>Step 1, the axes: </a:t>
+            </a:r>
+            <a:pPr algn="l" indent="0" marL="0">
+              <a:spcAft>
+                <a:spcPts val="800"/>
+              </a:spcAft>
+              <a:buNone/>
+            </a:pPr>
+            <a:r>
+              <a:rPr lang="en-US" sz="3000" dirty="0">
+                <a:solidFill>
+                  <a:srgbClr val="111111"/>
+                </a:solidFill>
+                <a:latin typeface="Times New Roman" pitchFamily="34" charset="0"/>
+                <a:ea typeface="Times New Roman" pitchFamily="34" charset="-122"/>
+                <a:cs typeface="Times New Roman" pitchFamily="34" charset="-120"/>
+              </a:rPr>
+              <a:t>Draw a vertical axis in the middle for the age groups, in five-year cohorts from 0 to 4 at the bottom to 80+ at the top. Draw a horizontal axis on each side, with the same scale, for the percentages of males and females.</a:t>
+            </a:r>
+            <a:endParaRPr lang="en-US" sz="3000" dirty="0"/>
           </a:p>
         </p:txBody>
       </p:sp>
       <p:pic>
         <p:nvPicPr>
-          <p:cNvPr id="3" name="Image 0" descr="/home/claude/f4/img/minesec_sheet.png">    </p:cNvPr>
+          <p:cNvPr id="5" name="Image 0" descr="/home/claude/f4/img/v2/pop2_pyramid_parts.png">    </p:cNvPr>
           <p:cNvPicPr>
             <a:picLocks noChangeAspect="1"/>
           </p:cNvPicPr>
@@ -17344,8 +18119,8 @@
         </p:blipFill>
         <p:spPr>
           <a:xfrm>
-            <a:off x="0" y="658368"/>
-            <a:ext cx="5120640" cy="5833872"/>
+            <a:off x="6537960" y="2849678"/>
+            <a:ext cx="5470855" cy="2137053"/>
           </a:xfrm>
           <a:prstGeom prst="rect">
             <a:avLst/>
@@ -17354,14 +18129,14 @@
       </p:pic>
       <p:sp>
         <p:nvSpPr>
-          <p:cNvPr id="4" name="Text 1"/>
+          <p:cNvPr id="6" name="Text 3"/>
           <p:cNvSpPr/>
           <p:nvPr/>
         </p:nvSpPr>
         <p:spPr>
           <a:xfrm>
-            <a:off x="5349240" y="1005840"/>
-            <a:ext cx="6522415" cy="731520"/>
+            <a:off x="6537960" y="6089904"/>
+            <a:ext cx="5470855" cy="347472"/>
           </a:xfrm>
           <a:prstGeom prst="rect">
             <a:avLst/>
@@ -17370,68 +18145,24 @@
           <a:ln/>
         </p:spPr>
         <p:txBody>
-          <a:bodyPr wrap="square" lIns="0" tIns="0" rIns="0" bIns="0" rtlCol="0" anchor="ctr">
-            <a:normAutofit/>
-          </a:bodyPr>
+          <a:bodyPr wrap="square" lIns="0" tIns="0" rIns="0" bIns="0" rtlCol="0" anchor="ctr"/>
           <a:lstStyle/>
           <a:p>
             <a:pPr algn="ctr" indent="0" marL="0">
               <a:buNone/>
             </a:pPr>
             <a:r>
-              <a:rPr lang="en-US" sz="3600" b="1" dirty="0">
-                <a:solidFill>
-                  <a:srgbClr val="990011"/>
+              <a:rPr lang="en-US" sz="1600" i="1" dirty="0">
+                <a:solidFill>
+                  <a:srgbClr val="555555"/>
                 </a:solidFill>
                 <a:latin typeface="Times New Roman" pitchFamily="34" charset="0"/>
                 <a:ea typeface="Times New Roman" pitchFamily="34" charset="-122"/>
                 <a:cs typeface="Times New Roman" pitchFamily="34" charset="-120"/>
               </a:rPr>
-              <a:t>Expected Answer</a:t>
-            </a:r>
-            <a:endParaRPr lang="en-US" sz="3600" dirty="0"/>
-          </a:p>
-        </p:txBody>
-      </p:sp>
-      <p:sp>
-        <p:nvSpPr>
-          <p:cNvPr id="5" name="Text 2"/>
-          <p:cNvSpPr/>
-          <p:nvPr/>
-        </p:nvSpPr>
-        <p:spPr>
-          <a:xfrm>
-            <a:off x="5349240" y="1783080"/>
-            <a:ext cx="6522415" cy="4663440"/>
-          </a:xfrm>
-          <a:prstGeom prst="rect">
-            <a:avLst/>
-          </a:prstGeom>
-          <a:noFill/>
-          <a:ln/>
-        </p:spPr>
-        <p:txBody>
-          <a:bodyPr wrap="square" lIns="0" tIns="0" rIns="0" bIns="0" rtlCol="0" anchor="t"/>
-          <a:lstStyle/>
-          <a:p>
-            <a:pPr algn="l" indent="0" marL="0">
-              <a:spcAft>
-                <a:spcPts val="800"/>
-              </a:spcAft>
-              <a:buNone/>
-            </a:pPr>
-            <a:r>
-              <a:rPr lang="en-US" sz="4000" dirty="0">
-                <a:solidFill>
-                  <a:srgbClr val="111111"/>
-                </a:solidFill>
-                <a:latin typeface="Times New Roman" pitchFamily="34" charset="0"/>
-                <a:ea typeface="Times New Roman" pitchFamily="34" charset="-122"/>
-                <a:cs typeface="Times New Roman" pitchFamily="34" charset="-120"/>
-              </a:rPr>
-              <a:t>(4,500 + 500) ÷ 5,000 × 100 = 100 %.</a:t>
-            </a:r>
-            <a:endParaRPr lang="en-US" sz="4000" dirty="0"/>
+              <a:t>Illustration: the parts of a pyramid</a:t>
+            </a:r>
+            <a:endParaRPr lang="en-US" sz="1600" dirty="0"/>
           </a:p>
         </p:txBody>
       </p:sp>
@@ -17541,7 +18272,7 @@
                 <a:ea typeface="Calibri" pitchFamily="34" charset="-122"/>
                 <a:cs typeface="Calibri" pitchFamily="34" charset="-120"/>
               </a:rPr>
-              <a:t>FORMATIVE EVALUATION</a:t>
+              <a:t>BOARD SUMMARY</a:t>
             </a:r>
             <a:endParaRPr lang="en-US" sz="1400" dirty="0"/>
           </a:p>
@@ -17564,7 +18295,7 @@
         <p:spPr>
           <a:xfrm>
             <a:off x="0" y="658368"/>
-            <a:ext cx="5120640" cy="5833872"/>
+            <a:ext cx="3840480" cy="5833872"/>
           </a:xfrm>
           <a:prstGeom prst="rect">
             <a:avLst/>
@@ -17579,8 +18310,8 @@
         </p:nvSpPr>
         <p:spPr>
           <a:xfrm>
-            <a:off x="5349240" y="1005840"/>
-            <a:ext cx="6522415" cy="731520"/>
+            <a:off x="4069080" y="1005840"/>
+            <a:ext cx="7802575" cy="731520"/>
           </a:xfrm>
           <a:prstGeom prst="rect">
             <a:avLst/>
@@ -17606,7 +18337,7 @@
                 <a:ea typeface="Times New Roman" pitchFamily="34" charset="-122"/>
                 <a:cs typeface="Times New Roman" pitchFamily="34" charset="-120"/>
               </a:rPr>
-              <a:t>Evaluation 2</a:t>
+              <a:t>4. Construction of a Population Pyramid</a:t>
             </a:r>
             <a:endParaRPr lang="en-US" sz="3600" dirty="0"/>
           </a:p>
@@ -17620,8 +18351,8 @@
         </p:nvSpPr>
         <p:spPr>
           <a:xfrm>
-            <a:off x="5349240" y="1783080"/>
-            <a:ext cx="6522415" cy="4663440"/>
+            <a:off x="4069080" y="1783080"/>
+            <a:ext cx="7802575" cy="4663440"/>
           </a:xfrm>
           <a:prstGeom prst="rect">
             <a:avLst/>
@@ -17640,7 +18371,7 @@
               <a:buNone/>
             </a:pPr>
             <a:r>
-              <a:rPr lang="en-US" sz="4000" dirty="0">
+              <a:rPr lang="en-US" sz="4000" b="1" dirty="0">
                 <a:solidFill>
                   <a:srgbClr val="111111"/>
                 </a:solidFill>
@@ -17648,7 +18379,24 @@
                 <a:ea typeface="Times New Roman" pitchFamily="34" charset="-122"/>
                 <a:cs typeface="Times New Roman" pitchFamily="34" charset="-120"/>
               </a:rPr>
-              <a:t>Interpret a dependency ratio of 100 %.</a:t>
+              <a:t>Step 2, the percentages: </a:t>
+            </a:r>
+            <a:pPr algn="l" indent="0" marL="0">
+              <a:spcAft>
+                <a:spcPts val="800"/>
+              </a:spcAft>
+              <a:buNone/>
+            </a:pPr>
+            <a:r>
+              <a:rPr lang="en-US" sz="4000" dirty="0">
+                <a:solidFill>
+                  <a:srgbClr val="111111"/>
+                </a:solidFill>
+                <a:latin typeface="Times New Roman" pitchFamily="34" charset="0"/>
+                <a:ea typeface="Times New Roman" pitchFamily="34" charset="-122"/>
+                <a:cs typeface="Times New Roman" pitchFamily="34" charset="-120"/>
+              </a:rPr>
+              <a:t>If the data are numbers, divide each group by the total population and multiply by 100. The males and females of every group must be calculated as a share of the same total.</a:t>
             </a:r>
             <a:endParaRPr lang="en-US" sz="4000" dirty="0"/>
           </a:p>
@@ -17760,7 +18508,7 @@
                 <a:ea typeface="Calibri" pitchFamily="34" charset="-122"/>
                 <a:cs typeface="Calibri" pitchFamily="34" charset="-120"/>
               </a:rPr>
-              <a:t>FORMATIVE EVALUATION</a:t>
+              <a:t>BOARD SUMMARY</a:t>
             </a:r>
             <a:endParaRPr lang="en-US" sz="1400" dirty="0"/>
           </a:p>
@@ -17825,7 +18573,7 @@
                 <a:ea typeface="Times New Roman" pitchFamily="34" charset="-122"/>
                 <a:cs typeface="Times New Roman" pitchFamily="34" charset="-120"/>
               </a:rPr>
-              <a:t>Expected Answer</a:t>
+              <a:t>4. Construction of a Population Pyramid</a:t>
             </a:r>
             <a:endParaRPr lang="en-US" sz="3600" dirty="0"/>
           </a:p>
@@ -17859,7 +18607,7 @@
               <a:buNone/>
             </a:pPr>
             <a:r>
-              <a:rPr lang="en-US" sz="4000" dirty="0">
+              <a:rPr lang="en-US" sz="4000" b="1" dirty="0">
                 <a:solidFill>
                   <a:srgbClr val="111111"/>
                 </a:solidFill>
@@ -17867,7 +18615,24 @@
                 <a:ea typeface="Times New Roman" pitchFamily="34" charset="-122"/>
                 <a:cs typeface="Times New Roman" pitchFamily="34" charset="-120"/>
               </a:rPr>
-              <a:t>There is one dependant for every person of working age.</a:t>
+              <a:t>Step 3, the bars: </a:t>
+            </a:r>
+            <a:pPr algn="l" indent="0" marL="0">
+              <a:spcAft>
+                <a:spcPts val="800"/>
+              </a:spcAft>
+              <a:buNone/>
+            </a:pPr>
+            <a:r>
+              <a:rPr lang="en-US" sz="4000" dirty="0">
+                <a:solidFill>
+                  <a:srgbClr val="111111"/>
+                </a:solidFill>
+                <a:latin typeface="Times New Roman" pitchFamily="34" charset="0"/>
+                <a:ea typeface="Times New Roman" pitchFamily="34" charset="-122"/>
+                <a:cs typeface="Times New Roman" pitchFamily="34" charset="-120"/>
+              </a:rPr>
+              <a:t>Draw a horizontal bar for each age group, males on the left and females on the right. The length of each bar is proportional to its percentage.</a:t>
             </a:r>
             <a:endParaRPr lang="en-US" sz="4000" dirty="0"/>
           </a:p>
@@ -18198,7 +18963,7 @@
                 <a:ea typeface="Calibri" pitchFamily="34" charset="-122"/>
                 <a:cs typeface="Calibri" pitchFamily="34" charset="-120"/>
               </a:rPr>
-              <a:t>REMEDIATION</a:t>
+              <a:t>BOARD SUMMARY</a:t>
             </a:r>
             <a:endParaRPr lang="en-US" sz="1400" dirty="0"/>
           </a:p>
@@ -18221,7 +18986,7 @@
         <p:spPr>
           <a:xfrm>
             <a:off x="0" y="658368"/>
-            <a:ext cx="2468880" cy="5833872"/>
+            <a:ext cx="5120640" cy="5833872"/>
           </a:xfrm>
           <a:prstGeom prst="rect">
             <a:avLst/>
@@ -18236,8 +19001,8 @@
         </p:nvSpPr>
         <p:spPr>
           <a:xfrm>
-            <a:off x="2697480" y="1005840"/>
-            <a:ext cx="9174175" cy="731520"/>
+            <a:off x="5349240" y="1005840"/>
+            <a:ext cx="6522415" cy="731520"/>
           </a:xfrm>
           <a:prstGeom prst="rect">
             <a:avLst/>
@@ -18263,7 +19028,7 @@
                 <a:ea typeface="Times New Roman" pitchFamily="34" charset="-122"/>
                 <a:cs typeface="Times New Roman" pitchFamily="34" charset="-120"/>
               </a:rPr>
-              <a:t>Remediation</a:t>
+              <a:t>4. Construction of a Population Pyramid</a:t>
             </a:r>
             <a:endParaRPr lang="en-US" sz="3600" dirty="0"/>
           </a:p>
@@ -18277,8 +19042,8 @@
         </p:nvSpPr>
         <p:spPr>
           <a:xfrm>
-            <a:off x="2697480" y="1783080"/>
-            <a:ext cx="9174175" cy="4663440"/>
+            <a:off x="5349240" y="1783080"/>
+            <a:ext cx="6522415" cy="4663440"/>
           </a:xfrm>
           <a:prstGeom prst="rect">
             <a:avLst/>
@@ -18305,18 +19070,13 @@
                 <a:ea typeface="Times New Roman" pitchFamily="34" charset="-122"/>
                 <a:cs typeface="Times New Roman" pitchFamily="34" charset="-120"/>
               </a:rPr>
-              <a:t>Fill in the blanks:</a:t>
-            </a:r>
-            <a:endParaRPr lang="en-US" sz="4000" dirty="0"/>
-          </a:p>
-          <a:p>
-            <a:pPr algn="l" marL="342900" indent="-342900">
+              <a:t>Step 4, the finishing: </a:t>
+            </a:r>
+            <a:pPr algn="l" indent="0" marL="0">
               <a:spcAft>
                 <a:spcPts val="800"/>
               </a:spcAft>
-              <a:buSzPct val="100000"/>
-              <a:buFont typeface="+mj-lt"/>
-              <a:buAutoNum type="arabicPeriod" startAt="1"/>
+              <a:buNone/>
             </a:pPr>
             <a:r>
               <a:rPr lang="en-US" sz="4000" dirty="0">
@@ -18327,51 +19087,7 @@
                 <a:ea typeface="Times New Roman" pitchFamily="34" charset="-122"/>
                 <a:cs typeface="Times New Roman" pitchFamily="34" charset="-120"/>
               </a:rPr>
-              <a:t>Dependants are aged 0–14 and ______ and over.</a:t>
-            </a:r>
-            <a:endParaRPr lang="en-US" sz="4000" dirty="0"/>
-          </a:p>
-          <a:p>
-            <a:pPr algn="l" marL="342900" indent="-342900">
-              <a:spcAft>
-                <a:spcPts val="800"/>
-              </a:spcAft>
-              <a:buSzPct val="100000"/>
-              <a:buFont typeface="+mj-lt"/>
-              <a:buAutoNum type="arabicPeriod" startAt="1"/>
-            </a:pPr>
-            <a:r>
-              <a:rPr lang="en-US" sz="4000" dirty="0">
-                <a:solidFill>
-                  <a:srgbClr val="111111"/>
-                </a:solidFill>
-                <a:latin typeface="Times New Roman" pitchFamily="34" charset="0"/>
-                <a:ea typeface="Times New Roman" pitchFamily="34" charset="-122"/>
-                <a:cs typeface="Times New Roman" pitchFamily="34" charset="-120"/>
-              </a:rPr>
-              <a:t>The ratio is multiplied by ______.</a:t>
-            </a:r>
-            <a:endParaRPr lang="en-US" sz="4000" dirty="0"/>
-          </a:p>
-          <a:p>
-            <a:pPr algn="l" marL="342900" indent="-342900">
-              <a:spcAft>
-                <a:spcPts val="800"/>
-              </a:spcAft>
-              <a:buSzPct val="100000"/>
-              <a:buFont typeface="+mj-lt"/>
-              <a:buAutoNum type="arabicPeriod" startAt="1"/>
-            </a:pPr>
-            <a:r>
-              <a:rPr lang="en-US" sz="4000" dirty="0">
-                <a:solidFill>
-                  <a:srgbClr val="111111"/>
-                </a:solidFill>
-                <a:latin typeface="Times New Roman" pitchFamily="34" charset="0"/>
-                <a:ea typeface="Times New Roman" pitchFamily="34" charset="-122"/>
-                <a:cs typeface="Times New Roman" pitchFamily="34" charset="-120"/>
-              </a:rPr>
-              <a:t>A ratio of 65 % means 65 dependants for every ______ workers.</a:t>
+              <a:t>Give the pyramid a title with the country and the year, and label the axes and the sexes. Shade the bars neatly so that the shape is clear.</a:t>
             </a:r>
             <a:endParaRPr lang="en-US" sz="4000" dirty="0"/>
           </a:p>
@@ -18483,15 +19199,135 @@
                 <a:ea typeface="Calibri" pitchFamily="34" charset="-122"/>
                 <a:cs typeface="Calibri" pitchFamily="34" charset="-120"/>
               </a:rPr>
-              <a:t>HOMEWORK</a:t>
+              <a:t>BOARD SUMMARY</a:t>
             </a:r>
             <a:endParaRPr lang="en-US" sz="1400" dirty="0"/>
+          </a:p>
+        </p:txBody>
+      </p:sp>
+      <p:sp>
+        <p:nvSpPr>
+          <p:cNvPr id="3" name="Text 1"/>
+          <p:cNvSpPr/>
+          <p:nvPr/>
+        </p:nvSpPr>
+        <p:spPr>
+          <a:xfrm>
+            <a:off x="365760" y="1005840"/>
+            <a:ext cx="11460175" cy="731520"/>
+          </a:xfrm>
+          <a:prstGeom prst="rect">
+            <a:avLst/>
+          </a:prstGeom>
+          <a:noFill/>
+          <a:ln/>
+        </p:spPr>
+        <p:txBody>
+          <a:bodyPr wrap="square" lIns="0" tIns="0" rIns="0" bIns="0" rtlCol="0" anchor="ctr">
+            <a:normAutofit/>
+          </a:bodyPr>
+          <a:lstStyle/>
+          <a:p>
+            <a:pPr algn="ctr" indent="0" marL="0">
+              <a:buNone/>
+            </a:pPr>
+            <a:r>
+              <a:rPr lang="en-US" sz="3600" b="1" dirty="0">
+                <a:solidFill>
+                  <a:srgbClr val="990011"/>
+                </a:solidFill>
+                <a:latin typeface="Times New Roman" pitchFamily="34" charset="0"/>
+                <a:ea typeface="Times New Roman" pitchFamily="34" charset="-122"/>
+                <a:cs typeface="Times New Roman" pitchFamily="34" charset="-120"/>
+              </a:rPr>
+              <a:t>5. Interpretation of a Population Pyramid</a:t>
+            </a:r>
+            <a:endParaRPr lang="en-US" sz="3600" dirty="0"/>
+          </a:p>
+        </p:txBody>
+      </p:sp>
+      <p:sp>
+        <p:nvSpPr>
+          <p:cNvPr id="4" name="Text 2"/>
+          <p:cNvSpPr/>
+          <p:nvPr/>
+        </p:nvSpPr>
+        <p:spPr>
+          <a:xfrm>
+            <a:off x="365760" y="1783080"/>
+            <a:ext cx="6035040" cy="4617720"/>
+          </a:xfrm>
+          <a:prstGeom prst="rect">
+            <a:avLst/>
+          </a:prstGeom>
+          <a:noFill/>
+          <a:ln/>
+        </p:spPr>
+        <p:txBody>
+          <a:bodyPr wrap="square" lIns="0" tIns="0" rIns="0" bIns="0" rtlCol="0" anchor="t"/>
+          <a:lstStyle/>
+          <a:p>
+            <a:pPr algn="l" indent="0" marL="0">
+              <a:spcAft>
+                <a:spcPts val="800"/>
+              </a:spcAft>
+              <a:buNone/>
+            </a:pPr>
+            <a:r>
+              <a:rPr lang="en-US" sz="3200" i="1" dirty="0">
+                <a:solidFill>
+                  <a:srgbClr val="111111"/>
+                </a:solidFill>
+                <a:latin typeface="Times New Roman" pitchFamily="34" charset="0"/>
+                <a:ea typeface="Times New Roman" pitchFamily="34" charset="-122"/>
+                <a:cs typeface="Times New Roman" pitchFamily="34" charset="-120"/>
+              </a:rPr>
+              <a:t>A population pyramid is interpreted in the following steps:</a:t>
+            </a:r>
+            <a:endParaRPr lang="en-US" sz="3200" dirty="0"/>
+          </a:p>
+          <a:p>
+            <a:pPr algn="l" indent="0" marL="0">
+              <a:spcAft>
+                <a:spcPts val="800"/>
+              </a:spcAft>
+              <a:buNone/>
+            </a:pPr>
+            <a:r>
+              <a:rPr lang="en-US" sz="3200" b="1" dirty="0">
+                <a:solidFill>
+                  <a:srgbClr val="111111"/>
+                </a:solidFill>
+                <a:latin typeface="Times New Roman" pitchFamily="34" charset="0"/>
+                <a:ea typeface="Times New Roman" pitchFamily="34" charset="-122"/>
+                <a:cs typeface="Times New Roman" pitchFamily="34" charset="-120"/>
+              </a:rPr>
+              <a:t>Describe the shape: </a:t>
+            </a:r>
+            <a:pPr algn="l" indent="0" marL="0">
+              <a:spcAft>
+                <a:spcPts val="800"/>
+              </a:spcAft>
+              <a:buNone/>
+            </a:pPr>
+            <a:r>
+              <a:rPr lang="en-US" sz="3200" dirty="0">
+                <a:solidFill>
+                  <a:srgbClr val="111111"/>
+                </a:solidFill>
+                <a:latin typeface="Times New Roman" pitchFamily="34" charset="0"/>
+                <a:ea typeface="Times New Roman" pitchFamily="34" charset="-122"/>
+                <a:cs typeface="Times New Roman" pitchFamily="34" charset="-120"/>
+              </a:rPr>
+              <a:t>Say whether the base is broad or narrow and whether the top is narrow or wide. Then name the type of pyramid: progressive, regressive, stationary or composite.</a:t>
+            </a:r>
+            <a:endParaRPr lang="en-US" sz="3200" dirty="0"/>
           </a:p>
         </p:txBody>
       </p:sp>
       <p:pic>
         <p:nvPicPr>
-          <p:cNvPr id="3" name="Image 0" descr="/home/claude/f4/img/minesec_sheet.png">    </p:cNvPr>
+          <p:cNvPr id="5" name="Image 0" descr="/home/claude/f4/img/v2/pop2_pyramid4.png">    </p:cNvPr>
           <p:cNvPicPr>
             <a:picLocks noChangeAspect="1"/>
           </p:cNvPicPr>
@@ -18505,8 +19341,8 @@
         </p:blipFill>
         <p:spPr>
           <a:xfrm>
-            <a:off x="0" y="658368"/>
-            <a:ext cx="5120640" cy="5833872"/>
+            <a:off x="6537960" y="2849678"/>
+            <a:ext cx="5470855" cy="2137053"/>
           </a:xfrm>
           <a:prstGeom prst="rect">
             <a:avLst/>
@@ -18515,14 +19351,14 @@
       </p:pic>
       <p:sp>
         <p:nvSpPr>
-          <p:cNvPr id="4" name="Text 1"/>
+          <p:cNvPr id="6" name="Text 3"/>
           <p:cNvSpPr/>
           <p:nvPr/>
         </p:nvSpPr>
         <p:spPr>
           <a:xfrm>
-            <a:off x="5349240" y="1005840"/>
-            <a:ext cx="6522415" cy="731520"/>
+            <a:off x="6537960" y="6089904"/>
+            <a:ext cx="5470855" cy="347472"/>
           </a:xfrm>
           <a:prstGeom prst="rect">
             <a:avLst/>
@@ -18531,68 +19367,24 @@
           <a:ln/>
         </p:spPr>
         <p:txBody>
-          <a:bodyPr wrap="square" lIns="0" tIns="0" rIns="0" bIns="0" rtlCol="0" anchor="ctr">
-            <a:normAutofit/>
-          </a:bodyPr>
+          <a:bodyPr wrap="square" lIns="0" tIns="0" rIns="0" bIns="0" rtlCol="0" anchor="ctr"/>
           <a:lstStyle/>
           <a:p>
             <a:pPr algn="ctr" indent="0" marL="0">
               <a:buNone/>
             </a:pPr>
             <a:r>
-              <a:rPr lang="en-US" sz="3600" b="1" dirty="0">
-                <a:solidFill>
-                  <a:srgbClr val="990011"/>
+              <a:rPr lang="en-US" sz="1600" i="1" dirty="0">
+                <a:solidFill>
+                  <a:srgbClr val="555555"/>
                 </a:solidFill>
                 <a:latin typeface="Times New Roman" pitchFamily="34" charset="0"/>
                 <a:ea typeface="Times New Roman" pitchFamily="34" charset="-122"/>
                 <a:cs typeface="Times New Roman" pitchFamily="34" charset="-120"/>
               </a:rPr>
-              <a:t>Homework</a:t>
-            </a:r>
-            <a:endParaRPr lang="en-US" sz="3600" dirty="0"/>
-          </a:p>
-        </p:txBody>
-      </p:sp>
-      <p:sp>
-        <p:nvSpPr>
-          <p:cNvPr id="5" name="Text 2"/>
-          <p:cNvSpPr/>
-          <p:nvPr/>
-        </p:nvSpPr>
-        <p:spPr>
-          <a:xfrm>
-            <a:off x="5349240" y="1783080"/>
-            <a:ext cx="6522415" cy="4663440"/>
-          </a:xfrm>
-          <a:prstGeom prst="rect">
-            <a:avLst/>
-          </a:prstGeom>
-          <a:noFill/>
-          <a:ln/>
-        </p:spPr>
-        <p:txBody>
-          <a:bodyPr wrap="square" lIns="0" tIns="0" rIns="0" bIns="0" rtlCol="0" anchor="t"/>
-          <a:lstStyle/>
-          <a:p>
-            <a:pPr algn="l" indent="0" marL="0">
-              <a:spcAft>
-                <a:spcPts val="800"/>
-              </a:spcAft>
-              <a:buNone/>
-            </a:pPr>
-            <a:r>
-              <a:rPr lang="en-US" sz="4000" dirty="0">
-                <a:solidFill>
-                  <a:srgbClr val="111111"/>
-                </a:solidFill>
-                <a:latin typeface="Times New Roman" pitchFamily="34" charset="0"/>
-                <a:ea typeface="Times New Roman" pitchFamily="34" charset="-122"/>
-                <a:cs typeface="Times New Roman" pitchFamily="34" charset="-120"/>
-              </a:rPr>
-              <a:t>State the world population around 1800.</a:t>
-            </a:r>
-            <a:endParaRPr lang="en-US" sz="4000" dirty="0"/>
+              <a:t>Illustration: the four types of pyramids</a:t>
+            </a:r>
+            <a:endParaRPr lang="en-US" sz="1600" dirty="0"/>
           </a:p>
         </p:txBody>
       </p:sp>
@@ -18702,7 +19494,7 @@
                 <a:ea typeface="Calibri" pitchFamily="34" charset="-122"/>
                 <a:cs typeface="Calibri" pitchFamily="34" charset="-120"/>
               </a:rPr>
-              <a:t>NEXT LESSON</a:t>
+              <a:t>BOARD SUMMARY</a:t>
             </a:r>
             <a:endParaRPr lang="en-US" sz="1400" dirty="0"/>
           </a:p>
@@ -18767,7 +19559,7 @@
                 <a:ea typeface="Times New Roman" pitchFamily="34" charset="-122"/>
                 <a:cs typeface="Times New Roman" pitchFamily="34" charset="-120"/>
               </a:rPr>
-              <a:t>Next Lesson</a:t>
+              <a:t>5. Interpretation of a Population Pyramid</a:t>
             </a:r>
             <a:endParaRPr lang="en-US" sz="3600" dirty="0"/>
           </a:p>
@@ -18791,10 +19583,10 @@
           <a:ln/>
         </p:spPr>
         <p:txBody>
-          <a:bodyPr wrap="square" lIns="0" tIns="0" rIns="0" bIns="0" rtlCol="0" anchor="ctr"/>
-          <a:lstStyle/>
-          <a:p>
-            <a:pPr algn="ctr" indent="0" marL="0">
+          <a:bodyPr wrap="square" lIns="0" tIns="0" rIns="0" bIns="0" rtlCol="0" anchor="t"/>
+          <a:lstStyle/>
+          <a:p>
+            <a:pPr algn="l" indent="0" marL="0">
               <a:spcAft>
                 <a:spcPts val="800"/>
               </a:spcAft>
@@ -18809,27 +19601,24 @@
                 <a:ea typeface="Times New Roman" pitchFamily="34" charset="-122"/>
                 <a:cs typeface="Times New Roman" pitchFamily="34" charset="-120"/>
               </a:rPr>
-              <a:t>Our next lesson will be on:</a:t>
-            </a:r>
-            <a:endParaRPr lang="en-US" sz="4000" dirty="0"/>
-          </a:p>
-          <a:p>
-            <a:pPr algn="ctr" indent="0" marL="0">
+              <a:t>Pick out the distinguishing features: </a:t>
+            </a:r>
+            <a:pPr algn="l" indent="0" marL="0">
               <a:spcAft>
                 <a:spcPts val="800"/>
               </a:spcAft>
               <a:buNone/>
             </a:pPr>
             <a:r>
-              <a:rPr lang="en-US" sz="4000" b="1" dirty="0">
-                <a:solidFill>
-                  <a:srgbClr val="990011"/>
+              <a:rPr lang="en-US" sz="4000" dirty="0">
+                <a:solidFill>
+                  <a:srgbClr val="111111"/>
                 </a:solidFill>
                 <a:latin typeface="Times New Roman" pitchFamily="34" charset="0"/>
                 <a:ea typeface="Times New Roman" pitchFamily="34" charset="-122"/>
                 <a:cs typeface="Times New Roman" pitchFamily="34" charset="-120"/>
               </a:rPr>
-              <a:t>Lesson 8: Historical Evolution of World Population</a:t>
+              <a:t>Look for bulges and notches in particular age groups and for differences between males and females. Quote figures read from the graph.</a:t>
             </a:r>
             <a:endParaRPr lang="en-US" sz="4000" dirty="0"/>
           </a:p>
@@ -18941,6 +19730,2192 @@
                 <a:ea typeface="Calibri" pitchFamily="34" charset="-122"/>
                 <a:cs typeface="Calibri" pitchFamily="34" charset="-120"/>
               </a:rPr>
+              <a:t>BOARD SUMMARY</a:t>
+            </a:r>
+            <a:endParaRPr lang="en-US" sz="1400" dirty="0"/>
+          </a:p>
+        </p:txBody>
+      </p:sp>
+      <p:pic>
+        <p:nvPicPr>
+          <p:cNvPr id="3" name="Image 0" descr="/home/claude/f4/img/minesec_sheet.png">    </p:cNvPr>
+          <p:cNvPicPr>
+            <a:picLocks noChangeAspect="1"/>
+          </p:cNvPicPr>
+          <p:nvPr/>
+        </p:nvPicPr>
+        <p:blipFill>
+          <a:blip r:embed="rId1"/>
+          <a:stretch>
+            <a:fillRect/>
+          </a:stretch>
+        </p:blipFill>
+        <p:spPr>
+          <a:xfrm>
+            <a:off x="0" y="658368"/>
+            <a:ext cx="5120640" cy="5833872"/>
+          </a:xfrm>
+          <a:prstGeom prst="rect">
+            <a:avLst/>
+          </a:prstGeom>
+        </p:spPr>
+      </p:pic>
+      <p:sp>
+        <p:nvSpPr>
+          <p:cNvPr id="4" name="Text 1"/>
+          <p:cNvSpPr/>
+          <p:nvPr/>
+        </p:nvSpPr>
+        <p:spPr>
+          <a:xfrm>
+            <a:off x="5349240" y="1005840"/>
+            <a:ext cx="6522415" cy="731520"/>
+          </a:xfrm>
+          <a:prstGeom prst="rect">
+            <a:avLst/>
+          </a:prstGeom>
+          <a:noFill/>
+          <a:ln/>
+        </p:spPr>
+        <p:txBody>
+          <a:bodyPr wrap="square" lIns="0" tIns="0" rIns="0" bIns="0" rtlCol="0" anchor="ctr">
+            <a:normAutofit/>
+          </a:bodyPr>
+          <a:lstStyle/>
+          <a:p>
+            <a:pPr algn="ctr" indent="0" marL="0">
+              <a:buNone/>
+            </a:pPr>
+            <a:r>
+              <a:rPr lang="en-US" sz="3600" b="1" dirty="0">
+                <a:solidFill>
+                  <a:srgbClr val="990011"/>
+                </a:solidFill>
+                <a:latin typeface="Times New Roman" pitchFamily="34" charset="0"/>
+                <a:ea typeface="Times New Roman" pitchFamily="34" charset="-122"/>
+                <a:cs typeface="Times New Roman" pitchFamily="34" charset="-120"/>
+              </a:rPr>
+              <a:t>5. Interpretation of a Population Pyramid</a:t>
+            </a:r>
+            <a:endParaRPr lang="en-US" sz="3600" dirty="0"/>
+          </a:p>
+        </p:txBody>
+      </p:sp>
+      <p:sp>
+        <p:nvSpPr>
+          <p:cNvPr id="5" name="Text 2"/>
+          <p:cNvSpPr/>
+          <p:nvPr/>
+        </p:nvSpPr>
+        <p:spPr>
+          <a:xfrm>
+            <a:off x="5349240" y="1783080"/>
+            <a:ext cx="6522415" cy="4663440"/>
+          </a:xfrm>
+          <a:prstGeom prst="rect">
+            <a:avLst/>
+          </a:prstGeom>
+          <a:noFill/>
+          <a:ln/>
+        </p:spPr>
+        <p:txBody>
+          <a:bodyPr wrap="square" lIns="0" tIns="0" rIns="0" bIns="0" rtlCol="0" anchor="t"/>
+          <a:lstStyle/>
+          <a:p>
+            <a:pPr algn="l" indent="0" marL="0">
+              <a:spcAft>
+                <a:spcPts val="800"/>
+              </a:spcAft>
+              <a:buNone/>
+            </a:pPr>
+            <a:r>
+              <a:rPr lang="en-US" sz="4000" b="1" dirty="0">
+                <a:solidFill>
+                  <a:srgbClr val="111111"/>
+                </a:solidFill>
+                <a:latin typeface="Times New Roman" pitchFamily="34" charset="0"/>
+                <a:ea typeface="Times New Roman" pitchFamily="34" charset="-122"/>
+                <a:cs typeface="Times New Roman" pitchFamily="34" charset="-120"/>
+              </a:rPr>
+              <a:t>Explain the features: </a:t>
+            </a:r>
+            <a:pPr algn="l" indent="0" marL="0">
+              <a:spcAft>
+                <a:spcPts val="800"/>
+              </a:spcAft>
+              <a:buNone/>
+            </a:pPr>
+            <a:r>
+              <a:rPr lang="en-US" sz="4000" dirty="0">
+                <a:solidFill>
+                  <a:srgbClr val="111111"/>
+                </a:solidFill>
+                <a:latin typeface="Times New Roman" pitchFamily="34" charset="0"/>
+                <a:ea typeface="Times New Roman" pitchFamily="34" charset="-122"/>
+                <a:cs typeface="Times New Roman" pitchFamily="34" charset="-120"/>
+              </a:rPr>
+              <a:t>Explain the shape with birth rates, death rates and life expectancy. Explain the bulges and notches with migrations, wars, epidemics or baby booms.</a:t>
+            </a:r>
+            <a:endParaRPr lang="en-US" sz="4000" dirty="0"/>
+          </a:p>
+        </p:txBody>
+      </p:sp>
+      <p:sp>
+        <p:nvSpPr>
+          <p:cNvPr id="25" name="Slide Number Placeholder 0"/>
+          <p:cNvSpPr>
+            <a:spLocks noGrp="1"/>
+          </p:cNvSpPr>
+          <p:nvPr>
+            <p:ph type="sldNum" sz="quarter" idx="4294967295"/>
+          </p:nvPr>
+        </p:nvSpPr>
+        <p:spPr>
+          <a:xfrm>
+            <a:off x="27432" y="91440"/>
+            <a:ext cx="585216" cy="475488"/>
+          </a:xfrm>
+          <a:prstGeom prst="rect">
+            <a:avLst/>
+          </a:prstGeom>
+          <a:extLst>
+            <a:ext uri="{C572A759-6A51-4108-AA02-DFA0A04FC94B}">
+              <ma14:wrappingTextBoxFlag xmlns:ma14="http://schemas.microsoft.com/office/mac/drawingml/2011/main" val="0"/>
+            </a:ext>
+          </a:extLst>
+        </p:spPr>
+        <p:txBody>
+          <a:bodyPr/>
+          <a:lstStyle>
+            <a:lvl1pPr>
+              <a:defRPr sz="2000">
+                <a:solidFill>
+                  <a:srgbClr val="FFFFFF"/>
+                </a:solidFill>
+                <a:latin typeface="Calibri"/>
+                <a:ea typeface="Calibri"/>
+                <a:cs typeface="Calibri"/>
+              </a:defRPr>
+            </a:lvl1pPr>
+          </a:lstStyle>
+          <a:p>
+            <a:pPr algn="ctr"/>
+            <a:fld id="{F7021451-1387-4CA6-816F-3879F97B5CBC}" type="slidenum">
+              <a:rPr b="1" lang="en-US"/>
+              <a:t>53</a:t>
+            </a:fld>
+            <a:endParaRPr lang="en-US"/>
+          </a:p>
+        </p:txBody>
+      </p:sp>
+    </p:spTree>
+  </p:cSld>
+  <p:clrMapOvr>
+    <a:masterClrMapping/>
+  </p:clrMapOvr>
+</p:sld>
+</file>
+
+<file path=ppt/slides/slide54.xml><?xml version="1.0" encoding="utf-8"?>
+<p:sld xmlns:a="http://schemas.openxmlformats.org/drawingml/2006/main" xmlns:r="http://schemas.openxmlformats.org/officeDocument/2006/relationships" xmlns:p="http://schemas.openxmlformats.org/presentationml/2006/main">
+  <p:cSld name="Slide 54">
+    <p:spTree>
+      <p:nvGrpSpPr>
+        <p:cNvPr id="1" name=""/>
+        <p:cNvGrpSpPr/>
+        <p:nvPr/>
+      </p:nvGrpSpPr>
+      <p:grpSpPr>
+        <a:xfrm>
+          <a:off x="0" y="0"/>
+          <a:ext cx="0" cy="0"/>
+          <a:chOff x="0" y="0"/>
+          <a:chExt cx="0" cy="0"/>
+        </a:xfrm>
+      </p:grpSpPr>
+      <p:sp>
+        <p:nvSpPr>
+          <p:cNvPr id="2" name="Text 0"/>
+          <p:cNvSpPr/>
+          <p:nvPr/>
+        </p:nvSpPr>
+        <p:spPr>
+          <a:xfrm>
+            <a:off x="457200" y="713232"/>
+            <a:ext cx="11368735" cy="274320"/>
+          </a:xfrm>
+          <a:prstGeom prst="rect">
+            <a:avLst/>
+          </a:prstGeom>
+          <a:noFill/>
+          <a:ln/>
+        </p:spPr>
+        <p:txBody>
+          <a:bodyPr wrap="square" lIns="0" tIns="0" rIns="0" bIns="0" rtlCol="0" anchor="ctr"/>
+          <a:lstStyle/>
+          <a:p>
+            <a:pPr algn="r" indent="0" marL="0">
+              <a:buNone/>
+            </a:pPr>
+            <a:r>
+              <a:rPr lang="en-US" sz="1400" b="1" dirty="0">
+                <a:solidFill>
+                  <a:srgbClr val="1C3F6E"/>
+                </a:solidFill>
+                <a:latin typeface="Calibri" pitchFamily="34" charset="0"/>
+                <a:ea typeface="Calibri" pitchFamily="34" charset="-122"/>
+                <a:cs typeface="Calibri" pitchFamily="34" charset="-120"/>
+              </a:rPr>
+              <a:t>FORMATIVE EVALUATION</a:t>
+            </a:r>
+            <a:endParaRPr lang="en-US" sz="1400" dirty="0"/>
+          </a:p>
+        </p:txBody>
+      </p:sp>
+      <p:pic>
+        <p:nvPicPr>
+          <p:cNvPr id="3" name="Image 0" descr="/home/claude/f4/img/minesec_sheet.png">    </p:cNvPr>
+          <p:cNvPicPr>
+            <a:picLocks noChangeAspect="1"/>
+          </p:cNvPicPr>
+          <p:nvPr/>
+        </p:nvPicPr>
+        <p:blipFill>
+          <a:blip r:embed="rId1"/>
+          <a:stretch>
+            <a:fillRect/>
+          </a:stretch>
+        </p:blipFill>
+        <p:spPr>
+          <a:xfrm>
+            <a:off x="0" y="658368"/>
+            <a:ext cx="5120640" cy="5833872"/>
+          </a:xfrm>
+          <a:prstGeom prst="rect">
+            <a:avLst/>
+          </a:prstGeom>
+        </p:spPr>
+      </p:pic>
+      <p:sp>
+        <p:nvSpPr>
+          <p:cNvPr id="4" name="Text 1"/>
+          <p:cNvSpPr/>
+          <p:nvPr/>
+        </p:nvSpPr>
+        <p:spPr>
+          <a:xfrm>
+            <a:off x="5349240" y="1005840"/>
+            <a:ext cx="6522415" cy="731520"/>
+          </a:xfrm>
+          <a:prstGeom prst="rect">
+            <a:avLst/>
+          </a:prstGeom>
+          <a:noFill/>
+          <a:ln/>
+        </p:spPr>
+        <p:txBody>
+          <a:bodyPr wrap="square" lIns="0" tIns="0" rIns="0" bIns="0" rtlCol="0" anchor="ctr">
+            <a:normAutofit/>
+          </a:bodyPr>
+          <a:lstStyle/>
+          <a:p>
+            <a:pPr algn="ctr" indent="0" marL="0">
+              <a:buNone/>
+            </a:pPr>
+            <a:r>
+              <a:rPr lang="en-US" sz="3600" b="1" dirty="0">
+                <a:solidFill>
+                  <a:srgbClr val="990011"/>
+                </a:solidFill>
+                <a:latin typeface="Times New Roman" pitchFamily="34" charset="0"/>
+                <a:ea typeface="Times New Roman" pitchFamily="34" charset="-122"/>
+                <a:cs typeface="Times New Roman" pitchFamily="34" charset="-120"/>
+              </a:rPr>
+              <a:t>Evaluation 1</a:t>
+            </a:r>
+            <a:endParaRPr lang="en-US" sz="3600" dirty="0"/>
+          </a:p>
+        </p:txBody>
+      </p:sp>
+      <p:sp>
+        <p:nvSpPr>
+          <p:cNvPr id="5" name="Text 2"/>
+          <p:cNvSpPr/>
+          <p:nvPr/>
+        </p:nvSpPr>
+        <p:spPr>
+          <a:xfrm>
+            <a:off x="5349240" y="1783080"/>
+            <a:ext cx="6522415" cy="4663440"/>
+          </a:xfrm>
+          <a:prstGeom prst="rect">
+            <a:avLst/>
+          </a:prstGeom>
+          <a:noFill/>
+          <a:ln/>
+        </p:spPr>
+        <p:txBody>
+          <a:bodyPr wrap="square" lIns="0" tIns="0" rIns="0" bIns="0" rtlCol="0" anchor="t"/>
+          <a:lstStyle/>
+          <a:p>
+            <a:pPr algn="l" indent="0" marL="0">
+              <a:spcAft>
+                <a:spcPts val="800"/>
+              </a:spcAft>
+              <a:buNone/>
+            </a:pPr>
+            <a:r>
+              <a:rPr lang="en-US" sz="4000" dirty="0">
+                <a:solidFill>
+                  <a:srgbClr val="111111"/>
+                </a:solidFill>
+                <a:latin typeface="Times New Roman" pitchFamily="34" charset="0"/>
+                <a:ea typeface="Times New Roman" pitchFamily="34" charset="-122"/>
+                <a:cs typeface="Times New Roman" pitchFamily="34" charset="-120"/>
+              </a:rPr>
+              <a:t>Calculate the dependency ratio of a population with 4,500 children, 500 elderly and 5,000 adults.</a:t>
+            </a:r>
+            <a:endParaRPr lang="en-US" sz="4000" dirty="0"/>
+          </a:p>
+        </p:txBody>
+      </p:sp>
+      <p:sp>
+        <p:nvSpPr>
+          <p:cNvPr id="25" name="Slide Number Placeholder 0"/>
+          <p:cNvSpPr>
+            <a:spLocks noGrp="1"/>
+          </p:cNvSpPr>
+          <p:nvPr>
+            <p:ph type="sldNum" sz="quarter" idx="4294967295"/>
+          </p:nvPr>
+        </p:nvSpPr>
+        <p:spPr>
+          <a:xfrm>
+            <a:off x="27432" y="91440"/>
+            <a:ext cx="585216" cy="475488"/>
+          </a:xfrm>
+          <a:prstGeom prst="rect">
+            <a:avLst/>
+          </a:prstGeom>
+          <a:extLst>
+            <a:ext uri="{C572A759-6A51-4108-AA02-DFA0A04FC94B}">
+              <ma14:wrappingTextBoxFlag xmlns:ma14="http://schemas.microsoft.com/office/mac/drawingml/2011/main" val="0"/>
+            </a:ext>
+          </a:extLst>
+        </p:spPr>
+        <p:txBody>
+          <a:bodyPr/>
+          <a:lstStyle>
+            <a:lvl1pPr>
+              <a:defRPr sz="2000">
+                <a:solidFill>
+                  <a:srgbClr val="FFFFFF"/>
+                </a:solidFill>
+                <a:latin typeface="Calibri"/>
+                <a:ea typeface="Calibri"/>
+                <a:cs typeface="Calibri"/>
+              </a:defRPr>
+            </a:lvl1pPr>
+          </a:lstStyle>
+          <a:p>
+            <a:pPr algn="ctr"/>
+            <a:fld id="{F7021451-1387-4CA6-816F-3879F97B5CBC}" type="slidenum">
+              <a:rPr b="1" lang="en-US"/>
+              <a:t>54</a:t>
+            </a:fld>
+            <a:endParaRPr lang="en-US"/>
+          </a:p>
+        </p:txBody>
+      </p:sp>
+    </p:spTree>
+  </p:cSld>
+  <p:clrMapOvr>
+    <a:masterClrMapping/>
+  </p:clrMapOvr>
+</p:sld>
+</file>
+
+<file path=ppt/slides/slide55.xml><?xml version="1.0" encoding="utf-8"?>
+<p:sld xmlns:a="http://schemas.openxmlformats.org/drawingml/2006/main" xmlns:r="http://schemas.openxmlformats.org/officeDocument/2006/relationships" xmlns:p="http://schemas.openxmlformats.org/presentationml/2006/main">
+  <p:cSld name="Slide 55">
+    <p:spTree>
+      <p:nvGrpSpPr>
+        <p:cNvPr id="1" name=""/>
+        <p:cNvGrpSpPr/>
+        <p:nvPr/>
+      </p:nvGrpSpPr>
+      <p:grpSpPr>
+        <a:xfrm>
+          <a:off x="0" y="0"/>
+          <a:ext cx="0" cy="0"/>
+          <a:chOff x="0" y="0"/>
+          <a:chExt cx="0" cy="0"/>
+        </a:xfrm>
+      </p:grpSpPr>
+      <p:sp>
+        <p:nvSpPr>
+          <p:cNvPr id="2" name="Text 0"/>
+          <p:cNvSpPr/>
+          <p:nvPr/>
+        </p:nvSpPr>
+        <p:spPr>
+          <a:xfrm>
+            <a:off x="457200" y="713232"/>
+            <a:ext cx="11368735" cy="274320"/>
+          </a:xfrm>
+          <a:prstGeom prst="rect">
+            <a:avLst/>
+          </a:prstGeom>
+          <a:noFill/>
+          <a:ln/>
+        </p:spPr>
+        <p:txBody>
+          <a:bodyPr wrap="square" lIns="0" tIns="0" rIns="0" bIns="0" rtlCol="0" anchor="ctr"/>
+          <a:lstStyle/>
+          <a:p>
+            <a:pPr algn="r" indent="0" marL="0">
+              <a:buNone/>
+            </a:pPr>
+            <a:r>
+              <a:rPr lang="en-US" sz="1400" b="1" dirty="0">
+                <a:solidFill>
+                  <a:srgbClr val="1C3F6E"/>
+                </a:solidFill>
+                <a:latin typeface="Calibri" pitchFamily="34" charset="0"/>
+                <a:ea typeface="Calibri" pitchFamily="34" charset="-122"/>
+                <a:cs typeface="Calibri" pitchFamily="34" charset="-120"/>
+              </a:rPr>
+              <a:t>FORMATIVE EVALUATION</a:t>
+            </a:r>
+            <a:endParaRPr lang="en-US" sz="1400" dirty="0"/>
+          </a:p>
+        </p:txBody>
+      </p:sp>
+      <p:pic>
+        <p:nvPicPr>
+          <p:cNvPr id="3" name="Image 0" descr="/home/claude/f4/img/minesec_sheet.png">    </p:cNvPr>
+          <p:cNvPicPr>
+            <a:picLocks noChangeAspect="1"/>
+          </p:cNvPicPr>
+          <p:nvPr/>
+        </p:nvPicPr>
+        <p:blipFill>
+          <a:blip r:embed="rId1"/>
+          <a:stretch>
+            <a:fillRect/>
+          </a:stretch>
+        </p:blipFill>
+        <p:spPr>
+          <a:xfrm>
+            <a:off x="0" y="658368"/>
+            <a:ext cx="5120640" cy="5833872"/>
+          </a:xfrm>
+          <a:prstGeom prst="rect">
+            <a:avLst/>
+          </a:prstGeom>
+        </p:spPr>
+      </p:pic>
+      <p:sp>
+        <p:nvSpPr>
+          <p:cNvPr id="4" name="Text 1"/>
+          <p:cNvSpPr/>
+          <p:nvPr/>
+        </p:nvSpPr>
+        <p:spPr>
+          <a:xfrm>
+            <a:off x="5349240" y="1005840"/>
+            <a:ext cx="6522415" cy="731520"/>
+          </a:xfrm>
+          <a:prstGeom prst="rect">
+            <a:avLst/>
+          </a:prstGeom>
+          <a:noFill/>
+          <a:ln/>
+        </p:spPr>
+        <p:txBody>
+          <a:bodyPr wrap="square" lIns="0" tIns="0" rIns="0" bIns="0" rtlCol="0" anchor="ctr">
+            <a:normAutofit/>
+          </a:bodyPr>
+          <a:lstStyle/>
+          <a:p>
+            <a:pPr algn="ctr" indent="0" marL="0">
+              <a:buNone/>
+            </a:pPr>
+            <a:r>
+              <a:rPr lang="en-US" sz="3600" b="1" dirty="0">
+                <a:solidFill>
+                  <a:srgbClr val="990011"/>
+                </a:solidFill>
+                <a:latin typeface="Times New Roman" pitchFamily="34" charset="0"/>
+                <a:ea typeface="Times New Roman" pitchFamily="34" charset="-122"/>
+                <a:cs typeface="Times New Roman" pitchFamily="34" charset="-120"/>
+              </a:rPr>
+              <a:t>Expected Answer</a:t>
+            </a:r>
+            <a:endParaRPr lang="en-US" sz="3600" dirty="0"/>
+          </a:p>
+        </p:txBody>
+      </p:sp>
+      <p:sp>
+        <p:nvSpPr>
+          <p:cNvPr id="5" name="Text 2"/>
+          <p:cNvSpPr/>
+          <p:nvPr/>
+        </p:nvSpPr>
+        <p:spPr>
+          <a:xfrm>
+            <a:off x="5349240" y="1783080"/>
+            <a:ext cx="6522415" cy="4663440"/>
+          </a:xfrm>
+          <a:prstGeom prst="rect">
+            <a:avLst/>
+          </a:prstGeom>
+          <a:noFill/>
+          <a:ln/>
+        </p:spPr>
+        <p:txBody>
+          <a:bodyPr wrap="square" lIns="0" tIns="0" rIns="0" bIns="0" rtlCol="0" anchor="t"/>
+          <a:lstStyle/>
+          <a:p>
+            <a:pPr algn="l" indent="0" marL="0">
+              <a:spcAft>
+                <a:spcPts val="800"/>
+              </a:spcAft>
+              <a:buNone/>
+            </a:pPr>
+            <a:r>
+              <a:rPr lang="en-US" sz="4000" dirty="0">
+                <a:solidFill>
+                  <a:srgbClr val="111111"/>
+                </a:solidFill>
+                <a:latin typeface="Times New Roman" pitchFamily="34" charset="0"/>
+                <a:ea typeface="Times New Roman" pitchFamily="34" charset="-122"/>
+                <a:cs typeface="Times New Roman" pitchFamily="34" charset="-120"/>
+              </a:rPr>
+              <a:t>(4,500 + 500) ÷ 5,000 × 100 = 100 %.</a:t>
+            </a:r>
+            <a:endParaRPr lang="en-US" sz="4000" dirty="0"/>
+          </a:p>
+        </p:txBody>
+      </p:sp>
+      <p:sp>
+        <p:nvSpPr>
+          <p:cNvPr id="25" name="Slide Number Placeholder 0"/>
+          <p:cNvSpPr>
+            <a:spLocks noGrp="1"/>
+          </p:cNvSpPr>
+          <p:nvPr>
+            <p:ph type="sldNum" sz="quarter" idx="4294967295"/>
+          </p:nvPr>
+        </p:nvSpPr>
+        <p:spPr>
+          <a:xfrm>
+            <a:off x="27432" y="91440"/>
+            <a:ext cx="585216" cy="475488"/>
+          </a:xfrm>
+          <a:prstGeom prst="rect">
+            <a:avLst/>
+          </a:prstGeom>
+          <a:extLst>
+            <a:ext uri="{C572A759-6A51-4108-AA02-DFA0A04FC94B}">
+              <ma14:wrappingTextBoxFlag xmlns:ma14="http://schemas.microsoft.com/office/mac/drawingml/2011/main" val="0"/>
+            </a:ext>
+          </a:extLst>
+        </p:spPr>
+        <p:txBody>
+          <a:bodyPr/>
+          <a:lstStyle>
+            <a:lvl1pPr>
+              <a:defRPr sz="2000">
+                <a:solidFill>
+                  <a:srgbClr val="FFFFFF"/>
+                </a:solidFill>
+                <a:latin typeface="Calibri"/>
+                <a:ea typeface="Calibri"/>
+                <a:cs typeface="Calibri"/>
+              </a:defRPr>
+            </a:lvl1pPr>
+          </a:lstStyle>
+          <a:p>
+            <a:pPr algn="ctr"/>
+            <a:fld id="{F7021451-1387-4CA6-816F-3879F97B5CBC}" type="slidenum">
+              <a:rPr b="1" lang="en-US"/>
+              <a:t>55</a:t>
+            </a:fld>
+            <a:endParaRPr lang="en-US"/>
+          </a:p>
+        </p:txBody>
+      </p:sp>
+    </p:spTree>
+  </p:cSld>
+  <p:clrMapOvr>
+    <a:masterClrMapping/>
+  </p:clrMapOvr>
+</p:sld>
+</file>
+
+<file path=ppt/slides/slide56.xml><?xml version="1.0" encoding="utf-8"?>
+<p:sld xmlns:a="http://schemas.openxmlformats.org/drawingml/2006/main" xmlns:r="http://schemas.openxmlformats.org/officeDocument/2006/relationships" xmlns:p="http://schemas.openxmlformats.org/presentationml/2006/main">
+  <p:cSld name="Slide 56">
+    <p:spTree>
+      <p:nvGrpSpPr>
+        <p:cNvPr id="1" name=""/>
+        <p:cNvGrpSpPr/>
+        <p:nvPr/>
+      </p:nvGrpSpPr>
+      <p:grpSpPr>
+        <a:xfrm>
+          <a:off x="0" y="0"/>
+          <a:ext cx="0" cy="0"/>
+          <a:chOff x="0" y="0"/>
+          <a:chExt cx="0" cy="0"/>
+        </a:xfrm>
+      </p:grpSpPr>
+      <p:sp>
+        <p:nvSpPr>
+          <p:cNvPr id="2" name="Text 0"/>
+          <p:cNvSpPr/>
+          <p:nvPr/>
+        </p:nvSpPr>
+        <p:spPr>
+          <a:xfrm>
+            <a:off x="457200" y="713232"/>
+            <a:ext cx="11368735" cy="274320"/>
+          </a:xfrm>
+          <a:prstGeom prst="rect">
+            <a:avLst/>
+          </a:prstGeom>
+          <a:noFill/>
+          <a:ln/>
+        </p:spPr>
+        <p:txBody>
+          <a:bodyPr wrap="square" lIns="0" tIns="0" rIns="0" bIns="0" rtlCol="0" anchor="ctr"/>
+          <a:lstStyle/>
+          <a:p>
+            <a:pPr algn="r" indent="0" marL="0">
+              <a:buNone/>
+            </a:pPr>
+            <a:r>
+              <a:rPr lang="en-US" sz="1400" b="1" dirty="0">
+                <a:solidFill>
+                  <a:srgbClr val="1C3F6E"/>
+                </a:solidFill>
+                <a:latin typeface="Calibri" pitchFamily="34" charset="0"/>
+                <a:ea typeface="Calibri" pitchFamily="34" charset="-122"/>
+                <a:cs typeface="Calibri" pitchFamily="34" charset="-120"/>
+              </a:rPr>
+              <a:t>FORMATIVE EVALUATION</a:t>
+            </a:r>
+            <a:endParaRPr lang="en-US" sz="1400" dirty="0"/>
+          </a:p>
+        </p:txBody>
+      </p:sp>
+      <p:pic>
+        <p:nvPicPr>
+          <p:cNvPr id="3" name="Image 0" descr="/home/claude/f4/img/minesec_sheet.png">    </p:cNvPr>
+          <p:cNvPicPr>
+            <a:picLocks noChangeAspect="1"/>
+          </p:cNvPicPr>
+          <p:nvPr/>
+        </p:nvPicPr>
+        <p:blipFill>
+          <a:blip r:embed="rId1"/>
+          <a:stretch>
+            <a:fillRect/>
+          </a:stretch>
+        </p:blipFill>
+        <p:spPr>
+          <a:xfrm>
+            <a:off x="0" y="658368"/>
+            <a:ext cx="5120640" cy="5833872"/>
+          </a:xfrm>
+          <a:prstGeom prst="rect">
+            <a:avLst/>
+          </a:prstGeom>
+        </p:spPr>
+      </p:pic>
+      <p:sp>
+        <p:nvSpPr>
+          <p:cNvPr id="4" name="Text 1"/>
+          <p:cNvSpPr/>
+          <p:nvPr/>
+        </p:nvSpPr>
+        <p:spPr>
+          <a:xfrm>
+            <a:off x="5349240" y="1005840"/>
+            <a:ext cx="6522415" cy="731520"/>
+          </a:xfrm>
+          <a:prstGeom prst="rect">
+            <a:avLst/>
+          </a:prstGeom>
+          <a:noFill/>
+          <a:ln/>
+        </p:spPr>
+        <p:txBody>
+          <a:bodyPr wrap="square" lIns="0" tIns="0" rIns="0" bIns="0" rtlCol="0" anchor="ctr">
+            <a:normAutofit/>
+          </a:bodyPr>
+          <a:lstStyle/>
+          <a:p>
+            <a:pPr algn="ctr" indent="0" marL="0">
+              <a:buNone/>
+            </a:pPr>
+            <a:r>
+              <a:rPr lang="en-US" sz="3600" b="1" dirty="0">
+                <a:solidFill>
+                  <a:srgbClr val="990011"/>
+                </a:solidFill>
+                <a:latin typeface="Times New Roman" pitchFamily="34" charset="0"/>
+                <a:ea typeface="Times New Roman" pitchFamily="34" charset="-122"/>
+                <a:cs typeface="Times New Roman" pitchFamily="34" charset="-120"/>
+              </a:rPr>
+              <a:t>Evaluation 2</a:t>
+            </a:r>
+            <a:endParaRPr lang="en-US" sz="3600" dirty="0"/>
+          </a:p>
+        </p:txBody>
+      </p:sp>
+      <p:sp>
+        <p:nvSpPr>
+          <p:cNvPr id="5" name="Text 2"/>
+          <p:cNvSpPr/>
+          <p:nvPr/>
+        </p:nvSpPr>
+        <p:spPr>
+          <a:xfrm>
+            <a:off x="5349240" y="1783080"/>
+            <a:ext cx="6522415" cy="4663440"/>
+          </a:xfrm>
+          <a:prstGeom prst="rect">
+            <a:avLst/>
+          </a:prstGeom>
+          <a:noFill/>
+          <a:ln/>
+        </p:spPr>
+        <p:txBody>
+          <a:bodyPr wrap="square" lIns="0" tIns="0" rIns="0" bIns="0" rtlCol="0" anchor="t"/>
+          <a:lstStyle/>
+          <a:p>
+            <a:pPr algn="l" indent="0" marL="0">
+              <a:spcAft>
+                <a:spcPts val="800"/>
+              </a:spcAft>
+              <a:buNone/>
+            </a:pPr>
+            <a:r>
+              <a:rPr lang="en-US" sz="4000" dirty="0">
+                <a:solidFill>
+                  <a:srgbClr val="111111"/>
+                </a:solidFill>
+                <a:latin typeface="Times New Roman" pitchFamily="34" charset="0"/>
+                <a:ea typeface="Times New Roman" pitchFamily="34" charset="-122"/>
+                <a:cs typeface="Times New Roman" pitchFamily="34" charset="-120"/>
+              </a:rPr>
+              <a:t>Interpret a dependency ratio of 100 %.</a:t>
+            </a:r>
+            <a:endParaRPr lang="en-US" sz="4000" dirty="0"/>
+          </a:p>
+        </p:txBody>
+      </p:sp>
+      <p:sp>
+        <p:nvSpPr>
+          <p:cNvPr id="25" name="Slide Number Placeholder 0"/>
+          <p:cNvSpPr>
+            <a:spLocks noGrp="1"/>
+          </p:cNvSpPr>
+          <p:nvPr>
+            <p:ph type="sldNum" sz="quarter" idx="4294967295"/>
+          </p:nvPr>
+        </p:nvSpPr>
+        <p:spPr>
+          <a:xfrm>
+            <a:off x="27432" y="91440"/>
+            <a:ext cx="585216" cy="475488"/>
+          </a:xfrm>
+          <a:prstGeom prst="rect">
+            <a:avLst/>
+          </a:prstGeom>
+          <a:extLst>
+            <a:ext uri="{C572A759-6A51-4108-AA02-DFA0A04FC94B}">
+              <ma14:wrappingTextBoxFlag xmlns:ma14="http://schemas.microsoft.com/office/mac/drawingml/2011/main" val="0"/>
+            </a:ext>
+          </a:extLst>
+        </p:spPr>
+        <p:txBody>
+          <a:bodyPr/>
+          <a:lstStyle>
+            <a:lvl1pPr>
+              <a:defRPr sz="2000">
+                <a:solidFill>
+                  <a:srgbClr val="FFFFFF"/>
+                </a:solidFill>
+                <a:latin typeface="Calibri"/>
+                <a:ea typeface="Calibri"/>
+                <a:cs typeface="Calibri"/>
+              </a:defRPr>
+            </a:lvl1pPr>
+          </a:lstStyle>
+          <a:p>
+            <a:pPr algn="ctr"/>
+            <a:fld id="{F7021451-1387-4CA6-816F-3879F97B5CBC}" type="slidenum">
+              <a:rPr b="1" lang="en-US"/>
+              <a:t>56</a:t>
+            </a:fld>
+            <a:endParaRPr lang="en-US"/>
+          </a:p>
+        </p:txBody>
+      </p:sp>
+    </p:spTree>
+  </p:cSld>
+  <p:clrMapOvr>
+    <a:masterClrMapping/>
+  </p:clrMapOvr>
+</p:sld>
+</file>
+
+<file path=ppt/slides/slide57.xml><?xml version="1.0" encoding="utf-8"?>
+<p:sld xmlns:a="http://schemas.openxmlformats.org/drawingml/2006/main" xmlns:r="http://schemas.openxmlformats.org/officeDocument/2006/relationships" xmlns:p="http://schemas.openxmlformats.org/presentationml/2006/main">
+  <p:cSld name="Slide 57">
+    <p:spTree>
+      <p:nvGrpSpPr>
+        <p:cNvPr id="1" name=""/>
+        <p:cNvGrpSpPr/>
+        <p:nvPr/>
+      </p:nvGrpSpPr>
+      <p:grpSpPr>
+        <a:xfrm>
+          <a:off x="0" y="0"/>
+          <a:ext cx="0" cy="0"/>
+          <a:chOff x="0" y="0"/>
+          <a:chExt cx="0" cy="0"/>
+        </a:xfrm>
+      </p:grpSpPr>
+      <p:sp>
+        <p:nvSpPr>
+          <p:cNvPr id="2" name="Text 0"/>
+          <p:cNvSpPr/>
+          <p:nvPr/>
+        </p:nvSpPr>
+        <p:spPr>
+          <a:xfrm>
+            <a:off x="457200" y="713232"/>
+            <a:ext cx="11368735" cy="274320"/>
+          </a:xfrm>
+          <a:prstGeom prst="rect">
+            <a:avLst/>
+          </a:prstGeom>
+          <a:noFill/>
+          <a:ln/>
+        </p:spPr>
+        <p:txBody>
+          <a:bodyPr wrap="square" lIns="0" tIns="0" rIns="0" bIns="0" rtlCol="0" anchor="ctr"/>
+          <a:lstStyle/>
+          <a:p>
+            <a:pPr algn="r" indent="0" marL="0">
+              <a:buNone/>
+            </a:pPr>
+            <a:r>
+              <a:rPr lang="en-US" sz="1400" b="1" dirty="0">
+                <a:solidFill>
+                  <a:srgbClr val="1C3F6E"/>
+                </a:solidFill>
+                <a:latin typeface="Calibri" pitchFamily="34" charset="0"/>
+                <a:ea typeface="Calibri" pitchFamily="34" charset="-122"/>
+                <a:cs typeface="Calibri" pitchFamily="34" charset="-120"/>
+              </a:rPr>
+              <a:t>FORMATIVE EVALUATION</a:t>
+            </a:r>
+            <a:endParaRPr lang="en-US" sz="1400" dirty="0"/>
+          </a:p>
+        </p:txBody>
+      </p:sp>
+      <p:pic>
+        <p:nvPicPr>
+          <p:cNvPr id="3" name="Image 0" descr="/home/claude/f4/img/minesec_sheet.png">    </p:cNvPr>
+          <p:cNvPicPr>
+            <a:picLocks noChangeAspect="1"/>
+          </p:cNvPicPr>
+          <p:nvPr/>
+        </p:nvPicPr>
+        <p:blipFill>
+          <a:blip r:embed="rId1"/>
+          <a:stretch>
+            <a:fillRect/>
+          </a:stretch>
+        </p:blipFill>
+        <p:spPr>
+          <a:xfrm>
+            <a:off x="0" y="658368"/>
+            <a:ext cx="5120640" cy="5833872"/>
+          </a:xfrm>
+          <a:prstGeom prst="rect">
+            <a:avLst/>
+          </a:prstGeom>
+        </p:spPr>
+      </p:pic>
+      <p:sp>
+        <p:nvSpPr>
+          <p:cNvPr id="4" name="Text 1"/>
+          <p:cNvSpPr/>
+          <p:nvPr/>
+        </p:nvSpPr>
+        <p:spPr>
+          <a:xfrm>
+            <a:off x="5349240" y="1005840"/>
+            <a:ext cx="6522415" cy="731520"/>
+          </a:xfrm>
+          <a:prstGeom prst="rect">
+            <a:avLst/>
+          </a:prstGeom>
+          <a:noFill/>
+          <a:ln/>
+        </p:spPr>
+        <p:txBody>
+          <a:bodyPr wrap="square" lIns="0" tIns="0" rIns="0" bIns="0" rtlCol="0" anchor="ctr">
+            <a:normAutofit/>
+          </a:bodyPr>
+          <a:lstStyle/>
+          <a:p>
+            <a:pPr algn="ctr" indent="0" marL="0">
+              <a:buNone/>
+            </a:pPr>
+            <a:r>
+              <a:rPr lang="en-US" sz="3600" b="1" dirty="0">
+                <a:solidFill>
+                  <a:srgbClr val="990011"/>
+                </a:solidFill>
+                <a:latin typeface="Times New Roman" pitchFamily="34" charset="0"/>
+                <a:ea typeface="Times New Roman" pitchFamily="34" charset="-122"/>
+                <a:cs typeface="Times New Roman" pitchFamily="34" charset="-120"/>
+              </a:rPr>
+              <a:t>Expected Answer</a:t>
+            </a:r>
+            <a:endParaRPr lang="en-US" sz="3600" dirty="0"/>
+          </a:p>
+        </p:txBody>
+      </p:sp>
+      <p:sp>
+        <p:nvSpPr>
+          <p:cNvPr id="5" name="Text 2"/>
+          <p:cNvSpPr/>
+          <p:nvPr/>
+        </p:nvSpPr>
+        <p:spPr>
+          <a:xfrm>
+            <a:off x="5349240" y="1783080"/>
+            <a:ext cx="6522415" cy="4663440"/>
+          </a:xfrm>
+          <a:prstGeom prst="rect">
+            <a:avLst/>
+          </a:prstGeom>
+          <a:noFill/>
+          <a:ln/>
+        </p:spPr>
+        <p:txBody>
+          <a:bodyPr wrap="square" lIns="0" tIns="0" rIns="0" bIns="0" rtlCol="0" anchor="t"/>
+          <a:lstStyle/>
+          <a:p>
+            <a:pPr algn="l" indent="0" marL="0">
+              <a:spcAft>
+                <a:spcPts val="800"/>
+              </a:spcAft>
+              <a:buNone/>
+            </a:pPr>
+            <a:r>
+              <a:rPr lang="en-US" sz="4000" dirty="0">
+                <a:solidFill>
+                  <a:srgbClr val="111111"/>
+                </a:solidFill>
+                <a:latin typeface="Times New Roman" pitchFamily="34" charset="0"/>
+                <a:ea typeface="Times New Roman" pitchFamily="34" charset="-122"/>
+                <a:cs typeface="Times New Roman" pitchFamily="34" charset="-120"/>
+              </a:rPr>
+              <a:t>There is one dependant for every person of working age.</a:t>
+            </a:r>
+            <a:endParaRPr lang="en-US" sz="4000" dirty="0"/>
+          </a:p>
+        </p:txBody>
+      </p:sp>
+      <p:sp>
+        <p:nvSpPr>
+          <p:cNvPr id="25" name="Slide Number Placeholder 0"/>
+          <p:cNvSpPr>
+            <a:spLocks noGrp="1"/>
+          </p:cNvSpPr>
+          <p:nvPr>
+            <p:ph type="sldNum" sz="quarter" idx="4294967295"/>
+          </p:nvPr>
+        </p:nvSpPr>
+        <p:spPr>
+          <a:xfrm>
+            <a:off x="27432" y="91440"/>
+            <a:ext cx="585216" cy="475488"/>
+          </a:xfrm>
+          <a:prstGeom prst="rect">
+            <a:avLst/>
+          </a:prstGeom>
+          <a:extLst>
+            <a:ext uri="{C572A759-6A51-4108-AA02-DFA0A04FC94B}">
+              <ma14:wrappingTextBoxFlag xmlns:ma14="http://schemas.microsoft.com/office/mac/drawingml/2011/main" val="0"/>
+            </a:ext>
+          </a:extLst>
+        </p:spPr>
+        <p:txBody>
+          <a:bodyPr/>
+          <a:lstStyle>
+            <a:lvl1pPr>
+              <a:defRPr sz="2000">
+                <a:solidFill>
+                  <a:srgbClr val="FFFFFF"/>
+                </a:solidFill>
+                <a:latin typeface="Calibri"/>
+                <a:ea typeface="Calibri"/>
+                <a:cs typeface="Calibri"/>
+              </a:defRPr>
+            </a:lvl1pPr>
+          </a:lstStyle>
+          <a:p>
+            <a:pPr algn="ctr"/>
+            <a:fld id="{F7021451-1387-4CA6-816F-3879F97B5CBC}" type="slidenum">
+              <a:rPr b="1" lang="en-US"/>
+              <a:t>57</a:t>
+            </a:fld>
+            <a:endParaRPr lang="en-US"/>
+          </a:p>
+        </p:txBody>
+      </p:sp>
+    </p:spTree>
+  </p:cSld>
+  <p:clrMapOvr>
+    <a:masterClrMapping/>
+  </p:clrMapOvr>
+</p:sld>
+</file>
+
+<file path=ppt/slides/slide58.xml><?xml version="1.0" encoding="utf-8"?>
+<p:sld xmlns:a="http://schemas.openxmlformats.org/drawingml/2006/main" xmlns:r="http://schemas.openxmlformats.org/officeDocument/2006/relationships" xmlns:p="http://schemas.openxmlformats.org/presentationml/2006/main">
+  <p:cSld name="Slide 58">
+    <p:spTree>
+      <p:nvGrpSpPr>
+        <p:cNvPr id="1" name=""/>
+        <p:cNvGrpSpPr/>
+        <p:nvPr/>
+      </p:nvGrpSpPr>
+      <p:grpSpPr>
+        <a:xfrm>
+          <a:off x="0" y="0"/>
+          <a:ext cx="0" cy="0"/>
+          <a:chOff x="0" y="0"/>
+          <a:chExt cx="0" cy="0"/>
+        </a:xfrm>
+      </p:grpSpPr>
+      <p:sp>
+        <p:nvSpPr>
+          <p:cNvPr id="2" name="Text 0"/>
+          <p:cNvSpPr/>
+          <p:nvPr/>
+        </p:nvSpPr>
+        <p:spPr>
+          <a:xfrm>
+            <a:off x="457200" y="713232"/>
+            <a:ext cx="11368735" cy="274320"/>
+          </a:xfrm>
+          <a:prstGeom prst="rect">
+            <a:avLst/>
+          </a:prstGeom>
+          <a:noFill/>
+          <a:ln/>
+        </p:spPr>
+        <p:txBody>
+          <a:bodyPr wrap="square" lIns="0" tIns="0" rIns="0" bIns="0" rtlCol="0" anchor="ctr"/>
+          <a:lstStyle/>
+          <a:p>
+            <a:pPr algn="r" indent="0" marL="0">
+              <a:buNone/>
+            </a:pPr>
+            <a:r>
+              <a:rPr lang="en-US" sz="1400" b="1" dirty="0">
+                <a:solidFill>
+                  <a:srgbClr val="1C3F6E"/>
+                </a:solidFill>
+                <a:latin typeface="Calibri" pitchFamily="34" charset="0"/>
+                <a:ea typeface="Calibri" pitchFamily="34" charset="-122"/>
+                <a:cs typeface="Calibri" pitchFamily="34" charset="-120"/>
+              </a:rPr>
+              <a:t>REMEDIATION</a:t>
+            </a:r>
+            <a:endParaRPr lang="en-US" sz="1400" dirty="0"/>
+          </a:p>
+        </p:txBody>
+      </p:sp>
+      <p:pic>
+        <p:nvPicPr>
+          <p:cNvPr id="3" name="Image 0" descr="/home/claude/f4/img/minesec_sheet.png">    </p:cNvPr>
+          <p:cNvPicPr>
+            <a:picLocks noChangeAspect="1"/>
+          </p:cNvPicPr>
+          <p:nvPr/>
+        </p:nvPicPr>
+        <p:blipFill>
+          <a:blip r:embed="rId1"/>
+          <a:stretch>
+            <a:fillRect/>
+          </a:stretch>
+        </p:blipFill>
+        <p:spPr>
+          <a:xfrm>
+            <a:off x="0" y="658368"/>
+            <a:ext cx="2468880" cy="5833872"/>
+          </a:xfrm>
+          <a:prstGeom prst="rect">
+            <a:avLst/>
+          </a:prstGeom>
+        </p:spPr>
+      </p:pic>
+      <p:sp>
+        <p:nvSpPr>
+          <p:cNvPr id="4" name="Text 1"/>
+          <p:cNvSpPr/>
+          <p:nvPr/>
+        </p:nvSpPr>
+        <p:spPr>
+          <a:xfrm>
+            <a:off x="2697480" y="1005840"/>
+            <a:ext cx="9174175" cy="731520"/>
+          </a:xfrm>
+          <a:prstGeom prst="rect">
+            <a:avLst/>
+          </a:prstGeom>
+          <a:noFill/>
+          <a:ln/>
+        </p:spPr>
+        <p:txBody>
+          <a:bodyPr wrap="square" lIns="0" tIns="0" rIns="0" bIns="0" rtlCol="0" anchor="ctr">
+            <a:normAutofit/>
+          </a:bodyPr>
+          <a:lstStyle/>
+          <a:p>
+            <a:pPr algn="ctr" indent="0" marL="0">
+              <a:buNone/>
+            </a:pPr>
+            <a:r>
+              <a:rPr lang="en-US" sz="3600" b="1" dirty="0">
+                <a:solidFill>
+                  <a:srgbClr val="990011"/>
+                </a:solidFill>
+                <a:latin typeface="Times New Roman" pitchFamily="34" charset="0"/>
+                <a:ea typeface="Times New Roman" pitchFamily="34" charset="-122"/>
+                <a:cs typeface="Times New Roman" pitchFamily="34" charset="-120"/>
+              </a:rPr>
+              <a:t>Remediation</a:t>
+            </a:r>
+            <a:endParaRPr lang="en-US" sz="3600" dirty="0"/>
+          </a:p>
+        </p:txBody>
+      </p:sp>
+      <p:sp>
+        <p:nvSpPr>
+          <p:cNvPr id="5" name="Text 2"/>
+          <p:cNvSpPr/>
+          <p:nvPr/>
+        </p:nvSpPr>
+        <p:spPr>
+          <a:xfrm>
+            <a:off x="2697480" y="1783080"/>
+            <a:ext cx="9174175" cy="4663440"/>
+          </a:xfrm>
+          <a:prstGeom prst="rect">
+            <a:avLst/>
+          </a:prstGeom>
+          <a:noFill/>
+          <a:ln/>
+        </p:spPr>
+        <p:txBody>
+          <a:bodyPr wrap="square" lIns="0" tIns="0" rIns="0" bIns="0" rtlCol="0" anchor="t"/>
+          <a:lstStyle/>
+          <a:p>
+            <a:pPr algn="l" indent="0" marL="0">
+              <a:spcAft>
+                <a:spcPts val="800"/>
+              </a:spcAft>
+              <a:buNone/>
+            </a:pPr>
+            <a:r>
+              <a:rPr lang="en-US" sz="4000" b="1" dirty="0">
+                <a:solidFill>
+                  <a:srgbClr val="111111"/>
+                </a:solidFill>
+                <a:latin typeface="Times New Roman" pitchFamily="34" charset="0"/>
+                <a:ea typeface="Times New Roman" pitchFamily="34" charset="-122"/>
+                <a:cs typeface="Times New Roman" pitchFamily="34" charset="-120"/>
+              </a:rPr>
+              <a:t>Fill in the blanks:</a:t>
+            </a:r>
+            <a:endParaRPr lang="en-US" sz="4000" dirty="0"/>
+          </a:p>
+          <a:p>
+            <a:pPr algn="l" marL="342900" indent="-342900">
+              <a:spcAft>
+                <a:spcPts val="800"/>
+              </a:spcAft>
+              <a:buSzPct val="100000"/>
+              <a:buFont typeface="+mj-lt"/>
+              <a:buAutoNum type="arabicPeriod" startAt="1"/>
+            </a:pPr>
+            <a:r>
+              <a:rPr lang="en-US" sz="4000" dirty="0">
+                <a:solidFill>
+                  <a:srgbClr val="111111"/>
+                </a:solidFill>
+                <a:latin typeface="Times New Roman" pitchFamily="34" charset="0"/>
+                <a:ea typeface="Times New Roman" pitchFamily="34" charset="-122"/>
+                <a:cs typeface="Times New Roman" pitchFamily="34" charset="-120"/>
+              </a:rPr>
+              <a:t>Dependants are aged 0–14 and ______ and over.</a:t>
+            </a:r>
+            <a:endParaRPr lang="en-US" sz="4000" dirty="0"/>
+          </a:p>
+          <a:p>
+            <a:pPr algn="l" marL="342900" indent="-342900">
+              <a:spcAft>
+                <a:spcPts val="800"/>
+              </a:spcAft>
+              <a:buSzPct val="100000"/>
+              <a:buFont typeface="+mj-lt"/>
+              <a:buAutoNum type="arabicPeriod" startAt="1"/>
+            </a:pPr>
+            <a:r>
+              <a:rPr lang="en-US" sz="4000" dirty="0">
+                <a:solidFill>
+                  <a:srgbClr val="111111"/>
+                </a:solidFill>
+                <a:latin typeface="Times New Roman" pitchFamily="34" charset="0"/>
+                <a:ea typeface="Times New Roman" pitchFamily="34" charset="-122"/>
+                <a:cs typeface="Times New Roman" pitchFamily="34" charset="-120"/>
+              </a:rPr>
+              <a:t>The ratio is multiplied by ______.</a:t>
+            </a:r>
+            <a:endParaRPr lang="en-US" sz="4000" dirty="0"/>
+          </a:p>
+          <a:p>
+            <a:pPr algn="l" marL="342900" indent="-342900">
+              <a:spcAft>
+                <a:spcPts val="800"/>
+              </a:spcAft>
+              <a:buSzPct val="100000"/>
+              <a:buFont typeface="+mj-lt"/>
+              <a:buAutoNum type="arabicPeriod" startAt="1"/>
+            </a:pPr>
+            <a:r>
+              <a:rPr lang="en-US" sz="4000" dirty="0">
+                <a:solidFill>
+                  <a:srgbClr val="111111"/>
+                </a:solidFill>
+                <a:latin typeface="Times New Roman" pitchFamily="34" charset="0"/>
+                <a:ea typeface="Times New Roman" pitchFamily="34" charset="-122"/>
+                <a:cs typeface="Times New Roman" pitchFamily="34" charset="-120"/>
+              </a:rPr>
+              <a:t>A ratio of 65 % means 65 dependants for every ______ workers.</a:t>
+            </a:r>
+            <a:endParaRPr lang="en-US" sz="4000" dirty="0"/>
+          </a:p>
+        </p:txBody>
+      </p:sp>
+      <p:sp>
+        <p:nvSpPr>
+          <p:cNvPr id="25" name="Slide Number Placeholder 0"/>
+          <p:cNvSpPr>
+            <a:spLocks noGrp="1"/>
+          </p:cNvSpPr>
+          <p:nvPr>
+            <p:ph type="sldNum" sz="quarter" idx="4294967295"/>
+          </p:nvPr>
+        </p:nvSpPr>
+        <p:spPr>
+          <a:xfrm>
+            <a:off x="27432" y="91440"/>
+            <a:ext cx="585216" cy="475488"/>
+          </a:xfrm>
+          <a:prstGeom prst="rect">
+            <a:avLst/>
+          </a:prstGeom>
+          <a:extLst>
+            <a:ext uri="{C572A759-6A51-4108-AA02-DFA0A04FC94B}">
+              <ma14:wrappingTextBoxFlag xmlns:ma14="http://schemas.microsoft.com/office/mac/drawingml/2011/main" val="0"/>
+            </a:ext>
+          </a:extLst>
+        </p:spPr>
+        <p:txBody>
+          <a:bodyPr/>
+          <a:lstStyle>
+            <a:lvl1pPr>
+              <a:defRPr sz="2000">
+                <a:solidFill>
+                  <a:srgbClr val="FFFFFF"/>
+                </a:solidFill>
+                <a:latin typeface="Calibri"/>
+                <a:ea typeface="Calibri"/>
+                <a:cs typeface="Calibri"/>
+              </a:defRPr>
+            </a:lvl1pPr>
+          </a:lstStyle>
+          <a:p>
+            <a:pPr algn="ctr"/>
+            <a:fld id="{F7021451-1387-4CA6-816F-3879F97B5CBC}" type="slidenum">
+              <a:rPr b="1" lang="en-US"/>
+              <a:t>58</a:t>
+            </a:fld>
+            <a:endParaRPr lang="en-US"/>
+          </a:p>
+        </p:txBody>
+      </p:sp>
+    </p:spTree>
+  </p:cSld>
+  <p:clrMapOvr>
+    <a:masterClrMapping/>
+  </p:clrMapOvr>
+</p:sld>
+</file>
+
+<file path=ppt/slides/slide59.xml><?xml version="1.0" encoding="utf-8"?>
+<p:sld xmlns:a="http://schemas.openxmlformats.org/drawingml/2006/main" xmlns:r="http://schemas.openxmlformats.org/officeDocument/2006/relationships" xmlns:p="http://schemas.openxmlformats.org/presentationml/2006/main">
+  <p:cSld name="Slide 59">
+    <p:spTree>
+      <p:nvGrpSpPr>
+        <p:cNvPr id="1" name=""/>
+        <p:cNvGrpSpPr/>
+        <p:nvPr/>
+      </p:nvGrpSpPr>
+      <p:grpSpPr>
+        <a:xfrm>
+          <a:off x="0" y="0"/>
+          <a:ext cx="0" cy="0"/>
+          <a:chOff x="0" y="0"/>
+          <a:chExt cx="0" cy="0"/>
+        </a:xfrm>
+      </p:grpSpPr>
+      <p:sp>
+        <p:nvSpPr>
+          <p:cNvPr id="2" name="Text 0"/>
+          <p:cNvSpPr/>
+          <p:nvPr/>
+        </p:nvSpPr>
+        <p:spPr>
+          <a:xfrm>
+            <a:off x="457200" y="713232"/>
+            <a:ext cx="11368735" cy="274320"/>
+          </a:xfrm>
+          <a:prstGeom prst="rect">
+            <a:avLst/>
+          </a:prstGeom>
+          <a:noFill/>
+          <a:ln/>
+        </p:spPr>
+        <p:txBody>
+          <a:bodyPr wrap="square" lIns="0" tIns="0" rIns="0" bIns="0" rtlCol="0" anchor="ctr"/>
+          <a:lstStyle/>
+          <a:p>
+            <a:pPr algn="r" indent="0" marL="0">
+              <a:buNone/>
+            </a:pPr>
+            <a:r>
+              <a:rPr lang="en-US" sz="1400" b="1" dirty="0">
+                <a:solidFill>
+                  <a:srgbClr val="1C3F6E"/>
+                </a:solidFill>
+                <a:latin typeface="Calibri" pitchFamily="34" charset="0"/>
+                <a:ea typeface="Calibri" pitchFamily="34" charset="-122"/>
+                <a:cs typeface="Calibri" pitchFamily="34" charset="-120"/>
+              </a:rPr>
+              <a:t>HOMEWORK</a:t>
+            </a:r>
+            <a:endParaRPr lang="en-US" sz="1400" dirty="0"/>
+          </a:p>
+        </p:txBody>
+      </p:sp>
+      <p:pic>
+        <p:nvPicPr>
+          <p:cNvPr id="3" name="Image 0" descr="/home/claude/f4/img/minesec_sheet.png">    </p:cNvPr>
+          <p:cNvPicPr>
+            <a:picLocks noChangeAspect="1"/>
+          </p:cNvPicPr>
+          <p:nvPr/>
+        </p:nvPicPr>
+        <p:blipFill>
+          <a:blip r:embed="rId1"/>
+          <a:stretch>
+            <a:fillRect/>
+          </a:stretch>
+        </p:blipFill>
+        <p:spPr>
+          <a:xfrm>
+            <a:off x="0" y="658368"/>
+            <a:ext cx="5120640" cy="5833872"/>
+          </a:xfrm>
+          <a:prstGeom prst="rect">
+            <a:avLst/>
+          </a:prstGeom>
+        </p:spPr>
+      </p:pic>
+      <p:sp>
+        <p:nvSpPr>
+          <p:cNvPr id="4" name="Text 1"/>
+          <p:cNvSpPr/>
+          <p:nvPr/>
+        </p:nvSpPr>
+        <p:spPr>
+          <a:xfrm>
+            <a:off x="5349240" y="1005840"/>
+            <a:ext cx="6522415" cy="731520"/>
+          </a:xfrm>
+          <a:prstGeom prst="rect">
+            <a:avLst/>
+          </a:prstGeom>
+          <a:noFill/>
+          <a:ln/>
+        </p:spPr>
+        <p:txBody>
+          <a:bodyPr wrap="square" lIns="0" tIns="0" rIns="0" bIns="0" rtlCol="0" anchor="ctr">
+            <a:normAutofit/>
+          </a:bodyPr>
+          <a:lstStyle/>
+          <a:p>
+            <a:pPr algn="ctr" indent="0" marL="0">
+              <a:buNone/>
+            </a:pPr>
+            <a:r>
+              <a:rPr lang="en-US" sz="3600" b="1" dirty="0">
+                <a:solidFill>
+                  <a:srgbClr val="990011"/>
+                </a:solidFill>
+                <a:latin typeface="Times New Roman" pitchFamily="34" charset="0"/>
+                <a:ea typeface="Times New Roman" pitchFamily="34" charset="-122"/>
+                <a:cs typeface="Times New Roman" pitchFamily="34" charset="-120"/>
+              </a:rPr>
+              <a:t>Homework</a:t>
+            </a:r>
+            <a:endParaRPr lang="en-US" sz="3600" dirty="0"/>
+          </a:p>
+        </p:txBody>
+      </p:sp>
+      <p:sp>
+        <p:nvSpPr>
+          <p:cNvPr id="5" name="Text 2"/>
+          <p:cNvSpPr/>
+          <p:nvPr/>
+        </p:nvSpPr>
+        <p:spPr>
+          <a:xfrm>
+            <a:off x="5349240" y="1783080"/>
+            <a:ext cx="6522415" cy="4663440"/>
+          </a:xfrm>
+          <a:prstGeom prst="rect">
+            <a:avLst/>
+          </a:prstGeom>
+          <a:noFill/>
+          <a:ln/>
+        </p:spPr>
+        <p:txBody>
+          <a:bodyPr wrap="square" lIns="0" tIns="0" rIns="0" bIns="0" rtlCol="0" anchor="t"/>
+          <a:lstStyle/>
+          <a:p>
+            <a:pPr algn="l" indent="0" marL="0">
+              <a:spcAft>
+                <a:spcPts val="800"/>
+              </a:spcAft>
+              <a:buNone/>
+            </a:pPr>
+            <a:r>
+              <a:rPr lang="en-US" sz="4000" dirty="0">
+                <a:solidFill>
+                  <a:srgbClr val="111111"/>
+                </a:solidFill>
+                <a:latin typeface="Times New Roman" pitchFamily="34" charset="0"/>
+                <a:ea typeface="Times New Roman" pitchFamily="34" charset="-122"/>
+                <a:cs typeface="Times New Roman" pitchFamily="34" charset="-120"/>
+              </a:rPr>
+              <a:t>State the world population around 1800.</a:t>
+            </a:r>
+            <a:endParaRPr lang="en-US" sz="4000" dirty="0"/>
+          </a:p>
+        </p:txBody>
+      </p:sp>
+      <p:sp>
+        <p:nvSpPr>
+          <p:cNvPr id="25" name="Slide Number Placeholder 0"/>
+          <p:cNvSpPr>
+            <a:spLocks noGrp="1"/>
+          </p:cNvSpPr>
+          <p:nvPr>
+            <p:ph type="sldNum" sz="quarter" idx="4294967295"/>
+          </p:nvPr>
+        </p:nvSpPr>
+        <p:spPr>
+          <a:xfrm>
+            <a:off x="27432" y="91440"/>
+            <a:ext cx="585216" cy="475488"/>
+          </a:xfrm>
+          <a:prstGeom prst="rect">
+            <a:avLst/>
+          </a:prstGeom>
+          <a:extLst>
+            <a:ext uri="{C572A759-6A51-4108-AA02-DFA0A04FC94B}">
+              <ma14:wrappingTextBoxFlag xmlns:ma14="http://schemas.microsoft.com/office/mac/drawingml/2011/main" val="0"/>
+            </a:ext>
+          </a:extLst>
+        </p:spPr>
+        <p:txBody>
+          <a:bodyPr/>
+          <a:lstStyle>
+            <a:lvl1pPr>
+              <a:defRPr sz="2000">
+                <a:solidFill>
+                  <a:srgbClr val="FFFFFF"/>
+                </a:solidFill>
+                <a:latin typeface="Calibri"/>
+                <a:ea typeface="Calibri"/>
+                <a:cs typeface="Calibri"/>
+              </a:defRPr>
+            </a:lvl1pPr>
+          </a:lstStyle>
+          <a:p>
+            <a:pPr algn="ctr"/>
+            <a:fld id="{F7021451-1387-4CA6-816F-3879F97B5CBC}" type="slidenum">
+              <a:rPr b="1" lang="en-US"/>
+              <a:t>59</a:t>
+            </a:fld>
+            <a:endParaRPr lang="en-US"/>
+          </a:p>
+        </p:txBody>
+      </p:sp>
+    </p:spTree>
+  </p:cSld>
+  <p:clrMapOvr>
+    <a:masterClrMapping/>
+  </p:clrMapOvr>
+</p:sld>
+</file>
+
+<file path=ppt/slides/slide6.xml><?xml version="1.0" encoding="utf-8"?>
+<p:sld xmlns:a="http://schemas.openxmlformats.org/drawingml/2006/main" xmlns:r="http://schemas.openxmlformats.org/officeDocument/2006/relationships" xmlns:p="http://schemas.openxmlformats.org/presentationml/2006/main">
+  <p:cSld name="Slide 6">
+    <p:spTree>
+      <p:nvGrpSpPr>
+        <p:cNvPr id="1" name=""/>
+        <p:cNvGrpSpPr/>
+        <p:nvPr/>
+      </p:nvGrpSpPr>
+      <p:grpSpPr>
+        <a:xfrm>
+          <a:off x="0" y="0"/>
+          <a:ext cx="0" cy="0"/>
+          <a:chOff x="0" y="0"/>
+          <a:chExt cx="0" cy="0"/>
+        </a:xfrm>
+      </p:grpSpPr>
+      <p:sp>
+        <p:nvSpPr>
+          <p:cNvPr id="2" name="Text 0"/>
+          <p:cNvSpPr/>
+          <p:nvPr/>
+        </p:nvSpPr>
+        <p:spPr>
+          <a:xfrm>
+            <a:off x="457200" y="713232"/>
+            <a:ext cx="11368735" cy="274320"/>
+          </a:xfrm>
+          <a:prstGeom prst="rect">
+            <a:avLst/>
+          </a:prstGeom>
+          <a:noFill/>
+          <a:ln/>
+        </p:spPr>
+        <p:txBody>
+          <a:bodyPr wrap="square" lIns="0" tIns="0" rIns="0" bIns="0" rtlCol="0" anchor="ctr"/>
+          <a:lstStyle/>
+          <a:p>
+            <a:pPr algn="r" indent="0" marL="0">
+              <a:buNone/>
+            </a:pPr>
+            <a:r>
+              <a:rPr lang="en-US" sz="1400" b="1" dirty="0">
+                <a:solidFill>
+                  <a:srgbClr val="1C3F6E"/>
+                </a:solidFill>
+                <a:latin typeface="Calibri" pitchFamily="34" charset="0"/>
+                <a:ea typeface="Calibri" pitchFamily="34" charset="-122"/>
+                <a:cs typeface="Calibri" pitchFamily="34" charset="-120"/>
+              </a:rPr>
+              <a:t>LESSON PLAN</a:t>
+            </a:r>
+            <a:endParaRPr lang="en-US" sz="1400" dirty="0"/>
+          </a:p>
+        </p:txBody>
+      </p:sp>
+      <p:pic>
+        <p:nvPicPr>
+          <p:cNvPr id="3" name="Image 0" descr="/home/claude/f4/img/minesec_sheet.png">    </p:cNvPr>
+          <p:cNvPicPr>
+            <a:picLocks noChangeAspect="1"/>
+          </p:cNvPicPr>
+          <p:nvPr/>
+        </p:nvPicPr>
+        <p:blipFill>
+          <a:blip r:embed="rId1"/>
+          <a:stretch>
+            <a:fillRect/>
+          </a:stretch>
+        </p:blipFill>
+        <p:spPr>
+          <a:xfrm>
+            <a:off x="0" y="658368"/>
+            <a:ext cx="2468880" cy="5833872"/>
+          </a:xfrm>
+          <a:prstGeom prst="rect">
+            <a:avLst/>
+          </a:prstGeom>
+        </p:spPr>
+      </p:pic>
+      <p:sp>
+        <p:nvSpPr>
+          <p:cNvPr id="4" name="Text 1"/>
+          <p:cNvSpPr/>
+          <p:nvPr/>
+        </p:nvSpPr>
+        <p:spPr>
+          <a:xfrm>
+            <a:off x="2697480" y="1005840"/>
+            <a:ext cx="9174175" cy="731520"/>
+          </a:xfrm>
+          <a:prstGeom prst="rect">
+            <a:avLst/>
+          </a:prstGeom>
+          <a:noFill/>
+          <a:ln/>
+        </p:spPr>
+        <p:txBody>
+          <a:bodyPr wrap="square" lIns="0" tIns="0" rIns="0" bIns="0" rtlCol="0" anchor="ctr">
+            <a:normAutofit/>
+          </a:bodyPr>
+          <a:lstStyle/>
+          <a:p>
+            <a:pPr algn="ctr" indent="0" marL="0">
+              <a:buNone/>
+            </a:pPr>
+            <a:r>
+              <a:rPr lang="en-US" sz="3600" b="1" dirty="0">
+                <a:solidFill>
+                  <a:srgbClr val="990011"/>
+                </a:solidFill>
+                <a:latin typeface="Times New Roman" pitchFamily="34" charset="0"/>
+                <a:ea typeface="Times New Roman" pitchFamily="34" charset="-122"/>
+                <a:cs typeface="Times New Roman" pitchFamily="34" charset="-120"/>
+              </a:rPr>
+              <a:t>Lesson Plan</a:t>
+            </a:r>
+            <a:endParaRPr lang="en-US" sz="3600" dirty="0"/>
+          </a:p>
+        </p:txBody>
+      </p:sp>
+      <p:sp>
+        <p:nvSpPr>
+          <p:cNvPr id="5" name="Text 2"/>
+          <p:cNvSpPr/>
+          <p:nvPr/>
+        </p:nvSpPr>
+        <p:spPr>
+          <a:xfrm>
+            <a:off x="2697480" y="1783080"/>
+            <a:ext cx="9174175" cy="4663440"/>
+          </a:xfrm>
+          <a:prstGeom prst="rect">
+            <a:avLst/>
+          </a:prstGeom>
+          <a:noFill/>
+          <a:ln/>
+        </p:spPr>
+        <p:txBody>
+          <a:bodyPr wrap="square" lIns="0" tIns="0" rIns="0" bIns="0" rtlCol="0" anchor="t"/>
+          <a:lstStyle/>
+          <a:p>
+            <a:pPr algn="l" marL="342900" indent="-342900">
+              <a:spcAft>
+                <a:spcPts val="800"/>
+              </a:spcAft>
+              <a:buSzPct val="100000"/>
+              <a:buFont typeface="+mj-lt"/>
+              <a:buAutoNum type="arabicPeriod" startAt="1"/>
+            </a:pPr>
+            <a:r>
+              <a:rPr lang="en-US" sz="4000" dirty="0">
+                <a:solidFill>
+                  <a:srgbClr val="111111"/>
+                </a:solidFill>
+                <a:latin typeface="Times New Roman" pitchFamily="34" charset="0"/>
+                <a:ea typeface="Times New Roman" pitchFamily="34" charset="-122"/>
+                <a:cs typeface="Times New Roman" pitchFamily="34" charset="-120"/>
+              </a:rPr>
+              <a:t>Correction of the homework</a:t>
+            </a:r>
+            <a:endParaRPr lang="en-US" sz="4000" dirty="0"/>
+          </a:p>
+          <a:p>
+            <a:pPr algn="l" marL="342900" indent="-342900">
+              <a:spcAft>
+                <a:spcPts val="800"/>
+              </a:spcAft>
+              <a:buSzPct val="100000"/>
+              <a:buFont typeface="+mj-lt"/>
+              <a:buAutoNum type="arabicPeriod" startAt="1"/>
+            </a:pPr>
+            <a:r>
+              <a:rPr lang="en-US" sz="4000" dirty="0">
+                <a:solidFill>
+                  <a:srgbClr val="111111"/>
+                </a:solidFill>
+                <a:latin typeface="Times New Roman" pitchFamily="34" charset="0"/>
+                <a:ea typeface="Times New Roman" pitchFamily="34" charset="-122"/>
+                <a:cs typeface="Times New Roman" pitchFamily="34" charset="-120"/>
+              </a:rPr>
+              <a:t>Objectives and recall</a:t>
+            </a:r>
+            <a:endParaRPr lang="en-US" sz="4000" dirty="0"/>
+          </a:p>
+          <a:p>
+            <a:pPr algn="l" marL="342900" indent="-342900">
+              <a:spcAft>
+                <a:spcPts val="800"/>
+              </a:spcAft>
+              <a:buSzPct val="100000"/>
+              <a:buFont typeface="+mj-lt"/>
+              <a:buAutoNum type="arabicPeriod" startAt="1"/>
+            </a:pPr>
+            <a:r>
+              <a:rPr lang="en-US" sz="4000" dirty="0">
+                <a:solidFill>
+                  <a:srgbClr val="111111"/>
+                </a:solidFill>
+                <a:latin typeface="Times New Roman" pitchFamily="34" charset="0"/>
+                <a:ea typeface="Times New Roman" pitchFamily="34" charset="-122"/>
+                <a:cs typeface="Times New Roman" pitchFamily="34" charset="-120"/>
+              </a:rPr>
+              <a:t>Real-life situation and action to take</a:t>
+            </a:r>
+            <a:endParaRPr lang="en-US" sz="4000" dirty="0"/>
+          </a:p>
+          <a:p>
+            <a:pPr algn="l" marL="342900" indent="-342900">
+              <a:spcAft>
+                <a:spcPts val="800"/>
+              </a:spcAft>
+              <a:buSzPct val="100000"/>
+              <a:buFont typeface="+mj-lt"/>
+              <a:buAutoNum type="arabicPeriod" startAt="1"/>
+            </a:pPr>
+            <a:r>
+              <a:rPr lang="en-US" sz="4000" dirty="0">
+                <a:solidFill>
+                  <a:srgbClr val="111111"/>
+                </a:solidFill>
+                <a:latin typeface="Times New Roman" pitchFamily="34" charset="0"/>
+                <a:ea typeface="Times New Roman" pitchFamily="34" charset="-122"/>
+                <a:cs typeface="Times New Roman" pitchFamily="34" charset="-120"/>
+              </a:rPr>
+              <a:t>Learning activities</a:t>
+            </a:r>
+            <a:endParaRPr lang="en-US" sz="4000" dirty="0"/>
+          </a:p>
+          <a:p>
+            <a:pPr algn="l" marL="342900" indent="-342900">
+              <a:spcAft>
+                <a:spcPts val="800"/>
+              </a:spcAft>
+              <a:buSzPct val="100000"/>
+              <a:buFont typeface="+mj-lt"/>
+              <a:buAutoNum type="arabicPeriod" startAt="1"/>
+            </a:pPr>
+            <a:r>
+              <a:rPr lang="en-US" sz="4000" dirty="0">
+                <a:solidFill>
+                  <a:srgbClr val="111111"/>
+                </a:solidFill>
+                <a:latin typeface="Times New Roman" pitchFamily="34" charset="0"/>
+                <a:ea typeface="Times New Roman" pitchFamily="34" charset="-122"/>
+                <a:cs typeface="Times New Roman" pitchFamily="34" charset="-120"/>
+              </a:rPr>
+              <a:t>Board summary</a:t>
+            </a:r>
+            <a:endParaRPr lang="en-US" sz="4000" dirty="0"/>
+          </a:p>
+          <a:p>
+            <a:pPr algn="l" marL="342900" indent="-342900">
+              <a:spcAft>
+                <a:spcPts val="800"/>
+              </a:spcAft>
+              <a:buSzPct val="100000"/>
+              <a:buFont typeface="+mj-lt"/>
+              <a:buAutoNum type="arabicPeriod" startAt="1"/>
+            </a:pPr>
+            <a:r>
+              <a:rPr lang="en-US" sz="4000" dirty="0">
+                <a:solidFill>
+                  <a:srgbClr val="111111"/>
+                </a:solidFill>
+                <a:latin typeface="Times New Roman" pitchFamily="34" charset="0"/>
+                <a:ea typeface="Times New Roman" pitchFamily="34" charset="-122"/>
+                <a:cs typeface="Times New Roman" pitchFamily="34" charset="-120"/>
+              </a:rPr>
+              <a:t>Evaluation, remediation and homework</a:t>
+            </a:r>
+            <a:endParaRPr lang="en-US" sz="4000" dirty="0"/>
+          </a:p>
+        </p:txBody>
+      </p:sp>
+      <p:sp>
+        <p:nvSpPr>
+          <p:cNvPr id="25" name="Slide Number Placeholder 0"/>
+          <p:cNvSpPr>
+            <a:spLocks noGrp="1"/>
+          </p:cNvSpPr>
+          <p:nvPr>
+            <p:ph type="sldNum" sz="quarter" idx="4294967295"/>
+          </p:nvPr>
+        </p:nvSpPr>
+        <p:spPr>
+          <a:xfrm>
+            <a:off x="27432" y="91440"/>
+            <a:ext cx="585216" cy="475488"/>
+          </a:xfrm>
+          <a:prstGeom prst="rect">
+            <a:avLst/>
+          </a:prstGeom>
+          <a:extLst>
+            <a:ext uri="{C572A759-6A51-4108-AA02-DFA0A04FC94B}">
+              <ma14:wrappingTextBoxFlag xmlns:ma14="http://schemas.microsoft.com/office/mac/drawingml/2011/main" val="0"/>
+            </a:ext>
+          </a:extLst>
+        </p:spPr>
+        <p:txBody>
+          <a:bodyPr/>
+          <a:lstStyle>
+            <a:lvl1pPr>
+              <a:defRPr sz="2000">
+                <a:solidFill>
+                  <a:srgbClr val="FFFFFF"/>
+                </a:solidFill>
+                <a:latin typeface="Calibri"/>
+                <a:ea typeface="Calibri"/>
+                <a:cs typeface="Calibri"/>
+              </a:defRPr>
+            </a:lvl1pPr>
+          </a:lstStyle>
+          <a:p>
+            <a:pPr algn="ctr"/>
+            <a:fld id="{F7021451-1387-4CA6-816F-3879F97B5CBC}" type="slidenum">
+              <a:rPr b="1" lang="en-US"/>
+              <a:t>6</a:t>
+            </a:fld>
+            <a:endParaRPr lang="en-US"/>
+          </a:p>
+        </p:txBody>
+      </p:sp>
+    </p:spTree>
+  </p:cSld>
+  <p:clrMapOvr>
+    <a:masterClrMapping/>
+  </p:clrMapOvr>
+</p:sld>
+</file>
+
+<file path=ppt/slides/slide60.xml><?xml version="1.0" encoding="utf-8"?>
+<p:sld xmlns:a="http://schemas.openxmlformats.org/drawingml/2006/main" xmlns:r="http://schemas.openxmlformats.org/officeDocument/2006/relationships" xmlns:p="http://schemas.openxmlformats.org/presentationml/2006/main">
+  <p:cSld name="Slide 60">
+    <p:spTree>
+      <p:nvGrpSpPr>
+        <p:cNvPr id="1" name=""/>
+        <p:cNvGrpSpPr/>
+        <p:nvPr/>
+      </p:nvGrpSpPr>
+      <p:grpSpPr>
+        <a:xfrm>
+          <a:off x="0" y="0"/>
+          <a:ext cx="0" cy="0"/>
+          <a:chOff x="0" y="0"/>
+          <a:chExt cx="0" cy="0"/>
+        </a:xfrm>
+      </p:grpSpPr>
+      <p:sp>
+        <p:nvSpPr>
+          <p:cNvPr id="2" name="Text 0"/>
+          <p:cNvSpPr/>
+          <p:nvPr/>
+        </p:nvSpPr>
+        <p:spPr>
+          <a:xfrm>
+            <a:off x="457200" y="713232"/>
+            <a:ext cx="11368735" cy="274320"/>
+          </a:xfrm>
+          <a:prstGeom prst="rect">
+            <a:avLst/>
+          </a:prstGeom>
+          <a:noFill/>
+          <a:ln/>
+        </p:spPr>
+        <p:txBody>
+          <a:bodyPr wrap="square" lIns="0" tIns="0" rIns="0" bIns="0" rtlCol="0" anchor="ctr"/>
+          <a:lstStyle/>
+          <a:p>
+            <a:pPr algn="r" indent="0" marL="0">
+              <a:buNone/>
+            </a:pPr>
+            <a:r>
+              <a:rPr lang="en-US" sz="1400" b="1" dirty="0">
+                <a:solidFill>
+                  <a:srgbClr val="1C3F6E"/>
+                </a:solidFill>
+                <a:latin typeface="Calibri" pitchFamily="34" charset="0"/>
+                <a:ea typeface="Calibri" pitchFamily="34" charset="-122"/>
+                <a:cs typeface="Calibri" pitchFamily="34" charset="-120"/>
+              </a:rPr>
+              <a:t>NEXT LESSON</a:t>
+            </a:r>
+            <a:endParaRPr lang="en-US" sz="1400" dirty="0"/>
+          </a:p>
+        </p:txBody>
+      </p:sp>
+      <p:pic>
+        <p:nvPicPr>
+          <p:cNvPr id="3" name="Image 0" descr="/home/claude/f4/img/minesec_sheet.png">    </p:cNvPr>
+          <p:cNvPicPr>
+            <a:picLocks noChangeAspect="1"/>
+          </p:cNvPicPr>
+          <p:nvPr/>
+        </p:nvPicPr>
+        <p:blipFill>
+          <a:blip r:embed="rId1"/>
+          <a:stretch>
+            <a:fillRect/>
+          </a:stretch>
+        </p:blipFill>
+        <p:spPr>
+          <a:xfrm>
+            <a:off x="0" y="658368"/>
+            <a:ext cx="5120640" cy="5833872"/>
+          </a:xfrm>
+          <a:prstGeom prst="rect">
+            <a:avLst/>
+          </a:prstGeom>
+        </p:spPr>
+      </p:pic>
+      <p:sp>
+        <p:nvSpPr>
+          <p:cNvPr id="4" name="Text 1"/>
+          <p:cNvSpPr/>
+          <p:nvPr/>
+        </p:nvSpPr>
+        <p:spPr>
+          <a:xfrm>
+            <a:off x="5349240" y="1005840"/>
+            <a:ext cx="6522415" cy="731520"/>
+          </a:xfrm>
+          <a:prstGeom prst="rect">
+            <a:avLst/>
+          </a:prstGeom>
+          <a:noFill/>
+          <a:ln/>
+        </p:spPr>
+        <p:txBody>
+          <a:bodyPr wrap="square" lIns="0" tIns="0" rIns="0" bIns="0" rtlCol="0" anchor="ctr">
+            <a:normAutofit/>
+          </a:bodyPr>
+          <a:lstStyle/>
+          <a:p>
+            <a:pPr algn="ctr" indent="0" marL="0">
+              <a:buNone/>
+            </a:pPr>
+            <a:r>
+              <a:rPr lang="en-US" sz="3600" b="1" dirty="0">
+                <a:solidFill>
+                  <a:srgbClr val="990011"/>
+                </a:solidFill>
+                <a:latin typeface="Times New Roman" pitchFamily="34" charset="0"/>
+                <a:ea typeface="Times New Roman" pitchFamily="34" charset="-122"/>
+                <a:cs typeface="Times New Roman" pitchFamily="34" charset="-120"/>
+              </a:rPr>
+              <a:t>Next Lesson</a:t>
+            </a:r>
+            <a:endParaRPr lang="en-US" sz="3600" dirty="0"/>
+          </a:p>
+        </p:txBody>
+      </p:sp>
+      <p:sp>
+        <p:nvSpPr>
+          <p:cNvPr id="5" name="Text 2"/>
+          <p:cNvSpPr/>
+          <p:nvPr/>
+        </p:nvSpPr>
+        <p:spPr>
+          <a:xfrm>
+            <a:off x="5349240" y="1783080"/>
+            <a:ext cx="6522415" cy="4663440"/>
+          </a:xfrm>
+          <a:prstGeom prst="rect">
+            <a:avLst/>
+          </a:prstGeom>
+          <a:noFill/>
+          <a:ln/>
+        </p:spPr>
+        <p:txBody>
+          <a:bodyPr wrap="square" lIns="0" tIns="0" rIns="0" bIns="0" rtlCol="0" anchor="ctr"/>
+          <a:lstStyle/>
+          <a:p>
+            <a:pPr algn="ctr" indent="0" marL="0">
+              <a:spcAft>
+                <a:spcPts val="800"/>
+              </a:spcAft>
+              <a:buNone/>
+            </a:pPr>
+            <a:r>
+              <a:rPr lang="en-US" sz="4000" b="1" dirty="0">
+                <a:solidFill>
+                  <a:srgbClr val="111111"/>
+                </a:solidFill>
+                <a:latin typeface="Times New Roman" pitchFamily="34" charset="0"/>
+                <a:ea typeface="Times New Roman" pitchFamily="34" charset="-122"/>
+                <a:cs typeface="Times New Roman" pitchFamily="34" charset="-120"/>
+              </a:rPr>
+              <a:t>Our next lesson will be on:</a:t>
+            </a:r>
+            <a:endParaRPr lang="en-US" sz="4000" dirty="0"/>
+          </a:p>
+          <a:p>
+            <a:pPr algn="ctr" indent="0" marL="0">
+              <a:spcAft>
+                <a:spcPts val="800"/>
+              </a:spcAft>
+              <a:buNone/>
+            </a:pPr>
+            <a:r>
+              <a:rPr lang="en-US" sz="4000" b="1" dirty="0">
+                <a:solidFill>
+                  <a:srgbClr val="990011"/>
+                </a:solidFill>
+                <a:latin typeface="Times New Roman" pitchFamily="34" charset="0"/>
+                <a:ea typeface="Times New Roman" pitchFamily="34" charset="-122"/>
+                <a:cs typeface="Times New Roman" pitchFamily="34" charset="-120"/>
+              </a:rPr>
+              <a:t>Lesson 8: Historical Evolution of World Population</a:t>
+            </a:r>
+            <a:endParaRPr lang="en-US" sz="4000" dirty="0"/>
+          </a:p>
+        </p:txBody>
+      </p:sp>
+      <p:sp>
+        <p:nvSpPr>
+          <p:cNvPr id="25" name="Slide Number Placeholder 0"/>
+          <p:cNvSpPr>
+            <a:spLocks noGrp="1"/>
+          </p:cNvSpPr>
+          <p:nvPr>
+            <p:ph type="sldNum" sz="quarter" idx="4294967295"/>
+          </p:nvPr>
+        </p:nvSpPr>
+        <p:spPr>
+          <a:xfrm>
+            <a:off x="27432" y="91440"/>
+            <a:ext cx="585216" cy="475488"/>
+          </a:xfrm>
+          <a:prstGeom prst="rect">
+            <a:avLst/>
+          </a:prstGeom>
+          <a:extLst>
+            <a:ext uri="{C572A759-6A51-4108-AA02-DFA0A04FC94B}">
+              <ma14:wrappingTextBoxFlag xmlns:ma14="http://schemas.microsoft.com/office/mac/drawingml/2011/main" val="0"/>
+            </a:ext>
+          </a:extLst>
+        </p:spPr>
+        <p:txBody>
+          <a:bodyPr/>
+          <a:lstStyle>
+            <a:lvl1pPr>
+              <a:defRPr sz="2000">
+                <a:solidFill>
+                  <a:srgbClr val="FFFFFF"/>
+                </a:solidFill>
+                <a:latin typeface="Calibri"/>
+                <a:ea typeface="Calibri"/>
+                <a:cs typeface="Calibri"/>
+              </a:defRPr>
+            </a:lvl1pPr>
+          </a:lstStyle>
+          <a:p>
+            <a:pPr algn="ctr"/>
+            <a:fld id="{F7021451-1387-4CA6-816F-3879F97B5CBC}" type="slidenum">
+              <a:rPr b="1" lang="en-US"/>
+              <a:t>60</a:t>
+            </a:fld>
+            <a:endParaRPr lang="en-US"/>
+          </a:p>
+        </p:txBody>
+      </p:sp>
+    </p:spTree>
+  </p:cSld>
+  <p:clrMapOvr>
+    <a:masterClrMapping/>
+  </p:clrMapOvr>
+</p:sld>
+</file>
+
+<file path=ppt/slides/slide61.xml><?xml version="1.0" encoding="utf-8"?>
+<p:sld xmlns:a="http://schemas.openxmlformats.org/drawingml/2006/main" xmlns:r="http://schemas.openxmlformats.org/officeDocument/2006/relationships" xmlns:p="http://schemas.openxmlformats.org/presentationml/2006/main">
+  <p:cSld name="Slide 61">
+    <p:spTree>
+      <p:nvGrpSpPr>
+        <p:cNvPr id="1" name=""/>
+        <p:cNvGrpSpPr/>
+        <p:nvPr/>
+      </p:nvGrpSpPr>
+      <p:grpSpPr>
+        <a:xfrm>
+          <a:off x="0" y="0"/>
+          <a:ext cx="0" cy="0"/>
+          <a:chOff x="0" y="0"/>
+          <a:chExt cx="0" cy="0"/>
+        </a:xfrm>
+      </p:grpSpPr>
+      <p:sp>
+        <p:nvSpPr>
+          <p:cNvPr id="2" name="Text 0"/>
+          <p:cNvSpPr/>
+          <p:nvPr/>
+        </p:nvSpPr>
+        <p:spPr>
+          <a:xfrm>
+            <a:off x="457200" y="713232"/>
+            <a:ext cx="11368735" cy="274320"/>
+          </a:xfrm>
+          <a:prstGeom prst="rect">
+            <a:avLst/>
+          </a:prstGeom>
+          <a:noFill/>
+          <a:ln/>
+        </p:spPr>
+        <p:txBody>
+          <a:bodyPr wrap="square" lIns="0" tIns="0" rIns="0" bIns="0" rtlCol="0" anchor="ctr"/>
+          <a:lstStyle/>
+          <a:p>
+            <a:pPr algn="r" indent="0" marL="0">
+              <a:buNone/>
+            </a:pPr>
+            <a:r>
+              <a:rPr lang="en-US" sz="1400" b="1" dirty="0">
+                <a:solidFill>
+                  <a:srgbClr val="1C3F6E"/>
+                </a:solidFill>
+                <a:latin typeface="Calibri" pitchFamily="34" charset="0"/>
+                <a:ea typeface="Calibri" pitchFamily="34" charset="-122"/>
+                <a:cs typeface="Calibri" pitchFamily="34" charset="-120"/>
+              </a:rPr>
               <a:t>BILINGUAL GAME</a:t>
             </a:r>
             <a:endParaRPr lang="en-US" sz="1400" dirty="0"/>
@@ -18988,7 +21963,7 @@
       </p:sp>
       <p:graphicFrame>
         <p:nvGraphicFramePr>
-          <p:cNvPr id="54" name="Table 0"/>
+          <p:cNvPr id="62" name="Table 0"/>
           <p:cNvGraphicFramePr>
             <a:graphicFrameLocks noGrp="1"/>
           </p:cNvGraphicFramePr>
@@ -20024,7 +22999,7 @@
             <a:pPr algn="ctr"/>
             <a:fld id="{F7021451-1387-4CA6-816F-3879F97B5CBC}" type="slidenum">
               <a:rPr b="1" lang="en-US"/>
-              <a:t>53</a:t>
+              <a:t>61</a:t>
             </a:fld>
             <a:endParaRPr lang="en-US"/>
           </a:p>
@@ -20038,9 +23013,9 @@
 </p:sld>
 </file>
 
-<file path=ppt/slides/slide54.xml><?xml version="1.0" encoding="utf-8"?>
+<file path=ppt/slides/slide62.xml><?xml version="1.0" encoding="utf-8"?>
 <p:sld xmlns:a="http://schemas.openxmlformats.org/drawingml/2006/main" xmlns:r="http://schemas.openxmlformats.org/officeDocument/2006/relationships" xmlns:p="http://schemas.openxmlformats.org/presentationml/2006/main">
-  <p:cSld name="Slide 54">
+  <p:cSld name="Slide 62">
     <p:spTree>
       <p:nvGrpSpPr>
         <p:cNvPr id="1" name=""/>
@@ -20135,7 +23110,7 @@
       </p:sp>
       <p:graphicFrame>
         <p:nvGraphicFramePr>
-          <p:cNvPr id="55" name="Table 0"/>
+          <p:cNvPr id="63" name="Table 0"/>
           <p:cNvGraphicFramePr>
             <a:graphicFrameLocks noGrp="1"/>
           </p:cNvGraphicFramePr>
@@ -20757,7 +23732,7 @@
             <a:pPr algn="ctr"/>
             <a:fld id="{F7021451-1387-4CA6-816F-3879F97B5CBC}" type="slidenum">
               <a:rPr b="1" lang="en-US"/>
-              <a:t>54</a:t>
+              <a:t>62</a:t>
             </a:fld>
             <a:endParaRPr lang="en-US"/>
           </a:p>
@@ -20771,9 +23746,9 @@
 </p:sld>
 </file>
 
-<file path=ppt/slides/slide55.xml><?xml version="1.0" encoding="utf-8"?>
+<file path=ppt/slides/slide63.xml><?xml version="1.0" encoding="utf-8"?>
 <p:sld xmlns:a="http://schemas.openxmlformats.org/drawingml/2006/main" xmlns:r="http://schemas.openxmlformats.org/officeDocument/2006/relationships" xmlns:p="http://schemas.openxmlformats.org/presentationml/2006/main">
-  <p:cSld name="Slide 55">
+  <p:cSld name="Slide 63">
     <p:spTree>
       <p:nvGrpSpPr>
         <p:cNvPr id="1" name=""/>
@@ -20868,7 +23843,7 @@
       </p:sp>
       <p:graphicFrame>
         <p:nvGraphicFramePr>
-          <p:cNvPr id="56" name="Table 0"/>
+          <p:cNvPr id="64" name="Table 0"/>
           <p:cNvGraphicFramePr>
             <a:graphicFrameLocks noGrp="1"/>
           </p:cNvGraphicFramePr>
@@ -20978,7 +23953,7 @@
                           <a:ea typeface="Calibri" pitchFamily="34" charset="-122"/>
                           <a:cs typeface="Calibri" pitchFamily="34" charset="-120"/>
                         </a:rPr>
-                        <a:t>DEFINITIONS; The Formula; Worked Examples; Interpretation of the Results.</a:t>
+                        <a:t>DEFINITIONS; The Dependency Ratio; Worked Examples; Interpretation of the Results; Construction of a Population Pyramid; Interpretation of a Population Pyramid.</a:t>
                       </a:r>
                       <a:endParaRPr lang="en-US" sz="1600" dirty="0">
                         <a:latin typeface="Calibri" charset="0"/>
@@ -21628,7 +24603,7 @@
             <a:pPr algn="ctr"/>
             <a:fld id="{F7021451-1387-4CA6-816F-3879F97B5CBC}" type="slidenum">
               <a:rPr b="1" lang="en-US"/>
-              <a:t>55</a:t>
+              <a:t>63</a:t>
             </a:fld>
             <a:endParaRPr lang="en-US"/>
           </a:p>
@@ -21642,9 +24617,9 @@
 </p:sld>
 </file>
 
-<file path=ppt/slides/slide56.xml><?xml version="1.0" encoding="utf-8"?>
+<file path=ppt/slides/slide64.xml><?xml version="1.0" encoding="utf-8"?>
 <p:sld xmlns:a="http://schemas.openxmlformats.org/drawingml/2006/main" xmlns:r="http://schemas.openxmlformats.org/officeDocument/2006/relationships" xmlns:p="http://schemas.openxmlformats.org/presentationml/2006/main">
-  <p:cSld name="Slide 56">
+  <p:cSld name="Slide 64">
     <p:spTree>
       <p:nvGrpSpPr>
         <p:cNvPr id="1" name=""/>
@@ -21953,7 +24928,7 @@
             <a:pPr algn="ctr"/>
             <a:fld id="{F7021451-1387-4CA6-816F-3879F97B5CBC}" type="slidenum">
               <a:rPr b="1" lang="en-US"/>
-              <a:t>56</a:t>
+              <a:t>64</a:t>
             </a:fld>
             <a:endParaRPr lang="en-US"/>
           </a:p>
@@ -21967,9 +24942,9 @@
 </p:sld>
 </file>
 
-<file path=ppt/slides/slide57.xml><?xml version="1.0" encoding="utf-8"?>
+<file path=ppt/slides/slide65.xml><?xml version="1.0" encoding="utf-8"?>
 <p:sld xmlns:a="http://schemas.openxmlformats.org/drawingml/2006/main" xmlns:r="http://schemas.openxmlformats.org/officeDocument/2006/relationships" xmlns:p="http://schemas.openxmlformats.org/presentationml/2006/main">
-  <p:cSld name="Slide 57">
+  <p:cSld name="Slide 65">
     <p:spTree>
       <p:nvGrpSpPr>
         <p:cNvPr id="1" name=""/>
@@ -22257,338 +25232,7 @@
             <a:pPr algn="ctr"/>
             <a:fld id="{F7021451-1387-4CA6-816F-3879F97B5CBC}" type="slidenum">
               <a:rPr b="1" lang="en-US"/>
-              <a:t>57</a:t>
-            </a:fld>
-            <a:endParaRPr lang="en-US"/>
-          </a:p>
-        </p:txBody>
-      </p:sp>
-    </p:spTree>
-  </p:cSld>
-  <p:clrMapOvr>
-    <a:masterClrMapping/>
-  </p:clrMapOvr>
-</p:sld>
-</file>
-
-<file path=ppt/slides/slide6.xml><?xml version="1.0" encoding="utf-8"?>
-<p:sld xmlns:a="http://schemas.openxmlformats.org/drawingml/2006/main" xmlns:r="http://schemas.openxmlformats.org/officeDocument/2006/relationships" xmlns:p="http://schemas.openxmlformats.org/presentationml/2006/main">
-  <p:cSld name="Slide 6">
-    <p:spTree>
-      <p:nvGrpSpPr>
-        <p:cNvPr id="1" name=""/>
-        <p:cNvGrpSpPr/>
-        <p:nvPr/>
-      </p:nvGrpSpPr>
-      <p:grpSpPr>
-        <a:xfrm>
-          <a:off x="0" y="0"/>
-          <a:ext cx="0" cy="0"/>
-          <a:chOff x="0" y="0"/>
-          <a:chExt cx="0" cy="0"/>
-        </a:xfrm>
-      </p:grpSpPr>
-      <p:sp>
-        <p:nvSpPr>
-          <p:cNvPr id="2" name="Text 0"/>
-          <p:cNvSpPr/>
-          <p:nvPr/>
-        </p:nvSpPr>
-        <p:spPr>
-          <a:xfrm>
-            <a:off x="457200" y="713232"/>
-            <a:ext cx="11368735" cy="274320"/>
-          </a:xfrm>
-          <a:prstGeom prst="rect">
-            <a:avLst/>
-          </a:prstGeom>
-          <a:noFill/>
-          <a:ln/>
-        </p:spPr>
-        <p:txBody>
-          <a:bodyPr wrap="square" lIns="0" tIns="0" rIns="0" bIns="0" rtlCol="0" anchor="ctr"/>
-          <a:lstStyle/>
-          <a:p>
-            <a:pPr algn="r" indent="0" marL="0">
-              <a:buNone/>
-            </a:pPr>
-            <a:r>
-              <a:rPr lang="en-US" sz="1400" b="1" dirty="0">
-                <a:solidFill>
-                  <a:srgbClr val="1C3F6E"/>
-                </a:solidFill>
-                <a:latin typeface="Calibri" pitchFamily="34" charset="0"/>
-                <a:ea typeface="Calibri" pitchFamily="34" charset="-122"/>
-                <a:cs typeface="Calibri" pitchFamily="34" charset="-120"/>
-              </a:rPr>
-              <a:t>LESSON PLAN</a:t>
-            </a:r>
-            <a:endParaRPr lang="en-US" sz="1400" dirty="0"/>
-          </a:p>
-        </p:txBody>
-      </p:sp>
-      <p:pic>
-        <p:nvPicPr>
-          <p:cNvPr id="3" name="Image 0" descr="/home/claude/f4/img/minesec_sheet.png">    </p:cNvPr>
-          <p:cNvPicPr>
-            <a:picLocks noChangeAspect="1"/>
-          </p:cNvPicPr>
-          <p:nvPr/>
-        </p:nvPicPr>
-        <p:blipFill>
-          <a:blip r:embed="rId1"/>
-          <a:stretch>
-            <a:fillRect/>
-          </a:stretch>
-        </p:blipFill>
-        <p:spPr>
-          <a:xfrm>
-            <a:off x="0" y="658368"/>
-            <a:ext cx="2468880" cy="5833872"/>
-          </a:xfrm>
-          <a:prstGeom prst="rect">
-            <a:avLst/>
-          </a:prstGeom>
-        </p:spPr>
-      </p:pic>
-      <p:sp>
-        <p:nvSpPr>
-          <p:cNvPr id="4" name="Text 1"/>
-          <p:cNvSpPr/>
-          <p:nvPr/>
-        </p:nvSpPr>
-        <p:spPr>
-          <a:xfrm>
-            <a:off x="2697480" y="1005840"/>
-            <a:ext cx="9174175" cy="731520"/>
-          </a:xfrm>
-          <a:prstGeom prst="rect">
-            <a:avLst/>
-          </a:prstGeom>
-          <a:noFill/>
-          <a:ln/>
-        </p:spPr>
-        <p:txBody>
-          <a:bodyPr wrap="square" lIns="0" tIns="0" rIns="0" bIns="0" rtlCol="0" anchor="ctr">
-            <a:normAutofit/>
-          </a:bodyPr>
-          <a:lstStyle/>
-          <a:p>
-            <a:pPr algn="ctr" indent="0" marL="0">
-              <a:buNone/>
-            </a:pPr>
-            <a:r>
-              <a:rPr lang="en-US" sz="3600" b="1" dirty="0">
-                <a:solidFill>
-                  <a:srgbClr val="990011"/>
-                </a:solidFill>
-                <a:latin typeface="Times New Roman" pitchFamily="34" charset="0"/>
-                <a:ea typeface="Times New Roman" pitchFamily="34" charset="-122"/>
-                <a:cs typeface="Times New Roman" pitchFamily="34" charset="-120"/>
-              </a:rPr>
-              <a:t>Lesson Plan</a:t>
-            </a:r>
-            <a:endParaRPr lang="en-US" sz="3600" dirty="0"/>
-          </a:p>
-        </p:txBody>
-      </p:sp>
-      <p:sp>
-        <p:nvSpPr>
-          <p:cNvPr id="5" name="Text 2"/>
-          <p:cNvSpPr/>
-          <p:nvPr/>
-        </p:nvSpPr>
-        <p:spPr>
-          <a:xfrm>
-            <a:off x="2697480" y="1783080"/>
-            <a:ext cx="9174175" cy="4663440"/>
-          </a:xfrm>
-          <a:prstGeom prst="rect">
-            <a:avLst/>
-          </a:prstGeom>
-          <a:noFill/>
-          <a:ln/>
-        </p:spPr>
-        <p:txBody>
-          <a:bodyPr wrap="square" lIns="0" tIns="0" rIns="0" bIns="0" rtlCol="0" anchor="t"/>
-          <a:lstStyle/>
-          <a:p>
-            <a:pPr algn="l" marL="342900" indent="-342900">
-              <a:spcAft>
-                <a:spcPts val="800"/>
-              </a:spcAft>
-              <a:buSzPct val="100000"/>
-              <a:buFont typeface="+mj-lt"/>
-              <a:buAutoNum type="arabicPeriod" startAt="1"/>
-            </a:pPr>
-            <a:r>
-              <a:rPr lang="en-US" sz="4000" dirty="0">
-                <a:solidFill>
-                  <a:srgbClr val="111111"/>
-                </a:solidFill>
-                <a:latin typeface="Times New Roman" pitchFamily="34" charset="0"/>
-                <a:ea typeface="Times New Roman" pitchFamily="34" charset="-122"/>
-                <a:cs typeface="Times New Roman" pitchFamily="34" charset="-120"/>
-              </a:rPr>
-              <a:t>Correction of the homework</a:t>
-            </a:r>
-            <a:endParaRPr lang="en-US" sz="4000" dirty="0"/>
-          </a:p>
-          <a:p>
-            <a:pPr algn="l" marL="342900" indent="-342900">
-              <a:spcAft>
-                <a:spcPts val="800"/>
-              </a:spcAft>
-              <a:buSzPct val="100000"/>
-              <a:buFont typeface="+mj-lt"/>
-              <a:buAutoNum type="arabicPeriod" startAt="1"/>
-            </a:pPr>
-            <a:r>
-              <a:rPr lang="en-US" sz="4000" dirty="0">
-                <a:solidFill>
-                  <a:srgbClr val="111111"/>
-                </a:solidFill>
-                <a:latin typeface="Times New Roman" pitchFamily="34" charset="0"/>
-                <a:ea typeface="Times New Roman" pitchFamily="34" charset="-122"/>
-                <a:cs typeface="Times New Roman" pitchFamily="34" charset="-120"/>
-              </a:rPr>
-              <a:t>Objectives and recall</a:t>
-            </a:r>
-            <a:endParaRPr lang="en-US" sz="4000" dirty="0"/>
-          </a:p>
-          <a:p>
-            <a:pPr algn="l" marL="342900" indent="-342900">
-              <a:spcAft>
-                <a:spcPts val="800"/>
-              </a:spcAft>
-              <a:buSzPct val="100000"/>
-              <a:buFont typeface="+mj-lt"/>
-              <a:buAutoNum type="arabicPeriod" startAt="1"/>
-            </a:pPr>
-            <a:r>
-              <a:rPr lang="en-US" sz="4000" dirty="0">
-                <a:solidFill>
-                  <a:srgbClr val="111111"/>
-                </a:solidFill>
-                <a:latin typeface="Times New Roman" pitchFamily="34" charset="0"/>
-                <a:ea typeface="Times New Roman" pitchFamily="34" charset="-122"/>
-                <a:cs typeface="Times New Roman" pitchFamily="34" charset="-120"/>
-              </a:rPr>
-              <a:t>Real-life situation and action to take</a:t>
-            </a:r>
-            <a:endParaRPr lang="en-US" sz="4000" dirty="0"/>
-          </a:p>
-          <a:p>
-            <a:pPr algn="l" marL="342900" indent="-342900">
-              <a:spcAft>
-                <a:spcPts val="800"/>
-              </a:spcAft>
-              <a:buSzPct val="100000"/>
-              <a:buFont typeface="+mj-lt"/>
-              <a:buAutoNum type="arabicPeriod" startAt="1"/>
-            </a:pPr>
-            <a:r>
-              <a:rPr lang="en-US" sz="4000" dirty="0">
-                <a:solidFill>
-                  <a:srgbClr val="111111"/>
-                </a:solidFill>
-                <a:latin typeface="Times New Roman" pitchFamily="34" charset="0"/>
-                <a:ea typeface="Times New Roman" pitchFamily="34" charset="-122"/>
-                <a:cs typeface="Times New Roman" pitchFamily="34" charset="-120"/>
-              </a:rPr>
-              <a:t>Learning activities</a:t>
-            </a:r>
-            <a:endParaRPr lang="en-US" sz="4000" dirty="0"/>
-          </a:p>
-          <a:p>
-            <a:pPr algn="l" marL="342900" indent="-342900">
-              <a:spcAft>
-                <a:spcPts val="800"/>
-              </a:spcAft>
-              <a:buSzPct val="100000"/>
-              <a:buFont typeface="+mj-lt"/>
-              <a:buAutoNum type="arabicPeriod" startAt="1"/>
-            </a:pPr>
-            <a:r>
-              <a:rPr lang="en-US" sz="4000" dirty="0">
-                <a:solidFill>
-                  <a:srgbClr val="111111"/>
-                </a:solidFill>
-                <a:latin typeface="Times New Roman" pitchFamily="34" charset="0"/>
-                <a:ea typeface="Times New Roman" pitchFamily="34" charset="-122"/>
-                <a:cs typeface="Times New Roman" pitchFamily="34" charset="-120"/>
-              </a:rPr>
-              <a:t>Board summary</a:t>
-            </a:r>
-            <a:endParaRPr lang="en-US" sz="4000" dirty="0"/>
-          </a:p>
-          <a:p>
-            <a:pPr algn="l" marL="342900" indent="-342900">
-              <a:spcAft>
-                <a:spcPts val="800"/>
-              </a:spcAft>
-              <a:buSzPct val="100000"/>
-              <a:buFont typeface="+mj-lt"/>
-              <a:buAutoNum type="arabicPeriod" startAt="1"/>
-            </a:pPr>
-            <a:r>
-              <a:rPr lang="en-US" sz="4000" dirty="0">
-                <a:solidFill>
-                  <a:srgbClr val="111111"/>
-                </a:solidFill>
-                <a:latin typeface="Times New Roman" pitchFamily="34" charset="0"/>
-                <a:ea typeface="Times New Roman" pitchFamily="34" charset="-122"/>
-                <a:cs typeface="Times New Roman" pitchFamily="34" charset="-120"/>
-              </a:rPr>
-              <a:t>Evaluation, remediation and homework</a:t>
-            </a:r>
-            <a:endParaRPr lang="en-US" sz="4000" dirty="0"/>
-          </a:p>
-        </p:txBody>
-      </p:sp>
-      <p:sp>
-        <p:nvSpPr>
-          <p:cNvPr id="25" name="Slide Number Placeholder 0"/>
-          <p:cNvSpPr>
-            <a:spLocks noGrp="1"/>
-          </p:cNvSpPr>
-          <p:nvPr>
-            <p:ph type="sldNum" sz="quarter" idx="4294967295"/>
-          </p:nvPr>
-        </p:nvSpPr>
-        <p:spPr>
-          <a:xfrm>
-            <a:off x="27432" y="91440"/>
-            <a:ext cx="585216" cy="475488"/>
-          </a:xfrm>
-          <a:prstGeom prst="rect">
-            <a:avLst/>
-          </a:prstGeom>
-          <a:extLst>
-            <a:ext uri="{C572A759-6A51-4108-AA02-DFA0A04FC94B}">
-              <ma14:wrappingTextBoxFlag xmlns:ma14="http://schemas.microsoft.com/office/mac/drawingml/2011/main" val="0"/>
-            </a:ext>
-          </a:extLst>
-        </p:spPr>
-        <p:txBody>
-          <a:bodyPr/>
-          <a:lstStyle>
-            <a:lvl1pPr>
-              <a:defRPr sz="2000">
-                <a:solidFill>
-                  <a:srgbClr val="FFFFFF"/>
-                </a:solidFill>
-                <a:latin typeface="Calibri"/>
-                <a:ea typeface="Calibri"/>
-                <a:cs typeface="Calibri"/>
-              </a:defRPr>
-            </a:lvl1pPr>
-          </a:lstStyle>
-          <a:p>
-            <a:pPr algn="ctr"/>
-            <a:fld id="{F7021451-1387-4CA6-816F-3879F97B5CBC}" type="slidenum">
-              <a:rPr b="1" lang="en-US"/>
-              <a:t>6</a:t>
+              <a:t>65</a:t>
             </a:fld>
             <a:endParaRPr lang="en-US"/>
           </a:p>
